--- a/17 18 20/5.Power Bi/5) Dax/Dax.pptx
+++ b/17 18 20/5.Power Bi/5) Dax/Dax.pptx
@@ -5,17 +5,16 @@
     <p:sldMasterId id="2147483660" r:id="rId1"/>
   </p:sldMasterIdLst>
   <p:notesMasterIdLst>
-    <p:notesMasterId r:id="rId10"/>
+    <p:notesMasterId r:id="rId9"/>
   </p:notesMasterIdLst>
   <p:sldIdLst>
     <p:sldId id="291" r:id="rId2"/>
-    <p:sldId id="292" r:id="rId3"/>
-    <p:sldId id="281" r:id="rId4"/>
-    <p:sldId id="287" r:id="rId5"/>
-    <p:sldId id="288" r:id="rId6"/>
-    <p:sldId id="289" r:id="rId7"/>
-    <p:sldId id="290" r:id="rId8"/>
-    <p:sldId id="270" r:id="rId9"/>
+    <p:sldId id="281" r:id="rId3"/>
+    <p:sldId id="287" r:id="rId4"/>
+    <p:sldId id="288" r:id="rId5"/>
+    <p:sldId id="289" r:id="rId6"/>
+    <p:sldId id="290" r:id="rId7"/>
+    <p:sldId id="270" r:id="rId8"/>
   </p:sldIdLst>
   <p:sldSz cx="12192000" cy="6858000"/>
   <p:notesSz cx="6858000" cy="9144000"/>
@@ -204,7 +203,7 @@
           <a:p>
             <a:fld id="{B17773B0-9C71-4C42-839B-CED3341CD232}" type="datetimeFigureOut">
               <a:rPr lang="en-IN" smtClean="0"/>
-              <a:t>10-08-2026</a:t>
+              <a:t>13-08-2026</a:t>
             </a:fld>
             <a:endParaRPr lang="en-IN"/>
           </a:p>
@@ -658,7 +657,7 @@
           <a:p>
             <a:fld id="{DC8321A5-74C1-4574-A6AA-F1EDDDF12D9F}" type="datetimeFigureOut">
               <a:rPr lang="en-IN" smtClean="0"/>
-              <a:t>10-08-2026</a:t>
+              <a:t>13-08-2026</a:t>
             </a:fld>
             <a:endParaRPr lang="en-IN"/>
           </a:p>
@@ -933,7 +932,7 @@
           <a:p>
             <a:fld id="{DC8321A5-74C1-4574-A6AA-F1EDDDF12D9F}" type="datetimeFigureOut">
               <a:rPr lang="en-IN" smtClean="0"/>
-              <a:t>10-08-2026</a:t>
+              <a:t>13-08-2026</a:t>
             </a:fld>
             <a:endParaRPr lang="en-IN"/>
           </a:p>
@@ -1127,7 +1126,7 @@
           <a:p>
             <a:fld id="{DC8321A5-74C1-4574-A6AA-F1EDDDF12D9F}" type="datetimeFigureOut">
               <a:rPr lang="en-IN" smtClean="0"/>
-              <a:t>10-08-2026</a:t>
+              <a:t>13-08-2026</a:t>
             </a:fld>
             <a:endParaRPr lang="en-IN"/>
           </a:p>
@@ -1400,7 +1399,7 @@
           <a:p>
             <a:fld id="{DC8321A5-74C1-4574-A6AA-F1EDDDF12D9F}" type="datetimeFigureOut">
               <a:rPr lang="en-IN" smtClean="0"/>
-              <a:t>10-08-2026</a:t>
+              <a:t>13-08-2026</a:t>
             </a:fld>
             <a:endParaRPr lang="en-IN"/>
           </a:p>
@@ -1741,7 +1740,7 @@
           <a:p>
             <a:fld id="{DC8321A5-74C1-4574-A6AA-F1EDDDF12D9F}" type="datetimeFigureOut">
               <a:rPr lang="en-IN" smtClean="0"/>
-              <a:t>10-08-2026</a:t>
+              <a:t>13-08-2026</a:t>
             </a:fld>
             <a:endParaRPr lang="en-IN"/>
           </a:p>
@@ -2364,7 +2363,7 @@
           <a:p>
             <a:fld id="{DC8321A5-74C1-4574-A6AA-F1EDDDF12D9F}" type="datetimeFigureOut">
               <a:rPr lang="en-IN" smtClean="0"/>
-              <a:t>10-08-2026</a:t>
+              <a:t>13-08-2026</a:t>
             </a:fld>
             <a:endParaRPr lang="en-IN"/>
           </a:p>
@@ -3224,7 +3223,7 @@
           <a:p>
             <a:fld id="{DC8321A5-74C1-4574-A6AA-F1EDDDF12D9F}" type="datetimeFigureOut">
               <a:rPr lang="en-IN" smtClean="0"/>
-              <a:t>10-08-2026</a:t>
+              <a:t>13-08-2026</a:t>
             </a:fld>
             <a:endParaRPr lang="en-IN"/>
           </a:p>
@@ -3394,7 +3393,7 @@
           <a:p>
             <a:fld id="{DC8321A5-74C1-4574-A6AA-F1EDDDF12D9F}" type="datetimeFigureOut">
               <a:rPr lang="en-IN" smtClean="0"/>
-              <a:t>10-08-2026</a:t>
+              <a:t>13-08-2026</a:t>
             </a:fld>
             <a:endParaRPr lang="en-IN"/>
           </a:p>
@@ -3574,7 +3573,7 @@
           <a:p>
             <a:fld id="{DC8321A5-74C1-4574-A6AA-F1EDDDF12D9F}" type="datetimeFigureOut">
               <a:rPr lang="en-IN" smtClean="0"/>
-              <a:t>10-08-2026</a:t>
+              <a:t>13-08-2026</a:t>
             </a:fld>
             <a:endParaRPr lang="en-IN"/>
           </a:p>
@@ -3744,7 +3743,7 @@
           <a:p>
             <a:fld id="{DC8321A5-74C1-4574-A6AA-F1EDDDF12D9F}" type="datetimeFigureOut">
               <a:rPr lang="en-IN" smtClean="0"/>
-              <a:t>10-08-2026</a:t>
+              <a:t>13-08-2026</a:t>
             </a:fld>
             <a:endParaRPr lang="en-IN"/>
           </a:p>
@@ -3991,7 +3990,7 @@
           <a:p>
             <a:fld id="{DC8321A5-74C1-4574-A6AA-F1EDDDF12D9F}" type="datetimeFigureOut">
               <a:rPr lang="en-IN" smtClean="0"/>
-              <a:t>10-08-2026</a:t>
+              <a:t>13-08-2026</a:t>
             </a:fld>
             <a:endParaRPr lang="en-IN"/>
           </a:p>
@@ -4283,7 +4282,7 @@
           <a:p>
             <a:fld id="{DC8321A5-74C1-4574-A6AA-F1EDDDF12D9F}" type="datetimeFigureOut">
               <a:rPr lang="en-IN" smtClean="0"/>
-              <a:t>10-08-2026</a:t>
+              <a:t>13-08-2026</a:t>
             </a:fld>
             <a:endParaRPr lang="en-IN"/>
           </a:p>
@@ -4727,7 +4726,7 @@
           <a:p>
             <a:fld id="{DC8321A5-74C1-4574-A6AA-F1EDDDF12D9F}" type="datetimeFigureOut">
               <a:rPr lang="en-IN" smtClean="0"/>
-              <a:t>10-08-2026</a:t>
+              <a:t>13-08-2026</a:t>
             </a:fld>
             <a:endParaRPr lang="en-IN"/>
           </a:p>
@@ -4845,7 +4844,7 @@
           <a:p>
             <a:fld id="{DC8321A5-74C1-4574-A6AA-F1EDDDF12D9F}" type="datetimeFigureOut">
               <a:rPr lang="en-IN" smtClean="0"/>
-              <a:t>10-08-2026</a:t>
+              <a:t>13-08-2026</a:t>
             </a:fld>
             <a:endParaRPr lang="en-IN"/>
           </a:p>
@@ -4940,7 +4939,7 @@
           <a:p>
             <a:fld id="{DC8321A5-74C1-4574-A6AA-F1EDDDF12D9F}" type="datetimeFigureOut">
               <a:rPr lang="en-IN" smtClean="0"/>
-              <a:t>10-08-2026</a:t>
+              <a:t>13-08-2026</a:t>
             </a:fld>
             <a:endParaRPr lang="en-IN"/>
           </a:p>
@@ -5219,7 +5218,7 @@
           <a:p>
             <a:fld id="{DC8321A5-74C1-4574-A6AA-F1EDDDF12D9F}" type="datetimeFigureOut">
               <a:rPr lang="en-IN" smtClean="0"/>
-              <a:t>10-08-2026</a:t>
+              <a:t>13-08-2026</a:t>
             </a:fld>
             <a:endParaRPr lang="en-IN"/>
           </a:p>
@@ -5494,7 +5493,7 @@
           <a:p>
             <a:fld id="{DC8321A5-74C1-4574-A6AA-F1EDDDF12D9F}" type="datetimeFigureOut">
               <a:rPr lang="en-IN" smtClean="0"/>
-              <a:t>10-08-2026</a:t>
+              <a:t>13-08-2026</a:t>
             </a:fld>
             <a:endParaRPr lang="en-IN"/>
           </a:p>
@@ -5923,7 +5922,7 @@
           <a:p>
             <a:fld id="{DC8321A5-74C1-4574-A6AA-F1EDDDF12D9F}" type="datetimeFigureOut">
               <a:rPr lang="en-IN" smtClean="0"/>
-              <a:t>10-08-2026</a:t>
+              <a:t>13-08-2026</a:t>
             </a:fld>
             <a:endParaRPr lang="en-IN"/>
           </a:p>
@@ -6651,9 +6650,6 @@
             </a:endParaRPr>
           </a:p>
           <a:p>
-            <a:pPr marL="342900" indent="-342900">
-              <a:buAutoNum type="arabicPeriod"/>
-            </a:pPr>
             <a:endParaRPr lang="en-US" b="1" dirty="0">
               <a:latin typeface="+mj-lt"/>
             </a:endParaRPr>
@@ -6949,97 +6945,6 @@
 </file>
 
 <file path=ppt/slides/slide2.xml><?xml version="1.0" encoding="utf-8"?>
-<p:sld xmlns:a="http://schemas.openxmlformats.org/drawingml/2006/main" xmlns:r="http://schemas.openxmlformats.org/officeDocument/2006/relationships" xmlns:p="http://schemas.openxmlformats.org/presentationml/2006/main">
-  <p:cSld>
-    <p:spTree>
-      <p:nvGrpSpPr>
-        <p:cNvPr id="1" name=""/>
-        <p:cNvGrpSpPr/>
-        <p:nvPr/>
-      </p:nvGrpSpPr>
-      <p:grpSpPr>
-        <a:xfrm>
-          <a:off x="0" y="0"/>
-          <a:ext cx="0" cy="0"/>
-          <a:chOff x="0" y="0"/>
-          <a:chExt cx="0" cy="0"/>
-        </a:xfrm>
-      </p:grpSpPr>
-      <p:sp>
-        <p:nvSpPr>
-          <p:cNvPr id="4" name="Rectangle 3"/>
-          <p:cNvSpPr/>
-          <p:nvPr/>
-        </p:nvSpPr>
-        <p:spPr>
-          <a:xfrm>
-            <a:off x="525748" y="717703"/>
-            <a:ext cx="4604146" cy="1477328"/>
-          </a:xfrm>
-          <a:prstGeom prst="rect">
-            <a:avLst/>
-          </a:prstGeom>
-        </p:spPr>
-        <p:txBody>
-          <a:bodyPr wrap="none">
-            <a:spAutoFit/>
-          </a:bodyPr>
-          <a:lstStyle/>
-          <a:p>
-            <a:r>
-              <a:rPr lang="en-IN" dirty="0"/>
-              <a:t>Total Sales = SUM(Sales[Sales</a:t>
-            </a:r>
-            <a:r>
-              <a:rPr lang="en-IN" dirty="0" smtClean="0"/>
-              <a:t>])</a:t>
-            </a:r>
-          </a:p>
-          <a:p>
-            <a:endParaRPr lang="en-US" dirty="0"/>
-          </a:p>
-          <a:p>
-            <a:r>
-              <a:rPr lang="en-IN" dirty="0"/>
-              <a:t>Number of Sales = COUNT(Sales[Sales</a:t>
-            </a:r>
-            <a:r>
-              <a:rPr lang="en-IN" dirty="0" smtClean="0"/>
-              <a:t>])</a:t>
-            </a:r>
-          </a:p>
-          <a:p>
-            <a:endParaRPr lang="en-US" dirty="0"/>
-          </a:p>
-          <a:p>
-            <a:r>
-              <a:rPr lang="en-IN" dirty="0"/>
-              <a:t>Average Sales = AVERAGE(Sales[Sales])</a:t>
-            </a:r>
-          </a:p>
-        </p:txBody>
-      </p:sp>
-    </p:spTree>
-    <p:extLst>
-      <p:ext uri="{BB962C8B-B14F-4D97-AF65-F5344CB8AC3E}">
-        <p14:creationId xmlns:p14="http://schemas.microsoft.com/office/powerpoint/2010/main" val="1542663776"/>
-      </p:ext>
-    </p:extLst>
-  </p:cSld>
-  <p:clrMapOvr>
-    <a:masterClrMapping/>
-  </p:clrMapOvr>
-  <p:timing>
-    <p:tnLst>
-      <p:par>
-        <p:cTn id="1" dur="indefinite" restart="never" nodeType="tmRoot"/>
-      </p:par>
-    </p:tnLst>
-  </p:timing>
-</p:sld>
-</file>
-
-<file path=ppt/slides/slide3.xml><?xml version="1.0" encoding="utf-8"?>
 <p:sld xmlns:a="http://schemas.openxmlformats.org/drawingml/2006/main" xmlns:r="http://schemas.openxmlformats.org/officeDocument/2006/relationships" xmlns:p="http://schemas.openxmlformats.org/presentationml/2006/main">
   <p:cSld>
     <p:spTree>
@@ -10086,7 +9991,7 @@
 </p:sld>
 </file>
 
-<file path=ppt/slides/slide4.xml><?xml version="1.0" encoding="utf-8"?>
+<file path=ppt/slides/slide3.xml><?xml version="1.0" encoding="utf-8"?>
 <p:sld xmlns:a="http://schemas.openxmlformats.org/drawingml/2006/main" xmlns:r="http://schemas.openxmlformats.org/officeDocument/2006/relationships" xmlns:p="http://schemas.openxmlformats.org/presentationml/2006/main">
   <p:cSld>
     <p:spTree>
@@ -10837,7 +10742,7 @@
 </p:sld>
 </file>
 
-<file path=ppt/slides/slide5.xml><?xml version="1.0" encoding="utf-8"?>
+<file path=ppt/slides/slide4.xml><?xml version="1.0" encoding="utf-8"?>
 <p:sld xmlns:a="http://schemas.openxmlformats.org/drawingml/2006/main" xmlns:r="http://schemas.openxmlformats.org/officeDocument/2006/relationships" xmlns:p="http://schemas.openxmlformats.org/presentationml/2006/main">
   <p:cSld>
     <p:spTree>
@@ -10940,7 +10845,7 @@
           <p:nvPr>
             <p:extLst>
               <p:ext uri="{D42A27DB-BD31-4B8C-83A1-F6EECF244321}">
-                <p14:modId xmlns:p14="http://schemas.microsoft.com/office/powerpoint/2010/main" val="3124313123"/>
+                <p14:modId xmlns:p14="http://schemas.microsoft.com/office/powerpoint/2010/main" val="4061848951"/>
               </p:ext>
             </p:extLst>
           </p:nvPr>
@@ -11516,18 +11421,10 @@
                           <a:latin typeface="Courier New" panose="02070309020205020404" pitchFamily="49" charset="0"/>
                           <a:cs typeface="Courier New" panose="02070309020205020404" pitchFamily="49" charset="0"/>
                         </a:rPr>
-                        <a:t> </a:t>
-                      </a:r>
-                      <a:r>
-                        <a:rPr lang="en-IN" sz="1200" u="none" strike="noStrike">
-                          <a:effectLst/>
-                          <a:latin typeface="Courier New" panose="02070309020205020404" pitchFamily="49" charset="0"/>
-                          <a:cs typeface="Courier New" panose="02070309020205020404" pitchFamily="49" charset="0"/>
-                        </a:rPr>
-                        <a:t>= </a:t>
-                      </a:r>
-                      <a:r>
-                        <a:rPr lang="en-IN" sz="1200" u="none" strike="noStrike" smtClean="0">
+                        <a:t> = </a:t>
+                      </a:r>
+                      <a:r>
+                        <a:rPr lang="en-IN" sz="1200" u="none" strike="noStrike" dirty="0" smtClean="0">
                           <a:effectLst/>
                           <a:latin typeface="Courier New" panose="02070309020205020404" pitchFamily="49" charset="0"/>
                           <a:cs typeface="Courier New" panose="02070309020205020404" pitchFamily="49" charset="0"/>
@@ -11714,23 +11611,23 @@
                           <a:latin typeface="Courier New" panose="02070309020205020404" pitchFamily="49" charset="0"/>
                           <a:cs typeface="Courier New" panose="02070309020205020404" pitchFamily="49" charset="0"/>
                         </a:rPr>
-                        <a:t> </a:t>
-                      </a:r>
-                      <a:r>
-                        <a:rPr lang="en-IN" sz="1200" u="none" strike="noStrike">
-                          <a:effectLst/>
-                          <a:latin typeface="Courier New" panose="02070309020205020404" pitchFamily="49" charset="0"/>
-                          <a:cs typeface="Courier New" panose="02070309020205020404" pitchFamily="49" charset="0"/>
-                        </a:rPr>
-                        <a:t>= </a:t>
-                      </a:r>
-                      <a:r>
-                        <a:rPr lang="en-IN" sz="1200" u="none" strike="noStrike" smtClean="0">
-                          <a:effectLst/>
-                          <a:latin typeface="Courier New" panose="02070309020205020404" pitchFamily="49" charset="0"/>
-                          <a:cs typeface="Courier New" panose="02070309020205020404" pitchFamily="49" charset="0"/>
-                        </a:rPr>
-                        <a:t>MONTH(Sales[OrderDate</a:t>
+                        <a:t> = </a:t>
+                      </a:r>
+                      <a:r>
+                        <a:rPr lang="en-IN" sz="1200" u="none" strike="noStrike" dirty="0" smtClean="0">
+                          <a:effectLst/>
+                          <a:latin typeface="Courier New" panose="02070309020205020404" pitchFamily="49" charset="0"/>
+                          <a:cs typeface="Courier New" panose="02070309020205020404" pitchFamily="49" charset="0"/>
+                        </a:rPr>
+                        <a:t>MONTH(Sales[</a:t>
+                      </a:r>
+                      <a:r>
+                        <a:rPr lang="en-IN" sz="1200" u="none" strike="noStrike" dirty="0" err="1" smtClean="0">
+                          <a:effectLst/>
+                          <a:latin typeface="Courier New" panose="02070309020205020404" pitchFamily="49" charset="0"/>
+                          <a:cs typeface="Courier New" panose="02070309020205020404" pitchFamily="49" charset="0"/>
+                        </a:rPr>
+                        <a:t>OrderDate</a:t>
                       </a:r>
                       <a:r>
                         <a:rPr lang="en-IN" sz="1200" u="none" strike="noStrike" dirty="0">
@@ -12592,7 +12489,7 @@
 </p:sld>
 </file>
 
-<file path=ppt/slides/slide6.xml><?xml version="1.0" encoding="utf-8"?>
+<file path=ppt/slides/slide5.xml><?xml version="1.0" encoding="utf-8"?>
 <p:sld xmlns:a="http://schemas.openxmlformats.org/drawingml/2006/main" xmlns:r="http://schemas.openxmlformats.org/officeDocument/2006/relationships" xmlns:p="http://schemas.openxmlformats.org/presentationml/2006/main">
   <p:cSld>
     <p:spTree>
@@ -12618,7 +12515,7 @@
           <p:nvPr>
             <p:extLst>
               <p:ext uri="{D42A27DB-BD31-4B8C-83A1-F6EECF244321}">
-                <p14:modId xmlns:p14="http://schemas.microsoft.com/office/powerpoint/2010/main" val="658077181"/>
+                <p14:modId xmlns:p14="http://schemas.microsoft.com/office/powerpoint/2010/main" val="2686762209"/>
               </p:ext>
             </p:extLst>
           </p:nvPr>
@@ -13560,7 +13457,7 @@
 </p:sld>
 </file>
 
-<file path=ppt/slides/slide7.xml><?xml version="1.0" encoding="utf-8"?>
+<file path=ppt/slides/slide6.xml><?xml version="1.0" encoding="utf-8"?>
 <p:sld xmlns:a="http://schemas.openxmlformats.org/drawingml/2006/main" xmlns:r="http://schemas.openxmlformats.org/officeDocument/2006/relationships" xmlns:p="http://schemas.openxmlformats.org/presentationml/2006/main">
   <p:cSld>
     <p:spTree>
@@ -13654,7 +13551,7 @@
           <p:nvPr>
             <p:extLst>
               <p:ext uri="{D42A27DB-BD31-4B8C-83A1-F6EECF244321}">
-                <p14:modId xmlns:p14="http://schemas.microsoft.com/office/powerpoint/2010/main" val="3358664339"/>
+                <p14:modId xmlns:p14="http://schemas.microsoft.com/office/powerpoint/2010/main" val="2929397212"/>
               </p:ext>
             </p:extLst>
           </p:nvPr>
@@ -13670,14 +13567,14 @@
                 <a:tableStyleId>{9D7B26C5-4107-4FEC-AEDC-1716B250A1EF}</a:tableStyleId>
               </a:tblPr>
               <a:tblGrid>
-                <a:gridCol w="1076746">
+                <a:gridCol w="1303117">
                   <a:extLst>
                     <a:ext uri="{9D8B030D-6E8A-4147-A177-3AD203B41FA5}">
                       <a16:colId xmlns:a16="http://schemas.microsoft.com/office/drawing/2014/main" val="56115187"/>
                     </a:ext>
                   </a:extLst>
                 </a:gridCol>
-                <a:gridCol w="9318000">
+                <a:gridCol w="9091629">
                   <a:extLst>
                     <a:ext uri="{9D8B030D-6E8A-4147-A177-3AD203B41FA5}">
                       <a16:colId xmlns:a16="http://schemas.microsoft.com/office/drawing/2014/main" val="1675222765"/>
@@ -13693,12 +13590,12 @@
                     <a:p>
                       <a:pPr algn="l" fontAlgn="b"/>
                       <a:r>
-                        <a:rPr lang="en-IN" sz="1600" u="none" strike="noStrike" dirty="0">
-                          <a:effectLst/>
-                          <a:latin typeface="Courier New" panose="02070309020205020404" pitchFamily="49" charset="0"/>
-                          <a:cs typeface="Courier New" panose="02070309020205020404" pitchFamily="49" charset="0"/>
-                        </a:rPr>
-                        <a:t>AND</a:t>
+                        <a:rPr lang="en-IN" sz="1600" u="none" strike="noStrike" dirty="0" smtClean="0">
+                          <a:effectLst/>
+                          <a:latin typeface="Courier New" panose="02070309020205020404" pitchFamily="49" charset="0"/>
+                          <a:cs typeface="Courier New" panose="02070309020205020404" pitchFamily="49" charset="0"/>
+                        </a:rPr>
+                        <a:t> AND</a:t>
                       </a:r>
                       <a:endParaRPr lang="en-IN" sz="1600" b="1" i="0" u="none" strike="noStrike" dirty="0">
                         <a:solidFill>
@@ -13784,14 +13681,14 @@
                     <a:p>
                       <a:pPr algn="l" fontAlgn="b"/>
                       <a:r>
-                        <a:rPr lang="en-IN" sz="1600" u="none" strike="noStrike">
-                          <a:effectLst/>
-                          <a:latin typeface="Courier New" panose="02070309020205020404" pitchFamily="49" charset="0"/>
-                          <a:cs typeface="Courier New" panose="02070309020205020404" pitchFamily="49" charset="0"/>
-                        </a:rPr>
-                        <a:t>OR</a:t>
-                      </a:r>
-                      <a:endParaRPr lang="en-IN" sz="1600" b="1" i="0" u="none" strike="noStrike">
+                        <a:rPr lang="en-IN" sz="1600" u="none" strike="noStrike" dirty="0" smtClean="0">
+                          <a:effectLst/>
+                          <a:latin typeface="Courier New" panose="02070309020205020404" pitchFamily="49" charset="0"/>
+                          <a:cs typeface="Courier New" panose="02070309020205020404" pitchFamily="49" charset="0"/>
+                        </a:rPr>
+                        <a:t> OR</a:t>
+                      </a:r>
+                      <a:endParaRPr lang="en-IN" sz="1600" b="1" i="0" u="none" strike="noStrike" dirty="0">
                         <a:solidFill>
                           <a:srgbClr val="000000"/>
                         </a:solidFill>
@@ -13875,14 +13772,14 @@
                     <a:p>
                       <a:pPr algn="l" fontAlgn="b"/>
                       <a:r>
-                        <a:rPr lang="en-IN" sz="1600" u="none" strike="noStrike">
-                          <a:effectLst/>
-                          <a:latin typeface="Courier New" panose="02070309020205020404" pitchFamily="49" charset="0"/>
-                          <a:cs typeface="Courier New" panose="02070309020205020404" pitchFamily="49" charset="0"/>
-                        </a:rPr>
-                        <a:t>NOT</a:t>
-                      </a:r>
-                      <a:endParaRPr lang="en-IN" sz="1600" b="1" i="0" u="none" strike="noStrike">
+                        <a:rPr lang="en-IN" sz="1600" u="none" strike="noStrike" dirty="0" smtClean="0">
+                          <a:effectLst/>
+                          <a:latin typeface="Courier New" panose="02070309020205020404" pitchFamily="49" charset="0"/>
+                          <a:cs typeface="Courier New" panose="02070309020205020404" pitchFamily="49" charset="0"/>
+                        </a:rPr>
+                        <a:t> NOT</a:t>
+                      </a:r>
+                      <a:endParaRPr lang="en-IN" sz="1600" b="1" i="0" u="none" strike="noStrike" dirty="0">
                         <a:solidFill>
                           <a:srgbClr val="000000"/>
                         </a:solidFill>
@@ -13950,14 +13847,14 @@
                     <a:p>
                       <a:pPr algn="l" fontAlgn="b"/>
                       <a:r>
-                        <a:rPr lang="en-IN" sz="1600" u="none" strike="noStrike">
-                          <a:effectLst/>
-                          <a:latin typeface="Courier New" panose="02070309020205020404" pitchFamily="49" charset="0"/>
-                          <a:cs typeface="Courier New" panose="02070309020205020404" pitchFamily="49" charset="0"/>
-                        </a:rPr>
-                        <a:t>IF</a:t>
-                      </a:r>
-                      <a:endParaRPr lang="en-IN" sz="1600" b="1" i="0" u="none" strike="noStrike">
+                        <a:rPr lang="en-IN" sz="1600" u="none" strike="noStrike" dirty="0" smtClean="0">
+                          <a:effectLst/>
+                          <a:latin typeface="Courier New" panose="02070309020205020404" pitchFamily="49" charset="0"/>
+                          <a:cs typeface="Courier New" panose="02070309020205020404" pitchFamily="49" charset="0"/>
+                        </a:rPr>
+                        <a:t> IF</a:t>
+                      </a:r>
+                      <a:endParaRPr lang="en-IN" sz="1600" b="1" i="0" u="none" strike="noStrike" dirty="0">
                         <a:solidFill>
                           <a:srgbClr val="000000"/>
                         </a:solidFill>
@@ -14025,14 +13922,14 @@
                     <a:p>
                       <a:pPr algn="l" fontAlgn="b"/>
                       <a:r>
-                        <a:rPr lang="en-IN" sz="1600" u="none" strike="noStrike">
-                          <a:effectLst/>
-                          <a:latin typeface="Courier New" panose="02070309020205020404" pitchFamily="49" charset="0"/>
-                          <a:cs typeface="Courier New" panose="02070309020205020404" pitchFamily="49" charset="0"/>
-                        </a:rPr>
-                        <a:t>SWITCH</a:t>
-                      </a:r>
-                      <a:endParaRPr lang="en-IN" sz="1600" b="1" i="0" u="none" strike="noStrike">
+                        <a:rPr lang="en-IN" sz="1600" u="none" strike="noStrike" dirty="0" smtClean="0">
+                          <a:effectLst/>
+                          <a:latin typeface="Courier New" panose="02070309020205020404" pitchFamily="49" charset="0"/>
+                          <a:cs typeface="Courier New" panose="02070309020205020404" pitchFamily="49" charset="0"/>
+                        </a:rPr>
+                        <a:t> SWITCH</a:t>
+                      </a:r>
+                      <a:endParaRPr lang="en-IN" sz="1600" b="1" i="0" u="none" strike="noStrike" dirty="0">
                         <a:solidFill>
                           <a:srgbClr val="000000"/>
                         </a:solidFill>
@@ -14100,14 +13997,14 @@
                     <a:p>
                       <a:pPr algn="l" fontAlgn="b"/>
                       <a:r>
-                        <a:rPr lang="en-IN" sz="1600" u="none" strike="noStrike">
-                          <a:effectLst/>
-                          <a:latin typeface="Courier New" panose="02070309020205020404" pitchFamily="49" charset="0"/>
-                          <a:cs typeface="Courier New" panose="02070309020205020404" pitchFamily="49" charset="0"/>
-                        </a:rPr>
-                        <a:t>IFERROR</a:t>
-                      </a:r>
-                      <a:endParaRPr lang="en-IN" sz="1600" b="1" i="0" u="none" strike="noStrike">
+                        <a:rPr lang="en-IN" sz="1600" u="none" strike="noStrike" dirty="0" smtClean="0">
+                          <a:effectLst/>
+                          <a:latin typeface="Courier New" panose="02070309020205020404" pitchFamily="49" charset="0"/>
+                          <a:cs typeface="Courier New" panose="02070309020205020404" pitchFamily="49" charset="0"/>
+                        </a:rPr>
+                        <a:t> IFERROR</a:t>
+                      </a:r>
+                      <a:endParaRPr lang="en-IN" sz="1600" b="1" i="0" u="none" strike="noStrike" dirty="0">
                         <a:solidFill>
                           <a:srgbClr val="000000"/>
                         </a:solidFill>
@@ -14199,14 +14096,14 @@
                     <a:p>
                       <a:pPr algn="l" fontAlgn="b"/>
                       <a:r>
-                        <a:rPr lang="en-IN" sz="1600" u="none" strike="noStrike">
-                          <a:effectLst/>
-                          <a:latin typeface="Courier New" panose="02070309020205020404" pitchFamily="49" charset="0"/>
-                          <a:cs typeface="Courier New" panose="02070309020205020404" pitchFamily="49" charset="0"/>
-                        </a:rPr>
-                        <a:t>COALESCE</a:t>
-                      </a:r>
-                      <a:endParaRPr lang="en-IN" sz="1600" b="1" i="0" u="none" strike="noStrike">
+                        <a:rPr lang="en-IN" sz="1600" u="none" strike="noStrike" dirty="0" smtClean="0">
+                          <a:effectLst/>
+                          <a:latin typeface="Courier New" panose="02070309020205020404" pitchFamily="49" charset="0"/>
+                          <a:cs typeface="Courier New" panose="02070309020205020404" pitchFamily="49" charset="0"/>
+                        </a:rPr>
+                        <a:t> COALESCE</a:t>
+                      </a:r>
+                      <a:endParaRPr lang="en-IN" sz="1600" b="1" i="0" u="none" strike="noStrike" dirty="0">
                         <a:solidFill>
                           <a:srgbClr val="000000"/>
                         </a:solidFill>
@@ -14225,7 +14122,7 @@
                     <a:p>
                       <a:pPr algn="l" fontAlgn="b"/>
                       <a:r>
-                        <a:rPr lang="en-US" sz="1200" u="none" strike="noStrike" baseline="0" smtClean="0">
+                        <a:rPr lang="en-US" sz="1200" u="none" strike="noStrike" baseline="0" dirty="0" smtClean="0">
                           <a:effectLst/>
                           <a:latin typeface="Courier New" panose="02070309020205020404" pitchFamily="49" charset="0"/>
                           <a:cs typeface="Courier New" panose="02070309020205020404" pitchFamily="49" charset="0"/>
@@ -14233,15 +14130,23 @@
                         <a:t> </a:t>
                       </a:r>
                       <a:r>
-                        <a:rPr lang="en-US" sz="1200" u="none" strike="noStrike" smtClean="0">
-                          <a:effectLst/>
-                          <a:latin typeface="Courier New" panose="02070309020205020404" pitchFamily="49" charset="0"/>
-                          <a:cs typeface="Courier New" panose="02070309020205020404" pitchFamily="49" charset="0"/>
-                        </a:rPr>
-                        <a:t>COALESCE(Sales[AltPhone</a:t>
-                      </a:r>
-                      <a:r>
-                        <a:rPr lang="en-US" sz="1200" u="none" strike="noStrike">
+                        <a:rPr lang="en-US" sz="1200" u="none" strike="noStrike" dirty="0" smtClean="0">
+                          <a:effectLst/>
+                          <a:latin typeface="Courier New" panose="02070309020205020404" pitchFamily="49" charset="0"/>
+                          <a:cs typeface="Courier New" panose="02070309020205020404" pitchFamily="49" charset="0"/>
+                        </a:rPr>
+                        <a:t>COALESCE(Sales[</a:t>
+                      </a:r>
+                      <a:r>
+                        <a:rPr lang="en-US" sz="1200" u="none" strike="noStrike" dirty="0" err="1" smtClean="0">
+                          <a:effectLst/>
+                          <a:latin typeface="Courier New" panose="02070309020205020404" pitchFamily="49" charset="0"/>
+                          <a:cs typeface="Courier New" panose="02070309020205020404" pitchFamily="49" charset="0"/>
+                        </a:rPr>
+                        <a:t>AltPhone</a:t>
+                      </a:r>
+                      <a:r>
+                        <a:rPr lang="en-US" sz="1200" u="none" strike="noStrike" dirty="0">
                           <a:effectLst/>
                           <a:latin typeface="Courier New" panose="02070309020205020404" pitchFamily="49" charset="0"/>
                           <a:cs typeface="Courier New" panose="02070309020205020404" pitchFamily="49" charset="0"/>
@@ -14249,12 +14154,20 @@
                         <a:t>], </a:t>
                       </a:r>
                       <a:r>
-                        <a:rPr lang="en-US" sz="1200" u="none" strike="noStrike" smtClean="0">
-                          <a:effectLst/>
-                          <a:latin typeface="Courier New" panose="02070309020205020404" pitchFamily="49" charset="0"/>
-                          <a:cs typeface="Courier New" panose="02070309020205020404" pitchFamily="49" charset="0"/>
-                        </a:rPr>
-                        <a:t>Sales[HomePhone</a:t>
+                        <a:rPr lang="en-US" sz="1200" u="none" strike="noStrike" dirty="0" smtClean="0">
+                          <a:effectLst/>
+                          <a:latin typeface="Courier New" panose="02070309020205020404" pitchFamily="49" charset="0"/>
+                          <a:cs typeface="Courier New" panose="02070309020205020404" pitchFamily="49" charset="0"/>
+                        </a:rPr>
+                        <a:t>Sales[</a:t>
+                      </a:r>
+                      <a:r>
+                        <a:rPr lang="en-US" sz="1200" u="none" strike="noStrike" dirty="0" err="1" smtClean="0">
+                          <a:effectLst/>
+                          <a:latin typeface="Courier New" panose="02070309020205020404" pitchFamily="49" charset="0"/>
+                          <a:cs typeface="Courier New" panose="02070309020205020404" pitchFamily="49" charset="0"/>
+                        </a:rPr>
+                        <a:t>HomePhone</a:t>
                       </a:r>
                       <a:r>
                         <a:rPr lang="en-US" sz="1200" u="none" strike="noStrike" dirty="0">
@@ -14290,14 +14203,14 @@
                     <a:p>
                       <a:pPr algn="l" fontAlgn="b"/>
                       <a:r>
-                        <a:rPr lang="en-IN" sz="1600" u="none" strike="noStrike">
-                          <a:effectLst/>
-                          <a:latin typeface="Courier New" panose="02070309020205020404" pitchFamily="49" charset="0"/>
-                          <a:cs typeface="Courier New" panose="02070309020205020404" pitchFamily="49" charset="0"/>
-                        </a:rPr>
-                        <a:t>FALSE</a:t>
-                      </a:r>
-                      <a:endParaRPr lang="en-IN" sz="1600" b="1" i="0" u="none" strike="noStrike">
+                        <a:rPr lang="en-IN" sz="1600" u="none" strike="noStrike" dirty="0" smtClean="0">
+                          <a:effectLst/>
+                          <a:latin typeface="Courier New" panose="02070309020205020404" pitchFamily="49" charset="0"/>
+                          <a:cs typeface="Courier New" panose="02070309020205020404" pitchFamily="49" charset="0"/>
+                        </a:rPr>
+                        <a:t> FALSE</a:t>
+                      </a:r>
+                      <a:endParaRPr lang="en-IN" sz="1600" b="1" i="0" u="none" strike="noStrike" dirty="0">
                         <a:solidFill>
                           <a:srgbClr val="000000"/>
                         </a:solidFill>
@@ -14373,14 +14286,14 @@
                     <a:p>
                       <a:pPr algn="l" fontAlgn="b"/>
                       <a:r>
-                        <a:rPr lang="en-IN" sz="1600" u="none" strike="noStrike">
-                          <a:effectLst/>
-                          <a:latin typeface="Courier New" panose="02070309020205020404" pitchFamily="49" charset="0"/>
-                          <a:cs typeface="Courier New" panose="02070309020205020404" pitchFamily="49" charset="0"/>
-                        </a:rPr>
-                        <a:t>TRUE</a:t>
-                      </a:r>
-                      <a:endParaRPr lang="en-IN" sz="1600" b="1" i="0" u="none" strike="noStrike">
+                        <a:rPr lang="en-IN" sz="1600" u="none" strike="noStrike" dirty="0" smtClean="0">
+                          <a:effectLst/>
+                          <a:latin typeface="Courier New" panose="02070309020205020404" pitchFamily="49" charset="0"/>
+                          <a:cs typeface="Courier New" panose="02070309020205020404" pitchFamily="49" charset="0"/>
+                        </a:rPr>
+                        <a:t> TRUE</a:t>
+                      </a:r>
+                      <a:endParaRPr lang="en-IN" sz="1600" b="1" i="0" u="none" strike="noStrike" dirty="0">
                         <a:solidFill>
                           <a:srgbClr val="000000"/>
                         </a:solidFill>
@@ -14607,7 +14520,7 @@
 </p:sld>
 </file>
 
-<file path=ppt/slides/slide8.xml><?xml version="1.0" encoding="utf-8"?>
+<file path=ppt/slides/slide7.xml><?xml version="1.0" encoding="utf-8"?>
 <p:sld xmlns:a="http://schemas.openxmlformats.org/drawingml/2006/main" xmlns:r="http://schemas.openxmlformats.org/officeDocument/2006/relationships" xmlns:p="http://schemas.openxmlformats.org/presentationml/2006/main">
   <p:cSld>
     <p:spTree>

--- a/17 18 20/5.Power Bi/5) Dax/Dax.pptx
+++ b/17 18 20/5.Power Bi/5) Dax/Dax.pptx
@@ -5,7 +5,7 @@
     <p:sldMasterId id="2147483660" r:id="rId1"/>
   </p:sldMasterIdLst>
   <p:notesMasterIdLst>
-    <p:notesMasterId r:id="rId15"/>
+    <p:notesMasterId r:id="rId14"/>
   </p:notesMasterIdLst>
   <p:sldIdLst>
     <p:sldId id="291" r:id="rId2"/>
@@ -14,13 +14,12 @@
     <p:sldId id="288" r:id="rId5"/>
     <p:sldId id="292" r:id="rId6"/>
     <p:sldId id="289" r:id="rId7"/>
-    <p:sldId id="293" r:id="rId8"/>
-    <p:sldId id="290" r:id="rId9"/>
+    <p:sldId id="290" r:id="rId8"/>
+    <p:sldId id="297" r:id="rId9"/>
     <p:sldId id="270" r:id="rId10"/>
     <p:sldId id="294" r:id="rId11"/>
     <p:sldId id="295" r:id="rId12"/>
-    <p:sldId id="297" r:id="rId13"/>
-    <p:sldId id="296" r:id="rId14"/>
+    <p:sldId id="296" r:id="rId13"/>
   </p:sldIdLst>
   <p:sldSz cx="12192000" cy="6858000"/>
   <p:notesSz cx="6858000" cy="9144000"/>
@@ -209,7 +208,7 @@
           <a:p>
             <a:fld id="{B17773B0-9C71-4C42-839B-CED3341CD232}" type="datetimeFigureOut">
               <a:rPr lang="en-IN" smtClean="0"/>
-              <a:t>17-08-2026</a:t>
+              <a:t>18-08-2026</a:t>
             </a:fld>
             <a:endParaRPr lang="en-IN"/>
           </a:p>
@@ -663,7 +662,7 @@
           <a:p>
             <a:fld id="{DC8321A5-74C1-4574-A6AA-F1EDDDF12D9F}" type="datetimeFigureOut">
               <a:rPr lang="en-IN" smtClean="0"/>
-              <a:t>17-08-2026</a:t>
+              <a:t>18-08-2026</a:t>
             </a:fld>
             <a:endParaRPr lang="en-IN"/>
           </a:p>
@@ -938,7 +937,7 @@
           <a:p>
             <a:fld id="{DC8321A5-74C1-4574-A6AA-F1EDDDF12D9F}" type="datetimeFigureOut">
               <a:rPr lang="en-IN" smtClean="0"/>
-              <a:t>17-08-2026</a:t>
+              <a:t>18-08-2026</a:t>
             </a:fld>
             <a:endParaRPr lang="en-IN"/>
           </a:p>
@@ -1132,7 +1131,7 @@
           <a:p>
             <a:fld id="{DC8321A5-74C1-4574-A6AA-F1EDDDF12D9F}" type="datetimeFigureOut">
               <a:rPr lang="en-IN" smtClean="0"/>
-              <a:t>17-08-2026</a:t>
+              <a:t>18-08-2026</a:t>
             </a:fld>
             <a:endParaRPr lang="en-IN"/>
           </a:p>
@@ -1405,7 +1404,7 @@
           <a:p>
             <a:fld id="{DC8321A5-74C1-4574-A6AA-F1EDDDF12D9F}" type="datetimeFigureOut">
               <a:rPr lang="en-IN" smtClean="0"/>
-              <a:t>17-08-2026</a:t>
+              <a:t>18-08-2026</a:t>
             </a:fld>
             <a:endParaRPr lang="en-IN"/>
           </a:p>
@@ -1746,7 +1745,7 @@
           <a:p>
             <a:fld id="{DC8321A5-74C1-4574-A6AA-F1EDDDF12D9F}" type="datetimeFigureOut">
               <a:rPr lang="en-IN" smtClean="0"/>
-              <a:t>17-08-2026</a:t>
+              <a:t>18-08-2026</a:t>
             </a:fld>
             <a:endParaRPr lang="en-IN"/>
           </a:p>
@@ -2369,7 +2368,7 @@
           <a:p>
             <a:fld id="{DC8321A5-74C1-4574-A6AA-F1EDDDF12D9F}" type="datetimeFigureOut">
               <a:rPr lang="en-IN" smtClean="0"/>
-              <a:t>17-08-2026</a:t>
+              <a:t>18-08-2026</a:t>
             </a:fld>
             <a:endParaRPr lang="en-IN"/>
           </a:p>
@@ -3229,7 +3228,7 @@
           <a:p>
             <a:fld id="{DC8321A5-74C1-4574-A6AA-F1EDDDF12D9F}" type="datetimeFigureOut">
               <a:rPr lang="en-IN" smtClean="0"/>
-              <a:t>17-08-2026</a:t>
+              <a:t>18-08-2026</a:t>
             </a:fld>
             <a:endParaRPr lang="en-IN"/>
           </a:p>
@@ -3399,7 +3398,7 @@
           <a:p>
             <a:fld id="{DC8321A5-74C1-4574-A6AA-F1EDDDF12D9F}" type="datetimeFigureOut">
               <a:rPr lang="en-IN" smtClean="0"/>
-              <a:t>17-08-2026</a:t>
+              <a:t>18-08-2026</a:t>
             </a:fld>
             <a:endParaRPr lang="en-IN"/>
           </a:p>
@@ -3579,7 +3578,7 @@
           <a:p>
             <a:fld id="{DC8321A5-74C1-4574-A6AA-F1EDDDF12D9F}" type="datetimeFigureOut">
               <a:rPr lang="en-IN" smtClean="0"/>
-              <a:t>17-08-2026</a:t>
+              <a:t>18-08-2026</a:t>
             </a:fld>
             <a:endParaRPr lang="en-IN"/>
           </a:p>
@@ -3749,7 +3748,7 @@
           <a:p>
             <a:fld id="{DC8321A5-74C1-4574-A6AA-F1EDDDF12D9F}" type="datetimeFigureOut">
               <a:rPr lang="en-IN" smtClean="0"/>
-              <a:t>17-08-2026</a:t>
+              <a:t>18-08-2026</a:t>
             </a:fld>
             <a:endParaRPr lang="en-IN"/>
           </a:p>
@@ -3996,7 +3995,7 @@
           <a:p>
             <a:fld id="{DC8321A5-74C1-4574-A6AA-F1EDDDF12D9F}" type="datetimeFigureOut">
               <a:rPr lang="en-IN" smtClean="0"/>
-              <a:t>17-08-2026</a:t>
+              <a:t>18-08-2026</a:t>
             </a:fld>
             <a:endParaRPr lang="en-IN"/>
           </a:p>
@@ -4288,7 +4287,7 @@
           <a:p>
             <a:fld id="{DC8321A5-74C1-4574-A6AA-F1EDDDF12D9F}" type="datetimeFigureOut">
               <a:rPr lang="en-IN" smtClean="0"/>
-              <a:t>17-08-2026</a:t>
+              <a:t>18-08-2026</a:t>
             </a:fld>
             <a:endParaRPr lang="en-IN"/>
           </a:p>
@@ -4732,7 +4731,7 @@
           <a:p>
             <a:fld id="{DC8321A5-74C1-4574-A6AA-F1EDDDF12D9F}" type="datetimeFigureOut">
               <a:rPr lang="en-IN" smtClean="0"/>
-              <a:t>17-08-2026</a:t>
+              <a:t>18-08-2026</a:t>
             </a:fld>
             <a:endParaRPr lang="en-IN"/>
           </a:p>
@@ -4850,7 +4849,7 @@
           <a:p>
             <a:fld id="{DC8321A5-74C1-4574-A6AA-F1EDDDF12D9F}" type="datetimeFigureOut">
               <a:rPr lang="en-IN" smtClean="0"/>
-              <a:t>17-08-2026</a:t>
+              <a:t>18-08-2026</a:t>
             </a:fld>
             <a:endParaRPr lang="en-IN"/>
           </a:p>
@@ -4945,7 +4944,7 @@
           <a:p>
             <a:fld id="{DC8321A5-74C1-4574-A6AA-F1EDDDF12D9F}" type="datetimeFigureOut">
               <a:rPr lang="en-IN" smtClean="0"/>
-              <a:t>17-08-2026</a:t>
+              <a:t>18-08-2026</a:t>
             </a:fld>
             <a:endParaRPr lang="en-IN"/>
           </a:p>
@@ -5224,7 +5223,7 @@
           <a:p>
             <a:fld id="{DC8321A5-74C1-4574-A6AA-F1EDDDF12D9F}" type="datetimeFigureOut">
               <a:rPr lang="en-IN" smtClean="0"/>
-              <a:t>17-08-2026</a:t>
+              <a:t>18-08-2026</a:t>
             </a:fld>
             <a:endParaRPr lang="en-IN"/>
           </a:p>
@@ -5499,7 +5498,7 @@
           <a:p>
             <a:fld id="{DC8321A5-74C1-4574-A6AA-F1EDDDF12D9F}" type="datetimeFigureOut">
               <a:rPr lang="en-IN" smtClean="0"/>
-              <a:t>17-08-2026</a:t>
+              <a:t>18-08-2026</a:t>
             </a:fld>
             <a:endParaRPr lang="en-IN"/>
           </a:p>
@@ -5928,7 +5927,7 @@
           <a:p>
             <a:fld id="{DC8321A5-74C1-4574-A6AA-F1EDDDF12D9F}" type="datetimeFigureOut">
               <a:rPr lang="en-IN" smtClean="0"/>
-              <a:t>17-08-2026</a:t>
+              <a:t>18-08-2026</a:t>
             </a:fld>
             <a:endParaRPr lang="en-IN"/>
           </a:p>
@@ -6564,7 +6563,15 @@
               <a:rPr lang="en-US" dirty="0">
                 <a:latin typeface="+mj-lt"/>
               </a:rPr>
-              <a:t> to perform calculations and create measures, calculated columns, and calculated tables</a:t>
+              <a:t> to perform calculations and create </a:t>
+            </a:r>
+            <a:r>
+              <a:rPr lang="en-US" dirty="0"/>
+              <a:t>calculated </a:t>
+            </a:r>
+            <a:r>
+              <a:rPr lang="en-US" dirty="0" smtClean="0"/>
+              <a:t> Fields such as </a:t>
             </a:r>
             <a:r>
               <a:rPr lang="en-US" dirty="0" smtClean="0">
@@ -6976,7 +6983,7 @@
         <p:spPr>
           <a:xfrm>
             <a:off x="845975" y="2159086"/>
-            <a:ext cx="9986866" cy="2161233"/>
+            <a:ext cx="9986866" cy="2417713"/>
           </a:xfrm>
           <a:prstGeom prst="rect">
             <a:avLst/>
@@ -7205,6 +7212,21 @@
               </a:rPr>
               <a:t> </a:t>
             </a:r>
+            <a:endParaRPr lang="en-IN" dirty="0" smtClean="0">
+              <a:latin typeface="Courier New" panose="02070309020205020404" pitchFamily="49" charset="0"/>
+              <a:ea typeface="Times New Roman" panose="02020603050405020304" pitchFamily="18" charset="0"/>
+              <a:cs typeface="Courier New" panose="02070309020205020404" pitchFamily="49" charset="0"/>
+            </a:endParaRPr>
+          </a:p>
+          <a:p>
+            <a:pPr marL="457200">
+              <a:lnSpc>
+                <a:spcPts val="1350"/>
+              </a:lnSpc>
+              <a:spcAft>
+                <a:spcPts val="600"/>
+              </a:spcAft>
+            </a:pPr>
             <a:endParaRPr lang="en-IN" dirty="0" smtClean="0">
               <a:latin typeface="Courier New" panose="02070309020205020404" pitchFamily="49" charset="0"/>
               <a:ea typeface="Times New Roman" panose="02020603050405020304" pitchFamily="18" charset="0"/>
@@ -8492,772 +8514,6 @@
       </p:grpSpPr>
       <p:sp>
         <p:nvSpPr>
-          <p:cNvPr id="6" name="Rectangle 5"/>
-          <p:cNvSpPr/>
-          <p:nvPr/>
-        </p:nvSpPr>
-        <p:spPr>
-          <a:xfrm>
-            <a:off x="443948" y="1420801"/>
-            <a:ext cx="10956234" cy="4834785"/>
-          </a:xfrm>
-          <a:prstGeom prst="rect">
-            <a:avLst/>
-          </a:prstGeom>
-        </p:spPr>
-        <p:txBody>
-          <a:bodyPr wrap="square">
-            <a:spAutoFit/>
-          </a:bodyPr>
-          <a:lstStyle/>
-          <a:p>
-            <a:pPr>
-              <a:lnSpc>
-                <a:spcPct val="107000"/>
-              </a:lnSpc>
-            </a:pPr>
-            <a:r>
-              <a:rPr lang="en-IN" sz="1600" dirty="0">
-                <a:latin typeface="Courier New" panose="02070309020205020404" pitchFamily="49" charset="0"/>
-                <a:ea typeface="Calibri" panose="020F0502020204030204" pitchFamily="34" charset="0"/>
-                <a:cs typeface="Times New Roman" panose="02020603050405020304" pitchFamily="18" charset="0"/>
-              </a:rPr>
-              <a:t>Function	</a:t>
-            </a:r>
-            <a:r>
-              <a:rPr lang="en-IN" sz="1600" dirty="0" smtClean="0">
-                <a:latin typeface="Courier New" panose="02070309020205020404" pitchFamily="49" charset="0"/>
-                <a:ea typeface="Calibri" panose="020F0502020204030204" pitchFamily="34" charset="0"/>
-                <a:cs typeface="Times New Roman" panose="02020603050405020304" pitchFamily="18" charset="0"/>
-              </a:rPr>
-              <a:t>	Example</a:t>
-            </a:r>
-            <a:r>
-              <a:rPr lang="en-IN" sz="1600" dirty="0">
-                <a:latin typeface="Courier New" panose="02070309020205020404" pitchFamily="49" charset="0"/>
-                <a:ea typeface="Calibri" panose="020F0502020204030204" pitchFamily="34" charset="0"/>
-                <a:cs typeface="Times New Roman" panose="02020603050405020304" pitchFamily="18" charset="0"/>
-              </a:rPr>
-              <a:t>	Result</a:t>
-            </a:r>
-            <a:endParaRPr lang="en-IN" sz="1600" dirty="0">
-              <a:latin typeface="Calibri" panose="020F0502020204030204" pitchFamily="34" charset="0"/>
-              <a:ea typeface="Calibri" panose="020F0502020204030204" pitchFamily="34" charset="0"/>
-              <a:cs typeface="Times New Roman" panose="02020603050405020304" pitchFamily="18" charset="0"/>
-            </a:endParaRPr>
-          </a:p>
-          <a:p>
-            <a:pPr>
-              <a:lnSpc>
-                <a:spcPct val="107000"/>
-              </a:lnSpc>
-            </a:pPr>
-            <a:r>
-              <a:rPr lang="en-IN" sz="1600" dirty="0" smtClean="0">
-                <a:latin typeface="Courier New" panose="02070309020205020404" pitchFamily="49" charset="0"/>
-                <a:ea typeface="Calibri" panose="020F0502020204030204" pitchFamily="34" charset="0"/>
-                <a:cs typeface="Times New Roman" panose="02020603050405020304" pitchFamily="18" charset="0"/>
-              </a:rPr>
-              <a:t>LEFT</a:t>
-            </a:r>
-            <a:r>
-              <a:rPr lang="en-IN" sz="1600" dirty="0">
-                <a:latin typeface="Courier New" panose="02070309020205020404" pitchFamily="49" charset="0"/>
-                <a:ea typeface="Calibri" panose="020F0502020204030204" pitchFamily="34" charset="0"/>
-                <a:cs typeface="Times New Roman" panose="02020603050405020304" pitchFamily="18" charset="0"/>
-              </a:rPr>
-              <a:t>()	</a:t>
-            </a:r>
-            <a:r>
-              <a:rPr lang="en-IN" sz="1600" dirty="0" smtClean="0">
-                <a:latin typeface="Courier New" panose="02070309020205020404" pitchFamily="49" charset="0"/>
-                <a:ea typeface="Calibri" panose="020F0502020204030204" pitchFamily="34" charset="0"/>
-                <a:cs typeface="Times New Roman" panose="02020603050405020304" pitchFamily="18" charset="0"/>
-              </a:rPr>
-              <a:t>		LEFT</a:t>
-            </a:r>
-            <a:r>
-              <a:rPr lang="en-IN" sz="1600" dirty="0">
-                <a:latin typeface="Courier New" panose="02070309020205020404" pitchFamily="49" charset="0"/>
-                <a:ea typeface="Calibri" panose="020F0502020204030204" pitchFamily="34" charset="0"/>
-                <a:cs typeface="Times New Roman" panose="02020603050405020304" pitchFamily="18" charset="0"/>
-              </a:rPr>
-              <a:t>("</a:t>
-            </a:r>
-            <a:r>
-              <a:rPr lang="en-IN" sz="1600" dirty="0" err="1">
-                <a:latin typeface="Courier New" panose="02070309020205020404" pitchFamily="49" charset="0"/>
-                <a:ea typeface="Calibri" panose="020F0502020204030204" pitchFamily="34" charset="0"/>
-                <a:cs typeface="Times New Roman" panose="02020603050405020304" pitchFamily="18" charset="0"/>
-              </a:rPr>
-              <a:t>PowerBI</a:t>
-            </a:r>
-            <a:r>
-              <a:rPr lang="en-IN" sz="1600" dirty="0">
-                <a:latin typeface="Courier New" panose="02070309020205020404" pitchFamily="49" charset="0"/>
-                <a:ea typeface="Calibri" panose="020F0502020204030204" pitchFamily="34" charset="0"/>
-                <a:cs typeface="Times New Roman" panose="02020603050405020304" pitchFamily="18" charset="0"/>
-              </a:rPr>
-              <a:t>", 5)	</a:t>
-            </a:r>
-            <a:r>
-              <a:rPr lang="en-IN" sz="1600" dirty="0" smtClean="0">
-                <a:latin typeface="Courier New" panose="02070309020205020404" pitchFamily="49" charset="0"/>
-                <a:ea typeface="Calibri" panose="020F0502020204030204" pitchFamily="34" charset="0"/>
-                <a:cs typeface="Times New Roman" panose="02020603050405020304" pitchFamily="18" charset="0"/>
-              </a:rPr>
-              <a:t>			Power</a:t>
-            </a:r>
-            <a:endParaRPr lang="en-IN" sz="1600" dirty="0">
-              <a:latin typeface="Calibri" panose="020F0502020204030204" pitchFamily="34" charset="0"/>
-              <a:ea typeface="Calibri" panose="020F0502020204030204" pitchFamily="34" charset="0"/>
-              <a:cs typeface="Times New Roman" panose="02020603050405020304" pitchFamily="18" charset="0"/>
-            </a:endParaRPr>
-          </a:p>
-          <a:p>
-            <a:pPr>
-              <a:lnSpc>
-                <a:spcPct val="107000"/>
-              </a:lnSpc>
-            </a:pPr>
-            <a:r>
-              <a:rPr lang="en-IN" sz="1600" dirty="0">
-                <a:latin typeface="Courier New" panose="02070309020205020404" pitchFamily="49" charset="0"/>
-                <a:ea typeface="Calibri" panose="020F0502020204030204" pitchFamily="34" charset="0"/>
-                <a:cs typeface="Times New Roman" panose="02020603050405020304" pitchFamily="18" charset="0"/>
-              </a:rPr>
-              <a:t>RIGHT()	</a:t>
-            </a:r>
-            <a:r>
-              <a:rPr lang="en-IN" sz="1600" dirty="0" smtClean="0">
-                <a:latin typeface="Courier New" panose="02070309020205020404" pitchFamily="49" charset="0"/>
-                <a:ea typeface="Calibri" panose="020F0502020204030204" pitchFamily="34" charset="0"/>
-                <a:cs typeface="Times New Roman" panose="02020603050405020304" pitchFamily="18" charset="0"/>
-              </a:rPr>
-              <a:t>		RIGHT</a:t>
-            </a:r>
-            <a:r>
-              <a:rPr lang="en-IN" sz="1600" dirty="0">
-                <a:latin typeface="Courier New" panose="02070309020205020404" pitchFamily="49" charset="0"/>
-                <a:ea typeface="Calibri" panose="020F0502020204030204" pitchFamily="34" charset="0"/>
-                <a:cs typeface="Times New Roman" panose="02020603050405020304" pitchFamily="18" charset="0"/>
-              </a:rPr>
-              <a:t>("</a:t>
-            </a:r>
-            <a:r>
-              <a:rPr lang="en-IN" sz="1600" dirty="0" err="1">
-                <a:latin typeface="Courier New" panose="02070309020205020404" pitchFamily="49" charset="0"/>
-                <a:ea typeface="Calibri" panose="020F0502020204030204" pitchFamily="34" charset="0"/>
-                <a:cs typeface="Times New Roman" panose="02020603050405020304" pitchFamily="18" charset="0"/>
-              </a:rPr>
-              <a:t>PowerBI</a:t>
-            </a:r>
-            <a:r>
-              <a:rPr lang="en-IN" sz="1600" dirty="0">
-                <a:latin typeface="Courier New" panose="02070309020205020404" pitchFamily="49" charset="0"/>
-                <a:ea typeface="Calibri" panose="020F0502020204030204" pitchFamily="34" charset="0"/>
-                <a:cs typeface="Times New Roman" panose="02020603050405020304" pitchFamily="18" charset="0"/>
-              </a:rPr>
-              <a:t>", 2)	</a:t>
-            </a:r>
-            <a:r>
-              <a:rPr lang="en-IN" sz="1600" dirty="0" smtClean="0">
-                <a:latin typeface="Courier New" panose="02070309020205020404" pitchFamily="49" charset="0"/>
-                <a:ea typeface="Calibri" panose="020F0502020204030204" pitchFamily="34" charset="0"/>
-                <a:cs typeface="Times New Roman" panose="02020603050405020304" pitchFamily="18" charset="0"/>
-              </a:rPr>
-              <a:t>			BI</a:t>
-            </a:r>
-            <a:endParaRPr lang="en-IN" sz="1600" dirty="0">
-              <a:latin typeface="Calibri" panose="020F0502020204030204" pitchFamily="34" charset="0"/>
-              <a:ea typeface="Calibri" panose="020F0502020204030204" pitchFamily="34" charset="0"/>
-              <a:cs typeface="Times New Roman" panose="02020603050405020304" pitchFamily="18" charset="0"/>
-            </a:endParaRPr>
-          </a:p>
-          <a:p>
-            <a:pPr>
-              <a:lnSpc>
-                <a:spcPct val="107000"/>
-              </a:lnSpc>
-            </a:pPr>
-            <a:r>
-              <a:rPr lang="en-IN" sz="1600" dirty="0">
-                <a:latin typeface="Courier New" panose="02070309020205020404" pitchFamily="49" charset="0"/>
-                <a:ea typeface="Calibri" panose="020F0502020204030204" pitchFamily="34" charset="0"/>
-                <a:cs typeface="Times New Roman" panose="02020603050405020304" pitchFamily="18" charset="0"/>
-              </a:rPr>
-              <a:t>MID()	</a:t>
-            </a:r>
-            <a:r>
-              <a:rPr lang="en-IN" sz="1600" dirty="0" smtClean="0">
-                <a:latin typeface="Courier New" panose="02070309020205020404" pitchFamily="49" charset="0"/>
-                <a:ea typeface="Calibri" panose="020F0502020204030204" pitchFamily="34" charset="0"/>
-                <a:cs typeface="Times New Roman" panose="02020603050405020304" pitchFamily="18" charset="0"/>
-              </a:rPr>
-              <a:t>		MID</a:t>
-            </a:r>
-            <a:r>
-              <a:rPr lang="en-IN" sz="1600" dirty="0">
-                <a:latin typeface="Courier New" panose="02070309020205020404" pitchFamily="49" charset="0"/>
-                <a:ea typeface="Calibri" panose="020F0502020204030204" pitchFamily="34" charset="0"/>
-                <a:cs typeface="Times New Roman" panose="02020603050405020304" pitchFamily="18" charset="0"/>
-              </a:rPr>
-              <a:t>("</a:t>
-            </a:r>
-            <a:r>
-              <a:rPr lang="en-IN" sz="1600" dirty="0" err="1">
-                <a:latin typeface="Courier New" panose="02070309020205020404" pitchFamily="49" charset="0"/>
-                <a:ea typeface="Calibri" panose="020F0502020204030204" pitchFamily="34" charset="0"/>
-                <a:cs typeface="Times New Roman" panose="02020603050405020304" pitchFamily="18" charset="0"/>
-              </a:rPr>
-              <a:t>PowerBI</a:t>
-            </a:r>
-            <a:r>
-              <a:rPr lang="en-IN" sz="1600" dirty="0">
-                <a:latin typeface="Courier New" panose="02070309020205020404" pitchFamily="49" charset="0"/>
-                <a:ea typeface="Calibri" panose="020F0502020204030204" pitchFamily="34" charset="0"/>
-                <a:cs typeface="Times New Roman" panose="02020603050405020304" pitchFamily="18" charset="0"/>
-              </a:rPr>
-              <a:t>", 2, 3)	</a:t>
-            </a:r>
-            <a:r>
-              <a:rPr lang="en-IN" sz="1600" dirty="0" smtClean="0">
-                <a:latin typeface="Courier New" panose="02070309020205020404" pitchFamily="49" charset="0"/>
-                <a:ea typeface="Calibri" panose="020F0502020204030204" pitchFamily="34" charset="0"/>
-                <a:cs typeface="Times New Roman" panose="02020603050405020304" pitchFamily="18" charset="0"/>
-              </a:rPr>
-              <a:t>			owe</a:t>
-            </a:r>
-            <a:endParaRPr lang="en-IN" sz="1600" dirty="0">
-              <a:latin typeface="Calibri" panose="020F0502020204030204" pitchFamily="34" charset="0"/>
-              <a:ea typeface="Calibri" panose="020F0502020204030204" pitchFamily="34" charset="0"/>
-              <a:cs typeface="Times New Roman" panose="02020603050405020304" pitchFamily="18" charset="0"/>
-            </a:endParaRPr>
-          </a:p>
-          <a:p>
-            <a:pPr>
-              <a:lnSpc>
-                <a:spcPct val="107000"/>
-              </a:lnSpc>
-            </a:pPr>
-            <a:endParaRPr lang="en-IN" sz="1600" dirty="0" smtClean="0">
-              <a:latin typeface="Courier New" panose="02070309020205020404" pitchFamily="49" charset="0"/>
-              <a:ea typeface="Calibri" panose="020F0502020204030204" pitchFamily="34" charset="0"/>
-              <a:cs typeface="Times New Roman" panose="02020603050405020304" pitchFamily="18" charset="0"/>
-            </a:endParaRPr>
-          </a:p>
-          <a:p>
-            <a:pPr>
-              <a:lnSpc>
-                <a:spcPct val="107000"/>
-              </a:lnSpc>
-            </a:pPr>
-            <a:r>
-              <a:rPr lang="en-IN" sz="1600" dirty="0" smtClean="0">
-                <a:latin typeface="Courier New" panose="02070309020205020404" pitchFamily="49" charset="0"/>
-                <a:ea typeface="Calibri" panose="020F0502020204030204" pitchFamily="34" charset="0"/>
-                <a:cs typeface="Times New Roman" panose="02020603050405020304" pitchFamily="18" charset="0"/>
-              </a:rPr>
-              <a:t>LEN</a:t>
-            </a:r>
-            <a:r>
-              <a:rPr lang="en-IN" sz="1600" dirty="0">
-                <a:latin typeface="Courier New" panose="02070309020205020404" pitchFamily="49" charset="0"/>
-                <a:ea typeface="Calibri" panose="020F0502020204030204" pitchFamily="34" charset="0"/>
-                <a:cs typeface="Times New Roman" panose="02020603050405020304" pitchFamily="18" charset="0"/>
-              </a:rPr>
-              <a:t>()	</a:t>
-            </a:r>
-            <a:r>
-              <a:rPr lang="en-IN" sz="1600" dirty="0" smtClean="0">
-                <a:latin typeface="Courier New" panose="02070309020205020404" pitchFamily="49" charset="0"/>
-                <a:ea typeface="Calibri" panose="020F0502020204030204" pitchFamily="34" charset="0"/>
-                <a:cs typeface="Times New Roman" panose="02020603050405020304" pitchFamily="18" charset="0"/>
-              </a:rPr>
-              <a:t>		LEN</a:t>
-            </a:r>
-            <a:r>
-              <a:rPr lang="en-IN" sz="1600" dirty="0">
-                <a:latin typeface="Courier New" panose="02070309020205020404" pitchFamily="49" charset="0"/>
-                <a:ea typeface="Calibri" panose="020F0502020204030204" pitchFamily="34" charset="0"/>
-                <a:cs typeface="Times New Roman" panose="02020603050405020304" pitchFamily="18" charset="0"/>
-              </a:rPr>
-              <a:t>("</a:t>
-            </a:r>
-            <a:r>
-              <a:rPr lang="en-IN" sz="1600" dirty="0" err="1">
-                <a:latin typeface="Courier New" panose="02070309020205020404" pitchFamily="49" charset="0"/>
-                <a:ea typeface="Calibri" panose="020F0502020204030204" pitchFamily="34" charset="0"/>
-                <a:cs typeface="Times New Roman" panose="02020603050405020304" pitchFamily="18" charset="0"/>
-              </a:rPr>
-              <a:t>PowerBI</a:t>
-            </a:r>
-            <a:r>
-              <a:rPr lang="en-IN" sz="1600" dirty="0">
-                <a:latin typeface="Courier New" panose="02070309020205020404" pitchFamily="49" charset="0"/>
-                <a:ea typeface="Calibri" panose="020F0502020204030204" pitchFamily="34" charset="0"/>
-                <a:cs typeface="Times New Roman" panose="02020603050405020304" pitchFamily="18" charset="0"/>
-              </a:rPr>
-              <a:t>")	</a:t>
-            </a:r>
-            <a:r>
-              <a:rPr lang="en-IN" sz="1600" dirty="0" smtClean="0">
-                <a:latin typeface="Courier New" panose="02070309020205020404" pitchFamily="49" charset="0"/>
-                <a:ea typeface="Calibri" panose="020F0502020204030204" pitchFamily="34" charset="0"/>
-                <a:cs typeface="Times New Roman" panose="02020603050405020304" pitchFamily="18" charset="0"/>
-              </a:rPr>
-              <a:t>				7</a:t>
-            </a:r>
-            <a:endParaRPr lang="en-IN" sz="1600" dirty="0">
-              <a:latin typeface="Calibri" panose="020F0502020204030204" pitchFamily="34" charset="0"/>
-              <a:ea typeface="Calibri" panose="020F0502020204030204" pitchFamily="34" charset="0"/>
-              <a:cs typeface="Times New Roman" panose="02020603050405020304" pitchFamily="18" charset="0"/>
-            </a:endParaRPr>
-          </a:p>
-          <a:p>
-            <a:pPr>
-              <a:lnSpc>
-                <a:spcPct val="107000"/>
-              </a:lnSpc>
-            </a:pPr>
-            <a:endParaRPr lang="en-IN" sz="1600" dirty="0" smtClean="0">
-              <a:latin typeface="Courier New" panose="02070309020205020404" pitchFamily="49" charset="0"/>
-              <a:ea typeface="Calibri" panose="020F0502020204030204" pitchFamily="34" charset="0"/>
-              <a:cs typeface="Times New Roman" panose="02020603050405020304" pitchFamily="18" charset="0"/>
-            </a:endParaRPr>
-          </a:p>
-          <a:p>
-            <a:pPr>
-              <a:lnSpc>
-                <a:spcPct val="107000"/>
-              </a:lnSpc>
-            </a:pPr>
-            <a:r>
-              <a:rPr lang="en-IN" sz="1600" dirty="0" smtClean="0">
-                <a:latin typeface="Courier New" panose="02070309020205020404" pitchFamily="49" charset="0"/>
-                <a:ea typeface="Calibri" panose="020F0502020204030204" pitchFamily="34" charset="0"/>
-                <a:cs typeface="Times New Roman" panose="02020603050405020304" pitchFamily="18" charset="0"/>
-              </a:rPr>
-              <a:t>UPPER</a:t>
-            </a:r>
-            <a:r>
-              <a:rPr lang="en-IN" sz="1600" dirty="0">
-                <a:latin typeface="Courier New" panose="02070309020205020404" pitchFamily="49" charset="0"/>
-                <a:ea typeface="Calibri" panose="020F0502020204030204" pitchFamily="34" charset="0"/>
-                <a:cs typeface="Times New Roman" panose="02020603050405020304" pitchFamily="18" charset="0"/>
-              </a:rPr>
-              <a:t>()	</a:t>
-            </a:r>
-            <a:r>
-              <a:rPr lang="en-IN" sz="1600" dirty="0" smtClean="0">
-                <a:latin typeface="Courier New" panose="02070309020205020404" pitchFamily="49" charset="0"/>
-                <a:ea typeface="Calibri" panose="020F0502020204030204" pitchFamily="34" charset="0"/>
-                <a:cs typeface="Times New Roman" panose="02020603050405020304" pitchFamily="18" charset="0"/>
-              </a:rPr>
-              <a:t>		UPPER</a:t>
-            </a:r>
-            <a:r>
-              <a:rPr lang="en-IN" sz="1600" dirty="0">
-                <a:latin typeface="Courier New" panose="02070309020205020404" pitchFamily="49" charset="0"/>
-                <a:ea typeface="Calibri" panose="020F0502020204030204" pitchFamily="34" charset="0"/>
-                <a:cs typeface="Times New Roman" panose="02020603050405020304" pitchFamily="18" charset="0"/>
-              </a:rPr>
-              <a:t>("power bi")	</a:t>
-            </a:r>
-            <a:r>
-              <a:rPr lang="en-IN" sz="1600" dirty="0" smtClean="0">
-                <a:latin typeface="Courier New" panose="02070309020205020404" pitchFamily="49" charset="0"/>
-                <a:ea typeface="Calibri" panose="020F0502020204030204" pitchFamily="34" charset="0"/>
-                <a:cs typeface="Times New Roman" panose="02020603050405020304" pitchFamily="18" charset="0"/>
-              </a:rPr>
-              <a:t>			POWER </a:t>
-            </a:r>
-            <a:r>
-              <a:rPr lang="en-IN" sz="1600" dirty="0">
-                <a:latin typeface="Courier New" panose="02070309020205020404" pitchFamily="49" charset="0"/>
-                <a:ea typeface="Calibri" panose="020F0502020204030204" pitchFamily="34" charset="0"/>
-                <a:cs typeface="Times New Roman" panose="02020603050405020304" pitchFamily="18" charset="0"/>
-              </a:rPr>
-              <a:t>BI</a:t>
-            </a:r>
-            <a:endParaRPr lang="en-IN" sz="1600" dirty="0">
-              <a:latin typeface="Calibri" panose="020F0502020204030204" pitchFamily="34" charset="0"/>
-              <a:ea typeface="Calibri" panose="020F0502020204030204" pitchFamily="34" charset="0"/>
-              <a:cs typeface="Times New Roman" panose="02020603050405020304" pitchFamily="18" charset="0"/>
-            </a:endParaRPr>
-          </a:p>
-          <a:p>
-            <a:pPr>
-              <a:lnSpc>
-                <a:spcPct val="107000"/>
-              </a:lnSpc>
-            </a:pPr>
-            <a:r>
-              <a:rPr lang="en-IN" sz="1600" dirty="0">
-                <a:latin typeface="Courier New" panose="02070309020205020404" pitchFamily="49" charset="0"/>
-                <a:ea typeface="Calibri" panose="020F0502020204030204" pitchFamily="34" charset="0"/>
-                <a:cs typeface="Times New Roman" panose="02020603050405020304" pitchFamily="18" charset="0"/>
-              </a:rPr>
-              <a:t>LOWER()	</a:t>
-            </a:r>
-            <a:r>
-              <a:rPr lang="en-IN" sz="1600" dirty="0" smtClean="0">
-                <a:latin typeface="Courier New" panose="02070309020205020404" pitchFamily="49" charset="0"/>
-                <a:ea typeface="Calibri" panose="020F0502020204030204" pitchFamily="34" charset="0"/>
-                <a:cs typeface="Times New Roman" panose="02020603050405020304" pitchFamily="18" charset="0"/>
-              </a:rPr>
-              <a:t>		LOWER</a:t>
-            </a:r>
-            <a:r>
-              <a:rPr lang="en-IN" sz="1600" dirty="0">
-                <a:latin typeface="Courier New" panose="02070309020205020404" pitchFamily="49" charset="0"/>
-                <a:ea typeface="Calibri" panose="020F0502020204030204" pitchFamily="34" charset="0"/>
-                <a:cs typeface="Times New Roman" panose="02020603050405020304" pitchFamily="18" charset="0"/>
-              </a:rPr>
-              <a:t>("POWER BI")	</a:t>
-            </a:r>
-            <a:r>
-              <a:rPr lang="en-IN" sz="1600" dirty="0" smtClean="0">
-                <a:latin typeface="Courier New" panose="02070309020205020404" pitchFamily="49" charset="0"/>
-                <a:ea typeface="Calibri" panose="020F0502020204030204" pitchFamily="34" charset="0"/>
-                <a:cs typeface="Times New Roman" panose="02020603050405020304" pitchFamily="18" charset="0"/>
-              </a:rPr>
-              <a:t>			power </a:t>
-            </a:r>
-            <a:r>
-              <a:rPr lang="en-IN" sz="1600" dirty="0">
-                <a:latin typeface="Courier New" panose="02070309020205020404" pitchFamily="49" charset="0"/>
-                <a:ea typeface="Calibri" panose="020F0502020204030204" pitchFamily="34" charset="0"/>
-                <a:cs typeface="Times New Roman" panose="02020603050405020304" pitchFamily="18" charset="0"/>
-              </a:rPr>
-              <a:t>bi</a:t>
-            </a:r>
-            <a:endParaRPr lang="en-IN" sz="1600" dirty="0">
-              <a:latin typeface="Calibri" panose="020F0502020204030204" pitchFamily="34" charset="0"/>
-              <a:ea typeface="Calibri" panose="020F0502020204030204" pitchFamily="34" charset="0"/>
-              <a:cs typeface="Times New Roman" panose="02020603050405020304" pitchFamily="18" charset="0"/>
-            </a:endParaRPr>
-          </a:p>
-          <a:p>
-            <a:pPr>
-              <a:lnSpc>
-                <a:spcPct val="107000"/>
-              </a:lnSpc>
-            </a:pPr>
-            <a:endParaRPr lang="en-IN" sz="1600" dirty="0" smtClean="0">
-              <a:latin typeface="Courier New" panose="02070309020205020404" pitchFamily="49" charset="0"/>
-              <a:ea typeface="Calibri" panose="020F0502020204030204" pitchFamily="34" charset="0"/>
-              <a:cs typeface="Times New Roman" panose="02020603050405020304" pitchFamily="18" charset="0"/>
-            </a:endParaRPr>
-          </a:p>
-          <a:p>
-            <a:pPr>
-              <a:lnSpc>
-                <a:spcPct val="107000"/>
-              </a:lnSpc>
-            </a:pPr>
-            <a:r>
-              <a:rPr lang="en-IN" sz="1600" dirty="0" smtClean="0">
-                <a:latin typeface="Courier New" panose="02070309020205020404" pitchFamily="49" charset="0"/>
-                <a:ea typeface="Calibri" panose="020F0502020204030204" pitchFamily="34" charset="0"/>
-                <a:cs typeface="Times New Roman" panose="02020603050405020304" pitchFamily="18" charset="0"/>
-              </a:rPr>
-              <a:t>TRIM</a:t>
-            </a:r>
-            <a:r>
-              <a:rPr lang="en-IN" sz="1600" dirty="0">
-                <a:latin typeface="Courier New" panose="02070309020205020404" pitchFamily="49" charset="0"/>
-                <a:ea typeface="Calibri" panose="020F0502020204030204" pitchFamily="34" charset="0"/>
-                <a:cs typeface="Times New Roman" panose="02020603050405020304" pitchFamily="18" charset="0"/>
-              </a:rPr>
-              <a:t>()	</a:t>
-            </a:r>
-            <a:r>
-              <a:rPr lang="en-IN" sz="1600" dirty="0" smtClean="0">
-                <a:latin typeface="Courier New" panose="02070309020205020404" pitchFamily="49" charset="0"/>
-                <a:ea typeface="Calibri" panose="020F0502020204030204" pitchFamily="34" charset="0"/>
-                <a:cs typeface="Times New Roman" panose="02020603050405020304" pitchFamily="18" charset="0"/>
-              </a:rPr>
-              <a:t>		TRIM</a:t>
-            </a:r>
-            <a:r>
-              <a:rPr lang="en-IN" sz="1600" dirty="0">
-                <a:latin typeface="Courier New" panose="02070309020205020404" pitchFamily="49" charset="0"/>
-                <a:ea typeface="Calibri" panose="020F0502020204030204" pitchFamily="34" charset="0"/>
-                <a:cs typeface="Times New Roman" panose="02020603050405020304" pitchFamily="18" charset="0"/>
-              </a:rPr>
-              <a:t>(" Power BI ")	</a:t>
-            </a:r>
-            <a:r>
-              <a:rPr lang="en-IN" sz="1600" dirty="0" smtClean="0">
-                <a:latin typeface="Courier New" panose="02070309020205020404" pitchFamily="49" charset="0"/>
-                <a:ea typeface="Calibri" panose="020F0502020204030204" pitchFamily="34" charset="0"/>
-                <a:cs typeface="Times New Roman" panose="02020603050405020304" pitchFamily="18" charset="0"/>
-              </a:rPr>
-              <a:t>			Power </a:t>
-            </a:r>
-            <a:r>
-              <a:rPr lang="en-IN" sz="1600" dirty="0">
-                <a:latin typeface="Courier New" panose="02070309020205020404" pitchFamily="49" charset="0"/>
-                <a:ea typeface="Calibri" panose="020F0502020204030204" pitchFamily="34" charset="0"/>
-                <a:cs typeface="Times New Roman" panose="02020603050405020304" pitchFamily="18" charset="0"/>
-              </a:rPr>
-              <a:t>BI</a:t>
-            </a:r>
-            <a:endParaRPr lang="en-IN" sz="1600" dirty="0">
-              <a:latin typeface="Calibri" panose="020F0502020204030204" pitchFamily="34" charset="0"/>
-              <a:ea typeface="Calibri" panose="020F0502020204030204" pitchFamily="34" charset="0"/>
-              <a:cs typeface="Times New Roman" panose="02020603050405020304" pitchFamily="18" charset="0"/>
-            </a:endParaRPr>
-          </a:p>
-          <a:p>
-            <a:pPr>
-              <a:lnSpc>
-                <a:spcPct val="107000"/>
-              </a:lnSpc>
-            </a:pPr>
-            <a:r>
-              <a:rPr lang="en-IN" sz="1600" dirty="0">
-                <a:latin typeface="Courier New" panose="02070309020205020404" pitchFamily="49" charset="0"/>
-                <a:ea typeface="Calibri" panose="020F0502020204030204" pitchFamily="34" charset="0"/>
-                <a:cs typeface="Times New Roman" panose="02020603050405020304" pitchFamily="18" charset="0"/>
-              </a:rPr>
-              <a:t>SUBSTITUTE()	</a:t>
-            </a:r>
-            <a:r>
-              <a:rPr lang="en-IN" sz="1600" dirty="0" smtClean="0">
-                <a:latin typeface="Courier New" panose="02070309020205020404" pitchFamily="49" charset="0"/>
-                <a:ea typeface="Calibri" panose="020F0502020204030204" pitchFamily="34" charset="0"/>
-                <a:cs typeface="Times New Roman" panose="02020603050405020304" pitchFamily="18" charset="0"/>
-              </a:rPr>
-              <a:t>	SUBSTITUTE</a:t>
-            </a:r>
-            <a:r>
-              <a:rPr lang="en-IN" sz="1600" dirty="0">
-                <a:latin typeface="Courier New" panose="02070309020205020404" pitchFamily="49" charset="0"/>
-                <a:ea typeface="Calibri" panose="020F0502020204030204" pitchFamily="34" charset="0"/>
-                <a:cs typeface="Times New Roman" panose="02020603050405020304" pitchFamily="18" charset="0"/>
-              </a:rPr>
-              <a:t>("Power BI", "BI", "Query")	</a:t>
-            </a:r>
-            <a:r>
-              <a:rPr lang="en-IN" sz="1600" dirty="0" smtClean="0">
-                <a:latin typeface="Courier New" panose="02070309020205020404" pitchFamily="49" charset="0"/>
-                <a:ea typeface="Calibri" panose="020F0502020204030204" pitchFamily="34" charset="0"/>
-                <a:cs typeface="Times New Roman" panose="02020603050405020304" pitchFamily="18" charset="0"/>
-              </a:rPr>
-              <a:t>	Power </a:t>
-            </a:r>
-            <a:r>
-              <a:rPr lang="en-IN" sz="1600" dirty="0">
-                <a:latin typeface="Courier New" panose="02070309020205020404" pitchFamily="49" charset="0"/>
-                <a:ea typeface="Calibri" panose="020F0502020204030204" pitchFamily="34" charset="0"/>
-                <a:cs typeface="Times New Roman" panose="02020603050405020304" pitchFamily="18" charset="0"/>
-              </a:rPr>
-              <a:t>Query</a:t>
-            </a:r>
-            <a:endParaRPr lang="en-IN" sz="1600" dirty="0">
-              <a:latin typeface="Calibri" panose="020F0502020204030204" pitchFamily="34" charset="0"/>
-              <a:ea typeface="Calibri" panose="020F0502020204030204" pitchFamily="34" charset="0"/>
-              <a:cs typeface="Times New Roman" panose="02020603050405020304" pitchFamily="18" charset="0"/>
-            </a:endParaRPr>
-          </a:p>
-          <a:p>
-            <a:pPr>
-              <a:lnSpc>
-                <a:spcPct val="107000"/>
-              </a:lnSpc>
-            </a:pPr>
-            <a:endParaRPr lang="en-US" sz="1600" dirty="0" smtClean="0">
-              <a:latin typeface="Courier New" panose="02070309020205020404" pitchFamily="49" charset="0"/>
-              <a:ea typeface="Calibri" panose="020F0502020204030204" pitchFamily="34" charset="0"/>
-              <a:cs typeface="Times New Roman" panose="02020603050405020304" pitchFamily="18" charset="0"/>
-            </a:endParaRPr>
-          </a:p>
-          <a:p>
-            <a:pPr>
-              <a:lnSpc>
-                <a:spcPct val="107000"/>
-              </a:lnSpc>
-            </a:pPr>
-            <a:r>
-              <a:rPr lang="en-IN" sz="1600" dirty="0">
-                <a:latin typeface="Courier New" panose="02070309020205020404" pitchFamily="49" charset="0"/>
-                <a:ea typeface="Calibri" panose="020F0502020204030204" pitchFamily="34" charset="0"/>
-                <a:cs typeface="Times New Roman" panose="02020603050405020304" pitchFamily="18" charset="0"/>
-              </a:rPr>
-              <a:t>CONTAINSSTRING()	CONTAINSSTRING("Power BI", "BI")		TRUE</a:t>
-            </a:r>
-          </a:p>
-          <a:p>
-            <a:pPr>
-              <a:lnSpc>
-                <a:spcPct val="107000"/>
-              </a:lnSpc>
-            </a:pPr>
-            <a:r>
-              <a:rPr lang="en-IN" sz="1600" dirty="0" smtClean="0">
-                <a:latin typeface="Courier New" panose="02070309020205020404" pitchFamily="49" charset="0"/>
-                <a:ea typeface="Calibri" panose="020F0502020204030204" pitchFamily="34" charset="0"/>
-                <a:cs typeface="Times New Roman" panose="02020603050405020304" pitchFamily="18" charset="0"/>
-              </a:rPr>
-              <a:t>SEARCH</a:t>
-            </a:r>
-            <a:r>
-              <a:rPr lang="en-IN" sz="1600" dirty="0">
-                <a:latin typeface="Courier New" panose="02070309020205020404" pitchFamily="49" charset="0"/>
-                <a:ea typeface="Calibri" panose="020F0502020204030204" pitchFamily="34" charset="0"/>
-                <a:cs typeface="Times New Roman" panose="02020603050405020304" pitchFamily="18" charset="0"/>
-              </a:rPr>
-              <a:t>()	</a:t>
-            </a:r>
-            <a:r>
-              <a:rPr lang="en-IN" sz="1600" dirty="0" smtClean="0">
-                <a:latin typeface="Courier New" panose="02070309020205020404" pitchFamily="49" charset="0"/>
-                <a:ea typeface="Calibri" panose="020F0502020204030204" pitchFamily="34" charset="0"/>
-                <a:cs typeface="Times New Roman" panose="02020603050405020304" pitchFamily="18" charset="0"/>
-              </a:rPr>
-              <a:t>	SEARCH</a:t>
-            </a:r>
-            <a:r>
-              <a:rPr lang="en-IN" sz="1600" dirty="0">
-                <a:latin typeface="Courier New" panose="02070309020205020404" pitchFamily="49" charset="0"/>
-                <a:ea typeface="Calibri" panose="020F0502020204030204" pitchFamily="34" charset="0"/>
-                <a:cs typeface="Times New Roman" panose="02020603050405020304" pitchFamily="18" charset="0"/>
-              </a:rPr>
-              <a:t>("BI", "Power BI")	</a:t>
-            </a:r>
-            <a:r>
-              <a:rPr lang="en-IN" sz="1600" dirty="0" smtClean="0">
-                <a:latin typeface="Courier New" panose="02070309020205020404" pitchFamily="49" charset="0"/>
-                <a:ea typeface="Calibri" panose="020F0502020204030204" pitchFamily="34" charset="0"/>
-                <a:cs typeface="Times New Roman" panose="02020603050405020304" pitchFamily="18" charset="0"/>
-              </a:rPr>
-              <a:t>		7</a:t>
-            </a:r>
-            <a:endParaRPr lang="en-IN" sz="1600" dirty="0">
-              <a:latin typeface="Calibri" panose="020F0502020204030204" pitchFamily="34" charset="0"/>
-              <a:ea typeface="Calibri" panose="020F0502020204030204" pitchFamily="34" charset="0"/>
-              <a:cs typeface="Times New Roman" panose="02020603050405020304" pitchFamily="18" charset="0"/>
-            </a:endParaRPr>
-          </a:p>
-          <a:p>
-            <a:pPr>
-              <a:lnSpc>
-                <a:spcPct val="107000"/>
-              </a:lnSpc>
-            </a:pPr>
-            <a:endParaRPr lang="en-IN" sz="1600" dirty="0" smtClean="0">
-              <a:latin typeface="Courier New" panose="02070309020205020404" pitchFamily="49" charset="0"/>
-              <a:ea typeface="Calibri" panose="020F0502020204030204" pitchFamily="34" charset="0"/>
-              <a:cs typeface="Times New Roman" panose="02020603050405020304" pitchFamily="18" charset="0"/>
-            </a:endParaRPr>
-          </a:p>
-          <a:p>
-            <a:pPr>
-              <a:lnSpc>
-                <a:spcPct val="107000"/>
-              </a:lnSpc>
-            </a:pPr>
-            <a:endParaRPr lang="en-IN" sz="1600" dirty="0" smtClean="0">
-              <a:latin typeface="Courier New" panose="02070309020205020404" pitchFamily="49" charset="0"/>
-              <a:ea typeface="Calibri" panose="020F0502020204030204" pitchFamily="34" charset="0"/>
-              <a:cs typeface="Times New Roman" panose="02020603050405020304" pitchFamily="18" charset="0"/>
-            </a:endParaRPr>
-          </a:p>
-          <a:p>
-            <a:pPr>
-              <a:lnSpc>
-                <a:spcPct val="107000"/>
-              </a:lnSpc>
-            </a:pPr>
-            <a:r>
-              <a:rPr lang="en-IN" sz="1600" dirty="0" smtClean="0">
-                <a:latin typeface="Courier New" panose="02070309020205020404" pitchFamily="49" charset="0"/>
-                <a:ea typeface="Calibri" panose="020F0502020204030204" pitchFamily="34" charset="0"/>
-                <a:cs typeface="Times New Roman" panose="02020603050405020304" pitchFamily="18" charset="0"/>
-              </a:rPr>
-              <a:t>CONCATENATE</a:t>
-            </a:r>
-            <a:r>
-              <a:rPr lang="en-IN" sz="1600" dirty="0">
-                <a:latin typeface="Courier New" panose="02070309020205020404" pitchFamily="49" charset="0"/>
-                <a:ea typeface="Calibri" panose="020F0502020204030204" pitchFamily="34" charset="0"/>
-                <a:cs typeface="Times New Roman" panose="02020603050405020304" pitchFamily="18" charset="0"/>
-              </a:rPr>
-              <a:t>()	</a:t>
-            </a:r>
-            <a:r>
-              <a:rPr lang="en-IN" sz="1600" dirty="0" smtClean="0">
-                <a:latin typeface="Courier New" panose="02070309020205020404" pitchFamily="49" charset="0"/>
-                <a:ea typeface="Calibri" panose="020F0502020204030204" pitchFamily="34" charset="0"/>
-                <a:cs typeface="Times New Roman" panose="02020603050405020304" pitchFamily="18" charset="0"/>
-              </a:rPr>
-              <a:t>	CONCATENATE</a:t>
-            </a:r>
-            <a:r>
-              <a:rPr lang="en-IN" sz="1600" dirty="0">
-                <a:latin typeface="Courier New" panose="02070309020205020404" pitchFamily="49" charset="0"/>
-                <a:ea typeface="Calibri" panose="020F0502020204030204" pitchFamily="34" charset="0"/>
-                <a:cs typeface="Times New Roman" panose="02020603050405020304" pitchFamily="18" charset="0"/>
-              </a:rPr>
-              <a:t>("Hello", " ", "World")	</a:t>
-            </a:r>
-            <a:r>
-              <a:rPr lang="en-IN" sz="1600" dirty="0" smtClean="0">
-                <a:latin typeface="Courier New" panose="02070309020205020404" pitchFamily="49" charset="0"/>
-                <a:ea typeface="Calibri" panose="020F0502020204030204" pitchFamily="34" charset="0"/>
-                <a:cs typeface="Times New Roman" panose="02020603050405020304" pitchFamily="18" charset="0"/>
-              </a:rPr>
-              <a:t>	Hello World</a:t>
-            </a:r>
-            <a:endParaRPr lang="en-IN" sz="1600" dirty="0">
-              <a:latin typeface="Calibri" panose="020F0502020204030204" pitchFamily="34" charset="0"/>
-              <a:ea typeface="Calibri" panose="020F0502020204030204" pitchFamily="34" charset="0"/>
-              <a:cs typeface="Times New Roman" panose="02020603050405020304" pitchFamily="18" charset="0"/>
-            </a:endParaRPr>
-          </a:p>
-        </p:txBody>
-      </p:sp>
-    </p:spTree>
-    <p:extLst>
-      <p:ext uri="{BB962C8B-B14F-4D97-AF65-F5344CB8AC3E}">
-        <p14:creationId xmlns:p14="http://schemas.microsoft.com/office/powerpoint/2010/main" val="1925480359"/>
-      </p:ext>
-    </p:extLst>
-  </p:cSld>
-  <p:clrMapOvr>
-    <a:masterClrMapping/>
-  </p:clrMapOvr>
-  <p:timing>
-    <p:tnLst>
-      <p:par>
-        <p:cTn id="1" dur="indefinite" restart="never" nodeType="tmRoot"/>
-      </p:par>
-    </p:tnLst>
-  </p:timing>
-</p:sld>
-</file>
-
-<file path=ppt/slides/slide13.xml><?xml version="1.0" encoding="utf-8"?>
-<p:sld xmlns:a="http://schemas.openxmlformats.org/drawingml/2006/main" xmlns:r="http://schemas.openxmlformats.org/officeDocument/2006/relationships" xmlns:p="http://schemas.openxmlformats.org/presentationml/2006/main">
-  <p:cSld>
-    <p:spTree>
-      <p:nvGrpSpPr>
-        <p:cNvPr id="1" name=""/>
-        <p:cNvGrpSpPr/>
-        <p:nvPr/>
-      </p:nvGrpSpPr>
-      <p:grpSpPr>
-        <a:xfrm>
-          <a:off x="0" y="0"/>
-          <a:ext cx="0" cy="0"/>
-          <a:chOff x="0" y="0"/>
-          <a:chExt cx="0" cy="0"/>
-        </a:xfrm>
-      </p:grpSpPr>
-      <p:sp>
-        <p:nvSpPr>
           <p:cNvPr id="4" name="Rectangle 3"/>
           <p:cNvSpPr/>
           <p:nvPr/>
@@ -9609,8 +8865,8 @@
         </p:nvSpPr>
         <p:spPr>
           <a:xfrm>
-            <a:off x="243068" y="185667"/>
-            <a:ext cx="1713054" cy="369332"/>
+            <a:off x="243067" y="185667"/>
+            <a:ext cx="10103567" cy="923330"/>
           </a:xfrm>
           <a:prstGeom prst="rect">
             <a:avLst/>
@@ -9627,7 +8883,39 @@
               <a:rPr lang="en-US" dirty="0" err="1" smtClean="0"/>
               <a:t>Dax</a:t>
             </a:r>
-            <a:endParaRPr lang="en-IN" dirty="0"/>
+            <a:endParaRPr lang="en-US" dirty="0" smtClean="0"/>
+          </a:p>
+          <a:p>
+            <a:pPr lvl="0" eaLnBrk="0" fontAlgn="base" hangingPunct="0">
+              <a:spcBef>
+                <a:spcPct val="0"/>
+              </a:spcBef>
+              <a:spcAft>
+                <a:spcPct val="0"/>
+              </a:spcAft>
+            </a:pPr>
+            <a:r>
+              <a:rPr lang="en-US" altLang="en-US" dirty="0">
+                <a:latin typeface="Candara" panose="020E0502030303020204" pitchFamily="34" charset="0"/>
+              </a:rPr>
+              <a:t>There are more than 200 DAX functions in power BI. </a:t>
+            </a:r>
+          </a:p>
+          <a:p>
+            <a:pPr lvl="0" eaLnBrk="0" fontAlgn="base" hangingPunct="0">
+              <a:spcBef>
+                <a:spcPct val="0"/>
+              </a:spcBef>
+              <a:spcAft>
+                <a:spcPct val="0"/>
+              </a:spcAft>
+            </a:pPr>
+            <a:r>
+              <a:rPr lang="en-US" altLang="en-US" dirty="0">
+                <a:latin typeface="Candara" panose="020E0502030303020204" pitchFamily="34" charset="0"/>
+              </a:rPr>
+              <a:t>Some important as below. </a:t>
+            </a:r>
           </a:p>
         </p:txBody>
       </p:sp>
@@ -9641,8 +8929,8 @@
         </p:nvSpPr>
         <p:spPr bwMode="auto">
           <a:xfrm>
-            <a:off x="167950" y="1018783"/>
-            <a:ext cx="6279503" cy="5078313"/>
+            <a:off x="167950" y="1295782"/>
+            <a:ext cx="6279503" cy="4524315"/>
           </a:xfrm>
           <a:prstGeom prst="rect">
             <a:avLst/>
@@ -9689,110 +8977,6 @@
             <a:spAutoFit/>
           </a:bodyPr>
           <a:lstStyle/>
-          <a:p>
-            <a:pPr marL="0" marR="0" lvl="0" indent="0" algn="l" defTabSz="914400" rtl="0" eaLnBrk="0" fontAlgn="base" latinLnBrk="0" hangingPunct="0">
-              <a:lnSpc>
-                <a:spcPct val="100000"/>
-              </a:lnSpc>
-              <a:spcBef>
-                <a:spcPct val="0"/>
-              </a:spcBef>
-              <a:spcAft>
-                <a:spcPct val="0"/>
-              </a:spcAft>
-              <a:buClrTx/>
-              <a:buSzTx/>
-              <a:buFontTx/>
-              <a:buNone/>
-              <a:tabLst/>
-            </a:pPr>
-            <a:r>
-              <a:rPr kumimoji="0" lang="en-US" altLang="en-US" sz="1800" b="0" i="0" u="none" strike="noStrike" cap="none" normalizeH="0" baseline="0" dirty="0" smtClean="0">
-                <a:ln>
-                  <a:noFill/>
-                </a:ln>
-                <a:solidFill>
-                  <a:schemeClr val="tx1"/>
-                </a:solidFill>
-                <a:effectLst/>
-                <a:latin typeface="Candara" panose="020E0502030303020204" pitchFamily="34" charset="0"/>
-              </a:rPr>
-              <a:t>There are more than 200 DAX functions in power</a:t>
-            </a:r>
-            <a:r>
-              <a:rPr kumimoji="0" lang="en-US" altLang="en-US" sz="1800" b="0" i="0" u="none" strike="noStrike" cap="none" normalizeH="0" dirty="0" smtClean="0">
-                <a:ln>
-                  <a:noFill/>
-                </a:ln>
-                <a:solidFill>
-                  <a:schemeClr val="tx1"/>
-                </a:solidFill>
-                <a:effectLst/>
-                <a:latin typeface="Candara" panose="020E0502030303020204" pitchFamily="34" charset="0"/>
-              </a:rPr>
-              <a:t> BI</a:t>
-            </a:r>
-            <a:r>
-              <a:rPr kumimoji="0" lang="en-US" altLang="en-US" sz="1800" b="0" i="0" u="none" strike="noStrike" cap="none" normalizeH="0" baseline="0" dirty="0" smtClean="0">
-                <a:ln>
-                  <a:noFill/>
-                </a:ln>
-                <a:solidFill>
-                  <a:schemeClr val="tx1"/>
-                </a:solidFill>
-                <a:effectLst/>
-                <a:latin typeface="Candara" panose="020E0502030303020204" pitchFamily="34" charset="0"/>
-              </a:rPr>
-              <a:t>. </a:t>
-            </a:r>
-          </a:p>
-          <a:p>
-            <a:pPr marL="0" marR="0" lvl="0" indent="0" algn="l" defTabSz="914400" rtl="0" eaLnBrk="0" fontAlgn="base" latinLnBrk="0" hangingPunct="0">
-              <a:lnSpc>
-                <a:spcPct val="100000"/>
-              </a:lnSpc>
-              <a:spcBef>
-                <a:spcPct val="0"/>
-              </a:spcBef>
-              <a:spcAft>
-                <a:spcPct val="0"/>
-              </a:spcAft>
-              <a:buClrTx/>
-              <a:buSzTx/>
-              <a:buFontTx/>
-              <a:buNone/>
-              <a:tabLst/>
-            </a:pPr>
-            <a:r>
-              <a:rPr kumimoji="0" lang="en-US" altLang="en-US" sz="1800" b="0" i="0" u="none" strike="noStrike" cap="none" normalizeH="0" baseline="0" dirty="0" smtClean="0">
-                <a:ln>
-                  <a:noFill/>
-                </a:ln>
-                <a:solidFill>
-                  <a:schemeClr val="tx1"/>
-                </a:solidFill>
-                <a:effectLst/>
-                <a:latin typeface="Candara" panose="020E0502030303020204" pitchFamily="34" charset="0"/>
-              </a:rPr>
-              <a:t>Some important as </a:t>
-            </a:r>
-            <a:r>
-              <a:rPr lang="en-US" altLang="en-US" dirty="0" smtClean="0">
-                <a:latin typeface="Candara" panose="020E0502030303020204" pitchFamily="34" charset="0"/>
-              </a:rPr>
-              <a:t>below. </a:t>
-            </a:r>
-            <a:endParaRPr kumimoji="0" lang="en-US" altLang="en-US" sz="1800" b="0" i="0" u="none" strike="noStrike" cap="none" normalizeH="0" baseline="0" dirty="0" smtClean="0">
-              <a:ln>
-                <a:noFill/>
-              </a:ln>
-              <a:solidFill>
-                <a:schemeClr val="tx1"/>
-              </a:solidFill>
-              <a:effectLst/>
-              <a:latin typeface="Candara" panose="020E0502030303020204" pitchFamily="34" charset="0"/>
-            </a:endParaRPr>
-          </a:p>
           <a:p>
             <a:pPr marL="0" marR="0" lvl="0" indent="0" algn="l" defTabSz="914400" rtl="0" eaLnBrk="0" fontAlgn="base" latinLnBrk="0" hangingPunct="0">
               <a:lnSpc>
@@ -11566,9 +10750,9 @@
                                           </p:stCondLst>
                                         </p:cTn>
                                         <p:tgtEl>
-                                          <p:spTgt spid="3">
+                                          <p:spTgt spid="2">
                                             <p:txEl>
-                                              <p:pRg st="0" end="0"/>
+                                              <p:pRg st="1" end="1"/>
                                             </p:txEl>
                                           </p:spTgt>
                                         </p:tgtEl>
@@ -11584,9 +10768,9 @@
                                       <p:cBhvr>
                                         <p:cTn id="12" dur="500"/>
                                         <p:tgtEl>
-                                          <p:spTgt spid="3">
+                                          <p:spTgt spid="2">
                                             <p:txEl>
-                                              <p:pRg st="0" end="0"/>
+                                              <p:pRg st="1" end="1"/>
                                             </p:txEl>
                                           </p:spTgt>
                                         </p:tgtEl>
@@ -11627,9 +10811,9 @@
                                           </p:stCondLst>
                                         </p:cTn>
                                         <p:tgtEl>
-                                          <p:spTgt spid="3">
+                                          <p:spTgt spid="2">
                                             <p:txEl>
-                                              <p:pRg st="1" end="1"/>
+                                              <p:pRg st="2" end="2"/>
                                             </p:txEl>
                                           </p:spTgt>
                                         </p:tgtEl>
@@ -11645,9 +10829,9 @@
                                       <p:cBhvr>
                                         <p:cTn id="17" dur="500"/>
                                         <p:tgtEl>
-                                          <p:spTgt spid="3">
+                                          <p:spTgt spid="2">
                                             <p:txEl>
-                                              <p:pRg st="1" end="1"/>
+                                              <p:pRg st="2" end="2"/>
                                             </p:txEl>
                                           </p:spTgt>
                                         </p:tgtEl>
@@ -11690,7 +10874,7 @@
                                         <p:tgtEl>
                                           <p:spTgt spid="3">
                                             <p:txEl>
-                                              <p:pRg st="2" end="2"/>
+                                              <p:pRg st="0" end="0"/>
                                             </p:txEl>
                                           </p:spTgt>
                                         </p:tgtEl>
@@ -11708,7 +10892,7 @@
                                         <p:tgtEl>
                                           <p:spTgt spid="3">
                                             <p:txEl>
-                                              <p:pRg st="2" end="2"/>
+                                              <p:pRg st="0" end="0"/>
                                             </p:txEl>
                                           </p:spTgt>
                                         </p:tgtEl>
@@ -11751,7 +10935,7 @@
                                         <p:tgtEl>
                                           <p:spTgt spid="3">
                                             <p:txEl>
-                                              <p:pRg st="3" end="3"/>
+                                              <p:pRg st="1" end="1"/>
                                             </p:txEl>
                                           </p:spTgt>
                                         </p:tgtEl>
@@ -11769,7 +10953,7 @@
                                         <p:tgtEl>
                                           <p:spTgt spid="3">
                                             <p:txEl>
-                                              <p:pRg st="3" end="3"/>
+                                              <p:pRg st="1" end="1"/>
                                             </p:txEl>
                                           </p:spTgt>
                                         </p:tgtEl>
@@ -11873,7 +11057,7 @@
                                         <p:tgtEl>
                                           <p:spTgt spid="3">
                                             <p:txEl>
-                                              <p:pRg st="4" end="4"/>
+                                              <p:pRg st="2" end="2"/>
                                             </p:txEl>
                                           </p:spTgt>
                                         </p:tgtEl>
@@ -11891,7 +11075,7 @@
                                         <p:tgtEl>
                                           <p:spTgt spid="3">
                                             <p:txEl>
-                                              <p:pRg st="4" end="4"/>
+                                              <p:pRg st="2" end="2"/>
                                             </p:txEl>
                                           </p:spTgt>
                                         </p:tgtEl>
@@ -11934,7 +11118,7 @@
                                         <p:tgtEl>
                                           <p:spTgt spid="3">
                                             <p:txEl>
-                                              <p:pRg st="5" end="5"/>
+                                              <p:pRg st="3" end="3"/>
                                             </p:txEl>
                                           </p:spTgt>
                                         </p:tgtEl>
@@ -11952,7 +11136,7 @@
                                         <p:tgtEl>
                                           <p:spTgt spid="3">
                                             <p:txEl>
-                                              <p:pRg st="5" end="5"/>
+                                              <p:pRg st="3" end="3"/>
                                             </p:txEl>
                                           </p:spTgt>
                                         </p:tgtEl>
@@ -12056,7 +11240,7 @@
                                         <p:tgtEl>
                                           <p:spTgt spid="3">
                                             <p:txEl>
-                                              <p:pRg st="6" end="6"/>
+                                              <p:pRg st="4" end="4"/>
                                             </p:txEl>
                                           </p:spTgt>
                                         </p:tgtEl>
@@ -12074,7 +11258,7 @@
                                         <p:tgtEl>
                                           <p:spTgt spid="3">
                                             <p:txEl>
-                                              <p:pRg st="6" end="6"/>
+                                              <p:pRg st="4" end="4"/>
                                             </p:txEl>
                                           </p:spTgt>
                                         </p:tgtEl>
@@ -12117,7 +11301,7 @@
                                         <p:tgtEl>
                                           <p:spTgt spid="3">
                                             <p:txEl>
-                                              <p:pRg st="7" end="7"/>
+                                              <p:pRg st="5" end="5"/>
                                             </p:txEl>
                                           </p:spTgt>
                                         </p:tgtEl>
@@ -12135,7 +11319,7 @@
                                         <p:tgtEl>
                                           <p:spTgt spid="3">
                                             <p:txEl>
-                                              <p:pRg st="7" end="7"/>
+                                              <p:pRg st="5" end="5"/>
                                             </p:txEl>
                                           </p:spTgt>
                                         </p:tgtEl>
@@ -12239,7 +11423,7 @@
                                         <p:tgtEl>
                                           <p:spTgt spid="3">
                                             <p:txEl>
-                                              <p:pRg st="8" end="8"/>
+                                              <p:pRg st="6" end="6"/>
                                             </p:txEl>
                                           </p:spTgt>
                                         </p:tgtEl>
@@ -12257,7 +11441,7 @@
                                         <p:tgtEl>
                                           <p:spTgt spid="3">
                                             <p:txEl>
-                                              <p:pRg st="8" end="8"/>
+                                              <p:pRg st="6" end="6"/>
                                             </p:txEl>
                                           </p:spTgt>
                                         </p:tgtEl>
@@ -12300,7 +11484,7 @@
                                         <p:tgtEl>
                                           <p:spTgt spid="3">
                                             <p:txEl>
-                                              <p:pRg st="9" end="9"/>
+                                              <p:pRg st="7" end="7"/>
                                             </p:txEl>
                                           </p:spTgt>
                                         </p:tgtEl>
@@ -12318,7 +11502,7 @@
                                         <p:tgtEl>
                                           <p:spTgt spid="3">
                                             <p:txEl>
-                                              <p:pRg st="9" end="9"/>
+                                              <p:pRg st="7" end="7"/>
                                             </p:txEl>
                                           </p:spTgt>
                                         </p:tgtEl>
@@ -12422,7 +11606,7 @@
                                         <p:tgtEl>
                                           <p:spTgt spid="3">
                                             <p:txEl>
-                                              <p:pRg st="10" end="10"/>
+                                              <p:pRg st="8" end="8"/>
                                             </p:txEl>
                                           </p:spTgt>
                                         </p:tgtEl>
@@ -12440,7 +11624,7 @@
                                         <p:tgtEl>
                                           <p:spTgt spid="3">
                                             <p:txEl>
-                                              <p:pRg st="10" end="10"/>
+                                              <p:pRg st="8" end="8"/>
                                             </p:txEl>
                                           </p:spTgt>
                                         </p:tgtEl>
@@ -12483,7 +11667,7 @@
                                         <p:tgtEl>
                                           <p:spTgt spid="3">
                                             <p:txEl>
-                                              <p:pRg st="11" end="11"/>
+                                              <p:pRg st="9" end="9"/>
                                             </p:txEl>
                                           </p:spTgt>
                                         </p:tgtEl>
@@ -12501,7 +11685,7 @@
                                         <p:tgtEl>
                                           <p:spTgt spid="3">
                                             <p:txEl>
-                                              <p:pRg st="11" end="11"/>
+                                              <p:pRg st="9" end="9"/>
                                             </p:txEl>
                                           </p:spTgt>
                                         </p:tgtEl>
@@ -13353,7 +12537,7 @@
         </p:nvSpPr>
         <p:spPr>
           <a:xfrm>
-            <a:off x="314631" y="450277"/>
+            <a:off x="205301" y="221677"/>
             <a:ext cx="8642555" cy="646331"/>
           </a:xfrm>
           <a:prstGeom prst="rect">
@@ -13430,8 +12614,8 @@
         </p:nvSpPr>
         <p:spPr>
           <a:xfrm>
-            <a:off x="661736" y="1329781"/>
-            <a:ext cx="10890184" cy="5016758"/>
+            <a:off x="592162" y="1260207"/>
+            <a:ext cx="10890184" cy="5416868"/>
           </a:xfrm>
           <a:prstGeom prst="rect">
             <a:avLst/>
@@ -13615,7 +12799,7 @@
           </a:p>
           <a:p>
             <a:pPr fontAlgn="b"/>
-            <a:endParaRPr lang="en-IN" sz="1600" dirty="0" smtClean="0">
+            <a:endParaRPr lang="en-US" sz="1600" dirty="0" smtClean="0">
               <a:latin typeface="Courier New" panose="02070309020205020404" pitchFamily="49" charset="0"/>
               <a:cs typeface="Courier New" panose="02070309020205020404" pitchFamily="49" charset="0"/>
             </a:endParaRPr>
@@ -13623,11 +12807,32 @@
           <a:p>
             <a:pPr fontAlgn="b"/>
             <a:r>
+              <a:rPr lang="en-US" sz="1600" dirty="0" smtClean="0">
+                <a:latin typeface="Courier New" panose="02070309020205020404" pitchFamily="49" charset="0"/>
+                <a:cs typeface="Courier New" panose="02070309020205020404" pitchFamily="49" charset="0"/>
+              </a:rPr>
+              <a:t>Extract Values from date</a:t>
+            </a:r>
+            <a:endParaRPr lang="en-US" sz="1600" dirty="0">
+              <a:latin typeface="Courier New" panose="02070309020205020404" pitchFamily="49" charset="0"/>
+              <a:cs typeface="Courier New" panose="02070309020205020404" pitchFamily="49" charset="0"/>
+            </a:endParaRPr>
+          </a:p>
+          <a:p>
+            <a:pPr fontAlgn="b"/>
+            <a:r>
+              <a:rPr lang="en-IN" sz="1600" dirty="0">
+                <a:latin typeface="Courier New" panose="02070309020205020404" pitchFamily="49" charset="0"/>
+                <a:cs typeface="Courier New" panose="02070309020205020404" pitchFamily="49" charset="0"/>
+              </a:rPr>
+              <a:t> </a:t>
+            </a:r>
+            <a:r>
               <a:rPr lang="en-IN" sz="1600" dirty="0" smtClean="0">
                 <a:latin typeface="Courier New" panose="02070309020205020404" pitchFamily="49" charset="0"/>
                 <a:cs typeface="Courier New" panose="02070309020205020404" pitchFamily="49" charset="0"/>
               </a:rPr>
-              <a:t> DAY</a:t>
+              <a:t>    DAY</a:t>
             </a:r>
             <a:r>
               <a:rPr lang="en-IN" sz="1600" b="1" dirty="0" smtClean="0">
@@ -13676,7 +12881,7 @@
             </a:endParaRPr>
           </a:p>
           <a:p>
-            <a:pPr fontAlgn="b"/>
+            <a:pPr lvl="1" fontAlgn="b"/>
             <a:r>
               <a:rPr lang="en-IN" sz="1600" dirty="0" smtClean="0">
                 <a:latin typeface="Courier New" panose="02070309020205020404" pitchFamily="49" charset="0"/>
@@ -13731,13 +12936,147 @@
             </a:endParaRPr>
           </a:p>
           <a:p>
+            <a:pPr lvl="1" fontAlgn="b"/>
+            <a:r>
+              <a:rPr lang="en-IN" sz="1600" dirty="0" smtClean="0">
+                <a:latin typeface="Courier New" panose="02070309020205020404" pitchFamily="49" charset="0"/>
+                <a:cs typeface="Courier New" panose="02070309020205020404" pitchFamily="49" charset="0"/>
+              </a:rPr>
+              <a:t> QUARTER</a:t>
+            </a:r>
+            <a:r>
+              <a:rPr lang="en-IN" sz="1600" b="1" dirty="0" smtClean="0">
+                <a:solidFill>
+                  <a:srgbClr val="000000"/>
+                </a:solidFill>
+                <a:latin typeface="Courier New" panose="02070309020205020404" pitchFamily="49" charset="0"/>
+                <a:cs typeface="Courier New" panose="02070309020205020404" pitchFamily="49" charset="0"/>
+              </a:rPr>
+              <a:t>     </a:t>
+            </a:r>
+            <a:r>
+              <a:rPr lang="en-IN" sz="1600" dirty="0" err="1" smtClean="0">
+                <a:latin typeface="Courier New" panose="02070309020205020404" pitchFamily="49" charset="0"/>
+                <a:cs typeface="Courier New" panose="02070309020205020404" pitchFamily="49" charset="0"/>
+              </a:rPr>
+              <a:t>CurrentQuarter</a:t>
+            </a:r>
+            <a:r>
+              <a:rPr lang="en-IN" sz="1600" dirty="0" smtClean="0">
+                <a:latin typeface="Courier New" panose="02070309020205020404" pitchFamily="49" charset="0"/>
+                <a:cs typeface="Courier New" panose="02070309020205020404" pitchFamily="49" charset="0"/>
+              </a:rPr>
+              <a:t> = QUARTER(Sales[</a:t>
+            </a:r>
+            <a:r>
+              <a:rPr lang="en-IN" sz="1600" dirty="0" err="1" smtClean="0">
+                <a:latin typeface="Courier New" panose="02070309020205020404" pitchFamily="49" charset="0"/>
+                <a:cs typeface="Courier New" panose="02070309020205020404" pitchFamily="49" charset="0"/>
+              </a:rPr>
+              <a:t>OrderDate</a:t>
+            </a:r>
+            <a:r>
+              <a:rPr lang="en-IN" sz="1600" dirty="0" smtClean="0">
+                <a:latin typeface="Courier New" panose="02070309020205020404" pitchFamily="49" charset="0"/>
+                <a:cs typeface="Courier New" panose="02070309020205020404" pitchFamily="49" charset="0"/>
+              </a:rPr>
+              <a:t>]) </a:t>
+            </a:r>
+          </a:p>
+          <a:p>
+            <a:pPr lvl="1" fontAlgn="b"/>
+            <a:r>
+              <a:rPr lang="en-IN" sz="1600" dirty="0" smtClean="0">
+                <a:latin typeface="Courier New" panose="02070309020205020404" pitchFamily="49" charset="0"/>
+                <a:cs typeface="Courier New" panose="02070309020205020404" pitchFamily="49" charset="0"/>
+              </a:rPr>
+              <a:t> YEAR</a:t>
+            </a:r>
+            <a:r>
+              <a:rPr lang="en-IN" sz="1600" b="1" dirty="0" smtClean="0">
+                <a:solidFill>
+                  <a:srgbClr val="000000"/>
+                </a:solidFill>
+                <a:latin typeface="Courier New" panose="02070309020205020404" pitchFamily="49" charset="0"/>
+                <a:cs typeface="Courier New" panose="02070309020205020404" pitchFamily="49" charset="0"/>
+              </a:rPr>
+              <a:t>        </a:t>
+            </a:r>
+            <a:r>
+              <a:rPr lang="en-IN" sz="1600" dirty="0" err="1" smtClean="0">
+                <a:latin typeface="Courier New" panose="02070309020205020404" pitchFamily="49" charset="0"/>
+                <a:cs typeface="Courier New" panose="02070309020205020404" pitchFamily="49" charset="0"/>
+              </a:rPr>
+              <a:t>OrderYear</a:t>
+            </a:r>
+            <a:r>
+              <a:rPr lang="en-IN" sz="1600" dirty="0" smtClean="0">
+                <a:latin typeface="Courier New" panose="02070309020205020404" pitchFamily="49" charset="0"/>
+                <a:cs typeface="Courier New" panose="02070309020205020404" pitchFamily="49" charset="0"/>
+              </a:rPr>
+              <a:t> = YEAR(Sales[</a:t>
+            </a:r>
+            <a:r>
+              <a:rPr lang="en-IN" sz="1600" dirty="0" err="1" smtClean="0">
+                <a:latin typeface="Courier New" panose="02070309020205020404" pitchFamily="49" charset="0"/>
+                <a:cs typeface="Courier New" panose="02070309020205020404" pitchFamily="49" charset="0"/>
+              </a:rPr>
+              <a:t>OrderDate</a:t>
+            </a:r>
+            <a:r>
+              <a:rPr lang="en-IN" sz="1600" dirty="0" smtClean="0">
+                <a:latin typeface="Courier New" panose="02070309020205020404" pitchFamily="49" charset="0"/>
+                <a:cs typeface="Courier New" panose="02070309020205020404" pitchFamily="49" charset="0"/>
+              </a:rPr>
+              <a:t>])</a:t>
+            </a:r>
+            <a:endParaRPr lang="en-IN" sz="1600" dirty="0">
+              <a:solidFill>
+                <a:srgbClr val="000000"/>
+              </a:solidFill>
+              <a:latin typeface="Courier New" panose="02070309020205020404" pitchFamily="49" charset="0"/>
+              <a:cs typeface="Courier New" panose="02070309020205020404" pitchFamily="49" charset="0"/>
+            </a:endParaRPr>
+          </a:p>
+          <a:p>
+            <a:pPr lvl="1" fontAlgn="b"/>
+            <a:endParaRPr lang="en-US" sz="1600" dirty="0" smtClean="0">
+              <a:solidFill>
+                <a:srgbClr val="000000"/>
+              </a:solidFill>
+              <a:latin typeface="Courier New" panose="02070309020205020404" pitchFamily="49" charset="0"/>
+              <a:cs typeface="Courier New" panose="02070309020205020404" pitchFamily="49" charset="0"/>
+            </a:endParaRPr>
+          </a:p>
+          <a:p>
             <a:pPr fontAlgn="b"/>
             <a:r>
+              <a:rPr lang="en-US" sz="1600" dirty="0">
+                <a:latin typeface="Courier New" panose="02070309020205020404" pitchFamily="49" charset="0"/>
+                <a:cs typeface="Courier New" panose="02070309020205020404" pitchFamily="49" charset="0"/>
+              </a:rPr>
+              <a:t>Extract Values from </a:t>
+            </a:r>
+            <a:r>
+              <a:rPr lang="en-US" sz="1600" dirty="0" smtClean="0">
+                <a:latin typeface="Courier New" panose="02070309020205020404" pitchFamily="49" charset="0"/>
+                <a:cs typeface="Courier New" panose="02070309020205020404" pitchFamily="49" charset="0"/>
+              </a:rPr>
+              <a:t>Date Time</a:t>
+            </a:r>
+            <a:endParaRPr lang="en-US" sz="1600" dirty="0">
+              <a:latin typeface="Courier New" panose="02070309020205020404" pitchFamily="49" charset="0"/>
+              <a:cs typeface="Courier New" panose="02070309020205020404" pitchFamily="49" charset="0"/>
+            </a:endParaRPr>
+          </a:p>
+          <a:p>
+            <a:pPr lvl="1" fontAlgn="b"/>
+            <a:r>
               <a:rPr lang="en-IN" sz="1600" dirty="0" smtClean="0">
                 <a:latin typeface="Courier New" panose="02070309020205020404" pitchFamily="49" charset="0"/>
                 <a:cs typeface="Courier New" panose="02070309020205020404" pitchFamily="49" charset="0"/>
               </a:rPr>
-              <a:t> QUARTER</a:t>
+              <a:t> SECOND</a:t>
             </a:r>
             <a:r>
               <a:rPr lang="en-IN" sz="1600" b="1" dirty="0" smtClean="0">
@@ -13747,45 +13086,65 @@
                 <a:latin typeface="Courier New" panose="02070309020205020404" pitchFamily="49" charset="0"/>
                 <a:cs typeface="Courier New" panose="02070309020205020404" pitchFamily="49" charset="0"/>
               </a:rPr>
-              <a:t>     </a:t>
+              <a:t>      </a:t>
             </a:r>
             <a:r>
               <a:rPr lang="en-IN" sz="1600" dirty="0" err="1" smtClean="0">
                 <a:latin typeface="Courier New" panose="02070309020205020404" pitchFamily="49" charset="0"/>
                 <a:cs typeface="Courier New" panose="02070309020205020404" pitchFamily="49" charset="0"/>
               </a:rPr>
-              <a:t>CurrentQuarter</a:t>
+              <a:t>OrderSecond</a:t>
             </a:r>
             <a:r>
               <a:rPr lang="en-IN" sz="1600" dirty="0" smtClean="0">
                 <a:latin typeface="Courier New" panose="02070309020205020404" pitchFamily="49" charset="0"/>
                 <a:cs typeface="Courier New" panose="02070309020205020404" pitchFamily="49" charset="0"/>
               </a:rPr>
-              <a:t> = QUARTER(Sales[</a:t>
+              <a:t> = SECOND(Sales[Timestamp]) </a:t>
+            </a:r>
+          </a:p>
+          <a:p>
+            <a:pPr lvl="1" fontAlgn="b"/>
+            <a:r>
+              <a:rPr lang="en-IN" sz="1600" dirty="0" smtClean="0">
+                <a:latin typeface="Courier New" panose="02070309020205020404" pitchFamily="49" charset="0"/>
+                <a:cs typeface="Courier New" panose="02070309020205020404" pitchFamily="49" charset="0"/>
+              </a:rPr>
+              <a:t> MINUTE</a:t>
+            </a:r>
+            <a:r>
+              <a:rPr lang="en-IN" sz="1600" b="1" dirty="0" smtClean="0">
+                <a:solidFill>
+                  <a:srgbClr val="000000"/>
+                </a:solidFill>
+                <a:latin typeface="Courier New" panose="02070309020205020404" pitchFamily="49" charset="0"/>
+                <a:cs typeface="Courier New" panose="02070309020205020404" pitchFamily="49" charset="0"/>
+              </a:rPr>
+              <a:t>      </a:t>
             </a:r>
             <a:r>
               <a:rPr lang="en-IN" sz="1600" dirty="0" err="1" smtClean="0">
                 <a:latin typeface="Courier New" panose="02070309020205020404" pitchFamily="49" charset="0"/>
                 <a:cs typeface="Courier New" panose="02070309020205020404" pitchFamily="49" charset="0"/>
               </a:rPr>
-              <a:t>OrderDate</a:t>
+              <a:t>OrderMinute</a:t>
             </a:r>
             <a:r>
               <a:rPr lang="en-IN" sz="1600" dirty="0" smtClean="0">
                 <a:latin typeface="Courier New" panose="02070309020205020404" pitchFamily="49" charset="0"/>
                 <a:cs typeface="Courier New" panose="02070309020205020404" pitchFamily="49" charset="0"/>
               </a:rPr>
-              <a:t>]) </a:t>
-            </a:r>
-          </a:p>
-          <a:p>
-            <a:pPr fontAlgn="b"/>
+              <a:t> = MINUTE(Sales[Timestamp]) </a:t>
+            </a:r>
+          </a:p>
+          <a:p>
+            <a:pPr lvl="1" fontAlgn="b"/>
             <a:r>
               <a:rPr lang="en-IN" sz="1600" dirty="0" smtClean="0">
                 <a:latin typeface="Courier New" panose="02070309020205020404" pitchFamily="49" charset="0"/>
                 <a:cs typeface="Courier New" panose="02070309020205020404" pitchFamily="49" charset="0"/>
               </a:rPr>
-              <a:t> YEAR</a:t>
+              <a:t> HOUR</a:t>
             </a:r>
             <a:r>
               <a:rPr lang="en-IN" sz="1600" b="1" dirty="0" smtClean="0">
@@ -13802,28 +13161,14 @@
                 <a:latin typeface="Courier New" panose="02070309020205020404" pitchFamily="49" charset="0"/>
                 <a:cs typeface="Courier New" panose="02070309020205020404" pitchFamily="49" charset="0"/>
               </a:rPr>
-              <a:t>OrderYear</a:t>
+              <a:t>OrderHour</a:t>
             </a:r>
             <a:r>
               <a:rPr lang="en-IN" sz="1600" dirty="0" smtClean="0">
                 <a:latin typeface="Courier New" panose="02070309020205020404" pitchFamily="49" charset="0"/>
                 <a:cs typeface="Courier New" panose="02070309020205020404" pitchFamily="49" charset="0"/>
               </a:rPr>
-              <a:t> = YEAR(Sales[</a:t>
-            </a:r>
-            <a:r>
-              <a:rPr lang="en-IN" sz="1600" dirty="0" err="1" smtClean="0">
-                <a:latin typeface="Courier New" panose="02070309020205020404" pitchFamily="49" charset="0"/>
-                <a:cs typeface="Courier New" panose="02070309020205020404" pitchFamily="49" charset="0"/>
-              </a:rPr>
-              <a:t>OrderDate</a:t>
-            </a:r>
-            <a:r>
-              <a:rPr lang="en-IN" sz="1600" dirty="0" smtClean="0">
-                <a:latin typeface="Courier New" panose="02070309020205020404" pitchFamily="49" charset="0"/>
-                <a:cs typeface="Courier New" panose="02070309020205020404" pitchFamily="49" charset="0"/>
-              </a:rPr>
-              <a:t>])</a:t>
+              <a:t> = HOUR(Sales[Timestamp])</a:t>
             </a:r>
             <a:endParaRPr lang="en-IN" sz="1600" dirty="0" smtClean="0">
               <a:solidFill>
@@ -13835,125 +13180,6 @@
           </a:p>
           <a:p>
             <a:pPr fontAlgn="b"/>
-            <a:r>
-              <a:rPr lang="en-IN" sz="1600" dirty="0" smtClean="0">
-                <a:latin typeface="Courier New" panose="02070309020205020404" pitchFamily="49" charset="0"/>
-                <a:cs typeface="Courier New" panose="02070309020205020404" pitchFamily="49" charset="0"/>
-              </a:rPr>
-              <a:t> </a:t>
-            </a:r>
-          </a:p>
-          <a:p>
-            <a:pPr fontAlgn="b"/>
-            <a:r>
-              <a:rPr lang="en-IN" sz="1600" dirty="0" smtClean="0">
-                <a:latin typeface="Courier New" panose="02070309020205020404" pitchFamily="49" charset="0"/>
-                <a:cs typeface="Courier New" panose="02070309020205020404" pitchFamily="49" charset="0"/>
-              </a:rPr>
-              <a:t> SECOND</a:t>
-            </a:r>
-            <a:r>
-              <a:rPr lang="en-IN" sz="1600" b="1" dirty="0" smtClean="0">
-                <a:solidFill>
-                  <a:srgbClr val="000000"/>
-                </a:solidFill>
-                <a:latin typeface="Courier New" panose="02070309020205020404" pitchFamily="49" charset="0"/>
-                <a:cs typeface="Courier New" panose="02070309020205020404" pitchFamily="49" charset="0"/>
-              </a:rPr>
-              <a:t>      </a:t>
-            </a:r>
-            <a:r>
-              <a:rPr lang="en-IN" sz="1600" dirty="0" err="1" smtClean="0">
-                <a:latin typeface="Courier New" panose="02070309020205020404" pitchFamily="49" charset="0"/>
-                <a:cs typeface="Courier New" panose="02070309020205020404" pitchFamily="49" charset="0"/>
-              </a:rPr>
-              <a:t>OrderSecond</a:t>
-            </a:r>
-            <a:r>
-              <a:rPr lang="en-IN" sz="1600" dirty="0" smtClean="0">
-                <a:latin typeface="Courier New" panose="02070309020205020404" pitchFamily="49" charset="0"/>
-                <a:cs typeface="Courier New" panose="02070309020205020404" pitchFamily="49" charset="0"/>
-              </a:rPr>
-              <a:t> = SECOND(Sales[Timestamp]) </a:t>
-            </a:r>
-          </a:p>
-          <a:p>
-            <a:pPr fontAlgn="b"/>
-            <a:r>
-              <a:rPr lang="en-IN" sz="1600" dirty="0" smtClean="0">
-                <a:latin typeface="Courier New" panose="02070309020205020404" pitchFamily="49" charset="0"/>
-                <a:cs typeface="Courier New" panose="02070309020205020404" pitchFamily="49" charset="0"/>
-              </a:rPr>
-              <a:t> MINUTE</a:t>
-            </a:r>
-            <a:r>
-              <a:rPr lang="en-IN" sz="1600" b="1" dirty="0" smtClean="0">
-                <a:solidFill>
-                  <a:srgbClr val="000000"/>
-                </a:solidFill>
-                <a:latin typeface="Courier New" panose="02070309020205020404" pitchFamily="49" charset="0"/>
-                <a:cs typeface="Courier New" panose="02070309020205020404" pitchFamily="49" charset="0"/>
-              </a:rPr>
-              <a:t>      </a:t>
-            </a:r>
-            <a:r>
-              <a:rPr lang="en-IN" sz="1600" dirty="0" err="1" smtClean="0">
-                <a:latin typeface="Courier New" panose="02070309020205020404" pitchFamily="49" charset="0"/>
-                <a:cs typeface="Courier New" panose="02070309020205020404" pitchFamily="49" charset="0"/>
-              </a:rPr>
-              <a:t>OrderMinute</a:t>
-            </a:r>
-            <a:r>
-              <a:rPr lang="en-IN" sz="1600" dirty="0" smtClean="0">
-                <a:latin typeface="Courier New" panose="02070309020205020404" pitchFamily="49" charset="0"/>
-                <a:cs typeface="Courier New" panose="02070309020205020404" pitchFamily="49" charset="0"/>
-              </a:rPr>
-              <a:t> = MINUTE(Sales[Timestamp]) </a:t>
-            </a:r>
-          </a:p>
-          <a:p>
-            <a:pPr fontAlgn="b"/>
-            <a:r>
-              <a:rPr lang="en-IN" sz="1600" dirty="0" smtClean="0">
-                <a:latin typeface="Courier New" panose="02070309020205020404" pitchFamily="49" charset="0"/>
-                <a:cs typeface="Courier New" panose="02070309020205020404" pitchFamily="49" charset="0"/>
-              </a:rPr>
-              <a:t> HOUR</a:t>
-            </a:r>
-            <a:r>
-              <a:rPr lang="en-IN" sz="1600" b="1" dirty="0" smtClean="0">
-                <a:solidFill>
-                  <a:srgbClr val="000000"/>
-                </a:solidFill>
-                <a:latin typeface="Courier New" panose="02070309020205020404" pitchFamily="49" charset="0"/>
-                <a:cs typeface="Courier New" panose="02070309020205020404" pitchFamily="49" charset="0"/>
-              </a:rPr>
-              <a:t>        </a:t>
-            </a:r>
-            <a:r>
-              <a:rPr lang="en-IN" sz="1600" dirty="0" err="1" smtClean="0">
-                <a:latin typeface="Courier New" panose="02070309020205020404" pitchFamily="49" charset="0"/>
-                <a:cs typeface="Courier New" panose="02070309020205020404" pitchFamily="49" charset="0"/>
-              </a:rPr>
-              <a:t>OrderHour</a:t>
-            </a:r>
-            <a:r>
-              <a:rPr lang="en-IN" sz="1600" dirty="0" smtClean="0">
-                <a:latin typeface="Courier New" panose="02070309020205020404" pitchFamily="49" charset="0"/>
-                <a:cs typeface="Courier New" panose="02070309020205020404" pitchFamily="49" charset="0"/>
-              </a:rPr>
-              <a:t> = HOUR(Sales[Timestamp])</a:t>
-            </a:r>
-            <a:endParaRPr lang="en-IN" sz="1600" dirty="0" smtClean="0">
-              <a:solidFill>
-                <a:srgbClr val="000000"/>
-              </a:solidFill>
-              <a:latin typeface="Courier New" panose="02070309020205020404" pitchFamily="49" charset="0"/>
-              <a:cs typeface="Courier New" panose="02070309020205020404" pitchFamily="49" charset="0"/>
-            </a:endParaRPr>
-          </a:p>
-          <a:p>
-            <a:pPr fontAlgn="b"/>
             <a:endParaRPr lang="en-US" sz="1600" dirty="0" smtClean="0">
               <a:latin typeface="Courier New" panose="02070309020205020404" pitchFamily="49" charset="0"/>
               <a:cs typeface="Courier New" panose="02070309020205020404" pitchFamily="49" charset="0"/>
@@ -13962,35 +13188,45 @@
           <a:p>
             <a:pPr fontAlgn="b"/>
             <a:r>
-              <a:rPr lang="en-IN" sz="1600" dirty="0" smtClean="0">
+              <a:rPr lang="en-US" sz="1600" dirty="0" smtClean="0">
+                <a:latin typeface="Courier New" panose="02070309020205020404" pitchFamily="49" charset="0"/>
+                <a:cs typeface="Courier New" panose="02070309020205020404" pitchFamily="49" charset="0"/>
+              </a:rPr>
+              <a:t>Date Formatting</a:t>
+            </a:r>
+          </a:p>
+          <a:p>
+            <a:pPr lvl="1" fontAlgn="b"/>
+            <a:r>
+              <a:rPr lang="en-IN" sz="1400" dirty="0" smtClean="0">
                 <a:latin typeface="Courier New" panose="02070309020205020404" pitchFamily="49" charset="0"/>
                 <a:cs typeface="Courier New" panose="02070309020205020404" pitchFamily="49" charset="0"/>
               </a:rPr>
               <a:t>FORMAT(Data[</a:t>
             </a:r>
             <a:r>
-              <a:rPr lang="en-IN" sz="1600" dirty="0" err="1" smtClean="0">
+              <a:rPr lang="en-IN" sz="1400" dirty="0" err="1" smtClean="0">
                 <a:latin typeface="Courier New" panose="02070309020205020404" pitchFamily="49" charset="0"/>
                 <a:cs typeface="Courier New" panose="02070309020205020404" pitchFamily="49" charset="0"/>
               </a:rPr>
               <a:t>Ord_Date_T</a:t>
             </a:r>
             <a:r>
-              <a:rPr lang="en-IN" sz="1600" dirty="0" smtClean="0">
+              <a:rPr lang="en-IN" sz="1400" dirty="0" smtClean="0">
                 <a:latin typeface="Courier New" panose="02070309020205020404" pitchFamily="49" charset="0"/>
                 <a:cs typeface="Courier New" panose="02070309020205020404" pitchFamily="49" charset="0"/>
               </a:rPr>
               <a:t>],"</a:t>
             </a:r>
             <a:r>
-              <a:rPr lang="en-IN" sz="1600" dirty="0" err="1" smtClean="0">
+              <a:rPr lang="en-IN" sz="1400" dirty="0" err="1" smtClean="0">
                 <a:latin typeface="Courier New" panose="02070309020205020404" pitchFamily="49" charset="0"/>
                 <a:cs typeface="Courier New" panose="02070309020205020404" pitchFamily="49" charset="0"/>
               </a:rPr>
               <a:t>ddd</a:t>
             </a:r>
             <a:r>
-              <a:rPr lang="en-IN" sz="1600" dirty="0" smtClean="0">
+              <a:rPr lang="en-IN" sz="1400" dirty="0" smtClean="0">
                 <a:latin typeface="Courier New" panose="02070309020205020404" pitchFamily="49" charset="0"/>
                 <a:cs typeface="Courier New" panose="02070309020205020404" pitchFamily="49" charset="0"/>
               </a:rPr>
@@ -13998,73 +13234,77 @@
             </a:r>
           </a:p>
           <a:p>
-            <a:pPr fontAlgn="b"/>
-            <a:r>
-              <a:rPr lang="en-IN" sz="1600" dirty="0" smtClean="0">
+            <a:pPr lvl="1" fontAlgn="b"/>
+            <a:r>
+              <a:rPr lang="en-IN" sz="1400" dirty="0" smtClean="0">
                 <a:latin typeface="Courier New" panose="02070309020205020404" pitchFamily="49" charset="0"/>
                 <a:cs typeface="Courier New" panose="02070309020205020404" pitchFamily="49" charset="0"/>
               </a:rPr>
               <a:t>FORMAT(Data[</a:t>
             </a:r>
             <a:r>
-              <a:rPr lang="en-IN" sz="1600" dirty="0" err="1" smtClean="0">
+              <a:rPr lang="en-IN" sz="1400" dirty="0" err="1" smtClean="0">
                 <a:latin typeface="Courier New" panose="02070309020205020404" pitchFamily="49" charset="0"/>
                 <a:cs typeface="Courier New" panose="02070309020205020404" pitchFamily="49" charset="0"/>
               </a:rPr>
               <a:t>Ord_Date_T</a:t>
             </a:r>
             <a:r>
-              <a:rPr lang="en-IN" sz="1600" dirty="0" smtClean="0">
-                <a:latin typeface="Courier New" panose="02070309020205020404" pitchFamily="49" charset="0"/>
-                <a:cs typeface="Courier New" panose="02070309020205020404" pitchFamily="49" charset="0"/>
-              </a:rPr>
-              <a:t>],“</a:t>
-            </a:r>
-            <a:r>
-              <a:rPr lang="en-IN" sz="1600" dirty="0" err="1" smtClean="0">
+              <a:rPr lang="en-IN" sz="1400" dirty="0">
+                <a:latin typeface="Courier New" panose="02070309020205020404" pitchFamily="49" charset="0"/>
+                <a:cs typeface="Courier New" panose="02070309020205020404" pitchFamily="49" charset="0"/>
+              </a:rPr>
+              <a:t>], "</a:t>
+            </a:r>
+            <a:r>
+              <a:rPr lang="en-IN" sz="1400" dirty="0" err="1" smtClean="0">
                 <a:latin typeface="Courier New" panose="02070309020205020404" pitchFamily="49" charset="0"/>
                 <a:cs typeface="Courier New" panose="02070309020205020404" pitchFamily="49" charset="0"/>
               </a:rPr>
               <a:t>yyyy</a:t>
             </a:r>
             <a:r>
-              <a:rPr lang="en-IN" sz="1600" dirty="0" smtClean="0">
+              <a:rPr lang="en-IN" sz="1400" dirty="0">
                 <a:latin typeface="Courier New" panose="02070309020205020404" pitchFamily="49" charset="0"/>
                 <a:cs typeface="Courier New" panose="02070309020205020404" pitchFamily="49" charset="0"/>
               </a:rPr>
               <a:t>")</a:t>
             </a:r>
-          </a:p>
-          <a:p>
-            <a:pPr fontAlgn="b"/>
-            <a:r>
-              <a:rPr lang="en-IN" sz="1600" dirty="0" smtClean="0">
-                <a:latin typeface="Courier New" panose="02070309020205020404" pitchFamily="49" charset="0"/>
-                <a:cs typeface="Courier New" panose="02070309020205020404" pitchFamily="49" charset="0"/>
-              </a:rPr>
-              <a:t>FORMAT(Data[</a:t>
-            </a:r>
-            <a:r>
-              <a:rPr lang="en-IN" sz="1600" dirty="0" err="1" smtClean="0">
-                <a:latin typeface="Courier New" panose="02070309020205020404" pitchFamily="49" charset="0"/>
-                <a:cs typeface="Courier New" panose="02070309020205020404" pitchFamily="49" charset="0"/>
-              </a:rPr>
-              <a:t>Ord_Date_T</a:t>
-            </a:r>
-            <a:r>
-              <a:rPr lang="en-IN" sz="1600" dirty="0" smtClean="0">
-                <a:latin typeface="Courier New" panose="02070309020205020404" pitchFamily="49" charset="0"/>
-                <a:cs typeface="Courier New" panose="02070309020205020404" pitchFamily="49" charset="0"/>
-              </a:rPr>
-              <a:t>],“mmm")</a:t>
-            </a:r>
-          </a:p>
-          <a:p>
-            <a:pPr fontAlgn="b"/>
-            <a:endParaRPr lang="en-US" sz="1600" dirty="0" smtClean="0">
+            <a:endParaRPr lang="en-IN" sz="1400" dirty="0" smtClean="0">
               <a:latin typeface="Courier New" panose="02070309020205020404" pitchFamily="49" charset="0"/>
               <a:cs typeface="Courier New" panose="02070309020205020404" pitchFamily="49" charset="0"/>
             </a:endParaRPr>
+          </a:p>
+          <a:p>
+            <a:pPr lvl="1" fontAlgn="b"/>
+            <a:r>
+              <a:rPr lang="en-IN" sz="1400" dirty="0" smtClean="0">
+                <a:latin typeface="Courier New" panose="02070309020205020404" pitchFamily="49" charset="0"/>
+                <a:cs typeface="Courier New" panose="02070309020205020404" pitchFamily="49" charset="0"/>
+              </a:rPr>
+              <a:t>FORMAT(Data[</a:t>
+            </a:r>
+            <a:r>
+              <a:rPr lang="en-IN" sz="1400" dirty="0" err="1" smtClean="0">
+                <a:latin typeface="Courier New" panose="02070309020205020404" pitchFamily="49" charset="0"/>
+                <a:cs typeface="Courier New" panose="02070309020205020404" pitchFamily="49" charset="0"/>
+              </a:rPr>
+              <a:t>Ord_Date_T</a:t>
+            </a:r>
+            <a:r>
+              <a:rPr lang="en-IN" sz="1400" dirty="0">
+                <a:latin typeface="Courier New" panose="02070309020205020404" pitchFamily="49" charset="0"/>
+                <a:cs typeface="Courier New" panose="02070309020205020404" pitchFamily="49" charset="0"/>
+              </a:rPr>
+              <a:t>], "</a:t>
+            </a:r>
+            <a:r>
+              <a:rPr lang="en-IN" sz="1400" dirty="0" smtClean="0">
+                <a:latin typeface="Courier New" panose="02070309020205020404" pitchFamily="49" charset="0"/>
+                <a:cs typeface="Courier New" panose="02070309020205020404" pitchFamily="49" charset="0"/>
+              </a:rPr>
+              <a:t>mmm")</a:t>
+            </a:r>
           </a:p>
         </p:txBody>
       </p:sp>
@@ -14361,7 +13601,7 @@
                                         <p:tgtEl>
                                           <p:spTgt spid="2">
                                             <p:txEl>
-                                              <p:pRg st="9" end="9"/>
+                                              <p:pRg st="7" end="7"/>
                                             </p:txEl>
                                           </p:spTgt>
                                         </p:tgtEl>
@@ -14379,7 +13619,7 @@
                                         <p:tgtEl>
                                           <p:spTgt spid="2">
                                             <p:txEl>
-                                              <p:pRg st="9" end="9"/>
+                                              <p:pRg st="7" end="7"/>
                                             </p:txEl>
                                           </p:spTgt>
                                         </p:tgtEl>
@@ -14422,7 +13662,7 @@
                                         <p:tgtEl>
                                           <p:spTgt spid="2">
                                             <p:txEl>
-                                              <p:pRg st="7" end="7"/>
+                                              <p:pRg st="8" end="8"/>
                                             </p:txEl>
                                           </p:spTgt>
                                         </p:tgtEl>
@@ -14440,7 +13680,7 @@
                                         <p:tgtEl>
                                           <p:spTgt spid="2">
                                             <p:txEl>
-                                              <p:pRg st="7" end="7"/>
+                                              <p:pRg st="8" end="8"/>
                                             </p:txEl>
                                           </p:spTgt>
                                         </p:tgtEl>
@@ -14483,7 +13723,7 @@
                                         <p:tgtEl>
                                           <p:spTgt spid="2">
                                             <p:txEl>
-                                              <p:pRg st="8" end="8"/>
+                                              <p:pRg st="9" end="9"/>
                                             </p:txEl>
                                           </p:spTgt>
                                         </p:tgtEl>
@@ -14501,7 +13741,7 @@
                                         <p:tgtEl>
                                           <p:spTgt spid="2">
                                             <p:txEl>
-                                              <p:pRg st="8" end="8"/>
+                                              <p:pRg st="9" end="9"/>
                                             </p:txEl>
                                           </p:spTgt>
                                         </p:tgtEl>
@@ -14544,7 +13784,7 @@
                                         <p:tgtEl>
                                           <p:spTgt spid="2">
                                             <p:txEl>
-                                              <p:pRg st="11" end="11"/>
+                                              <p:pRg st="10" end="10"/>
                                             </p:txEl>
                                           </p:spTgt>
                                         </p:tgtEl>
@@ -14562,7 +13802,7 @@
                                         <p:tgtEl>
                                           <p:spTgt spid="2">
                                             <p:txEl>
-                                              <p:pRg st="11" end="11"/>
+                                              <p:pRg st="10" end="10"/>
                                             </p:txEl>
                                           </p:spTgt>
                                         </p:tgtEl>
@@ -14605,7 +13845,7 @@
                                         <p:tgtEl>
                                           <p:spTgt spid="2">
                                             <p:txEl>
-                                              <p:pRg st="10" end="10"/>
+                                              <p:pRg st="11" end="11"/>
                                             </p:txEl>
                                           </p:spTgt>
                                         </p:tgtEl>
@@ -14623,7 +13863,7 @@
                                         <p:tgtEl>
                                           <p:spTgt spid="2">
                                             <p:txEl>
-                                              <p:pRg st="10" end="10"/>
+                                              <p:pRg st="11" end="11"/>
                                             </p:txEl>
                                           </p:spTgt>
                                         </p:tgtEl>
@@ -14666,7 +13906,7 @@
                                         <p:tgtEl>
                                           <p:spTgt spid="2">
                                             <p:txEl>
-                                              <p:pRg st="12" end="12"/>
+                                              <p:pRg st="13" end="13"/>
                                             </p:txEl>
                                           </p:spTgt>
                                         </p:tgtEl>
@@ -14684,7 +13924,7 @@
                                         <p:tgtEl>
                                           <p:spTgt spid="2">
                                             <p:txEl>
-                                              <p:pRg st="12" end="12"/>
+                                              <p:pRg st="13" end="13"/>
                                             </p:txEl>
                                           </p:spTgt>
                                         </p:tgtEl>
@@ -14727,7 +13967,7 @@
                                         <p:tgtEl>
                                           <p:spTgt spid="2">
                                             <p:txEl>
-                                              <p:pRg st="13" end="13"/>
+                                              <p:pRg st="14" end="14"/>
                                             </p:txEl>
                                           </p:spTgt>
                                         </p:tgtEl>
@@ -14745,7 +13985,7 @@
                                         <p:tgtEl>
                                           <p:spTgt spid="2">
                                             <p:txEl>
-                                              <p:pRg st="13" end="13"/>
+                                              <p:pRg st="14" end="14"/>
                                             </p:txEl>
                                           </p:spTgt>
                                         </p:tgtEl>
@@ -14788,7 +14028,7 @@
                                         <p:tgtEl>
                                           <p:spTgt spid="2">
                                             <p:txEl>
-                                              <p:pRg st="14" end="14"/>
+                                              <p:pRg st="15" end="15"/>
                                             </p:txEl>
                                           </p:spTgt>
                                         </p:tgtEl>
@@ -14806,7 +14046,7 @@
                                         <p:tgtEl>
                                           <p:spTgt spid="2">
                                             <p:txEl>
-                                              <p:pRg st="14" end="14"/>
+                                              <p:pRg st="15" end="15"/>
                                             </p:txEl>
                                           </p:spTgt>
                                         </p:tgtEl>
@@ -14910,7 +14150,7 @@
                                         <p:tgtEl>
                                           <p:spTgt spid="2">
                                             <p:txEl>
-                                              <p:pRg st="17" end="17"/>
+                                              <p:pRg st="18" end="18"/>
                                             </p:txEl>
                                           </p:spTgt>
                                         </p:tgtEl>
@@ -14928,7 +14168,7 @@
                                         <p:tgtEl>
                                           <p:spTgt spid="2">
                                             <p:txEl>
-                                              <p:pRg st="17" end="17"/>
+                                              <p:pRg st="18" end="18"/>
                                             </p:txEl>
                                           </p:spTgt>
                                         </p:tgtEl>
@@ -14971,7 +14211,7 @@
                                         <p:tgtEl>
                                           <p:spTgt spid="2">
                                             <p:txEl>
-                                              <p:pRg st="18" end="18"/>
+                                              <p:pRg st="19" end="19"/>
                                             </p:txEl>
                                           </p:spTgt>
                                         </p:tgtEl>
@@ -14989,7 +14229,129 @@
                                         <p:tgtEl>
                                           <p:spTgt spid="2">
                                             <p:txEl>
-                                              <p:pRg st="18" end="18"/>
+                                              <p:pRg st="19" end="19"/>
+                                            </p:txEl>
+                                          </p:spTgt>
+                                        </p:tgtEl>
+                                      </p:cBhvr>
+                                    </p:animEffect>
+                                  </p:childTnLst>
+                                </p:cTn>
+                              </p:par>
+                            </p:childTnLst>
+                          </p:cTn>
+                        </p:par>
+                      </p:childTnLst>
+                    </p:cTn>
+                  </p:par>
+                  <p:par>
+                    <p:cTn id="78" fill="hold">
+                      <p:stCondLst>
+                        <p:cond delay="indefinite"/>
+                      </p:stCondLst>
+                      <p:childTnLst>
+                        <p:par>
+                          <p:cTn id="79" fill="hold">
+                            <p:stCondLst>
+                              <p:cond delay="0"/>
+                            </p:stCondLst>
+                            <p:childTnLst>
+                              <p:par>
+                                <p:cTn id="80" presetID="22" presetClass="entr" presetSubtype="8" fill="hold" nodeType="clickEffect">
+                                  <p:stCondLst>
+                                    <p:cond delay="0"/>
+                                  </p:stCondLst>
+                                  <p:childTnLst>
+                                    <p:set>
+                                      <p:cBhvr>
+                                        <p:cTn id="81" dur="1" fill="hold">
+                                          <p:stCondLst>
+                                            <p:cond delay="0"/>
+                                          </p:stCondLst>
+                                        </p:cTn>
+                                        <p:tgtEl>
+                                          <p:spTgt spid="2">
+                                            <p:txEl>
+                                              <p:pRg st="20" end="20"/>
+                                            </p:txEl>
+                                          </p:spTgt>
+                                        </p:tgtEl>
+                                        <p:attrNameLst>
+                                          <p:attrName>style.visibility</p:attrName>
+                                        </p:attrNameLst>
+                                      </p:cBhvr>
+                                      <p:to>
+                                        <p:strVal val="visible"/>
+                                      </p:to>
+                                    </p:set>
+                                    <p:animEffect transition="in" filter="wipe(left)">
+                                      <p:cBhvr>
+                                        <p:cTn id="82" dur="500"/>
+                                        <p:tgtEl>
+                                          <p:spTgt spid="2">
+                                            <p:txEl>
+                                              <p:pRg st="20" end="20"/>
+                                            </p:txEl>
+                                          </p:spTgt>
+                                        </p:tgtEl>
+                                      </p:cBhvr>
+                                    </p:animEffect>
+                                  </p:childTnLst>
+                                </p:cTn>
+                              </p:par>
+                            </p:childTnLst>
+                          </p:cTn>
+                        </p:par>
+                      </p:childTnLst>
+                    </p:cTn>
+                  </p:par>
+                  <p:par>
+                    <p:cTn id="83" fill="hold">
+                      <p:stCondLst>
+                        <p:cond delay="indefinite"/>
+                      </p:stCondLst>
+                      <p:childTnLst>
+                        <p:par>
+                          <p:cTn id="84" fill="hold">
+                            <p:stCondLst>
+                              <p:cond delay="0"/>
+                            </p:stCondLst>
+                            <p:childTnLst>
+                              <p:par>
+                                <p:cTn id="85" presetID="22" presetClass="entr" presetSubtype="8" fill="hold" nodeType="clickEffect">
+                                  <p:stCondLst>
+                                    <p:cond delay="0"/>
+                                  </p:stCondLst>
+                                  <p:childTnLst>
+                                    <p:set>
+                                      <p:cBhvr>
+                                        <p:cTn id="86" dur="1" fill="hold">
+                                          <p:stCondLst>
+                                            <p:cond delay="0"/>
+                                          </p:stCondLst>
+                                        </p:cTn>
+                                        <p:tgtEl>
+                                          <p:spTgt spid="2">
+                                            <p:txEl>
+                                              <p:pRg st="21" end="21"/>
+                                            </p:txEl>
+                                          </p:spTgt>
+                                        </p:tgtEl>
+                                        <p:attrNameLst>
+                                          <p:attrName>style.visibility</p:attrName>
+                                        </p:attrNameLst>
+                                      </p:cBhvr>
+                                      <p:to>
+                                        <p:strVal val="visible"/>
+                                      </p:to>
+                                    </p:set>
+                                    <p:animEffect transition="in" filter="wipe(left)">
+                                      <p:cBhvr>
+                                        <p:cTn id="87" dur="500"/>
+                                        <p:tgtEl>
+                                          <p:spTgt spid="2">
+                                            <p:txEl>
+                                              <p:pRg st="21" end="21"/>
                                             </p:txEl>
                                           </p:spTgt>
                                         </p:tgtEl>
@@ -15055,7 +14417,7 @@
         <p:spPr>
           <a:xfrm>
             <a:off x="132080" y="473516"/>
-            <a:ext cx="11503152" cy="1323439"/>
+            <a:ext cx="11503152" cy="1231106"/>
           </a:xfrm>
           <a:prstGeom prst="rect">
             <a:avLst/>
@@ -15081,16 +14443,16 @@
             </a:endParaRPr>
           </a:p>
           <a:p>
-            <a:pPr fontAlgn="b"/>
-            <a:r>
-              <a:rPr lang="en-IN" sz="1600" dirty="0">
+            <a:pPr lvl="1" fontAlgn="b"/>
+            <a:r>
+              <a:rPr lang="en-IN" sz="1400" dirty="0">
                 <a:latin typeface="Courier New" panose="02070309020205020404" pitchFamily="49" charset="0"/>
                 <a:cs typeface="Courier New" panose="02070309020205020404" pitchFamily="49" charset="0"/>
               </a:rPr>
               <a:t> WEEKDAY</a:t>
             </a:r>
             <a:r>
-              <a:rPr lang="en-IN" sz="1600" b="1" dirty="0">
+              <a:rPr lang="en-IN" sz="1400" b="1" dirty="0">
                 <a:solidFill>
                   <a:srgbClr val="000000"/>
                 </a:solidFill>
@@ -15100,34 +14462,34 @@
               <a:t>     </a:t>
             </a:r>
             <a:r>
-              <a:rPr lang="en-IN" sz="1600" dirty="0" err="1">
+              <a:rPr lang="en-IN" sz="1400" dirty="0" err="1">
                 <a:latin typeface="Courier New" panose="02070309020205020404" pitchFamily="49" charset="0"/>
                 <a:cs typeface="Courier New" panose="02070309020205020404" pitchFamily="49" charset="0"/>
               </a:rPr>
               <a:t>DayOfWeek</a:t>
             </a:r>
             <a:r>
-              <a:rPr lang="en-IN" sz="1600" dirty="0">
+              <a:rPr lang="en-IN" sz="1400" dirty="0">
                 <a:latin typeface="Courier New" panose="02070309020205020404" pitchFamily="49" charset="0"/>
                 <a:cs typeface="Courier New" panose="02070309020205020404" pitchFamily="49" charset="0"/>
               </a:rPr>
               <a:t> = WEEKDAY(Sales[</a:t>
             </a:r>
             <a:r>
-              <a:rPr lang="en-IN" sz="1600" dirty="0" err="1">
+              <a:rPr lang="en-IN" sz="1400" dirty="0" err="1">
                 <a:latin typeface="Courier New" panose="02070309020205020404" pitchFamily="49" charset="0"/>
                 <a:cs typeface="Courier New" panose="02070309020205020404" pitchFamily="49" charset="0"/>
               </a:rPr>
               <a:t>OrderDate</a:t>
             </a:r>
             <a:r>
-              <a:rPr lang="en-IN" sz="1600" dirty="0">
+              <a:rPr lang="en-IN" sz="1400" dirty="0">
                 <a:latin typeface="Courier New" panose="02070309020205020404" pitchFamily="49" charset="0"/>
                 <a:cs typeface="Courier New" panose="02070309020205020404" pitchFamily="49" charset="0"/>
               </a:rPr>
               <a:t>], 1) Starting with Sunday</a:t>
             </a:r>
-            <a:endParaRPr lang="en-IN" sz="1600" dirty="0">
+            <a:endParaRPr lang="en-IN" sz="1400" dirty="0">
               <a:solidFill>
                 <a:srgbClr val="000000"/>
               </a:solidFill>
@@ -15136,16 +14498,16 @@
             </a:endParaRPr>
           </a:p>
           <a:p>
-            <a:pPr fontAlgn="b"/>
-            <a:r>
-              <a:rPr lang="en-IN" sz="1600" dirty="0">
+            <a:pPr lvl="1" fontAlgn="b"/>
+            <a:r>
+              <a:rPr lang="en-IN" sz="1400" dirty="0">
                 <a:latin typeface="Courier New" panose="02070309020205020404" pitchFamily="49" charset="0"/>
                 <a:cs typeface="Courier New" panose="02070309020205020404" pitchFamily="49" charset="0"/>
               </a:rPr>
               <a:t> WEEKDAY</a:t>
             </a:r>
             <a:r>
-              <a:rPr lang="en-IN" sz="1600" b="1" dirty="0">
+              <a:rPr lang="en-IN" sz="1400" b="1" dirty="0">
                 <a:solidFill>
                   <a:srgbClr val="000000"/>
                 </a:solidFill>
@@ -15155,34 +14517,34 @@
               <a:t>     </a:t>
             </a:r>
             <a:r>
-              <a:rPr lang="en-IN" sz="1600" dirty="0" err="1">
+              <a:rPr lang="en-IN" sz="1400" dirty="0" err="1">
                 <a:latin typeface="Courier New" panose="02070309020205020404" pitchFamily="49" charset="0"/>
                 <a:cs typeface="Courier New" panose="02070309020205020404" pitchFamily="49" charset="0"/>
               </a:rPr>
               <a:t>DayOfWeek</a:t>
             </a:r>
             <a:r>
-              <a:rPr lang="en-IN" sz="1600" dirty="0">
+              <a:rPr lang="en-IN" sz="1400" dirty="0">
                 <a:latin typeface="Courier New" panose="02070309020205020404" pitchFamily="49" charset="0"/>
                 <a:cs typeface="Courier New" panose="02070309020205020404" pitchFamily="49" charset="0"/>
               </a:rPr>
               <a:t> = WEEKDAY(Sales[</a:t>
             </a:r>
             <a:r>
-              <a:rPr lang="en-IN" sz="1600" dirty="0" err="1">
+              <a:rPr lang="en-IN" sz="1400" dirty="0" err="1">
                 <a:latin typeface="Courier New" panose="02070309020205020404" pitchFamily="49" charset="0"/>
                 <a:cs typeface="Courier New" panose="02070309020205020404" pitchFamily="49" charset="0"/>
               </a:rPr>
               <a:t>OrderDate</a:t>
             </a:r>
             <a:r>
-              <a:rPr lang="en-IN" sz="1600" dirty="0">
+              <a:rPr lang="en-IN" sz="1400" dirty="0">
                 <a:latin typeface="Courier New" panose="02070309020205020404" pitchFamily="49" charset="0"/>
                 <a:cs typeface="Courier New" panose="02070309020205020404" pitchFamily="49" charset="0"/>
               </a:rPr>
               <a:t>], 2) Starting with Monday</a:t>
             </a:r>
-            <a:endParaRPr lang="en-IN" sz="1600" dirty="0">
+            <a:endParaRPr lang="en-IN" sz="1400" dirty="0">
               <a:solidFill>
                 <a:srgbClr val="000000"/>
               </a:solidFill>
@@ -15191,23 +14553,23 @@
             </a:endParaRPr>
           </a:p>
           <a:p>
-            <a:pPr fontAlgn="b"/>
-            <a:r>
-              <a:rPr lang="en-IN" sz="1600" dirty="0" smtClean="0">
+            <a:pPr lvl="1" fontAlgn="b"/>
+            <a:r>
+              <a:rPr lang="en-IN" sz="1400" dirty="0" smtClean="0">
                 <a:latin typeface="Courier New" panose="02070309020205020404" pitchFamily="49" charset="0"/>
                 <a:cs typeface="Courier New" panose="02070309020205020404" pitchFamily="49" charset="0"/>
               </a:rPr>
               <a:t> </a:t>
             </a:r>
             <a:r>
-              <a:rPr lang="en-IN" sz="1600" dirty="0">
+              <a:rPr lang="en-IN" sz="1400" dirty="0">
                 <a:latin typeface="Courier New" panose="02070309020205020404" pitchFamily="49" charset="0"/>
                 <a:cs typeface="Courier New" panose="02070309020205020404" pitchFamily="49" charset="0"/>
               </a:rPr>
               <a:t>WEEKNUM</a:t>
             </a:r>
             <a:r>
-              <a:rPr lang="en-IN" sz="1600" b="1" dirty="0">
+              <a:rPr lang="en-IN" sz="1400" b="1" dirty="0">
                 <a:solidFill>
                   <a:srgbClr val="000000"/>
                 </a:solidFill>
@@ -15217,34 +14579,34 @@
               <a:t>     </a:t>
             </a:r>
             <a:r>
-              <a:rPr lang="en-IN" sz="1600" dirty="0" err="1">
+              <a:rPr lang="en-IN" sz="1400" dirty="0" err="1">
                 <a:latin typeface="Courier New" panose="02070309020205020404" pitchFamily="49" charset="0"/>
                 <a:cs typeface="Courier New" panose="02070309020205020404" pitchFamily="49" charset="0"/>
               </a:rPr>
               <a:t>WeekOfYear</a:t>
             </a:r>
             <a:r>
-              <a:rPr lang="en-IN" sz="1600" dirty="0">
+              <a:rPr lang="en-IN" sz="1400" dirty="0">
                 <a:latin typeface="Courier New" panose="02070309020205020404" pitchFamily="49" charset="0"/>
                 <a:cs typeface="Courier New" panose="02070309020205020404" pitchFamily="49" charset="0"/>
               </a:rPr>
               <a:t> = WEEKNUM(Sales[</a:t>
             </a:r>
             <a:r>
-              <a:rPr lang="en-IN" sz="1600" dirty="0" err="1">
+              <a:rPr lang="en-IN" sz="1400" dirty="0" err="1">
                 <a:latin typeface="Courier New" panose="02070309020205020404" pitchFamily="49" charset="0"/>
                 <a:cs typeface="Courier New" panose="02070309020205020404" pitchFamily="49" charset="0"/>
               </a:rPr>
               <a:t>OrderDate</a:t>
             </a:r>
             <a:r>
-              <a:rPr lang="en-IN" sz="1600" dirty="0" smtClean="0">
+              <a:rPr lang="en-IN" sz="1400" dirty="0" smtClean="0">
                 <a:latin typeface="Courier New" panose="02070309020205020404" pitchFamily="49" charset="0"/>
                 <a:cs typeface="Courier New" panose="02070309020205020404" pitchFamily="49" charset="0"/>
               </a:rPr>
               <a:t>])   week number as per year</a:t>
             </a:r>
-            <a:endParaRPr lang="en-IN" sz="1600" dirty="0">
+            <a:endParaRPr lang="en-IN" sz="1400" dirty="0">
               <a:solidFill>
                 <a:srgbClr val="000000"/>
               </a:solidFill>
@@ -15270,7 +14632,7 @@
         <p:spPr>
           <a:xfrm>
             <a:off x="132080" y="1986062"/>
-            <a:ext cx="11360912" cy="1569660"/>
+            <a:ext cx="11360912" cy="2123658"/>
           </a:xfrm>
           <a:prstGeom prst="rect">
             <a:avLst/>
@@ -15296,16 +14658,23 @@
             </a:endParaRPr>
           </a:p>
           <a:p>
-            <a:pPr fontAlgn="b"/>
-            <a:r>
-              <a:rPr lang="en-IN" sz="1600" dirty="0">
-                <a:latin typeface="Courier New" panose="02070309020205020404" pitchFamily="49" charset="0"/>
-                <a:cs typeface="Courier New" panose="02070309020205020404" pitchFamily="49" charset="0"/>
-              </a:rPr>
-              <a:t>  DATEDIFF</a:t>
-            </a:r>
-            <a:r>
-              <a:rPr lang="en-IN" sz="1600" b="1" dirty="0">
+            <a:pPr lvl="1" fontAlgn="b"/>
+            <a:r>
+              <a:rPr lang="en-IN" sz="1400" dirty="0">
+                <a:latin typeface="Courier New" panose="02070309020205020404" pitchFamily="49" charset="0"/>
+                <a:cs typeface="Courier New" panose="02070309020205020404" pitchFamily="49" charset="0"/>
+              </a:rPr>
+              <a:t> </a:t>
+            </a:r>
+            <a:r>
+              <a:rPr lang="en-IN" sz="1400" dirty="0" smtClean="0">
+                <a:latin typeface="Courier New" panose="02070309020205020404" pitchFamily="49" charset="0"/>
+                <a:cs typeface="Courier New" panose="02070309020205020404" pitchFamily="49" charset="0"/>
+              </a:rPr>
+              <a:t> DATEDIFF</a:t>
+            </a:r>
+            <a:r>
+              <a:rPr lang="en-IN" sz="1400" b="1" dirty="0" smtClean="0">
                 <a:solidFill>
                   <a:srgbClr val="000000"/>
                 </a:solidFill>
@@ -15315,48 +14684,131 @@
               <a:t>    </a:t>
             </a:r>
             <a:r>
-              <a:rPr lang="en-IN" sz="1600" dirty="0" err="1">
+              <a:rPr lang="en-IN" sz="1400" dirty="0" err="1">
                 <a:latin typeface="Courier New" panose="02070309020205020404" pitchFamily="49" charset="0"/>
                 <a:cs typeface="Courier New" panose="02070309020205020404" pitchFamily="49" charset="0"/>
               </a:rPr>
               <a:t>DaysPassed</a:t>
             </a:r>
             <a:r>
-              <a:rPr lang="en-IN" sz="1600" dirty="0">
+              <a:rPr lang="en-IN" sz="1400" dirty="0">
+                <a:latin typeface="Courier New" panose="02070309020205020404" pitchFamily="49" charset="0"/>
+                <a:cs typeface="Courier New" panose="02070309020205020404" pitchFamily="49" charset="0"/>
+              </a:rPr>
+              <a:t> = </a:t>
+            </a:r>
+            <a:r>
+              <a:rPr lang="en-IN" sz="1400" dirty="0" smtClean="0">
+                <a:latin typeface="Courier New" panose="02070309020205020404" pitchFamily="49" charset="0"/>
+                <a:cs typeface="Courier New" panose="02070309020205020404" pitchFamily="49" charset="0"/>
+              </a:rPr>
+              <a:t>DATEDIFF(</a:t>
+            </a:r>
+            <a:r>
+              <a:rPr lang="en-IN" sz="1400" dirty="0" err="1" smtClean="0">
+                <a:latin typeface="Courier New" panose="02070309020205020404" pitchFamily="49" charset="0"/>
+                <a:cs typeface="Courier New" panose="02070309020205020404" pitchFamily="49" charset="0"/>
+              </a:rPr>
+              <a:t>Start_Date</a:t>
+            </a:r>
+            <a:r>
+              <a:rPr lang="en-IN" sz="1400" dirty="0" smtClean="0">
+                <a:latin typeface="Courier New" panose="02070309020205020404" pitchFamily="49" charset="0"/>
+                <a:cs typeface="Courier New" panose="02070309020205020404" pitchFamily="49" charset="0"/>
+              </a:rPr>
+              <a:t>, </a:t>
+            </a:r>
+            <a:r>
+              <a:rPr lang="en-IN" sz="1400" dirty="0" err="1" smtClean="0">
+                <a:latin typeface="Courier New" panose="02070309020205020404" pitchFamily="49" charset="0"/>
+                <a:cs typeface="Courier New" panose="02070309020205020404" pitchFamily="49" charset="0"/>
+              </a:rPr>
+              <a:t>End_Date</a:t>
+            </a:r>
+            <a:r>
+              <a:rPr lang="en-IN" sz="1400" dirty="0" smtClean="0">
+                <a:latin typeface="Courier New" panose="02070309020205020404" pitchFamily="49" charset="0"/>
+                <a:cs typeface="Courier New" panose="02070309020205020404" pitchFamily="49" charset="0"/>
+              </a:rPr>
+              <a:t>, </a:t>
+            </a:r>
+            <a:r>
+              <a:rPr lang="en-IN" sz="1400" dirty="0">
+                <a:latin typeface="Courier New" panose="02070309020205020404" pitchFamily="49" charset="0"/>
+                <a:cs typeface="Courier New" panose="02070309020205020404" pitchFamily="49" charset="0"/>
+              </a:rPr>
+              <a:t>DAY)</a:t>
+            </a:r>
+          </a:p>
+          <a:p>
+            <a:pPr lvl="1" fontAlgn="b"/>
+            <a:r>
+              <a:rPr lang="en-IN" sz="1400" dirty="0" smtClean="0">
+                <a:latin typeface="Courier New" panose="02070309020205020404" pitchFamily="49" charset="0"/>
+                <a:cs typeface="Courier New" panose="02070309020205020404" pitchFamily="49" charset="0"/>
+              </a:rPr>
+              <a:t>  </a:t>
+            </a:r>
+            <a:r>
+              <a:rPr lang="en-IN" sz="1400" dirty="0">
+                <a:latin typeface="Courier New" panose="02070309020205020404" pitchFamily="49" charset="0"/>
+                <a:cs typeface="Courier New" panose="02070309020205020404" pitchFamily="49" charset="0"/>
+              </a:rPr>
+              <a:t>DATEDIFF</a:t>
+            </a:r>
+            <a:r>
+              <a:rPr lang="en-IN" sz="1400" b="1" dirty="0">
+                <a:solidFill>
+                  <a:srgbClr val="000000"/>
+                </a:solidFill>
+                <a:latin typeface="Courier New" panose="02070309020205020404" pitchFamily="49" charset="0"/>
+                <a:cs typeface="Courier New" panose="02070309020205020404" pitchFamily="49" charset="0"/>
+              </a:rPr>
+              <a:t>    </a:t>
+            </a:r>
+            <a:r>
+              <a:rPr lang="en-IN" sz="1400" dirty="0" err="1">
+                <a:latin typeface="Courier New" panose="02070309020205020404" pitchFamily="49" charset="0"/>
+                <a:cs typeface="Courier New" panose="02070309020205020404" pitchFamily="49" charset="0"/>
+              </a:rPr>
+              <a:t>DaysPassed</a:t>
+            </a:r>
+            <a:r>
+              <a:rPr lang="en-IN" sz="1400" dirty="0">
                 <a:latin typeface="Courier New" panose="02070309020205020404" pitchFamily="49" charset="0"/>
                 <a:cs typeface="Courier New" panose="02070309020205020404" pitchFamily="49" charset="0"/>
               </a:rPr>
               <a:t> = DATEDIFF(</a:t>
             </a:r>
             <a:r>
-              <a:rPr lang="en-IN" sz="1600" dirty="0" err="1">
+              <a:rPr lang="en-IN" sz="1400" dirty="0" err="1">
                 <a:latin typeface="Courier New" panose="02070309020205020404" pitchFamily="49" charset="0"/>
                 <a:cs typeface="Courier New" panose="02070309020205020404" pitchFamily="49" charset="0"/>
               </a:rPr>
               <a:t>OrderDate</a:t>
             </a:r>
             <a:r>
-              <a:rPr lang="en-IN" sz="1600" dirty="0">
+              <a:rPr lang="en-IN" sz="1400" dirty="0">
                 <a:latin typeface="Courier New" panose="02070309020205020404" pitchFamily="49" charset="0"/>
                 <a:cs typeface="Courier New" panose="02070309020205020404" pitchFamily="49" charset="0"/>
               </a:rPr>
               <a:t>, </a:t>
             </a:r>
             <a:r>
-              <a:rPr lang="en-IN" sz="1600" dirty="0" err="1">
+              <a:rPr lang="en-IN" sz="1400" dirty="0" err="1">
                 <a:latin typeface="Courier New" panose="02070309020205020404" pitchFamily="49" charset="0"/>
                 <a:cs typeface="Courier New" panose="02070309020205020404" pitchFamily="49" charset="0"/>
               </a:rPr>
               <a:t>ShipDate</a:t>
             </a:r>
             <a:r>
-              <a:rPr lang="en-IN" sz="1600" dirty="0">
+              <a:rPr lang="en-IN" sz="1400" dirty="0">
                 <a:latin typeface="Courier New" panose="02070309020205020404" pitchFamily="49" charset="0"/>
                 <a:cs typeface="Courier New" panose="02070309020205020404" pitchFamily="49" charset="0"/>
               </a:rPr>
               <a:t>, DAY)</a:t>
             </a:r>
-            <a:endParaRPr lang="en-IN" sz="1600" dirty="0">
+            <a:endParaRPr lang="en-IN" sz="1400" dirty="0">
               <a:solidFill>
                 <a:srgbClr val="000000"/>
               </a:solidFill>
@@ -15365,16 +14817,30 @@
             </a:endParaRPr>
           </a:p>
           <a:p>
-            <a:pPr fontAlgn="b"/>
-            <a:r>
-              <a:rPr lang="en-IN" sz="1600" dirty="0">
+            <a:pPr lvl="1" fontAlgn="b"/>
+            <a:r>
+              <a:rPr lang="en-IN" sz="1400" dirty="0">
+                <a:latin typeface="Courier New" panose="02070309020205020404" pitchFamily="49" charset="0"/>
+                <a:cs typeface="Courier New" panose="02070309020205020404" pitchFamily="49" charset="0"/>
+              </a:rPr>
+              <a:t>  </a:t>
+            </a:r>
+            <a:endParaRPr lang="en-IN" sz="1400" dirty="0" smtClean="0">
+              <a:latin typeface="Courier New" panose="02070309020205020404" pitchFamily="49" charset="0"/>
+              <a:cs typeface="Courier New" panose="02070309020205020404" pitchFamily="49" charset="0"/>
+            </a:endParaRPr>
+          </a:p>
+          <a:p>
+            <a:pPr lvl="1" fontAlgn="b"/>
+            <a:r>
+              <a:rPr lang="en-IN" sz="1400" dirty="0" smtClean="0">
                 <a:latin typeface="Courier New" panose="02070309020205020404" pitchFamily="49" charset="0"/>
                 <a:cs typeface="Courier New" panose="02070309020205020404" pitchFamily="49" charset="0"/>
               </a:rPr>
               <a:t>  EDATE</a:t>
             </a:r>
             <a:r>
-              <a:rPr lang="en-IN" sz="1600" b="1" dirty="0">
+              <a:rPr lang="en-IN" sz="1400" b="1" dirty="0" smtClean="0">
                 <a:solidFill>
                   <a:srgbClr val="000000"/>
                 </a:solidFill>
@@ -15384,34 +14850,34 @@
               <a:t>       </a:t>
             </a:r>
             <a:r>
-              <a:rPr lang="en-IN" sz="1600" dirty="0" err="1">
+              <a:rPr lang="en-IN" sz="1400" dirty="0" err="1">
                 <a:latin typeface="Courier New" panose="02070309020205020404" pitchFamily="49" charset="0"/>
                 <a:cs typeface="Courier New" panose="02070309020205020404" pitchFamily="49" charset="0"/>
               </a:rPr>
               <a:t>TwoMonthsLater</a:t>
             </a:r>
             <a:r>
-              <a:rPr lang="en-IN" sz="1600" dirty="0">
+              <a:rPr lang="en-IN" sz="1400" dirty="0">
                 <a:latin typeface="Courier New" panose="02070309020205020404" pitchFamily="49" charset="0"/>
                 <a:cs typeface="Courier New" panose="02070309020205020404" pitchFamily="49" charset="0"/>
               </a:rPr>
               <a:t> = EDATE(Sales[</a:t>
             </a:r>
             <a:r>
-              <a:rPr lang="en-IN" sz="1600" dirty="0" err="1">
+              <a:rPr lang="en-IN" sz="1400" dirty="0" err="1">
                 <a:latin typeface="Courier New" panose="02070309020205020404" pitchFamily="49" charset="0"/>
                 <a:cs typeface="Courier New" panose="02070309020205020404" pitchFamily="49" charset="0"/>
               </a:rPr>
               <a:t>OrderDate</a:t>
             </a:r>
             <a:r>
-              <a:rPr lang="en-IN" sz="1600" dirty="0">
+              <a:rPr lang="en-IN" sz="1400" dirty="0">
                 <a:latin typeface="Courier New" panose="02070309020205020404" pitchFamily="49" charset="0"/>
                 <a:cs typeface="Courier New" panose="02070309020205020404" pitchFamily="49" charset="0"/>
               </a:rPr>
               <a:t>], 2)     Add Month</a:t>
             </a:r>
-            <a:endParaRPr lang="en-IN" sz="1600" dirty="0">
+            <a:endParaRPr lang="en-IN" sz="1400" dirty="0">
               <a:solidFill>
                 <a:srgbClr val="000000"/>
               </a:solidFill>
@@ -15420,16 +14886,30 @@
             </a:endParaRPr>
           </a:p>
           <a:p>
-            <a:pPr fontAlgn="b"/>
-            <a:r>
-              <a:rPr lang="en-IN" sz="1600" dirty="0">
-                <a:latin typeface="Courier New" panose="02070309020205020404" pitchFamily="49" charset="0"/>
-                <a:cs typeface="Courier New" panose="02070309020205020404" pitchFamily="49" charset="0"/>
-              </a:rPr>
-              <a:t>  EOMONTH</a:t>
-            </a:r>
-            <a:r>
-              <a:rPr lang="en-IN" sz="1600" b="1" dirty="0">
+            <a:pPr lvl="1" fontAlgn="b"/>
+            <a:endParaRPr lang="en-IN" sz="1400" dirty="0" smtClean="0">
+              <a:latin typeface="Courier New" panose="02070309020205020404" pitchFamily="49" charset="0"/>
+              <a:cs typeface="Courier New" panose="02070309020205020404" pitchFamily="49" charset="0"/>
+            </a:endParaRPr>
+          </a:p>
+          <a:p>
+            <a:pPr lvl="1" fontAlgn="b"/>
+            <a:r>
+              <a:rPr lang="en-IN" sz="1400" dirty="0" smtClean="0">
+                <a:latin typeface="Courier New" panose="02070309020205020404" pitchFamily="49" charset="0"/>
+                <a:cs typeface="Courier New" panose="02070309020205020404" pitchFamily="49" charset="0"/>
+              </a:rPr>
+              <a:t>  </a:t>
+            </a:r>
+            <a:r>
+              <a:rPr lang="en-IN" sz="1400" dirty="0">
+                <a:latin typeface="Courier New" panose="02070309020205020404" pitchFamily="49" charset="0"/>
+                <a:cs typeface="Courier New" panose="02070309020205020404" pitchFamily="49" charset="0"/>
+              </a:rPr>
+              <a:t>EOMONTH</a:t>
+            </a:r>
+            <a:r>
+              <a:rPr lang="en-IN" sz="1400" b="1" dirty="0">
                 <a:solidFill>
                   <a:srgbClr val="000000"/>
                 </a:solidFill>
@@ -15439,34 +14919,48 @@
               <a:t>     </a:t>
             </a:r>
             <a:r>
-              <a:rPr lang="en-IN" sz="1600" dirty="0" err="1">
+              <a:rPr lang="en-IN" sz="1400" dirty="0" err="1">
                 <a:latin typeface="Courier New" panose="02070309020205020404" pitchFamily="49" charset="0"/>
                 <a:cs typeface="Courier New" panose="02070309020205020404" pitchFamily="49" charset="0"/>
               </a:rPr>
               <a:t>MonthEnd</a:t>
             </a:r>
             <a:r>
-              <a:rPr lang="en-IN" sz="1600" dirty="0">
+              <a:rPr lang="en-IN" sz="1400" dirty="0">
                 <a:latin typeface="Courier New" panose="02070309020205020404" pitchFamily="49" charset="0"/>
                 <a:cs typeface="Courier New" panose="02070309020205020404" pitchFamily="49" charset="0"/>
               </a:rPr>
               <a:t> = EOMONTH(Sales[</a:t>
             </a:r>
             <a:r>
-              <a:rPr lang="en-IN" sz="1600" dirty="0" err="1">
+              <a:rPr lang="en-IN" sz="1400" dirty="0" err="1">
                 <a:latin typeface="Courier New" panose="02070309020205020404" pitchFamily="49" charset="0"/>
                 <a:cs typeface="Courier New" panose="02070309020205020404" pitchFamily="49" charset="0"/>
               </a:rPr>
               <a:t>OrderDate</a:t>
             </a:r>
             <a:r>
-              <a:rPr lang="en-IN" sz="1600" dirty="0">
-                <a:latin typeface="Courier New" panose="02070309020205020404" pitchFamily="49" charset="0"/>
-                <a:cs typeface="Courier New" panose="02070309020205020404" pitchFamily="49" charset="0"/>
-              </a:rPr>
-              <a:t>], 0)	  return end of the month</a:t>
-            </a:r>
-            <a:endParaRPr lang="en-IN" sz="1600" dirty="0">
+              <a:rPr lang="en-IN" sz="1400" dirty="0">
+                <a:latin typeface="Courier New" panose="02070309020205020404" pitchFamily="49" charset="0"/>
+                <a:cs typeface="Courier New" panose="02070309020205020404" pitchFamily="49" charset="0"/>
+              </a:rPr>
+              <a:t>], 0)	  </a:t>
+            </a:r>
+            <a:r>
+              <a:rPr lang="en-IN" sz="1400" dirty="0" smtClean="0">
+                <a:latin typeface="Courier New" panose="02070309020205020404" pitchFamily="49" charset="0"/>
+                <a:cs typeface="Courier New" panose="02070309020205020404" pitchFamily="49" charset="0"/>
+              </a:rPr>
+              <a:t>    Return </a:t>
+            </a:r>
+            <a:r>
+              <a:rPr lang="en-IN" sz="1400" dirty="0">
+                <a:latin typeface="Courier New" panose="02070309020205020404" pitchFamily="49" charset="0"/>
+                <a:cs typeface="Courier New" panose="02070309020205020404" pitchFamily="49" charset="0"/>
+              </a:rPr>
+              <a:t>end of the month</a:t>
+            </a:r>
+            <a:endParaRPr lang="en-IN" sz="1400" dirty="0">
               <a:solidFill>
                 <a:srgbClr val="000000"/>
               </a:solidFill>
@@ -15538,7 +15032,7 @@
             </a:endParaRPr>
           </a:p>
           <a:p>
-            <a:pPr fontAlgn="b"/>
+            <a:pPr lvl="1" fontAlgn="b"/>
             <a:r>
               <a:rPr lang="en-IN" sz="1600" dirty="0">
                 <a:latin typeface="Courier New" panose="02070309020205020404" pitchFamily="49" charset="0"/>
@@ -15572,7 +15066,7 @@
             </a:r>
           </a:p>
           <a:p>
-            <a:pPr fontAlgn="b"/>
+            <a:pPr lvl="1" fontAlgn="b"/>
             <a:r>
               <a:rPr lang="en-IN" sz="1600" dirty="0">
                 <a:latin typeface="Courier New" panose="02070309020205020404" pitchFamily="49" charset="0"/>
@@ -16001,8 +15495,8 @@
         </p:nvSpPr>
         <p:spPr>
           <a:xfrm>
-            <a:off x="243840" y="1832079"/>
-            <a:ext cx="11724640" cy="3785652"/>
+            <a:off x="281162" y="1150944"/>
+            <a:ext cx="11724640" cy="2487219"/>
           </a:xfrm>
           <a:prstGeom prst="rect">
             <a:avLst/>
@@ -16016,18 +15510,7 @@
           <a:p>
             <a:pPr>
               <a:lnSpc>
-                <a:spcPct val="200000"/>
-              </a:lnSpc>
-            </a:pPr>
-            <a:endParaRPr lang="en-IN" sz="1500" dirty="0" smtClean="0">
-              <a:latin typeface="Courier New" panose="02070309020205020404" pitchFamily="49" charset="0"/>
-              <a:cs typeface="Courier New" panose="02070309020205020404" pitchFamily="49" charset="0"/>
-            </a:endParaRPr>
-          </a:p>
-          <a:p>
-            <a:pPr>
-              <a:lnSpc>
-                <a:spcPct val="200000"/>
+                <a:spcPct val="150000"/>
               </a:lnSpc>
             </a:pPr>
             <a:r>
@@ -16087,7 +15570,7 @@
           <a:p>
             <a:pPr>
               <a:lnSpc>
-                <a:spcPct val="200000"/>
+                <a:spcPct val="150000"/>
               </a:lnSpc>
             </a:pPr>
             <a:r>
@@ -16140,7 +15623,7 @@
           <a:p>
             <a:pPr>
               <a:lnSpc>
-                <a:spcPct val="200000"/>
+                <a:spcPct val="150000"/>
               </a:lnSpc>
             </a:pPr>
             <a:r>
@@ -16193,7 +15676,7 @@
           <a:p>
             <a:pPr>
               <a:lnSpc>
-                <a:spcPct val="200000"/>
+                <a:spcPct val="150000"/>
               </a:lnSpc>
             </a:pPr>
             <a:r>
@@ -16246,7 +15729,7 @@
           <a:p>
             <a:pPr>
               <a:lnSpc>
-                <a:spcPct val="200000"/>
+                <a:spcPct val="150000"/>
               </a:lnSpc>
             </a:pPr>
             <a:r>
@@ -16299,7 +15782,7 @@
           <a:p>
             <a:pPr>
               <a:lnSpc>
-                <a:spcPct val="200000"/>
+                <a:spcPct val="150000"/>
               </a:lnSpc>
             </a:pPr>
             <a:r>
@@ -16352,7 +15835,7 @@
           <a:p>
             <a:pPr>
               <a:lnSpc>
-                <a:spcPct val="200000"/>
+                <a:spcPct val="150000"/>
               </a:lnSpc>
               <a:spcAft>
                 <a:spcPts val="800"/>
@@ -16362,6 +15845,172 @@
               <a:latin typeface="Courier New" panose="02070309020205020404" pitchFamily="49" charset="0"/>
               <a:ea typeface="Calibri" panose="020F0502020204030204" pitchFamily="34" charset="0"/>
               <a:cs typeface="Courier New" panose="02070309020205020404" pitchFamily="49" charset="0"/>
+            </a:endParaRPr>
+          </a:p>
+        </p:txBody>
+      </p:sp>
+      <p:sp>
+        <p:nvSpPr>
+          <p:cNvPr id="4" name="Rectangle 3"/>
+          <p:cNvSpPr/>
+          <p:nvPr/>
+        </p:nvSpPr>
+        <p:spPr>
+          <a:xfrm>
+            <a:off x="443722" y="4775072"/>
+            <a:ext cx="11399520" cy="1347485"/>
+          </a:xfrm>
+          <a:prstGeom prst="rect">
+            <a:avLst/>
+          </a:prstGeom>
+        </p:spPr>
+        <p:txBody>
+          <a:bodyPr wrap="square">
+            <a:spAutoFit/>
+          </a:bodyPr>
+          <a:lstStyle/>
+          <a:p>
+            <a:pPr>
+              <a:lnSpc>
+                <a:spcPct val="107000"/>
+              </a:lnSpc>
+            </a:pPr>
+            <a:r>
+              <a:rPr lang="en-IN" sz="1400" dirty="0" smtClean="0">
+                <a:latin typeface="Courier New" panose="02070309020205020404" pitchFamily="49" charset="0"/>
+                <a:ea typeface="Calibri" panose="020F0502020204030204" pitchFamily="34" charset="0"/>
+                <a:cs typeface="Times New Roman" panose="02020603050405020304" pitchFamily="18" charset="0"/>
+              </a:rPr>
+              <a:t>USERNAME</a:t>
+            </a:r>
+            <a:r>
+              <a:rPr lang="en-IN" sz="1400" dirty="0">
+                <a:latin typeface="Courier New" panose="02070309020205020404" pitchFamily="49" charset="0"/>
+                <a:ea typeface="Calibri" panose="020F0502020204030204" pitchFamily="34" charset="0"/>
+                <a:cs typeface="Times New Roman" panose="02020603050405020304" pitchFamily="18" charset="0"/>
+              </a:rPr>
+              <a:t>() </a:t>
+            </a:r>
+            <a:r>
+              <a:rPr lang="en-IN" sz="1400" dirty="0" smtClean="0">
+                <a:latin typeface="Courier New" panose="02070309020205020404" pitchFamily="49" charset="0"/>
+                <a:ea typeface="Calibri" panose="020F0502020204030204" pitchFamily="34" charset="0"/>
+                <a:cs typeface="Times New Roman" panose="02020603050405020304" pitchFamily="18" charset="0"/>
+              </a:rPr>
+              <a:t>		e.g</a:t>
+            </a:r>
+            <a:r>
+              <a:rPr lang="en-IN" sz="1400" dirty="0">
+                <a:latin typeface="Courier New" panose="02070309020205020404" pitchFamily="49" charset="0"/>
+                <a:ea typeface="Calibri" panose="020F0502020204030204" pitchFamily="34" charset="0"/>
+                <a:cs typeface="Times New Roman" panose="02020603050405020304" pitchFamily="18" charset="0"/>
+              </a:rPr>
+              <a:t>. DOMAIN\username  </a:t>
+            </a:r>
+            <a:r>
+              <a:rPr lang="en-IN" sz="1400" dirty="0" smtClean="0">
+                <a:latin typeface="Courier New" panose="02070309020205020404" pitchFamily="49" charset="0"/>
+                <a:ea typeface="Calibri" panose="020F0502020204030204" pitchFamily="34" charset="0"/>
+                <a:cs typeface="Times New Roman" panose="02020603050405020304" pitchFamily="18" charset="0"/>
+              </a:rPr>
+              <a:t>	</a:t>
+            </a:r>
+            <a:r>
+              <a:rPr lang="en-IN" sz="1400" dirty="0" smtClean="0">
+                <a:solidFill>
+                  <a:schemeClr val="tx1">
+                    <a:lumMod val="50000"/>
+                  </a:schemeClr>
+                </a:solidFill>
+                <a:latin typeface="Courier New" panose="02070309020205020404" pitchFamily="49" charset="0"/>
+                <a:ea typeface="Calibri" panose="020F0502020204030204" pitchFamily="34" charset="0"/>
+                <a:cs typeface="Times New Roman" panose="02020603050405020304" pitchFamily="18" charset="0"/>
+              </a:rPr>
+              <a:t>Returns </a:t>
+            </a:r>
+            <a:r>
+              <a:rPr lang="en-IN" sz="1400" dirty="0">
+                <a:solidFill>
+                  <a:schemeClr val="tx1">
+                    <a:lumMod val="50000"/>
+                  </a:schemeClr>
+                </a:solidFill>
+                <a:latin typeface="Courier New" panose="02070309020205020404" pitchFamily="49" charset="0"/>
+                <a:ea typeface="Calibri" panose="020F0502020204030204" pitchFamily="34" charset="0"/>
+                <a:cs typeface="Times New Roman" panose="02020603050405020304" pitchFamily="18" charset="0"/>
+              </a:rPr>
+              <a:t>the current user's domain and </a:t>
+            </a:r>
+            <a:r>
+              <a:rPr lang="en-IN" sz="1400" dirty="0" smtClean="0">
+                <a:solidFill>
+                  <a:schemeClr val="tx1">
+                    <a:lumMod val="50000"/>
+                  </a:schemeClr>
+                </a:solidFill>
+                <a:latin typeface="Courier New" panose="02070309020205020404" pitchFamily="49" charset="0"/>
+                <a:ea typeface="Calibri" panose="020F0502020204030204" pitchFamily="34" charset="0"/>
+                <a:cs typeface="Times New Roman" panose="02020603050405020304" pitchFamily="18" charset="0"/>
+              </a:rPr>
+              <a:t>username</a:t>
+            </a:r>
+          </a:p>
+          <a:p>
+            <a:pPr>
+              <a:lnSpc>
+                <a:spcPct val="107000"/>
+              </a:lnSpc>
+              <a:spcAft>
+                <a:spcPts val="800"/>
+              </a:spcAft>
+            </a:pPr>
+            <a:endParaRPr lang="en-IN" sz="1400" dirty="0" smtClean="0">
+              <a:latin typeface="Courier New" panose="02070309020205020404" pitchFamily="49" charset="0"/>
+              <a:ea typeface="Calibri" panose="020F0502020204030204" pitchFamily="34" charset="0"/>
+              <a:cs typeface="Times New Roman" panose="02020603050405020304" pitchFamily="18" charset="0"/>
+            </a:endParaRPr>
+          </a:p>
+          <a:p>
+            <a:pPr>
+              <a:lnSpc>
+                <a:spcPct val="107000"/>
+              </a:lnSpc>
+            </a:pPr>
+            <a:r>
+              <a:rPr lang="en-IN" sz="1400" dirty="0" smtClean="0">
+                <a:latin typeface="Courier New" panose="02070309020205020404" pitchFamily="49" charset="0"/>
+                <a:ea typeface="Calibri" panose="020F0502020204030204" pitchFamily="34" charset="0"/>
+                <a:cs typeface="Times New Roman" panose="02020603050405020304" pitchFamily="18" charset="0"/>
+              </a:rPr>
+              <a:t>USERPRINCIPALNAME()       e.g. user@company.com 	</a:t>
+            </a:r>
+            <a:r>
+              <a:rPr lang="en-IN" sz="1400" dirty="0" smtClean="0">
+                <a:solidFill>
+                  <a:schemeClr val="tx1">
+                    <a:lumMod val="50000"/>
+                  </a:schemeClr>
+                </a:solidFill>
+                <a:latin typeface="Courier New" panose="02070309020205020404" pitchFamily="49" charset="0"/>
+                <a:ea typeface="Calibri" panose="020F0502020204030204" pitchFamily="34" charset="0"/>
+                <a:cs typeface="Times New Roman" panose="02020603050405020304" pitchFamily="18" charset="0"/>
+              </a:rPr>
+              <a:t>Returns the current user's login/email-style identifier</a:t>
+            </a:r>
+          </a:p>
+          <a:p>
+            <a:pPr>
+              <a:lnSpc>
+                <a:spcPct val="107000"/>
+              </a:lnSpc>
+              <a:spcAft>
+                <a:spcPts val="800"/>
+              </a:spcAft>
+            </a:pPr>
+            <a:endParaRPr lang="en-IN" sz="1400" dirty="0">
+              <a:latin typeface="Calibri" panose="020F0502020204030204" pitchFamily="34" charset="0"/>
+              <a:ea typeface="Calibri" panose="020F0502020204030204" pitchFamily="34" charset="0"/>
+              <a:cs typeface="Times New Roman" panose="02020603050405020304" pitchFamily="18" charset="0"/>
             </a:endParaRPr>
           </a:p>
         </p:txBody>
@@ -16487,265 +16136,6 @@
       </p:grpSpPr>
       <p:sp>
         <p:nvSpPr>
-          <p:cNvPr id="6" name="Rectangle 5"/>
-          <p:cNvSpPr/>
-          <p:nvPr/>
-        </p:nvSpPr>
-        <p:spPr>
-          <a:xfrm>
-            <a:off x="121920" y="1173455"/>
-            <a:ext cx="11399520" cy="2186111"/>
-          </a:xfrm>
-          <a:prstGeom prst="rect">
-            <a:avLst/>
-          </a:prstGeom>
-        </p:spPr>
-        <p:txBody>
-          <a:bodyPr wrap="square">
-            <a:spAutoFit/>
-          </a:bodyPr>
-          <a:lstStyle/>
-          <a:p>
-            <a:pPr>
-              <a:lnSpc>
-                <a:spcPct val="107000"/>
-              </a:lnSpc>
-              <a:spcAft>
-                <a:spcPts val="800"/>
-              </a:spcAft>
-            </a:pPr>
-            <a:r>
-              <a:rPr lang="en-IN" sz="1600" dirty="0">
-                <a:latin typeface="Courier New" panose="02070309020205020404" pitchFamily="49" charset="0"/>
-                <a:ea typeface="Calibri" panose="020F0502020204030204" pitchFamily="34" charset="0"/>
-                <a:cs typeface="Times New Roman" panose="02020603050405020304" pitchFamily="18" charset="0"/>
-              </a:rPr>
-              <a:t>USERNAME</a:t>
-            </a:r>
-            <a:r>
-              <a:rPr lang="en-IN" sz="1600" dirty="0" smtClean="0">
-                <a:latin typeface="Courier New" panose="02070309020205020404" pitchFamily="49" charset="0"/>
-                <a:ea typeface="Calibri" panose="020F0502020204030204" pitchFamily="34" charset="0"/>
-                <a:cs typeface="Times New Roman" panose="02020603050405020304" pitchFamily="18" charset="0"/>
-              </a:rPr>
-              <a:t>()	</a:t>
-            </a:r>
-            <a:r>
-              <a:rPr lang="en-IN" sz="1600" dirty="0" err="1" smtClean="0">
-                <a:latin typeface="Courier New" panose="02070309020205020404" pitchFamily="49" charset="0"/>
-                <a:ea typeface="Calibri" panose="020F0502020204030204" pitchFamily="34" charset="0"/>
-                <a:cs typeface="Times New Roman" panose="02020603050405020304" pitchFamily="18" charset="0"/>
-              </a:rPr>
-              <a:t>CurrentUser</a:t>
-            </a:r>
-            <a:r>
-              <a:rPr lang="en-IN" sz="1600" dirty="0" smtClean="0">
-                <a:latin typeface="Courier New" panose="02070309020205020404" pitchFamily="49" charset="0"/>
-                <a:ea typeface="Calibri" panose="020F0502020204030204" pitchFamily="34" charset="0"/>
-                <a:cs typeface="Times New Roman" panose="02020603050405020304" pitchFamily="18" charset="0"/>
-              </a:rPr>
-              <a:t> </a:t>
-            </a:r>
-            <a:r>
-              <a:rPr lang="en-IN" sz="1600" dirty="0">
-                <a:latin typeface="Courier New" panose="02070309020205020404" pitchFamily="49" charset="0"/>
-                <a:ea typeface="Calibri" panose="020F0502020204030204" pitchFamily="34" charset="0"/>
-                <a:cs typeface="Times New Roman" panose="02020603050405020304" pitchFamily="18" charset="0"/>
-              </a:rPr>
-              <a:t>= USERNAME()              e.g. DOMAIN\username  </a:t>
-            </a:r>
-            <a:endParaRPr lang="en-IN" sz="1600" dirty="0">
-              <a:latin typeface="Calibri" panose="020F0502020204030204" pitchFamily="34" charset="0"/>
-              <a:ea typeface="Calibri" panose="020F0502020204030204" pitchFamily="34" charset="0"/>
-              <a:cs typeface="Times New Roman" panose="02020603050405020304" pitchFamily="18" charset="0"/>
-            </a:endParaRPr>
-          </a:p>
-          <a:p>
-            <a:pPr>
-              <a:lnSpc>
-                <a:spcPct val="107000"/>
-              </a:lnSpc>
-              <a:spcAft>
-                <a:spcPts val="800"/>
-              </a:spcAft>
-            </a:pPr>
-            <a:r>
-              <a:rPr lang="en-IN" sz="1600" dirty="0" smtClean="0">
-                <a:latin typeface="Courier New" panose="02070309020205020404" pitchFamily="49" charset="0"/>
-                <a:ea typeface="Calibri" panose="020F0502020204030204" pitchFamily="34" charset="0"/>
-                <a:cs typeface="Times New Roman" panose="02020603050405020304" pitchFamily="18" charset="0"/>
-              </a:rPr>
-              <a:t>	Returns </a:t>
-            </a:r>
-            <a:r>
-              <a:rPr lang="en-IN" sz="1600" dirty="0">
-                <a:latin typeface="Courier New" panose="02070309020205020404" pitchFamily="49" charset="0"/>
-                <a:ea typeface="Calibri" panose="020F0502020204030204" pitchFamily="34" charset="0"/>
-                <a:cs typeface="Times New Roman" panose="02020603050405020304" pitchFamily="18" charset="0"/>
-              </a:rPr>
-              <a:t>the current user's domain and </a:t>
-            </a:r>
-            <a:r>
-              <a:rPr lang="en-IN" sz="1600" dirty="0" smtClean="0">
-                <a:latin typeface="Courier New" panose="02070309020205020404" pitchFamily="49" charset="0"/>
-                <a:ea typeface="Calibri" panose="020F0502020204030204" pitchFamily="34" charset="0"/>
-                <a:cs typeface="Times New Roman" panose="02020603050405020304" pitchFamily="18" charset="0"/>
-              </a:rPr>
-              <a:t>username</a:t>
-            </a:r>
-          </a:p>
-          <a:p>
-            <a:pPr>
-              <a:lnSpc>
-                <a:spcPct val="107000"/>
-              </a:lnSpc>
-              <a:spcAft>
-                <a:spcPts val="800"/>
-              </a:spcAft>
-            </a:pPr>
-            <a:endParaRPr lang="en-IN" sz="1600" dirty="0" smtClean="0">
-              <a:latin typeface="Courier New" panose="02070309020205020404" pitchFamily="49" charset="0"/>
-              <a:ea typeface="Calibri" panose="020F0502020204030204" pitchFamily="34" charset="0"/>
-              <a:cs typeface="Times New Roman" panose="02020603050405020304" pitchFamily="18" charset="0"/>
-            </a:endParaRPr>
-          </a:p>
-          <a:p>
-            <a:pPr>
-              <a:lnSpc>
-                <a:spcPct val="107000"/>
-              </a:lnSpc>
-              <a:spcAft>
-                <a:spcPts val="800"/>
-              </a:spcAft>
-            </a:pPr>
-            <a:r>
-              <a:rPr lang="en-IN" sz="1600" dirty="0" smtClean="0">
-                <a:latin typeface="Courier New" panose="02070309020205020404" pitchFamily="49" charset="0"/>
-                <a:ea typeface="Calibri" panose="020F0502020204030204" pitchFamily="34" charset="0"/>
-                <a:cs typeface="Times New Roman" panose="02020603050405020304" pitchFamily="18" charset="0"/>
-              </a:rPr>
-              <a:t>USERPRINCIPALNAME()     </a:t>
-            </a:r>
-            <a:r>
-              <a:rPr lang="en-IN" sz="1600" dirty="0" err="1" smtClean="0">
-                <a:latin typeface="Courier New" panose="02070309020205020404" pitchFamily="49" charset="0"/>
-                <a:ea typeface="Calibri" panose="020F0502020204030204" pitchFamily="34" charset="0"/>
-                <a:cs typeface="Times New Roman" panose="02020603050405020304" pitchFamily="18" charset="0"/>
-              </a:rPr>
-              <a:t>UserEmail</a:t>
-            </a:r>
-            <a:r>
-              <a:rPr lang="en-IN" sz="1600" dirty="0" smtClean="0">
-                <a:latin typeface="Courier New" panose="02070309020205020404" pitchFamily="49" charset="0"/>
-                <a:ea typeface="Calibri" panose="020F0502020204030204" pitchFamily="34" charset="0"/>
-                <a:cs typeface="Times New Roman" panose="02020603050405020304" pitchFamily="18" charset="0"/>
-              </a:rPr>
-              <a:t> </a:t>
-            </a:r>
-            <a:r>
-              <a:rPr lang="en-IN" sz="1600" dirty="0">
-                <a:latin typeface="Courier New" panose="02070309020205020404" pitchFamily="49" charset="0"/>
-                <a:ea typeface="Calibri" panose="020F0502020204030204" pitchFamily="34" charset="0"/>
-                <a:cs typeface="Times New Roman" panose="02020603050405020304" pitchFamily="18" charset="0"/>
-              </a:rPr>
-              <a:t>= USERPRINCIPALNAME()       e.g. user@company.com </a:t>
-            </a:r>
-            <a:endParaRPr lang="en-IN" sz="1600" dirty="0" smtClean="0">
-              <a:latin typeface="Courier New" panose="02070309020205020404" pitchFamily="49" charset="0"/>
-              <a:ea typeface="Calibri" panose="020F0502020204030204" pitchFamily="34" charset="0"/>
-              <a:cs typeface="Times New Roman" panose="02020603050405020304" pitchFamily="18" charset="0"/>
-            </a:endParaRPr>
-          </a:p>
-          <a:p>
-            <a:pPr>
-              <a:lnSpc>
-                <a:spcPct val="107000"/>
-              </a:lnSpc>
-              <a:spcAft>
-                <a:spcPts val="800"/>
-              </a:spcAft>
-            </a:pPr>
-            <a:r>
-              <a:rPr lang="en-IN" sz="1600" dirty="0" smtClean="0">
-                <a:latin typeface="Courier New" panose="02070309020205020404" pitchFamily="49" charset="0"/>
-                <a:ea typeface="Calibri" panose="020F0502020204030204" pitchFamily="34" charset="0"/>
-                <a:cs typeface="Times New Roman" panose="02020603050405020304" pitchFamily="18" charset="0"/>
-              </a:rPr>
-              <a:t>	Returns </a:t>
-            </a:r>
-            <a:r>
-              <a:rPr lang="en-IN" sz="1600" dirty="0">
-                <a:latin typeface="Courier New" panose="02070309020205020404" pitchFamily="49" charset="0"/>
-                <a:ea typeface="Calibri" panose="020F0502020204030204" pitchFamily="34" charset="0"/>
-                <a:cs typeface="Times New Roman" panose="02020603050405020304" pitchFamily="18" charset="0"/>
-              </a:rPr>
-              <a:t>the current user's login/email-style </a:t>
-            </a:r>
-            <a:r>
-              <a:rPr lang="en-IN" sz="1600" dirty="0" smtClean="0">
-                <a:latin typeface="Courier New" panose="02070309020205020404" pitchFamily="49" charset="0"/>
-                <a:ea typeface="Calibri" panose="020F0502020204030204" pitchFamily="34" charset="0"/>
-                <a:cs typeface="Times New Roman" panose="02020603050405020304" pitchFamily="18" charset="0"/>
-              </a:rPr>
-              <a:t>identifier</a:t>
-            </a:r>
-          </a:p>
-          <a:p>
-            <a:pPr>
-              <a:lnSpc>
-                <a:spcPct val="107000"/>
-              </a:lnSpc>
-              <a:spcAft>
-                <a:spcPts val="800"/>
-              </a:spcAft>
-            </a:pPr>
-            <a:endParaRPr lang="en-IN" sz="1600" dirty="0">
-              <a:latin typeface="Calibri" panose="020F0502020204030204" pitchFamily="34" charset="0"/>
-              <a:ea typeface="Calibri" panose="020F0502020204030204" pitchFamily="34" charset="0"/>
-              <a:cs typeface="Times New Roman" panose="02020603050405020304" pitchFamily="18" charset="0"/>
-            </a:endParaRPr>
-          </a:p>
-        </p:txBody>
-      </p:sp>
-    </p:spTree>
-    <p:extLst>
-      <p:ext uri="{BB962C8B-B14F-4D97-AF65-F5344CB8AC3E}">
-        <p14:creationId xmlns:p14="http://schemas.microsoft.com/office/powerpoint/2010/main" val="3884297573"/>
-      </p:ext>
-    </p:extLst>
-  </p:cSld>
-  <p:clrMapOvr>
-    <a:masterClrMapping/>
-  </p:clrMapOvr>
-  <p:timing>
-    <p:tnLst>
-      <p:par>
-        <p:cTn id="1" dur="indefinite" restart="never" nodeType="tmRoot"/>
-      </p:par>
-    </p:tnLst>
-  </p:timing>
-</p:sld>
-</file>
-
-<file path=ppt/slides/slide8.xml><?xml version="1.0" encoding="utf-8"?>
-<p:sld xmlns:a="http://schemas.openxmlformats.org/drawingml/2006/main" xmlns:r="http://schemas.openxmlformats.org/officeDocument/2006/relationships" xmlns:p="http://schemas.openxmlformats.org/presentationml/2006/main">
-  <p:cSld>
-    <p:spTree>
-      <p:nvGrpSpPr>
-        <p:cNvPr id="1" name=""/>
-        <p:cNvGrpSpPr/>
-        <p:nvPr/>
-      </p:nvGrpSpPr>
-      <p:grpSpPr>
-        <a:xfrm>
-          <a:off x="0" y="0"/>
-          <a:ext cx="0" cy="0"/>
-          <a:chOff x="0" y="0"/>
-          <a:chExt cx="0" cy="0"/>
-        </a:xfrm>
-      </p:grpSpPr>
-      <p:sp>
-        <p:nvSpPr>
           <p:cNvPr id="4" name="Rectangle 3"/>
           <p:cNvSpPr/>
           <p:nvPr/>
@@ -17181,7 +16571,7 @@
             </a:endParaRPr>
           </a:p>
           <a:p>
-            <a:pPr>
+            <a:pPr lvl="2">
               <a:lnSpc>
                 <a:spcPct val="107000"/>
               </a:lnSpc>
@@ -17217,7 +16607,7 @@
             </a:endParaRPr>
           </a:p>
           <a:p>
-            <a:pPr>
+            <a:pPr lvl="2">
               <a:lnSpc>
                 <a:spcPct val="107000"/>
               </a:lnSpc>
@@ -17253,7 +16643,7 @@
             </a:endParaRPr>
           </a:p>
           <a:p>
-            <a:pPr>
+            <a:pPr lvl="2">
               <a:lnSpc>
                 <a:spcPct val="107000"/>
               </a:lnSpc>
@@ -17411,6 +16801,772 @@
     <p:bldLst>
       <p:bldP spid="4" grpId="0"/>
     </p:bldLst>
+  </p:timing>
+</p:sld>
+</file>
+
+<file path=ppt/slides/slide8.xml><?xml version="1.0" encoding="utf-8"?>
+<p:sld xmlns:a="http://schemas.openxmlformats.org/drawingml/2006/main" xmlns:r="http://schemas.openxmlformats.org/officeDocument/2006/relationships" xmlns:p="http://schemas.openxmlformats.org/presentationml/2006/main">
+  <p:cSld>
+    <p:spTree>
+      <p:nvGrpSpPr>
+        <p:cNvPr id="1" name=""/>
+        <p:cNvGrpSpPr/>
+        <p:nvPr/>
+      </p:nvGrpSpPr>
+      <p:grpSpPr>
+        <a:xfrm>
+          <a:off x="0" y="0"/>
+          <a:ext cx="0" cy="0"/>
+          <a:chOff x="0" y="0"/>
+          <a:chExt cx="0" cy="0"/>
+        </a:xfrm>
+      </p:grpSpPr>
+      <p:sp>
+        <p:nvSpPr>
+          <p:cNvPr id="6" name="Rectangle 5"/>
+          <p:cNvSpPr/>
+          <p:nvPr/>
+        </p:nvSpPr>
+        <p:spPr>
+          <a:xfrm>
+            <a:off x="443948" y="1420801"/>
+            <a:ext cx="10956234" cy="4834785"/>
+          </a:xfrm>
+          <a:prstGeom prst="rect">
+            <a:avLst/>
+          </a:prstGeom>
+        </p:spPr>
+        <p:txBody>
+          <a:bodyPr wrap="square">
+            <a:spAutoFit/>
+          </a:bodyPr>
+          <a:lstStyle/>
+          <a:p>
+            <a:pPr>
+              <a:lnSpc>
+                <a:spcPct val="107000"/>
+              </a:lnSpc>
+            </a:pPr>
+            <a:r>
+              <a:rPr lang="en-IN" sz="1600" dirty="0">
+                <a:latin typeface="Courier New" panose="02070309020205020404" pitchFamily="49" charset="0"/>
+                <a:ea typeface="Calibri" panose="020F0502020204030204" pitchFamily="34" charset="0"/>
+                <a:cs typeface="Times New Roman" panose="02020603050405020304" pitchFamily="18" charset="0"/>
+              </a:rPr>
+              <a:t>Function	</a:t>
+            </a:r>
+            <a:r>
+              <a:rPr lang="en-IN" sz="1600" dirty="0" smtClean="0">
+                <a:latin typeface="Courier New" panose="02070309020205020404" pitchFamily="49" charset="0"/>
+                <a:ea typeface="Calibri" panose="020F0502020204030204" pitchFamily="34" charset="0"/>
+                <a:cs typeface="Times New Roman" panose="02020603050405020304" pitchFamily="18" charset="0"/>
+              </a:rPr>
+              <a:t>	Example</a:t>
+            </a:r>
+            <a:r>
+              <a:rPr lang="en-IN" sz="1600" dirty="0">
+                <a:latin typeface="Courier New" panose="02070309020205020404" pitchFamily="49" charset="0"/>
+                <a:ea typeface="Calibri" panose="020F0502020204030204" pitchFamily="34" charset="0"/>
+                <a:cs typeface="Times New Roman" panose="02020603050405020304" pitchFamily="18" charset="0"/>
+              </a:rPr>
+              <a:t>	Result</a:t>
+            </a:r>
+            <a:endParaRPr lang="en-IN" sz="1600" dirty="0">
+              <a:latin typeface="Calibri" panose="020F0502020204030204" pitchFamily="34" charset="0"/>
+              <a:ea typeface="Calibri" panose="020F0502020204030204" pitchFamily="34" charset="0"/>
+              <a:cs typeface="Times New Roman" panose="02020603050405020304" pitchFamily="18" charset="0"/>
+            </a:endParaRPr>
+          </a:p>
+          <a:p>
+            <a:pPr>
+              <a:lnSpc>
+                <a:spcPct val="107000"/>
+              </a:lnSpc>
+            </a:pPr>
+            <a:r>
+              <a:rPr lang="en-IN" sz="1600" dirty="0" smtClean="0">
+                <a:latin typeface="Courier New" panose="02070309020205020404" pitchFamily="49" charset="0"/>
+                <a:ea typeface="Calibri" panose="020F0502020204030204" pitchFamily="34" charset="0"/>
+                <a:cs typeface="Times New Roman" panose="02020603050405020304" pitchFamily="18" charset="0"/>
+              </a:rPr>
+              <a:t>LEFT</a:t>
+            </a:r>
+            <a:r>
+              <a:rPr lang="en-IN" sz="1600" dirty="0">
+                <a:latin typeface="Courier New" panose="02070309020205020404" pitchFamily="49" charset="0"/>
+                <a:ea typeface="Calibri" panose="020F0502020204030204" pitchFamily="34" charset="0"/>
+                <a:cs typeface="Times New Roman" panose="02020603050405020304" pitchFamily="18" charset="0"/>
+              </a:rPr>
+              <a:t>()	</a:t>
+            </a:r>
+            <a:r>
+              <a:rPr lang="en-IN" sz="1600" dirty="0" smtClean="0">
+                <a:latin typeface="Courier New" panose="02070309020205020404" pitchFamily="49" charset="0"/>
+                <a:ea typeface="Calibri" panose="020F0502020204030204" pitchFamily="34" charset="0"/>
+                <a:cs typeface="Times New Roman" panose="02020603050405020304" pitchFamily="18" charset="0"/>
+              </a:rPr>
+              <a:t>		LEFT</a:t>
+            </a:r>
+            <a:r>
+              <a:rPr lang="en-IN" sz="1600" dirty="0">
+                <a:latin typeface="Courier New" panose="02070309020205020404" pitchFamily="49" charset="0"/>
+                <a:ea typeface="Calibri" panose="020F0502020204030204" pitchFamily="34" charset="0"/>
+                <a:cs typeface="Times New Roman" panose="02020603050405020304" pitchFamily="18" charset="0"/>
+              </a:rPr>
+              <a:t>("</a:t>
+            </a:r>
+            <a:r>
+              <a:rPr lang="en-IN" sz="1600" dirty="0" err="1">
+                <a:latin typeface="Courier New" panose="02070309020205020404" pitchFamily="49" charset="0"/>
+                <a:ea typeface="Calibri" panose="020F0502020204030204" pitchFamily="34" charset="0"/>
+                <a:cs typeface="Times New Roman" panose="02020603050405020304" pitchFamily="18" charset="0"/>
+              </a:rPr>
+              <a:t>PowerBI</a:t>
+            </a:r>
+            <a:r>
+              <a:rPr lang="en-IN" sz="1600" dirty="0">
+                <a:latin typeface="Courier New" panose="02070309020205020404" pitchFamily="49" charset="0"/>
+                <a:ea typeface="Calibri" panose="020F0502020204030204" pitchFamily="34" charset="0"/>
+                <a:cs typeface="Times New Roman" panose="02020603050405020304" pitchFamily="18" charset="0"/>
+              </a:rPr>
+              <a:t>", 5)	</a:t>
+            </a:r>
+            <a:r>
+              <a:rPr lang="en-IN" sz="1600" dirty="0" smtClean="0">
+                <a:latin typeface="Courier New" panose="02070309020205020404" pitchFamily="49" charset="0"/>
+                <a:ea typeface="Calibri" panose="020F0502020204030204" pitchFamily="34" charset="0"/>
+                <a:cs typeface="Times New Roman" panose="02020603050405020304" pitchFamily="18" charset="0"/>
+              </a:rPr>
+              <a:t>			Power</a:t>
+            </a:r>
+            <a:endParaRPr lang="en-IN" sz="1600" dirty="0">
+              <a:latin typeface="Calibri" panose="020F0502020204030204" pitchFamily="34" charset="0"/>
+              <a:ea typeface="Calibri" panose="020F0502020204030204" pitchFamily="34" charset="0"/>
+              <a:cs typeface="Times New Roman" panose="02020603050405020304" pitchFamily="18" charset="0"/>
+            </a:endParaRPr>
+          </a:p>
+          <a:p>
+            <a:pPr>
+              <a:lnSpc>
+                <a:spcPct val="107000"/>
+              </a:lnSpc>
+            </a:pPr>
+            <a:r>
+              <a:rPr lang="en-IN" sz="1600" dirty="0">
+                <a:latin typeface="Courier New" panose="02070309020205020404" pitchFamily="49" charset="0"/>
+                <a:ea typeface="Calibri" panose="020F0502020204030204" pitchFamily="34" charset="0"/>
+                <a:cs typeface="Times New Roman" panose="02020603050405020304" pitchFamily="18" charset="0"/>
+              </a:rPr>
+              <a:t>RIGHT()	</a:t>
+            </a:r>
+            <a:r>
+              <a:rPr lang="en-IN" sz="1600" dirty="0" smtClean="0">
+                <a:latin typeface="Courier New" panose="02070309020205020404" pitchFamily="49" charset="0"/>
+                <a:ea typeface="Calibri" panose="020F0502020204030204" pitchFamily="34" charset="0"/>
+                <a:cs typeface="Times New Roman" panose="02020603050405020304" pitchFamily="18" charset="0"/>
+              </a:rPr>
+              <a:t>		RIGHT</a:t>
+            </a:r>
+            <a:r>
+              <a:rPr lang="en-IN" sz="1600" dirty="0">
+                <a:latin typeface="Courier New" panose="02070309020205020404" pitchFamily="49" charset="0"/>
+                <a:ea typeface="Calibri" panose="020F0502020204030204" pitchFamily="34" charset="0"/>
+                <a:cs typeface="Times New Roman" panose="02020603050405020304" pitchFamily="18" charset="0"/>
+              </a:rPr>
+              <a:t>("</a:t>
+            </a:r>
+            <a:r>
+              <a:rPr lang="en-IN" sz="1600" dirty="0" err="1">
+                <a:latin typeface="Courier New" panose="02070309020205020404" pitchFamily="49" charset="0"/>
+                <a:ea typeface="Calibri" panose="020F0502020204030204" pitchFamily="34" charset="0"/>
+                <a:cs typeface="Times New Roman" panose="02020603050405020304" pitchFamily="18" charset="0"/>
+              </a:rPr>
+              <a:t>PowerBI</a:t>
+            </a:r>
+            <a:r>
+              <a:rPr lang="en-IN" sz="1600" dirty="0">
+                <a:latin typeface="Courier New" panose="02070309020205020404" pitchFamily="49" charset="0"/>
+                <a:ea typeface="Calibri" panose="020F0502020204030204" pitchFamily="34" charset="0"/>
+                <a:cs typeface="Times New Roman" panose="02020603050405020304" pitchFamily="18" charset="0"/>
+              </a:rPr>
+              <a:t>", 2)	</a:t>
+            </a:r>
+            <a:r>
+              <a:rPr lang="en-IN" sz="1600" dirty="0" smtClean="0">
+                <a:latin typeface="Courier New" panose="02070309020205020404" pitchFamily="49" charset="0"/>
+                <a:ea typeface="Calibri" panose="020F0502020204030204" pitchFamily="34" charset="0"/>
+                <a:cs typeface="Times New Roman" panose="02020603050405020304" pitchFamily="18" charset="0"/>
+              </a:rPr>
+              <a:t>			BI</a:t>
+            </a:r>
+            <a:endParaRPr lang="en-IN" sz="1600" dirty="0">
+              <a:latin typeface="Calibri" panose="020F0502020204030204" pitchFamily="34" charset="0"/>
+              <a:ea typeface="Calibri" panose="020F0502020204030204" pitchFamily="34" charset="0"/>
+              <a:cs typeface="Times New Roman" panose="02020603050405020304" pitchFamily="18" charset="0"/>
+            </a:endParaRPr>
+          </a:p>
+          <a:p>
+            <a:pPr>
+              <a:lnSpc>
+                <a:spcPct val="107000"/>
+              </a:lnSpc>
+            </a:pPr>
+            <a:r>
+              <a:rPr lang="en-IN" sz="1600" dirty="0">
+                <a:latin typeface="Courier New" panose="02070309020205020404" pitchFamily="49" charset="0"/>
+                <a:ea typeface="Calibri" panose="020F0502020204030204" pitchFamily="34" charset="0"/>
+                <a:cs typeface="Times New Roman" panose="02020603050405020304" pitchFamily="18" charset="0"/>
+              </a:rPr>
+              <a:t>MID()	</a:t>
+            </a:r>
+            <a:r>
+              <a:rPr lang="en-IN" sz="1600" dirty="0" smtClean="0">
+                <a:latin typeface="Courier New" panose="02070309020205020404" pitchFamily="49" charset="0"/>
+                <a:ea typeface="Calibri" panose="020F0502020204030204" pitchFamily="34" charset="0"/>
+                <a:cs typeface="Times New Roman" panose="02020603050405020304" pitchFamily="18" charset="0"/>
+              </a:rPr>
+              <a:t>		MID</a:t>
+            </a:r>
+            <a:r>
+              <a:rPr lang="en-IN" sz="1600" dirty="0">
+                <a:latin typeface="Courier New" panose="02070309020205020404" pitchFamily="49" charset="0"/>
+                <a:ea typeface="Calibri" panose="020F0502020204030204" pitchFamily="34" charset="0"/>
+                <a:cs typeface="Times New Roman" panose="02020603050405020304" pitchFamily="18" charset="0"/>
+              </a:rPr>
+              <a:t>("</a:t>
+            </a:r>
+            <a:r>
+              <a:rPr lang="en-IN" sz="1600" dirty="0" err="1">
+                <a:latin typeface="Courier New" panose="02070309020205020404" pitchFamily="49" charset="0"/>
+                <a:ea typeface="Calibri" panose="020F0502020204030204" pitchFamily="34" charset="0"/>
+                <a:cs typeface="Times New Roman" panose="02020603050405020304" pitchFamily="18" charset="0"/>
+              </a:rPr>
+              <a:t>PowerBI</a:t>
+            </a:r>
+            <a:r>
+              <a:rPr lang="en-IN" sz="1600" dirty="0">
+                <a:latin typeface="Courier New" panose="02070309020205020404" pitchFamily="49" charset="0"/>
+                <a:ea typeface="Calibri" panose="020F0502020204030204" pitchFamily="34" charset="0"/>
+                <a:cs typeface="Times New Roman" panose="02020603050405020304" pitchFamily="18" charset="0"/>
+              </a:rPr>
+              <a:t>", 2, 3)	</a:t>
+            </a:r>
+            <a:r>
+              <a:rPr lang="en-IN" sz="1600" dirty="0" smtClean="0">
+                <a:latin typeface="Courier New" panose="02070309020205020404" pitchFamily="49" charset="0"/>
+                <a:ea typeface="Calibri" panose="020F0502020204030204" pitchFamily="34" charset="0"/>
+                <a:cs typeface="Times New Roman" panose="02020603050405020304" pitchFamily="18" charset="0"/>
+              </a:rPr>
+              <a:t>			owe</a:t>
+            </a:r>
+            <a:endParaRPr lang="en-IN" sz="1600" dirty="0">
+              <a:latin typeface="Calibri" panose="020F0502020204030204" pitchFamily="34" charset="0"/>
+              <a:ea typeface="Calibri" panose="020F0502020204030204" pitchFamily="34" charset="0"/>
+              <a:cs typeface="Times New Roman" panose="02020603050405020304" pitchFamily="18" charset="0"/>
+            </a:endParaRPr>
+          </a:p>
+          <a:p>
+            <a:pPr>
+              <a:lnSpc>
+                <a:spcPct val="107000"/>
+              </a:lnSpc>
+            </a:pPr>
+            <a:endParaRPr lang="en-IN" sz="1600" dirty="0" smtClean="0">
+              <a:latin typeface="Courier New" panose="02070309020205020404" pitchFamily="49" charset="0"/>
+              <a:ea typeface="Calibri" panose="020F0502020204030204" pitchFamily="34" charset="0"/>
+              <a:cs typeface="Times New Roman" panose="02020603050405020304" pitchFamily="18" charset="0"/>
+            </a:endParaRPr>
+          </a:p>
+          <a:p>
+            <a:pPr>
+              <a:lnSpc>
+                <a:spcPct val="107000"/>
+              </a:lnSpc>
+            </a:pPr>
+            <a:r>
+              <a:rPr lang="en-IN" sz="1600" dirty="0" smtClean="0">
+                <a:latin typeface="Courier New" panose="02070309020205020404" pitchFamily="49" charset="0"/>
+                <a:ea typeface="Calibri" panose="020F0502020204030204" pitchFamily="34" charset="0"/>
+                <a:cs typeface="Times New Roman" panose="02020603050405020304" pitchFamily="18" charset="0"/>
+              </a:rPr>
+              <a:t>LEN</a:t>
+            </a:r>
+            <a:r>
+              <a:rPr lang="en-IN" sz="1600" dirty="0">
+                <a:latin typeface="Courier New" panose="02070309020205020404" pitchFamily="49" charset="0"/>
+                <a:ea typeface="Calibri" panose="020F0502020204030204" pitchFamily="34" charset="0"/>
+                <a:cs typeface="Times New Roman" panose="02020603050405020304" pitchFamily="18" charset="0"/>
+              </a:rPr>
+              <a:t>()	</a:t>
+            </a:r>
+            <a:r>
+              <a:rPr lang="en-IN" sz="1600" dirty="0" smtClean="0">
+                <a:latin typeface="Courier New" panose="02070309020205020404" pitchFamily="49" charset="0"/>
+                <a:ea typeface="Calibri" panose="020F0502020204030204" pitchFamily="34" charset="0"/>
+                <a:cs typeface="Times New Roman" panose="02020603050405020304" pitchFamily="18" charset="0"/>
+              </a:rPr>
+              <a:t>		LEN</a:t>
+            </a:r>
+            <a:r>
+              <a:rPr lang="en-IN" sz="1600" dirty="0">
+                <a:latin typeface="Courier New" panose="02070309020205020404" pitchFamily="49" charset="0"/>
+                <a:ea typeface="Calibri" panose="020F0502020204030204" pitchFamily="34" charset="0"/>
+                <a:cs typeface="Times New Roman" panose="02020603050405020304" pitchFamily="18" charset="0"/>
+              </a:rPr>
+              <a:t>("</a:t>
+            </a:r>
+            <a:r>
+              <a:rPr lang="en-IN" sz="1600" dirty="0" err="1">
+                <a:latin typeface="Courier New" panose="02070309020205020404" pitchFamily="49" charset="0"/>
+                <a:ea typeface="Calibri" panose="020F0502020204030204" pitchFamily="34" charset="0"/>
+                <a:cs typeface="Times New Roman" panose="02020603050405020304" pitchFamily="18" charset="0"/>
+              </a:rPr>
+              <a:t>PowerBI</a:t>
+            </a:r>
+            <a:r>
+              <a:rPr lang="en-IN" sz="1600" dirty="0">
+                <a:latin typeface="Courier New" panose="02070309020205020404" pitchFamily="49" charset="0"/>
+                <a:ea typeface="Calibri" panose="020F0502020204030204" pitchFamily="34" charset="0"/>
+                <a:cs typeface="Times New Roman" panose="02020603050405020304" pitchFamily="18" charset="0"/>
+              </a:rPr>
+              <a:t>")	</a:t>
+            </a:r>
+            <a:r>
+              <a:rPr lang="en-IN" sz="1600" dirty="0" smtClean="0">
+                <a:latin typeface="Courier New" panose="02070309020205020404" pitchFamily="49" charset="0"/>
+                <a:ea typeface="Calibri" panose="020F0502020204030204" pitchFamily="34" charset="0"/>
+                <a:cs typeface="Times New Roman" panose="02020603050405020304" pitchFamily="18" charset="0"/>
+              </a:rPr>
+              <a:t>				7</a:t>
+            </a:r>
+            <a:endParaRPr lang="en-IN" sz="1600" dirty="0">
+              <a:latin typeface="Calibri" panose="020F0502020204030204" pitchFamily="34" charset="0"/>
+              <a:ea typeface="Calibri" panose="020F0502020204030204" pitchFamily="34" charset="0"/>
+              <a:cs typeface="Times New Roman" panose="02020603050405020304" pitchFamily="18" charset="0"/>
+            </a:endParaRPr>
+          </a:p>
+          <a:p>
+            <a:pPr>
+              <a:lnSpc>
+                <a:spcPct val="107000"/>
+              </a:lnSpc>
+            </a:pPr>
+            <a:endParaRPr lang="en-IN" sz="1600" dirty="0" smtClean="0">
+              <a:latin typeface="Courier New" panose="02070309020205020404" pitchFamily="49" charset="0"/>
+              <a:ea typeface="Calibri" panose="020F0502020204030204" pitchFamily="34" charset="0"/>
+              <a:cs typeface="Times New Roman" panose="02020603050405020304" pitchFamily="18" charset="0"/>
+            </a:endParaRPr>
+          </a:p>
+          <a:p>
+            <a:pPr>
+              <a:lnSpc>
+                <a:spcPct val="107000"/>
+              </a:lnSpc>
+            </a:pPr>
+            <a:r>
+              <a:rPr lang="en-IN" sz="1600" dirty="0" smtClean="0">
+                <a:latin typeface="Courier New" panose="02070309020205020404" pitchFamily="49" charset="0"/>
+                <a:ea typeface="Calibri" panose="020F0502020204030204" pitchFamily="34" charset="0"/>
+                <a:cs typeface="Times New Roman" panose="02020603050405020304" pitchFamily="18" charset="0"/>
+              </a:rPr>
+              <a:t>UPPER</a:t>
+            </a:r>
+            <a:r>
+              <a:rPr lang="en-IN" sz="1600" dirty="0">
+                <a:latin typeface="Courier New" panose="02070309020205020404" pitchFamily="49" charset="0"/>
+                <a:ea typeface="Calibri" panose="020F0502020204030204" pitchFamily="34" charset="0"/>
+                <a:cs typeface="Times New Roman" panose="02020603050405020304" pitchFamily="18" charset="0"/>
+              </a:rPr>
+              <a:t>()	</a:t>
+            </a:r>
+            <a:r>
+              <a:rPr lang="en-IN" sz="1600" dirty="0" smtClean="0">
+                <a:latin typeface="Courier New" panose="02070309020205020404" pitchFamily="49" charset="0"/>
+                <a:ea typeface="Calibri" panose="020F0502020204030204" pitchFamily="34" charset="0"/>
+                <a:cs typeface="Times New Roman" panose="02020603050405020304" pitchFamily="18" charset="0"/>
+              </a:rPr>
+              <a:t>		UPPER</a:t>
+            </a:r>
+            <a:r>
+              <a:rPr lang="en-IN" sz="1600" dirty="0">
+                <a:latin typeface="Courier New" panose="02070309020205020404" pitchFamily="49" charset="0"/>
+                <a:ea typeface="Calibri" panose="020F0502020204030204" pitchFamily="34" charset="0"/>
+                <a:cs typeface="Times New Roman" panose="02020603050405020304" pitchFamily="18" charset="0"/>
+              </a:rPr>
+              <a:t>("power bi")	</a:t>
+            </a:r>
+            <a:r>
+              <a:rPr lang="en-IN" sz="1600" dirty="0" smtClean="0">
+                <a:latin typeface="Courier New" panose="02070309020205020404" pitchFamily="49" charset="0"/>
+                <a:ea typeface="Calibri" panose="020F0502020204030204" pitchFamily="34" charset="0"/>
+                <a:cs typeface="Times New Roman" panose="02020603050405020304" pitchFamily="18" charset="0"/>
+              </a:rPr>
+              <a:t>			POWER </a:t>
+            </a:r>
+            <a:r>
+              <a:rPr lang="en-IN" sz="1600" dirty="0">
+                <a:latin typeface="Courier New" panose="02070309020205020404" pitchFamily="49" charset="0"/>
+                <a:ea typeface="Calibri" panose="020F0502020204030204" pitchFamily="34" charset="0"/>
+                <a:cs typeface="Times New Roman" panose="02020603050405020304" pitchFamily="18" charset="0"/>
+              </a:rPr>
+              <a:t>BI</a:t>
+            </a:r>
+            <a:endParaRPr lang="en-IN" sz="1600" dirty="0">
+              <a:latin typeface="Calibri" panose="020F0502020204030204" pitchFamily="34" charset="0"/>
+              <a:ea typeface="Calibri" panose="020F0502020204030204" pitchFamily="34" charset="0"/>
+              <a:cs typeface="Times New Roman" panose="02020603050405020304" pitchFamily="18" charset="0"/>
+            </a:endParaRPr>
+          </a:p>
+          <a:p>
+            <a:pPr>
+              <a:lnSpc>
+                <a:spcPct val="107000"/>
+              </a:lnSpc>
+            </a:pPr>
+            <a:r>
+              <a:rPr lang="en-IN" sz="1600" dirty="0">
+                <a:latin typeface="Courier New" panose="02070309020205020404" pitchFamily="49" charset="0"/>
+                <a:ea typeface="Calibri" panose="020F0502020204030204" pitchFamily="34" charset="0"/>
+                <a:cs typeface="Times New Roman" panose="02020603050405020304" pitchFamily="18" charset="0"/>
+              </a:rPr>
+              <a:t>LOWER()	</a:t>
+            </a:r>
+            <a:r>
+              <a:rPr lang="en-IN" sz="1600" dirty="0" smtClean="0">
+                <a:latin typeface="Courier New" panose="02070309020205020404" pitchFamily="49" charset="0"/>
+                <a:ea typeface="Calibri" panose="020F0502020204030204" pitchFamily="34" charset="0"/>
+                <a:cs typeface="Times New Roman" panose="02020603050405020304" pitchFamily="18" charset="0"/>
+              </a:rPr>
+              <a:t>		LOWER</a:t>
+            </a:r>
+            <a:r>
+              <a:rPr lang="en-IN" sz="1600" dirty="0">
+                <a:latin typeface="Courier New" panose="02070309020205020404" pitchFamily="49" charset="0"/>
+                <a:ea typeface="Calibri" panose="020F0502020204030204" pitchFamily="34" charset="0"/>
+                <a:cs typeface="Times New Roman" panose="02020603050405020304" pitchFamily="18" charset="0"/>
+              </a:rPr>
+              <a:t>("POWER BI")	</a:t>
+            </a:r>
+            <a:r>
+              <a:rPr lang="en-IN" sz="1600" dirty="0" smtClean="0">
+                <a:latin typeface="Courier New" panose="02070309020205020404" pitchFamily="49" charset="0"/>
+                <a:ea typeface="Calibri" panose="020F0502020204030204" pitchFamily="34" charset="0"/>
+                <a:cs typeface="Times New Roman" panose="02020603050405020304" pitchFamily="18" charset="0"/>
+              </a:rPr>
+              <a:t>			power </a:t>
+            </a:r>
+            <a:r>
+              <a:rPr lang="en-IN" sz="1600" dirty="0">
+                <a:latin typeface="Courier New" panose="02070309020205020404" pitchFamily="49" charset="0"/>
+                <a:ea typeface="Calibri" panose="020F0502020204030204" pitchFamily="34" charset="0"/>
+                <a:cs typeface="Times New Roman" panose="02020603050405020304" pitchFamily="18" charset="0"/>
+              </a:rPr>
+              <a:t>bi</a:t>
+            </a:r>
+            <a:endParaRPr lang="en-IN" sz="1600" dirty="0">
+              <a:latin typeface="Calibri" panose="020F0502020204030204" pitchFamily="34" charset="0"/>
+              <a:ea typeface="Calibri" panose="020F0502020204030204" pitchFamily="34" charset="0"/>
+              <a:cs typeface="Times New Roman" panose="02020603050405020304" pitchFamily="18" charset="0"/>
+            </a:endParaRPr>
+          </a:p>
+          <a:p>
+            <a:pPr>
+              <a:lnSpc>
+                <a:spcPct val="107000"/>
+              </a:lnSpc>
+            </a:pPr>
+            <a:endParaRPr lang="en-IN" sz="1600" dirty="0" smtClean="0">
+              <a:latin typeface="Courier New" panose="02070309020205020404" pitchFamily="49" charset="0"/>
+              <a:ea typeface="Calibri" panose="020F0502020204030204" pitchFamily="34" charset="0"/>
+              <a:cs typeface="Times New Roman" panose="02020603050405020304" pitchFamily="18" charset="0"/>
+            </a:endParaRPr>
+          </a:p>
+          <a:p>
+            <a:pPr>
+              <a:lnSpc>
+                <a:spcPct val="107000"/>
+              </a:lnSpc>
+            </a:pPr>
+            <a:r>
+              <a:rPr lang="en-IN" sz="1600" dirty="0" smtClean="0">
+                <a:latin typeface="Courier New" panose="02070309020205020404" pitchFamily="49" charset="0"/>
+                <a:ea typeface="Calibri" panose="020F0502020204030204" pitchFamily="34" charset="0"/>
+                <a:cs typeface="Times New Roman" panose="02020603050405020304" pitchFamily="18" charset="0"/>
+              </a:rPr>
+              <a:t>TRIM</a:t>
+            </a:r>
+            <a:r>
+              <a:rPr lang="en-IN" sz="1600" dirty="0">
+                <a:latin typeface="Courier New" panose="02070309020205020404" pitchFamily="49" charset="0"/>
+                <a:ea typeface="Calibri" panose="020F0502020204030204" pitchFamily="34" charset="0"/>
+                <a:cs typeface="Times New Roman" panose="02020603050405020304" pitchFamily="18" charset="0"/>
+              </a:rPr>
+              <a:t>()	</a:t>
+            </a:r>
+            <a:r>
+              <a:rPr lang="en-IN" sz="1600" dirty="0" smtClean="0">
+                <a:latin typeface="Courier New" panose="02070309020205020404" pitchFamily="49" charset="0"/>
+                <a:ea typeface="Calibri" panose="020F0502020204030204" pitchFamily="34" charset="0"/>
+                <a:cs typeface="Times New Roman" panose="02020603050405020304" pitchFamily="18" charset="0"/>
+              </a:rPr>
+              <a:t>		TRIM</a:t>
+            </a:r>
+            <a:r>
+              <a:rPr lang="en-IN" sz="1600" dirty="0">
+                <a:latin typeface="Courier New" panose="02070309020205020404" pitchFamily="49" charset="0"/>
+                <a:ea typeface="Calibri" panose="020F0502020204030204" pitchFamily="34" charset="0"/>
+                <a:cs typeface="Times New Roman" panose="02020603050405020304" pitchFamily="18" charset="0"/>
+              </a:rPr>
+              <a:t>(" Power BI ")	</a:t>
+            </a:r>
+            <a:r>
+              <a:rPr lang="en-IN" sz="1600" dirty="0" smtClean="0">
+                <a:latin typeface="Courier New" panose="02070309020205020404" pitchFamily="49" charset="0"/>
+                <a:ea typeface="Calibri" panose="020F0502020204030204" pitchFamily="34" charset="0"/>
+                <a:cs typeface="Times New Roman" panose="02020603050405020304" pitchFamily="18" charset="0"/>
+              </a:rPr>
+              <a:t>			Power </a:t>
+            </a:r>
+            <a:r>
+              <a:rPr lang="en-IN" sz="1600" dirty="0">
+                <a:latin typeface="Courier New" panose="02070309020205020404" pitchFamily="49" charset="0"/>
+                <a:ea typeface="Calibri" panose="020F0502020204030204" pitchFamily="34" charset="0"/>
+                <a:cs typeface="Times New Roman" panose="02020603050405020304" pitchFamily="18" charset="0"/>
+              </a:rPr>
+              <a:t>BI</a:t>
+            </a:r>
+            <a:endParaRPr lang="en-IN" sz="1600" dirty="0">
+              <a:latin typeface="Calibri" panose="020F0502020204030204" pitchFamily="34" charset="0"/>
+              <a:ea typeface="Calibri" panose="020F0502020204030204" pitchFamily="34" charset="0"/>
+              <a:cs typeface="Times New Roman" panose="02020603050405020304" pitchFamily="18" charset="0"/>
+            </a:endParaRPr>
+          </a:p>
+          <a:p>
+            <a:pPr>
+              <a:lnSpc>
+                <a:spcPct val="107000"/>
+              </a:lnSpc>
+            </a:pPr>
+            <a:r>
+              <a:rPr lang="en-IN" sz="1600" dirty="0">
+                <a:latin typeface="Courier New" panose="02070309020205020404" pitchFamily="49" charset="0"/>
+                <a:ea typeface="Calibri" panose="020F0502020204030204" pitchFamily="34" charset="0"/>
+                <a:cs typeface="Times New Roman" panose="02020603050405020304" pitchFamily="18" charset="0"/>
+              </a:rPr>
+              <a:t>SUBSTITUTE()	</a:t>
+            </a:r>
+            <a:r>
+              <a:rPr lang="en-IN" sz="1600" dirty="0" smtClean="0">
+                <a:latin typeface="Courier New" panose="02070309020205020404" pitchFamily="49" charset="0"/>
+                <a:ea typeface="Calibri" panose="020F0502020204030204" pitchFamily="34" charset="0"/>
+                <a:cs typeface="Times New Roman" panose="02020603050405020304" pitchFamily="18" charset="0"/>
+              </a:rPr>
+              <a:t>	SUBSTITUTE</a:t>
+            </a:r>
+            <a:r>
+              <a:rPr lang="en-IN" sz="1600" dirty="0">
+                <a:latin typeface="Courier New" panose="02070309020205020404" pitchFamily="49" charset="0"/>
+                <a:ea typeface="Calibri" panose="020F0502020204030204" pitchFamily="34" charset="0"/>
+                <a:cs typeface="Times New Roman" panose="02020603050405020304" pitchFamily="18" charset="0"/>
+              </a:rPr>
+              <a:t>("Power BI", "BI", "Query")	</a:t>
+            </a:r>
+            <a:r>
+              <a:rPr lang="en-IN" sz="1600" dirty="0" smtClean="0">
+                <a:latin typeface="Courier New" panose="02070309020205020404" pitchFamily="49" charset="0"/>
+                <a:ea typeface="Calibri" panose="020F0502020204030204" pitchFamily="34" charset="0"/>
+                <a:cs typeface="Times New Roman" panose="02020603050405020304" pitchFamily="18" charset="0"/>
+              </a:rPr>
+              <a:t>	Power </a:t>
+            </a:r>
+            <a:r>
+              <a:rPr lang="en-IN" sz="1600" dirty="0">
+                <a:latin typeface="Courier New" panose="02070309020205020404" pitchFamily="49" charset="0"/>
+                <a:ea typeface="Calibri" panose="020F0502020204030204" pitchFamily="34" charset="0"/>
+                <a:cs typeface="Times New Roman" panose="02020603050405020304" pitchFamily="18" charset="0"/>
+              </a:rPr>
+              <a:t>Query</a:t>
+            </a:r>
+            <a:endParaRPr lang="en-IN" sz="1600" dirty="0">
+              <a:latin typeface="Calibri" panose="020F0502020204030204" pitchFamily="34" charset="0"/>
+              <a:ea typeface="Calibri" panose="020F0502020204030204" pitchFamily="34" charset="0"/>
+              <a:cs typeface="Times New Roman" panose="02020603050405020304" pitchFamily="18" charset="0"/>
+            </a:endParaRPr>
+          </a:p>
+          <a:p>
+            <a:pPr>
+              <a:lnSpc>
+                <a:spcPct val="107000"/>
+              </a:lnSpc>
+            </a:pPr>
+            <a:endParaRPr lang="en-US" sz="1600" dirty="0" smtClean="0">
+              <a:latin typeface="Courier New" panose="02070309020205020404" pitchFamily="49" charset="0"/>
+              <a:ea typeface="Calibri" panose="020F0502020204030204" pitchFamily="34" charset="0"/>
+              <a:cs typeface="Times New Roman" panose="02020603050405020304" pitchFamily="18" charset="0"/>
+            </a:endParaRPr>
+          </a:p>
+          <a:p>
+            <a:pPr>
+              <a:lnSpc>
+                <a:spcPct val="107000"/>
+              </a:lnSpc>
+            </a:pPr>
+            <a:r>
+              <a:rPr lang="en-IN" sz="1600" dirty="0">
+                <a:latin typeface="Courier New" panose="02070309020205020404" pitchFamily="49" charset="0"/>
+                <a:ea typeface="Calibri" panose="020F0502020204030204" pitchFamily="34" charset="0"/>
+                <a:cs typeface="Times New Roman" panose="02020603050405020304" pitchFamily="18" charset="0"/>
+              </a:rPr>
+              <a:t>CONTAINSSTRING()	CONTAINSSTRING("Power BI", "BI")		TRUE</a:t>
+            </a:r>
+          </a:p>
+          <a:p>
+            <a:pPr>
+              <a:lnSpc>
+                <a:spcPct val="107000"/>
+              </a:lnSpc>
+            </a:pPr>
+            <a:r>
+              <a:rPr lang="en-IN" sz="1600" dirty="0" smtClean="0">
+                <a:latin typeface="Courier New" panose="02070309020205020404" pitchFamily="49" charset="0"/>
+                <a:ea typeface="Calibri" panose="020F0502020204030204" pitchFamily="34" charset="0"/>
+                <a:cs typeface="Times New Roman" panose="02020603050405020304" pitchFamily="18" charset="0"/>
+              </a:rPr>
+              <a:t>SEARCH</a:t>
+            </a:r>
+            <a:r>
+              <a:rPr lang="en-IN" sz="1600" dirty="0">
+                <a:latin typeface="Courier New" panose="02070309020205020404" pitchFamily="49" charset="0"/>
+                <a:ea typeface="Calibri" panose="020F0502020204030204" pitchFamily="34" charset="0"/>
+                <a:cs typeface="Times New Roman" panose="02020603050405020304" pitchFamily="18" charset="0"/>
+              </a:rPr>
+              <a:t>()	</a:t>
+            </a:r>
+            <a:r>
+              <a:rPr lang="en-IN" sz="1600" dirty="0" smtClean="0">
+                <a:latin typeface="Courier New" panose="02070309020205020404" pitchFamily="49" charset="0"/>
+                <a:ea typeface="Calibri" panose="020F0502020204030204" pitchFamily="34" charset="0"/>
+                <a:cs typeface="Times New Roman" panose="02020603050405020304" pitchFamily="18" charset="0"/>
+              </a:rPr>
+              <a:t>	SEARCH</a:t>
+            </a:r>
+            <a:r>
+              <a:rPr lang="en-IN" sz="1600" dirty="0">
+                <a:latin typeface="Courier New" panose="02070309020205020404" pitchFamily="49" charset="0"/>
+                <a:ea typeface="Calibri" panose="020F0502020204030204" pitchFamily="34" charset="0"/>
+                <a:cs typeface="Times New Roman" panose="02020603050405020304" pitchFamily="18" charset="0"/>
+              </a:rPr>
+              <a:t>("BI", "Power BI")	</a:t>
+            </a:r>
+            <a:r>
+              <a:rPr lang="en-IN" sz="1600" dirty="0" smtClean="0">
+                <a:latin typeface="Courier New" panose="02070309020205020404" pitchFamily="49" charset="0"/>
+                <a:ea typeface="Calibri" panose="020F0502020204030204" pitchFamily="34" charset="0"/>
+                <a:cs typeface="Times New Roman" panose="02020603050405020304" pitchFamily="18" charset="0"/>
+              </a:rPr>
+              <a:t>		7</a:t>
+            </a:r>
+            <a:endParaRPr lang="en-IN" sz="1600" dirty="0">
+              <a:latin typeface="Calibri" panose="020F0502020204030204" pitchFamily="34" charset="0"/>
+              <a:ea typeface="Calibri" panose="020F0502020204030204" pitchFamily="34" charset="0"/>
+              <a:cs typeface="Times New Roman" panose="02020603050405020304" pitchFamily="18" charset="0"/>
+            </a:endParaRPr>
+          </a:p>
+          <a:p>
+            <a:pPr>
+              <a:lnSpc>
+                <a:spcPct val="107000"/>
+              </a:lnSpc>
+            </a:pPr>
+            <a:endParaRPr lang="en-IN" sz="1600" dirty="0" smtClean="0">
+              <a:latin typeface="Courier New" panose="02070309020205020404" pitchFamily="49" charset="0"/>
+              <a:ea typeface="Calibri" panose="020F0502020204030204" pitchFamily="34" charset="0"/>
+              <a:cs typeface="Times New Roman" panose="02020603050405020304" pitchFamily="18" charset="0"/>
+            </a:endParaRPr>
+          </a:p>
+          <a:p>
+            <a:pPr>
+              <a:lnSpc>
+                <a:spcPct val="107000"/>
+              </a:lnSpc>
+            </a:pPr>
+            <a:endParaRPr lang="en-IN" sz="1600" dirty="0" smtClean="0">
+              <a:latin typeface="Courier New" panose="02070309020205020404" pitchFamily="49" charset="0"/>
+              <a:ea typeface="Calibri" panose="020F0502020204030204" pitchFamily="34" charset="0"/>
+              <a:cs typeface="Times New Roman" panose="02020603050405020304" pitchFamily="18" charset="0"/>
+            </a:endParaRPr>
+          </a:p>
+          <a:p>
+            <a:pPr>
+              <a:lnSpc>
+                <a:spcPct val="107000"/>
+              </a:lnSpc>
+            </a:pPr>
+            <a:r>
+              <a:rPr lang="en-IN" sz="1600" dirty="0" smtClean="0">
+                <a:latin typeface="Courier New" panose="02070309020205020404" pitchFamily="49" charset="0"/>
+                <a:ea typeface="Calibri" panose="020F0502020204030204" pitchFamily="34" charset="0"/>
+                <a:cs typeface="Times New Roman" panose="02020603050405020304" pitchFamily="18" charset="0"/>
+              </a:rPr>
+              <a:t>CONCATENATE</a:t>
+            </a:r>
+            <a:r>
+              <a:rPr lang="en-IN" sz="1600" dirty="0">
+                <a:latin typeface="Courier New" panose="02070309020205020404" pitchFamily="49" charset="0"/>
+                <a:ea typeface="Calibri" panose="020F0502020204030204" pitchFamily="34" charset="0"/>
+                <a:cs typeface="Times New Roman" panose="02020603050405020304" pitchFamily="18" charset="0"/>
+              </a:rPr>
+              <a:t>()	</a:t>
+            </a:r>
+            <a:r>
+              <a:rPr lang="en-IN" sz="1600" dirty="0" smtClean="0">
+                <a:latin typeface="Courier New" panose="02070309020205020404" pitchFamily="49" charset="0"/>
+                <a:ea typeface="Calibri" panose="020F0502020204030204" pitchFamily="34" charset="0"/>
+                <a:cs typeface="Times New Roman" panose="02020603050405020304" pitchFamily="18" charset="0"/>
+              </a:rPr>
+              <a:t>	CONCATENATE</a:t>
+            </a:r>
+            <a:r>
+              <a:rPr lang="en-IN" sz="1600" dirty="0">
+                <a:latin typeface="Courier New" panose="02070309020205020404" pitchFamily="49" charset="0"/>
+                <a:ea typeface="Calibri" panose="020F0502020204030204" pitchFamily="34" charset="0"/>
+                <a:cs typeface="Times New Roman" panose="02020603050405020304" pitchFamily="18" charset="0"/>
+              </a:rPr>
+              <a:t>("Hello", " ", "World")	</a:t>
+            </a:r>
+            <a:r>
+              <a:rPr lang="en-IN" sz="1600" dirty="0" smtClean="0">
+                <a:latin typeface="Courier New" panose="02070309020205020404" pitchFamily="49" charset="0"/>
+                <a:ea typeface="Calibri" panose="020F0502020204030204" pitchFamily="34" charset="0"/>
+                <a:cs typeface="Times New Roman" panose="02020603050405020304" pitchFamily="18" charset="0"/>
+              </a:rPr>
+              <a:t>	Hello World</a:t>
+            </a:r>
+            <a:endParaRPr lang="en-IN" sz="1600" dirty="0">
+              <a:latin typeface="Calibri" panose="020F0502020204030204" pitchFamily="34" charset="0"/>
+              <a:ea typeface="Calibri" panose="020F0502020204030204" pitchFamily="34" charset="0"/>
+              <a:cs typeface="Times New Roman" panose="02020603050405020304" pitchFamily="18" charset="0"/>
+            </a:endParaRPr>
+          </a:p>
+        </p:txBody>
+      </p:sp>
+    </p:spTree>
+    <p:extLst>
+      <p:ext uri="{BB962C8B-B14F-4D97-AF65-F5344CB8AC3E}">
+        <p14:creationId xmlns:p14="http://schemas.microsoft.com/office/powerpoint/2010/main" val="1925480359"/>
+      </p:ext>
+    </p:extLst>
+  </p:cSld>
+  <p:clrMapOvr>
+    <a:masterClrMapping/>
+  </p:clrMapOvr>
+  <p:timing>
+    <p:tnLst>
+      <p:par>
+        <p:cTn id="1" dur="indefinite" restart="never" nodeType="tmRoot"/>
+      </p:par>
+    </p:tnLst>
   </p:timing>
 </p:sld>
 </file>

--- a/17 18 20/5.Power Bi/5) Dax/Dax.pptx
+++ b/17 18 20/5.Power Bi/5) Dax/Dax.pptx
@@ -2,10 +2,10 @@
 <file path=ppt/presentation.xml><?xml version="1.0" encoding="utf-8"?>
 <p:presentation xmlns:a="http://schemas.openxmlformats.org/drawingml/2006/main" xmlns:r="http://schemas.openxmlformats.org/officeDocument/2006/relationships" xmlns:p="http://schemas.openxmlformats.org/presentationml/2006/main" saveSubsetFonts="1">
   <p:sldMasterIdLst>
-    <p:sldMasterId id="2147483660" r:id="rId1"/>
+    <p:sldMasterId id="2147483990" r:id="rId1"/>
   </p:sldMasterIdLst>
   <p:notesMasterIdLst>
-    <p:notesMasterId r:id="rId14"/>
+    <p:notesMasterId r:id="rId19"/>
   </p:notesMasterIdLst>
   <p:sldIdLst>
     <p:sldId id="291" r:id="rId2"/>
@@ -15,11 +15,16 @@
     <p:sldId id="292" r:id="rId6"/>
     <p:sldId id="289" r:id="rId7"/>
     <p:sldId id="290" r:id="rId8"/>
-    <p:sldId id="297" r:id="rId9"/>
-    <p:sldId id="270" r:id="rId10"/>
-    <p:sldId id="294" r:id="rId11"/>
-    <p:sldId id="295" r:id="rId12"/>
-    <p:sldId id="296" r:id="rId13"/>
+    <p:sldId id="298" r:id="rId9"/>
+    <p:sldId id="297" r:id="rId10"/>
+    <p:sldId id="301" r:id="rId11"/>
+    <p:sldId id="270" r:id="rId12"/>
+    <p:sldId id="302" r:id="rId13"/>
+    <p:sldId id="303" r:id="rId14"/>
+    <p:sldId id="300" r:id="rId15"/>
+    <p:sldId id="299" r:id="rId16"/>
+    <p:sldId id="295" r:id="rId17"/>
+    <p:sldId id="296" r:id="rId18"/>
   </p:sldIdLst>
   <p:sldSz cx="12192000" cy="6858000"/>
   <p:notesSz cx="6858000" cy="9144000"/>
@@ -208,7 +213,7 @@
           <a:p>
             <a:fld id="{B17773B0-9C71-4C42-839B-CED3341CD232}" type="datetimeFigureOut">
               <a:rPr lang="en-IN" smtClean="0"/>
-              <a:t>18-08-2026</a:t>
+              <a:t>21-08-2026</a:t>
             </a:fld>
             <a:endParaRPr lang="en-IN"/>
           </a:p>
@@ -662,7 +667,7 @@
           <a:p>
             <a:fld id="{DC8321A5-74C1-4574-A6AA-F1EDDDF12D9F}" type="datetimeFigureOut">
               <a:rPr lang="en-IN" smtClean="0"/>
-              <a:t>18-08-2026</a:t>
+              <a:t>21-08-2026</a:t>
             </a:fld>
             <a:endParaRPr lang="en-IN"/>
           </a:p>
@@ -713,7 +718,7 @@
     </p:spTree>
     <p:extLst>
       <p:ext uri="{BB962C8B-B14F-4D97-AF65-F5344CB8AC3E}">
-        <p14:creationId xmlns:p14="http://schemas.microsoft.com/office/powerpoint/2010/main" val="741173562"/>
+        <p14:creationId xmlns:p14="http://schemas.microsoft.com/office/powerpoint/2010/main" val="1756502092"/>
       </p:ext>
     </p:extLst>
   </p:cSld>
@@ -937,7 +942,7 @@
           <a:p>
             <a:fld id="{DC8321A5-74C1-4574-A6AA-F1EDDDF12D9F}" type="datetimeFigureOut">
               <a:rPr lang="en-IN" smtClean="0"/>
-              <a:t>18-08-2026</a:t>
+              <a:t>21-08-2026</a:t>
             </a:fld>
             <a:endParaRPr lang="en-IN"/>
           </a:p>
@@ -988,7 +993,7 @@
     </p:spTree>
     <p:extLst>
       <p:ext uri="{BB962C8B-B14F-4D97-AF65-F5344CB8AC3E}">
-        <p14:creationId xmlns:p14="http://schemas.microsoft.com/office/powerpoint/2010/main" val="460824083"/>
+        <p14:creationId xmlns:p14="http://schemas.microsoft.com/office/powerpoint/2010/main" val="484488624"/>
       </p:ext>
     </p:extLst>
   </p:cSld>
@@ -1131,7 +1136,7 @@
           <a:p>
             <a:fld id="{DC8321A5-74C1-4574-A6AA-F1EDDDF12D9F}" type="datetimeFigureOut">
               <a:rPr lang="en-IN" smtClean="0"/>
-              <a:t>18-08-2026</a:t>
+              <a:t>21-08-2026</a:t>
             </a:fld>
             <a:endParaRPr lang="en-IN"/>
           </a:p>
@@ -1182,7 +1187,7 @@
     </p:spTree>
     <p:extLst>
       <p:ext uri="{BB962C8B-B14F-4D97-AF65-F5344CB8AC3E}">
-        <p14:creationId xmlns:p14="http://schemas.microsoft.com/office/powerpoint/2010/main" val="1833044039"/>
+        <p14:creationId xmlns:p14="http://schemas.microsoft.com/office/powerpoint/2010/main" val="2297165862"/>
       </p:ext>
     </p:extLst>
   </p:cSld>
@@ -1404,7 +1409,7 @@
           <a:p>
             <a:fld id="{DC8321A5-74C1-4574-A6AA-F1EDDDF12D9F}" type="datetimeFigureOut">
               <a:rPr lang="en-IN" smtClean="0"/>
-              <a:t>18-08-2026</a:t>
+              <a:t>21-08-2026</a:t>
             </a:fld>
             <a:endParaRPr lang="en-IN"/>
           </a:p>
@@ -1549,7 +1554,7 @@
     </p:spTree>
     <p:extLst>
       <p:ext uri="{BB962C8B-B14F-4D97-AF65-F5344CB8AC3E}">
-        <p14:creationId xmlns:p14="http://schemas.microsoft.com/office/powerpoint/2010/main" val="740470158"/>
+        <p14:creationId xmlns:p14="http://schemas.microsoft.com/office/powerpoint/2010/main" val="1031242183"/>
       </p:ext>
     </p:extLst>
   </p:cSld>
@@ -1745,7 +1750,7 @@
           <a:p>
             <a:fld id="{DC8321A5-74C1-4574-A6AA-F1EDDDF12D9F}" type="datetimeFigureOut">
               <a:rPr lang="en-IN" smtClean="0"/>
-              <a:t>18-08-2026</a:t>
+              <a:t>21-08-2026</a:t>
             </a:fld>
             <a:endParaRPr lang="en-IN"/>
           </a:p>
@@ -1796,7 +1801,7 @@
     </p:spTree>
     <p:extLst>
       <p:ext uri="{BB962C8B-B14F-4D97-AF65-F5344CB8AC3E}">
-        <p14:creationId xmlns:p14="http://schemas.microsoft.com/office/powerpoint/2010/main" val="4016759612"/>
+        <p14:creationId xmlns:p14="http://schemas.microsoft.com/office/powerpoint/2010/main" val="3611841379"/>
       </p:ext>
     </p:extLst>
   </p:cSld>
@@ -2368,7 +2373,7 @@
           <a:p>
             <a:fld id="{DC8321A5-74C1-4574-A6AA-F1EDDDF12D9F}" type="datetimeFigureOut">
               <a:rPr lang="en-IN" smtClean="0"/>
-              <a:t>18-08-2026</a:t>
+              <a:t>21-08-2026</a:t>
             </a:fld>
             <a:endParaRPr lang="en-IN"/>
           </a:p>
@@ -2419,7 +2424,7 @@
     </p:spTree>
     <p:extLst>
       <p:ext uri="{BB962C8B-B14F-4D97-AF65-F5344CB8AC3E}">
-        <p14:creationId xmlns:p14="http://schemas.microsoft.com/office/powerpoint/2010/main" val="2124838913"/>
+        <p14:creationId xmlns:p14="http://schemas.microsoft.com/office/powerpoint/2010/main" val="3038061713"/>
       </p:ext>
     </p:extLst>
   </p:cSld>
@@ -3228,7 +3233,7 @@
           <a:p>
             <a:fld id="{DC8321A5-74C1-4574-A6AA-F1EDDDF12D9F}" type="datetimeFigureOut">
               <a:rPr lang="en-IN" smtClean="0"/>
-              <a:t>18-08-2026</a:t>
+              <a:t>21-08-2026</a:t>
             </a:fld>
             <a:endParaRPr lang="en-IN"/>
           </a:p>
@@ -3279,7 +3284,7 @@
     </p:spTree>
     <p:extLst>
       <p:ext uri="{BB962C8B-B14F-4D97-AF65-F5344CB8AC3E}">
-        <p14:creationId xmlns:p14="http://schemas.microsoft.com/office/powerpoint/2010/main" val="483539924"/>
+        <p14:creationId xmlns:p14="http://schemas.microsoft.com/office/powerpoint/2010/main" val="1701019177"/>
       </p:ext>
     </p:extLst>
   </p:cSld>
@@ -3398,7 +3403,7 @@
           <a:p>
             <a:fld id="{DC8321A5-74C1-4574-A6AA-F1EDDDF12D9F}" type="datetimeFigureOut">
               <a:rPr lang="en-IN" smtClean="0"/>
-              <a:t>18-08-2026</a:t>
+              <a:t>21-08-2026</a:t>
             </a:fld>
             <a:endParaRPr lang="en-IN"/>
           </a:p>
@@ -3449,7 +3454,7 @@
     </p:spTree>
     <p:extLst>
       <p:ext uri="{BB962C8B-B14F-4D97-AF65-F5344CB8AC3E}">
-        <p14:creationId xmlns:p14="http://schemas.microsoft.com/office/powerpoint/2010/main" val="307212075"/>
+        <p14:creationId xmlns:p14="http://schemas.microsoft.com/office/powerpoint/2010/main" val="1934929591"/>
       </p:ext>
     </p:extLst>
   </p:cSld>
@@ -3578,7 +3583,7 @@
           <a:p>
             <a:fld id="{DC8321A5-74C1-4574-A6AA-F1EDDDF12D9F}" type="datetimeFigureOut">
               <a:rPr lang="en-IN" smtClean="0"/>
-              <a:t>18-08-2026</a:t>
+              <a:t>21-08-2026</a:t>
             </a:fld>
             <a:endParaRPr lang="en-IN"/>
           </a:p>
@@ -3629,7 +3634,7 @@
     </p:spTree>
     <p:extLst>
       <p:ext uri="{BB962C8B-B14F-4D97-AF65-F5344CB8AC3E}">
-        <p14:creationId xmlns:p14="http://schemas.microsoft.com/office/powerpoint/2010/main" val="4294184451"/>
+        <p14:creationId xmlns:p14="http://schemas.microsoft.com/office/powerpoint/2010/main" val="2678716088"/>
       </p:ext>
     </p:extLst>
   </p:cSld>
@@ -3748,7 +3753,7 @@
           <a:p>
             <a:fld id="{DC8321A5-74C1-4574-A6AA-F1EDDDF12D9F}" type="datetimeFigureOut">
               <a:rPr lang="en-IN" smtClean="0"/>
-              <a:t>18-08-2026</a:t>
+              <a:t>21-08-2026</a:t>
             </a:fld>
             <a:endParaRPr lang="en-IN"/>
           </a:p>
@@ -3799,7 +3804,7 @@
     </p:spTree>
     <p:extLst>
       <p:ext uri="{BB962C8B-B14F-4D97-AF65-F5344CB8AC3E}">
-        <p14:creationId xmlns:p14="http://schemas.microsoft.com/office/powerpoint/2010/main" val="3353819168"/>
+        <p14:creationId xmlns:p14="http://schemas.microsoft.com/office/powerpoint/2010/main" val="1610631521"/>
       </p:ext>
     </p:extLst>
   </p:cSld>
@@ -3995,7 +4000,7 @@
           <a:p>
             <a:fld id="{DC8321A5-74C1-4574-A6AA-F1EDDDF12D9F}" type="datetimeFigureOut">
               <a:rPr lang="en-IN" smtClean="0"/>
-              <a:t>18-08-2026</a:t>
+              <a:t>21-08-2026</a:t>
             </a:fld>
             <a:endParaRPr lang="en-IN"/>
           </a:p>
@@ -4046,7 +4051,7 @@
     </p:spTree>
     <p:extLst>
       <p:ext uri="{BB962C8B-B14F-4D97-AF65-F5344CB8AC3E}">
-        <p14:creationId xmlns:p14="http://schemas.microsoft.com/office/powerpoint/2010/main" val="2855781516"/>
+        <p14:creationId xmlns:p14="http://schemas.microsoft.com/office/powerpoint/2010/main" val="190369973"/>
       </p:ext>
     </p:extLst>
   </p:cSld>
@@ -4287,7 +4292,7 @@
           <a:p>
             <a:fld id="{DC8321A5-74C1-4574-A6AA-F1EDDDF12D9F}" type="datetimeFigureOut">
               <a:rPr lang="en-IN" smtClean="0"/>
-              <a:t>18-08-2026</a:t>
+              <a:t>21-08-2026</a:t>
             </a:fld>
             <a:endParaRPr lang="en-IN"/>
           </a:p>
@@ -4338,7 +4343,7 @@
     </p:spTree>
     <p:extLst>
       <p:ext uri="{BB962C8B-B14F-4D97-AF65-F5344CB8AC3E}">
-        <p14:creationId xmlns:p14="http://schemas.microsoft.com/office/powerpoint/2010/main" val="2252621967"/>
+        <p14:creationId xmlns:p14="http://schemas.microsoft.com/office/powerpoint/2010/main" val="2947061999"/>
       </p:ext>
     </p:extLst>
   </p:cSld>
@@ -4731,7 +4736,7 @@
           <a:p>
             <a:fld id="{DC8321A5-74C1-4574-A6AA-F1EDDDF12D9F}" type="datetimeFigureOut">
               <a:rPr lang="en-IN" smtClean="0"/>
-              <a:t>18-08-2026</a:t>
+              <a:t>21-08-2026</a:t>
             </a:fld>
             <a:endParaRPr lang="en-IN"/>
           </a:p>
@@ -4782,7 +4787,7 @@
     </p:spTree>
     <p:extLst>
       <p:ext uri="{BB962C8B-B14F-4D97-AF65-F5344CB8AC3E}">
-        <p14:creationId xmlns:p14="http://schemas.microsoft.com/office/powerpoint/2010/main" val="1427198820"/>
+        <p14:creationId xmlns:p14="http://schemas.microsoft.com/office/powerpoint/2010/main" val="881634238"/>
       </p:ext>
     </p:extLst>
   </p:cSld>
@@ -4849,7 +4854,7 @@
           <a:p>
             <a:fld id="{DC8321A5-74C1-4574-A6AA-F1EDDDF12D9F}" type="datetimeFigureOut">
               <a:rPr lang="en-IN" smtClean="0"/>
-              <a:t>18-08-2026</a:t>
+              <a:t>21-08-2026</a:t>
             </a:fld>
             <a:endParaRPr lang="en-IN"/>
           </a:p>
@@ -4900,7 +4905,7 @@
     </p:spTree>
     <p:extLst>
       <p:ext uri="{BB962C8B-B14F-4D97-AF65-F5344CB8AC3E}">
-        <p14:creationId xmlns:p14="http://schemas.microsoft.com/office/powerpoint/2010/main" val="787433653"/>
+        <p14:creationId xmlns:p14="http://schemas.microsoft.com/office/powerpoint/2010/main" val="757981222"/>
       </p:ext>
     </p:extLst>
   </p:cSld>
@@ -4944,7 +4949,7 @@
           <a:p>
             <a:fld id="{DC8321A5-74C1-4574-A6AA-F1EDDDF12D9F}" type="datetimeFigureOut">
               <a:rPr lang="en-IN" smtClean="0"/>
-              <a:t>18-08-2026</a:t>
+              <a:t>21-08-2026</a:t>
             </a:fld>
             <a:endParaRPr lang="en-IN"/>
           </a:p>
@@ -4995,7 +5000,7 @@
     </p:spTree>
     <p:extLst>
       <p:ext uri="{BB962C8B-B14F-4D97-AF65-F5344CB8AC3E}">
-        <p14:creationId xmlns:p14="http://schemas.microsoft.com/office/powerpoint/2010/main" val="3670882679"/>
+        <p14:creationId xmlns:p14="http://schemas.microsoft.com/office/powerpoint/2010/main" val="1334415862"/>
       </p:ext>
     </p:extLst>
   </p:cSld>
@@ -5223,7 +5228,7 @@
           <a:p>
             <a:fld id="{DC8321A5-74C1-4574-A6AA-F1EDDDF12D9F}" type="datetimeFigureOut">
               <a:rPr lang="en-IN" smtClean="0"/>
-              <a:t>18-08-2026</a:t>
+              <a:t>21-08-2026</a:t>
             </a:fld>
             <a:endParaRPr lang="en-IN"/>
           </a:p>
@@ -5274,7 +5279,7 @@
     </p:spTree>
     <p:extLst>
       <p:ext uri="{BB962C8B-B14F-4D97-AF65-F5344CB8AC3E}">
-        <p14:creationId xmlns:p14="http://schemas.microsoft.com/office/powerpoint/2010/main" val="3325570497"/>
+        <p14:creationId xmlns:p14="http://schemas.microsoft.com/office/powerpoint/2010/main" val="4283391756"/>
       </p:ext>
     </p:extLst>
   </p:cSld>
@@ -5498,7 +5503,7 @@
           <a:p>
             <a:fld id="{DC8321A5-74C1-4574-A6AA-F1EDDDF12D9F}" type="datetimeFigureOut">
               <a:rPr lang="en-IN" smtClean="0"/>
-              <a:t>18-08-2026</a:t>
+              <a:t>21-08-2026</a:t>
             </a:fld>
             <a:endParaRPr lang="en-IN"/>
           </a:p>
@@ -5549,7 +5554,7 @@
     </p:spTree>
     <p:extLst>
       <p:ext uri="{BB962C8B-B14F-4D97-AF65-F5344CB8AC3E}">
-        <p14:creationId xmlns:p14="http://schemas.microsoft.com/office/powerpoint/2010/main" val="2859363665"/>
+        <p14:creationId xmlns:p14="http://schemas.microsoft.com/office/powerpoint/2010/main" val="95465005"/>
       </p:ext>
     </p:extLst>
   </p:cSld>
@@ -5927,7 +5932,7 @@
           <a:p>
             <a:fld id="{DC8321A5-74C1-4574-A6AA-F1EDDDF12D9F}" type="datetimeFigureOut">
               <a:rPr lang="en-IN" smtClean="0"/>
-              <a:t>18-08-2026</a:t>
+              <a:t>21-08-2026</a:t>
             </a:fld>
             <a:endParaRPr lang="en-IN"/>
           </a:p>
@@ -6015,29 +6020,29 @@
     </p:spTree>
     <p:extLst>
       <p:ext uri="{BB962C8B-B14F-4D97-AF65-F5344CB8AC3E}">
-        <p14:creationId xmlns:p14="http://schemas.microsoft.com/office/powerpoint/2010/main" val="3074431728"/>
+        <p14:creationId xmlns:p14="http://schemas.microsoft.com/office/powerpoint/2010/main" val="1598869137"/>
       </p:ext>
     </p:extLst>
   </p:cSld>
   <p:clrMap bg1="dk1" tx1="lt1" bg2="dk2" tx2="lt2" accent1="accent1" accent2="accent2" accent3="accent3" accent4="accent4" accent5="accent5" accent6="accent6" hlink="hlink" folHlink="folHlink"/>
   <p:sldLayoutIdLst>
-    <p:sldLayoutId id="2147483661" r:id="rId1"/>
-    <p:sldLayoutId id="2147483662" r:id="rId2"/>
-    <p:sldLayoutId id="2147483663" r:id="rId3"/>
-    <p:sldLayoutId id="2147483664" r:id="rId4"/>
-    <p:sldLayoutId id="2147483665" r:id="rId5"/>
-    <p:sldLayoutId id="2147483666" r:id="rId6"/>
-    <p:sldLayoutId id="2147483667" r:id="rId7"/>
-    <p:sldLayoutId id="2147483668" r:id="rId8"/>
-    <p:sldLayoutId id="2147483669" r:id="rId9"/>
-    <p:sldLayoutId id="2147483670" r:id="rId10"/>
-    <p:sldLayoutId id="2147483671" r:id="rId11"/>
-    <p:sldLayoutId id="2147483672" r:id="rId12"/>
-    <p:sldLayoutId id="2147483673" r:id="rId13"/>
-    <p:sldLayoutId id="2147483674" r:id="rId14"/>
-    <p:sldLayoutId id="2147483675" r:id="rId15"/>
-    <p:sldLayoutId id="2147483676" r:id="rId16"/>
-    <p:sldLayoutId id="2147483677" r:id="rId17"/>
+    <p:sldLayoutId id="2147483991" r:id="rId1"/>
+    <p:sldLayoutId id="2147483992" r:id="rId2"/>
+    <p:sldLayoutId id="2147483993" r:id="rId3"/>
+    <p:sldLayoutId id="2147483994" r:id="rId4"/>
+    <p:sldLayoutId id="2147483995" r:id="rId5"/>
+    <p:sldLayoutId id="2147483996" r:id="rId6"/>
+    <p:sldLayoutId id="2147483997" r:id="rId7"/>
+    <p:sldLayoutId id="2147483998" r:id="rId8"/>
+    <p:sldLayoutId id="2147483999" r:id="rId9"/>
+    <p:sldLayoutId id="2147484000" r:id="rId10"/>
+    <p:sldLayoutId id="2147484001" r:id="rId11"/>
+    <p:sldLayoutId id="2147484002" r:id="rId12"/>
+    <p:sldLayoutId id="2147484003" r:id="rId13"/>
+    <p:sldLayoutId id="2147484004" r:id="rId14"/>
+    <p:sldLayoutId id="2147484005" r:id="rId15"/>
+    <p:sldLayoutId id="2147484006" r:id="rId16"/>
+    <p:sldLayoutId id="2147484007" r:id="rId17"/>
   </p:sldLayoutIdLst>
   <p:txStyles>
     <p:titleStyle>
@@ -6976,743 +6981,53 @@
       </p:grpSpPr>
       <p:sp>
         <p:nvSpPr>
-          <p:cNvPr id="4" name="Rectangle 3"/>
-          <p:cNvSpPr/>
+          <p:cNvPr id="4" name="TextBox 3"/>
+          <p:cNvSpPr txBox="1"/>
           <p:nvPr/>
         </p:nvSpPr>
         <p:spPr>
           <a:xfrm>
-            <a:off x="845975" y="2159086"/>
-            <a:ext cx="9986866" cy="2417713"/>
-          </a:xfrm>
-          <a:prstGeom prst="rect">
-            <a:avLst/>
-          </a:prstGeom>
-        </p:spPr>
-        <p:txBody>
-          <a:bodyPr wrap="square">
-            <a:spAutoFit/>
-          </a:bodyPr>
-          <a:lstStyle/>
-          <a:p>
-            <a:pPr>
-              <a:lnSpc>
-                <a:spcPct val="107000"/>
-              </a:lnSpc>
-              <a:spcAft>
-                <a:spcPts val="600"/>
-              </a:spcAft>
-              <a:tabLst>
-                <a:tab pos="581660" algn="l"/>
-                <a:tab pos="1163320" algn="l"/>
-                <a:tab pos="1744980" algn="l"/>
-                <a:tab pos="2326640" algn="l"/>
-                <a:tab pos="2908300" algn="l"/>
-                <a:tab pos="3489960" algn="l"/>
-                <a:tab pos="4071620" algn="l"/>
-                <a:tab pos="4653280" algn="l"/>
-                <a:tab pos="5234940" algn="l"/>
-                <a:tab pos="5816600" algn="l"/>
-                <a:tab pos="6398260" algn="l"/>
-                <a:tab pos="6979920" algn="l"/>
-                <a:tab pos="7561580" algn="l"/>
-                <a:tab pos="8143240" algn="l"/>
-                <a:tab pos="8724900" algn="l"/>
-                <a:tab pos="9306560" algn="l"/>
-              </a:tabLst>
-            </a:pPr>
-            <a:r>
-              <a:rPr lang="en-IN" dirty="0">
-                <a:latin typeface="Courier New" panose="02070309020205020404" pitchFamily="49" charset="0"/>
-                <a:ea typeface="Times New Roman" panose="02020603050405020304" pitchFamily="18" charset="0"/>
-                <a:cs typeface="Courier New" panose="02070309020205020404" pitchFamily="49" charset="0"/>
-              </a:rPr>
-              <a:t>CALCULATE(&lt;expression&gt;, &lt;filter1&gt;, &lt;filter2&gt;, ...)</a:t>
-            </a:r>
-            <a:endParaRPr lang="en-IN" dirty="0">
-              <a:latin typeface="Courier New" panose="02070309020205020404" pitchFamily="49" charset="0"/>
-              <a:ea typeface="Calibri" panose="020F0502020204030204" pitchFamily="34" charset="0"/>
-              <a:cs typeface="Courier New" panose="02070309020205020404" pitchFamily="49" charset="0"/>
-            </a:endParaRPr>
-          </a:p>
-          <a:p>
-            <a:pPr>
-              <a:lnSpc>
-                <a:spcPct val="107000"/>
-              </a:lnSpc>
-              <a:spcAft>
-                <a:spcPts val="600"/>
-              </a:spcAft>
-            </a:pPr>
-            <a:r>
-              <a:rPr lang="en-IN" dirty="0">
-                <a:latin typeface="Courier New" panose="02070309020205020404" pitchFamily="49" charset="0"/>
-                <a:ea typeface="Calibri" panose="020F0502020204030204" pitchFamily="34" charset="0"/>
-                <a:cs typeface="Courier New" panose="02070309020205020404" pitchFamily="49" charset="0"/>
-              </a:rPr>
-              <a:t> </a:t>
-            </a:r>
-            <a:r>
-              <a:rPr lang="en-IN" dirty="0" smtClean="0">
-                <a:latin typeface="Courier New" panose="02070309020205020404" pitchFamily="49" charset="0"/>
-                <a:ea typeface="Calibri" panose="020F0502020204030204" pitchFamily="34" charset="0"/>
-                <a:cs typeface="Courier New" panose="02070309020205020404" pitchFamily="49" charset="0"/>
-              </a:rPr>
-              <a:t>  </a:t>
-            </a:r>
-            <a:r>
-              <a:rPr lang="en-IN" dirty="0" smtClean="0">
-                <a:latin typeface="Courier New" panose="02070309020205020404" pitchFamily="49" charset="0"/>
-                <a:ea typeface="Times New Roman" panose="02020603050405020304" pitchFamily="18" charset="0"/>
-                <a:cs typeface="Courier New" panose="02070309020205020404" pitchFamily="49" charset="0"/>
-              </a:rPr>
-              <a:t>East </a:t>
-            </a:r>
-            <a:r>
-              <a:rPr lang="en-IN" dirty="0">
-                <a:latin typeface="Courier New" panose="02070309020205020404" pitchFamily="49" charset="0"/>
-                <a:ea typeface="Times New Roman" panose="02020603050405020304" pitchFamily="18" charset="0"/>
-                <a:cs typeface="Courier New" panose="02070309020205020404" pitchFamily="49" charset="0"/>
-              </a:rPr>
-              <a:t>Sales =</a:t>
-            </a:r>
-            <a:endParaRPr lang="en-IN" dirty="0">
-              <a:latin typeface="Courier New" panose="02070309020205020404" pitchFamily="49" charset="0"/>
-              <a:ea typeface="Calibri" panose="020F0502020204030204" pitchFamily="34" charset="0"/>
-              <a:cs typeface="Courier New" panose="02070309020205020404" pitchFamily="49" charset="0"/>
-            </a:endParaRPr>
-          </a:p>
-          <a:p>
-            <a:pPr marL="914400" lvl="1">
-              <a:lnSpc>
-                <a:spcPct val="107000"/>
-              </a:lnSpc>
-              <a:spcAft>
-                <a:spcPts val="600"/>
-              </a:spcAft>
-              <a:tabLst>
-                <a:tab pos="581660" algn="l"/>
-                <a:tab pos="1163320" algn="l"/>
-                <a:tab pos="1744980" algn="l"/>
-                <a:tab pos="2326640" algn="l"/>
-                <a:tab pos="2908300" algn="l"/>
-                <a:tab pos="3489960" algn="l"/>
-                <a:tab pos="4071620" algn="l"/>
-                <a:tab pos="4653280" algn="l"/>
-                <a:tab pos="5234940" algn="l"/>
-                <a:tab pos="5816600" algn="l"/>
-                <a:tab pos="6398260" algn="l"/>
-                <a:tab pos="6979920" algn="l"/>
-                <a:tab pos="7561580" algn="l"/>
-                <a:tab pos="8143240" algn="l"/>
-                <a:tab pos="8724900" algn="l"/>
-                <a:tab pos="9306560" algn="l"/>
-              </a:tabLst>
-            </a:pPr>
-            <a:r>
-              <a:rPr lang="en-IN" dirty="0" smtClean="0">
-                <a:latin typeface="Courier New" panose="02070309020205020404" pitchFamily="49" charset="0"/>
-                <a:ea typeface="Times New Roman" panose="02020603050405020304" pitchFamily="18" charset="0"/>
-                <a:cs typeface="Courier New" panose="02070309020205020404" pitchFamily="49" charset="0"/>
-              </a:rPr>
-              <a:t>	CALCULATE(</a:t>
-            </a:r>
-            <a:r>
-              <a:rPr lang="en-IN" dirty="0">
-                <a:latin typeface="Courier New" panose="02070309020205020404" pitchFamily="49" charset="0"/>
-                <a:ea typeface="Calibri" panose="020F0502020204030204" pitchFamily="34" charset="0"/>
-                <a:cs typeface="Courier New" panose="02070309020205020404" pitchFamily="49" charset="0"/>
-              </a:rPr>
-              <a:t> </a:t>
-            </a:r>
-            <a:r>
-              <a:rPr lang="en-IN" dirty="0" smtClean="0">
-                <a:latin typeface="Courier New" panose="02070309020205020404" pitchFamily="49" charset="0"/>
-                <a:ea typeface="Calibri" panose="020F0502020204030204" pitchFamily="34" charset="0"/>
-                <a:cs typeface="Courier New" panose="02070309020205020404" pitchFamily="49" charset="0"/>
-              </a:rPr>
-              <a:t>sum(</a:t>
-            </a:r>
-            <a:r>
-              <a:rPr lang="en-IN" dirty="0" smtClean="0">
-                <a:latin typeface="Courier New" panose="02070309020205020404" pitchFamily="49" charset="0"/>
-                <a:ea typeface="Times New Roman" panose="02020603050405020304" pitchFamily="18" charset="0"/>
-                <a:cs typeface="Courier New" panose="02070309020205020404" pitchFamily="49" charset="0"/>
-              </a:rPr>
-              <a:t>[Total </a:t>
-            </a:r>
-            <a:r>
-              <a:rPr lang="en-IN" dirty="0">
-                <a:latin typeface="Courier New" panose="02070309020205020404" pitchFamily="49" charset="0"/>
-                <a:ea typeface="Times New Roman" panose="02020603050405020304" pitchFamily="18" charset="0"/>
-                <a:cs typeface="Courier New" panose="02070309020205020404" pitchFamily="49" charset="0"/>
-              </a:rPr>
-              <a:t>Sales</a:t>
-            </a:r>
-            <a:r>
-              <a:rPr lang="en-IN" dirty="0" smtClean="0">
-                <a:latin typeface="Courier New" panose="02070309020205020404" pitchFamily="49" charset="0"/>
-                <a:ea typeface="Times New Roman" panose="02020603050405020304" pitchFamily="18" charset="0"/>
-                <a:cs typeface="Courier New" panose="02070309020205020404" pitchFamily="49" charset="0"/>
-              </a:rPr>
-              <a:t>]),</a:t>
-            </a:r>
-            <a:r>
-              <a:rPr lang="en-IN" dirty="0" smtClean="0">
-                <a:latin typeface="Courier New" panose="02070309020205020404" pitchFamily="49" charset="0"/>
-                <a:ea typeface="Calibri" panose="020F0502020204030204" pitchFamily="34" charset="0"/>
-                <a:cs typeface="Courier New" panose="02070309020205020404" pitchFamily="49" charset="0"/>
-              </a:rPr>
-              <a:t> </a:t>
-            </a:r>
-            <a:r>
-              <a:rPr lang="en-IN" dirty="0" smtClean="0">
-                <a:latin typeface="Courier New" panose="02070309020205020404" pitchFamily="49" charset="0"/>
-                <a:ea typeface="Times New Roman" panose="02020603050405020304" pitchFamily="18" charset="0"/>
-                <a:cs typeface="Courier New" panose="02070309020205020404" pitchFamily="49" charset="0"/>
-              </a:rPr>
-              <a:t>Sales[Region</a:t>
-            </a:r>
-            <a:r>
-              <a:rPr lang="en-IN" dirty="0">
-                <a:latin typeface="Courier New" panose="02070309020205020404" pitchFamily="49" charset="0"/>
-                <a:ea typeface="Times New Roman" panose="02020603050405020304" pitchFamily="18" charset="0"/>
-                <a:cs typeface="Courier New" panose="02070309020205020404" pitchFamily="49" charset="0"/>
-              </a:rPr>
-              <a:t>] = "East</a:t>
-            </a:r>
-            <a:r>
-              <a:rPr lang="en-IN" dirty="0" smtClean="0">
-                <a:latin typeface="Courier New" panose="02070309020205020404" pitchFamily="49" charset="0"/>
-                <a:ea typeface="Times New Roman" panose="02020603050405020304" pitchFamily="18" charset="0"/>
-                <a:cs typeface="Courier New" panose="02070309020205020404" pitchFamily="49" charset="0"/>
-              </a:rPr>
-              <a:t>")</a:t>
-            </a:r>
-            <a:endParaRPr lang="en-IN" dirty="0">
-              <a:latin typeface="Courier New" panose="02070309020205020404" pitchFamily="49" charset="0"/>
-              <a:ea typeface="Calibri" panose="020F0502020204030204" pitchFamily="34" charset="0"/>
-              <a:cs typeface="Courier New" panose="02070309020205020404" pitchFamily="49" charset="0"/>
-            </a:endParaRPr>
-          </a:p>
-          <a:p>
-            <a:pPr marL="457200">
-              <a:lnSpc>
-                <a:spcPts val="1350"/>
-              </a:lnSpc>
-              <a:spcAft>
-                <a:spcPts val="600"/>
-              </a:spcAft>
-            </a:pPr>
-            <a:r>
-              <a:rPr lang="en-IN" dirty="0">
-                <a:latin typeface="Courier New" panose="02070309020205020404" pitchFamily="49" charset="0"/>
-                <a:ea typeface="Times New Roman" panose="02020603050405020304" pitchFamily="18" charset="0"/>
-                <a:cs typeface="Courier New" panose="02070309020205020404" pitchFamily="49" charset="0"/>
-              </a:rPr>
-              <a:t> </a:t>
-            </a:r>
-            <a:endParaRPr lang="en-IN" dirty="0" smtClean="0">
-              <a:latin typeface="Courier New" panose="02070309020205020404" pitchFamily="49" charset="0"/>
-              <a:ea typeface="Times New Roman" panose="02020603050405020304" pitchFamily="18" charset="0"/>
-              <a:cs typeface="Courier New" panose="02070309020205020404" pitchFamily="49" charset="0"/>
-            </a:endParaRPr>
-          </a:p>
-          <a:p>
-            <a:pPr marL="457200">
-              <a:lnSpc>
-                <a:spcPts val="1350"/>
-              </a:lnSpc>
-              <a:spcAft>
-                <a:spcPts val="600"/>
-              </a:spcAft>
-            </a:pPr>
-            <a:endParaRPr lang="en-IN" dirty="0" smtClean="0">
-              <a:latin typeface="Courier New" panose="02070309020205020404" pitchFamily="49" charset="0"/>
-              <a:ea typeface="Times New Roman" panose="02020603050405020304" pitchFamily="18" charset="0"/>
-              <a:cs typeface="Courier New" panose="02070309020205020404" pitchFamily="49" charset="0"/>
-            </a:endParaRPr>
-          </a:p>
-          <a:p>
-            <a:pPr marL="457200">
-              <a:lnSpc>
-                <a:spcPts val="1350"/>
-              </a:lnSpc>
-              <a:spcAft>
-                <a:spcPts val="600"/>
-              </a:spcAft>
-            </a:pPr>
-            <a:r>
-              <a:rPr lang="en-IN" dirty="0" smtClean="0">
-                <a:latin typeface="Courier New" panose="02070309020205020404" pitchFamily="49" charset="0"/>
-                <a:ea typeface="Times New Roman" panose="02020603050405020304" pitchFamily="18" charset="0"/>
-                <a:cs typeface="Courier New" panose="02070309020205020404" pitchFamily="49" charset="0"/>
-              </a:rPr>
-              <a:t>MS_CALC </a:t>
-            </a:r>
-            <a:r>
-              <a:rPr lang="en-IN" dirty="0">
-                <a:latin typeface="Courier New" panose="02070309020205020404" pitchFamily="49" charset="0"/>
-                <a:ea typeface="Times New Roman" panose="02020603050405020304" pitchFamily="18" charset="0"/>
-                <a:cs typeface="Courier New" panose="02070309020205020404" pitchFamily="49" charset="0"/>
-              </a:rPr>
-              <a:t>= </a:t>
-            </a:r>
-            <a:endParaRPr lang="en-IN" dirty="0" smtClean="0">
-              <a:latin typeface="Courier New" panose="02070309020205020404" pitchFamily="49" charset="0"/>
-              <a:ea typeface="Times New Roman" panose="02020603050405020304" pitchFamily="18" charset="0"/>
-              <a:cs typeface="Courier New" panose="02070309020205020404" pitchFamily="49" charset="0"/>
-            </a:endParaRPr>
-          </a:p>
-          <a:p>
-            <a:pPr marL="457200">
-              <a:lnSpc>
-                <a:spcPts val="1350"/>
-              </a:lnSpc>
-              <a:spcAft>
-                <a:spcPts val="600"/>
-              </a:spcAft>
-            </a:pPr>
-            <a:r>
-              <a:rPr lang="en-IN" dirty="0">
-                <a:latin typeface="Courier New" panose="02070309020205020404" pitchFamily="49" charset="0"/>
-                <a:ea typeface="Times New Roman" panose="02020603050405020304" pitchFamily="18" charset="0"/>
-                <a:cs typeface="Courier New" panose="02070309020205020404" pitchFamily="49" charset="0"/>
-              </a:rPr>
-              <a:t>	</a:t>
-            </a:r>
-            <a:r>
-              <a:rPr lang="en-IN" dirty="0" smtClean="0">
-                <a:latin typeface="Courier New" panose="02070309020205020404" pitchFamily="49" charset="0"/>
-                <a:ea typeface="Times New Roman" panose="02020603050405020304" pitchFamily="18" charset="0"/>
-                <a:cs typeface="Courier New" panose="02070309020205020404" pitchFamily="49" charset="0"/>
-              </a:rPr>
-              <a:t>CALCULATE( SUM(Orders[Sales]),Orders[Category</a:t>
-            </a:r>
-            <a:r>
-              <a:rPr lang="en-IN" dirty="0">
-                <a:latin typeface="Courier New" panose="02070309020205020404" pitchFamily="49" charset="0"/>
-                <a:ea typeface="Times New Roman" panose="02020603050405020304" pitchFamily="18" charset="0"/>
-                <a:cs typeface="Courier New" panose="02070309020205020404" pitchFamily="49" charset="0"/>
-              </a:rPr>
-              <a:t>]="Furniture</a:t>
-            </a:r>
-            <a:r>
-              <a:rPr lang="en-IN" dirty="0" smtClean="0">
-                <a:latin typeface="Courier New" panose="02070309020205020404" pitchFamily="49" charset="0"/>
-                <a:ea typeface="Times New Roman" panose="02020603050405020304" pitchFamily="18" charset="0"/>
-                <a:cs typeface="Courier New" panose="02070309020205020404" pitchFamily="49" charset="0"/>
-              </a:rPr>
-              <a:t>")</a:t>
-            </a:r>
-          </a:p>
-          <a:p>
-            <a:pPr marL="457200">
-              <a:lnSpc>
-                <a:spcPts val="1350"/>
-              </a:lnSpc>
-              <a:spcAft>
-                <a:spcPts val="600"/>
-              </a:spcAft>
-            </a:pPr>
-            <a:endParaRPr lang="en-IN" dirty="0">
-              <a:effectLst/>
-              <a:latin typeface="Courier New" panose="02070309020205020404" pitchFamily="49" charset="0"/>
-              <a:ea typeface="Calibri" panose="020F0502020204030204" pitchFamily="34" charset="0"/>
-              <a:cs typeface="Courier New" panose="02070309020205020404" pitchFamily="49" charset="0"/>
-            </a:endParaRPr>
-          </a:p>
-        </p:txBody>
-      </p:sp>
-      <p:sp>
-        <p:nvSpPr>
-          <p:cNvPr id="5" name="Rectangle 1"/>
-          <p:cNvSpPr>
-            <a:spLocks noChangeArrowheads="1"/>
-          </p:cNvSpPr>
-          <p:nvPr/>
-        </p:nvSpPr>
-        <p:spPr bwMode="auto">
-          <a:xfrm>
-            <a:off x="166395" y="403157"/>
-            <a:ext cx="9871788" cy="1077218"/>
+            <a:off x="791852" y="659876"/>
+            <a:ext cx="4619134" cy="923330"/>
           </a:xfrm>
           <a:prstGeom prst="rect">
             <a:avLst/>
           </a:prstGeom>
           <a:noFill/>
-          <a:ln>
-            <a:noFill/>
-          </a:ln>
-          <a:effectLst/>
-          <a:extLst>
-            <a:ext uri="{909E8E84-426E-40DD-AFC4-6F175D3DCCD1}">
-              <a14:hiddenFill xmlns:a14="http://schemas.microsoft.com/office/drawing/2010/main">
-                <a:solidFill>
-                  <a:schemeClr val="accent1"/>
-                </a:solidFill>
-              </a14:hiddenFill>
-            </a:ext>
-            <a:ext uri="{91240B29-F687-4F45-9708-019B960494DF}">
-              <a14:hiddenLine xmlns:a14="http://schemas.microsoft.com/office/drawing/2010/main" w="9525">
-                <a:solidFill>
-                  <a:schemeClr val="tx1"/>
-                </a:solidFill>
-                <a:miter lim="800000"/>
-                <a:headEnd/>
-                <a:tailEnd/>
-              </a14:hiddenLine>
-            </a:ext>
-            <a:ext uri="{AF507438-7753-43E0-B8FC-AC1667EBCBE1}">
-              <a14:hiddenEffects xmlns:a14="http://schemas.microsoft.com/office/drawing/2010/main">
-                <a:effectLst>
-                  <a:outerShdw dist="35921" dir="2700000" algn="ctr" rotWithShape="0">
-                    <a:schemeClr val="bg2"/>
-                  </a:outerShdw>
-                </a:effectLst>
-              </a14:hiddenEffects>
-            </a:ext>
-          </a:extLst>
         </p:spPr>
         <p:txBody>
-          <a:bodyPr vert="horz" wrap="square" lIns="91440" tIns="45720" rIns="91440" bIns="45720" numCol="1" anchor="ctr" anchorCtr="0" compatLnSpc="1">
-            <a:prstTxWarp prst="textNoShape">
-              <a:avLst/>
-            </a:prstTxWarp>
+          <a:bodyPr wrap="square" rtlCol="0">
             <a:spAutoFit/>
           </a:bodyPr>
-          <a:lstStyle>
-            <a:lvl1pPr indent="457200" eaLnBrk="0" fontAlgn="base" hangingPunct="0">
-              <a:spcBef>
-                <a:spcPct val="0"/>
-              </a:spcBef>
-              <a:spcAft>
-                <a:spcPct val="0"/>
-              </a:spcAft>
-              <a:defRPr>
-                <a:solidFill>
-                  <a:schemeClr val="tx1"/>
-                </a:solidFill>
-                <a:latin typeface="Arial" panose="020B0604020202020204" pitchFamily="34" charset="0"/>
-              </a:defRPr>
-            </a:lvl1pPr>
-            <a:lvl2pPr eaLnBrk="0" fontAlgn="base" hangingPunct="0">
-              <a:spcBef>
-                <a:spcPct val="0"/>
-              </a:spcBef>
-              <a:spcAft>
-                <a:spcPct val="0"/>
-              </a:spcAft>
-              <a:defRPr>
-                <a:solidFill>
-                  <a:schemeClr val="tx1"/>
-                </a:solidFill>
-                <a:latin typeface="Arial" panose="020B0604020202020204" pitchFamily="34" charset="0"/>
-              </a:defRPr>
-            </a:lvl2pPr>
-            <a:lvl3pPr eaLnBrk="0" fontAlgn="base" hangingPunct="0">
-              <a:spcBef>
-                <a:spcPct val="0"/>
-              </a:spcBef>
-              <a:spcAft>
-                <a:spcPct val="0"/>
-              </a:spcAft>
-              <a:defRPr>
-                <a:solidFill>
-                  <a:schemeClr val="tx1"/>
-                </a:solidFill>
-                <a:latin typeface="Arial" panose="020B0604020202020204" pitchFamily="34" charset="0"/>
-              </a:defRPr>
-            </a:lvl3pPr>
-            <a:lvl4pPr eaLnBrk="0" fontAlgn="base" hangingPunct="0">
-              <a:spcBef>
-                <a:spcPct val="0"/>
-              </a:spcBef>
-              <a:spcAft>
-                <a:spcPct val="0"/>
-              </a:spcAft>
-              <a:defRPr>
-                <a:solidFill>
-                  <a:schemeClr val="tx1"/>
-                </a:solidFill>
-                <a:latin typeface="Arial" panose="020B0604020202020204" pitchFamily="34" charset="0"/>
-              </a:defRPr>
-            </a:lvl4pPr>
-            <a:lvl5pPr eaLnBrk="0" fontAlgn="base" hangingPunct="0">
-              <a:spcBef>
-                <a:spcPct val="0"/>
-              </a:spcBef>
-              <a:spcAft>
-                <a:spcPct val="0"/>
-              </a:spcAft>
-              <a:defRPr>
-                <a:solidFill>
-                  <a:schemeClr val="tx1"/>
-                </a:solidFill>
-                <a:latin typeface="Arial" panose="020B0604020202020204" pitchFamily="34" charset="0"/>
-              </a:defRPr>
-            </a:lvl5pPr>
-            <a:lvl6pPr eaLnBrk="0" fontAlgn="base" hangingPunct="0">
-              <a:spcBef>
-                <a:spcPct val="0"/>
-              </a:spcBef>
-              <a:spcAft>
-                <a:spcPct val="0"/>
-              </a:spcAft>
-              <a:defRPr>
-                <a:solidFill>
-                  <a:schemeClr val="tx1"/>
-                </a:solidFill>
-                <a:latin typeface="Arial" panose="020B0604020202020204" pitchFamily="34" charset="0"/>
-              </a:defRPr>
-            </a:lvl6pPr>
-            <a:lvl7pPr eaLnBrk="0" fontAlgn="base" hangingPunct="0">
-              <a:spcBef>
-                <a:spcPct val="0"/>
-              </a:spcBef>
-              <a:spcAft>
-                <a:spcPct val="0"/>
-              </a:spcAft>
-              <a:defRPr>
-                <a:solidFill>
-                  <a:schemeClr val="tx1"/>
-                </a:solidFill>
-                <a:latin typeface="Arial" panose="020B0604020202020204" pitchFamily="34" charset="0"/>
-              </a:defRPr>
-            </a:lvl7pPr>
-            <a:lvl8pPr eaLnBrk="0" fontAlgn="base" hangingPunct="0">
-              <a:spcBef>
-                <a:spcPct val="0"/>
-              </a:spcBef>
-              <a:spcAft>
-                <a:spcPct val="0"/>
-              </a:spcAft>
-              <a:defRPr>
-                <a:solidFill>
-                  <a:schemeClr val="tx1"/>
-                </a:solidFill>
-                <a:latin typeface="Arial" panose="020B0604020202020204" pitchFamily="34" charset="0"/>
-              </a:defRPr>
-            </a:lvl8pPr>
-            <a:lvl9pPr eaLnBrk="0" fontAlgn="base" hangingPunct="0">
-              <a:spcBef>
-                <a:spcPct val="0"/>
-              </a:spcBef>
-              <a:spcAft>
-                <a:spcPct val="0"/>
-              </a:spcAft>
-              <a:defRPr>
-                <a:solidFill>
-                  <a:schemeClr val="tx1"/>
-                </a:solidFill>
-                <a:latin typeface="Arial" panose="020B0604020202020204" pitchFamily="34" charset="0"/>
-              </a:defRPr>
-            </a:lvl9pPr>
-          </a:lstStyle>
-          <a:p>
-            <a:pPr marL="0" marR="0" lvl="0" indent="457200" algn="l" defTabSz="914400" rtl="0" eaLnBrk="0" fontAlgn="base" latinLnBrk="0" hangingPunct="0">
-              <a:lnSpc>
-                <a:spcPct val="100000"/>
-              </a:lnSpc>
-              <a:spcBef>
-                <a:spcPct val="0"/>
-              </a:spcBef>
-              <a:spcAft>
-                <a:spcPct val="0"/>
-              </a:spcAft>
-              <a:buClrTx/>
-              <a:buSzTx/>
-              <a:buFontTx/>
-              <a:buNone/>
-              <a:tabLst/>
-            </a:pPr>
-            <a:r>
-              <a:rPr kumimoji="0" lang="en-US" altLang="en-US" sz="1600" b="1" i="0" u="none" strike="noStrike" cap="none" normalizeH="0" baseline="0" dirty="0" smtClean="0">
-                <a:ln>
-                  <a:noFill/>
-                </a:ln>
-                <a:solidFill>
-                  <a:schemeClr val="tx1"/>
-                </a:solidFill>
-                <a:effectLst/>
-                <a:latin typeface="Candara" panose="020E0502030303020204" pitchFamily="34" charset="0"/>
-                <a:ea typeface="Times New Roman" panose="02020603050405020304" pitchFamily="18" charset="0"/>
-                <a:cs typeface="Courier New" panose="02070309020205020404" pitchFamily="49" charset="0"/>
-              </a:rPr>
-              <a:t>CALCULATE function in Power BI (DAX)</a:t>
-            </a:r>
-            <a:endParaRPr kumimoji="0" lang="en-US" altLang="en-US" sz="1600" b="0" i="0" u="none" strike="noStrike" cap="none" normalizeH="0" baseline="0" dirty="0" smtClean="0">
-              <a:ln>
-                <a:noFill/>
-              </a:ln>
-              <a:solidFill>
-                <a:schemeClr val="tx1"/>
-              </a:solidFill>
-              <a:effectLst/>
-              <a:latin typeface="Candara" panose="020E0502030303020204" pitchFamily="34" charset="0"/>
-              <a:cs typeface="Courier New" panose="02070309020205020404" pitchFamily="49" charset="0"/>
-            </a:endParaRPr>
-          </a:p>
-          <a:p>
-            <a:pPr marL="0" marR="0" lvl="0" indent="457200" algn="l" defTabSz="914400" rtl="0" eaLnBrk="0" fontAlgn="base" latinLnBrk="0" hangingPunct="0">
-              <a:lnSpc>
-                <a:spcPct val="100000"/>
-              </a:lnSpc>
-              <a:spcBef>
-                <a:spcPct val="0"/>
-              </a:spcBef>
-              <a:spcAft>
-                <a:spcPct val="0"/>
-              </a:spcAft>
-              <a:buClrTx/>
-              <a:buSzTx/>
-              <a:buFontTx/>
-              <a:buNone/>
-              <a:tabLst/>
-            </a:pPr>
-            <a:r>
-              <a:rPr kumimoji="0" lang="en-US" altLang="en-US" sz="1600" b="0" i="0" u="none" strike="noStrike" cap="none" normalizeH="0" baseline="0" dirty="0" smtClean="0">
-                <a:ln>
-                  <a:noFill/>
-                </a:ln>
-                <a:solidFill>
-                  <a:schemeClr val="tx1"/>
-                </a:solidFill>
-                <a:effectLst/>
-                <a:latin typeface="Candara" panose="020E0502030303020204" pitchFamily="34" charset="0"/>
-                <a:ea typeface="Times New Roman" panose="02020603050405020304" pitchFamily="18" charset="0"/>
-                <a:cs typeface="Courier New" panose="02070309020205020404" pitchFamily="49" charset="0"/>
-              </a:rPr>
-              <a:t>CALCULATE() is one of the </a:t>
-            </a:r>
-            <a:r>
-              <a:rPr kumimoji="0" lang="en-US" altLang="en-US" sz="1600" b="1" i="0" u="none" strike="noStrike" cap="none" normalizeH="0" baseline="0" dirty="0" smtClean="0">
-                <a:ln>
-                  <a:noFill/>
-                </a:ln>
-                <a:solidFill>
-                  <a:schemeClr val="tx1"/>
-                </a:solidFill>
-                <a:effectLst/>
-                <a:latin typeface="Candara" panose="020E0502030303020204" pitchFamily="34" charset="0"/>
-                <a:ea typeface="Times New Roman" panose="02020603050405020304" pitchFamily="18" charset="0"/>
-                <a:cs typeface="Courier New" panose="02070309020205020404" pitchFamily="49" charset="0"/>
-              </a:rPr>
-              <a:t>most important DAX functions</a:t>
-            </a:r>
-            <a:r>
-              <a:rPr kumimoji="0" lang="en-US" altLang="en-US" sz="1600" b="0" i="0" u="none" strike="noStrike" cap="none" normalizeH="0" baseline="0" dirty="0" smtClean="0">
-                <a:ln>
-                  <a:noFill/>
-                </a:ln>
-                <a:solidFill>
-                  <a:schemeClr val="tx1"/>
-                </a:solidFill>
-                <a:effectLst/>
-                <a:latin typeface="Candara" panose="020E0502030303020204" pitchFamily="34" charset="0"/>
-                <a:ea typeface="Times New Roman" panose="02020603050405020304" pitchFamily="18" charset="0"/>
-                <a:cs typeface="Courier New" panose="02070309020205020404" pitchFamily="49" charset="0"/>
-              </a:rPr>
-              <a:t> in Power BI. It is used to </a:t>
-            </a:r>
-            <a:r>
-              <a:rPr kumimoji="0" lang="en-US" altLang="en-US" sz="1600" b="1" i="0" u="none" strike="noStrike" cap="none" normalizeH="0" baseline="0" dirty="0" smtClean="0">
-                <a:ln>
-                  <a:noFill/>
-                </a:ln>
-                <a:solidFill>
-                  <a:schemeClr val="tx1"/>
-                </a:solidFill>
-                <a:effectLst/>
-                <a:latin typeface="Candara" panose="020E0502030303020204" pitchFamily="34" charset="0"/>
-                <a:ea typeface="Times New Roman" panose="02020603050405020304" pitchFamily="18" charset="0"/>
-                <a:cs typeface="Courier New" panose="02070309020205020404" pitchFamily="49" charset="0"/>
-              </a:rPr>
-              <a:t>calculate an expression after modifying the filter context</a:t>
-            </a:r>
-            <a:r>
-              <a:rPr kumimoji="0" lang="en-US" altLang="en-US" sz="1600" b="0" i="0" u="none" strike="noStrike" cap="none" normalizeH="0" baseline="0" dirty="0" smtClean="0">
-                <a:ln>
-                  <a:noFill/>
-                </a:ln>
-                <a:solidFill>
-                  <a:schemeClr val="tx1"/>
-                </a:solidFill>
-                <a:effectLst/>
-                <a:latin typeface="Candara" panose="020E0502030303020204" pitchFamily="34" charset="0"/>
-                <a:ea typeface="Times New Roman" panose="02020603050405020304" pitchFamily="18" charset="0"/>
-                <a:cs typeface="Courier New" panose="02070309020205020404" pitchFamily="49" charset="0"/>
-              </a:rPr>
-              <a:t>.</a:t>
-            </a:r>
-            <a:endParaRPr kumimoji="0" lang="en-US" altLang="en-US" sz="1600" b="0" i="0" u="none" strike="noStrike" cap="none" normalizeH="0" baseline="0" dirty="0" smtClean="0">
-              <a:ln>
-                <a:noFill/>
-              </a:ln>
-              <a:solidFill>
-                <a:schemeClr val="tx1"/>
-              </a:solidFill>
-              <a:effectLst/>
-              <a:latin typeface="Candara" panose="020E0502030303020204" pitchFamily="34" charset="0"/>
-              <a:cs typeface="Courier New" panose="02070309020205020404" pitchFamily="49" charset="0"/>
-            </a:endParaRPr>
-          </a:p>
-          <a:p>
-            <a:pPr marL="0" marR="0" lvl="0" indent="457200" algn="l" defTabSz="914400" rtl="0" eaLnBrk="0" fontAlgn="base" latinLnBrk="0" hangingPunct="0">
-              <a:lnSpc>
-                <a:spcPct val="100000"/>
-              </a:lnSpc>
-              <a:spcBef>
-                <a:spcPct val="0"/>
-              </a:spcBef>
-              <a:spcAft>
-                <a:spcPct val="0"/>
-              </a:spcAft>
-              <a:buClrTx/>
-              <a:buSzTx/>
-              <a:buFontTx/>
-              <a:buNone/>
-              <a:tabLst/>
-            </a:pPr>
-            <a:r>
-              <a:rPr kumimoji="0" lang="en-US" altLang="en-US" sz="1600" b="1" i="0" u="none" strike="noStrike" cap="none" normalizeH="0" baseline="0" dirty="0" smtClean="0">
-                <a:ln>
-                  <a:noFill/>
-                </a:ln>
-                <a:solidFill>
-                  <a:schemeClr val="tx1"/>
-                </a:solidFill>
-                <a:effectLst/>
-                <a:latin typeface="Candara" panose="020E0502030303020204" pitchFamily="34" charset="0"/>
-                <a:ea typeface="Calibri" panose="020F0502020204030204" pitchFamily="34" charset="0"/>
-                <a:cs typeface="Courier New" panose="02070309020205020404" pitchFamily="49" charset="0"/>
-              </a:rPr>
-              <a:t>CALCULATE() works similarly to Excel's SUMIF()</a:t>
-            </a:r>
-            <a:r>
-              <a:rPr kumimoji="0" lang="en-US" altLang="en-US" sz="1600" b="0" i="0" u="none" strike="noStrike" cap="none" normalizeH="0" baseline="0" dirty="0" smtClean="0">
-                <a:ln>
-                  <a:noFill/>
-                </a:ln>
-                <a:solidFill>
-                  <a:schemeClr val="tx1"/>
-                </a:solidFill>
-                <a:effectLst/>
-                <a:latin typeface="Candara" panose="020E0502030303020204" pitchFamily="34" charset="0"/>
-                <a:ea typeface="Calibri" panose="020F0502020204030204" pitchFamily="34" charset="0"/>
-                <a:cs typeface="Courier New" panose="02070309020205020404" pitchFamily="49" charset="0"/>
-              </a:rPr>
-              <a:t>.</a:t>
-            </a:r>
-            <a:endParaRPr kumimoji="0" lang="en-US" altLang="en-US" sz="1600" b="0" i="0" u="none" strike="noStrike" cap="none" normalizeH="0" baseline="0" dirty="0" smtClean="0">
-              <a:ln>
-                <a:noFill/>
-              </a:ln>
-              <a:solidFill>
-                <a:schemeClr val="tx1"/>
-              </a:solidFill>
-              <a:effectLst/>
-              <a:latin typeface="Candara" panose="020E0502030303020204" pitchFamily="34" charset="0"/>
+          <a:lstStyle/>
+          <a:p>
+            <a:r>
+              <a:rPr lang="en-US" dirty="0" smtClean="0">
+                <a:latin typeface="Courier New" panose="02070309020205020404" pitchFamily="49" charset="0"/>
+                <a:cs typeface="Courier New" panose="02070309020205020404" pitchFamily="49" charset="0"/>
+              </a:rPr>
+              <a:t>Calculate()</a:t>
+            </a:r>
+          </a:p>
+          <a:p>
+            <a:r>
+              <a:rPr lang="en-US" dirty="0" smtClean="0">
+                <a:latin typeface="Courier New" panose="02070309020205020404" pitchFamily="49" charset="0"/>
+                <a:cs typeface="Courier New" panose="02070309020205020404" pitchFamily="49" charset="0"/>
+              </a:rPr>
+              <a:t>All()</a:t>
+            </a:r>
+          </a:p>
+          <a:p>
+            <a:r>
+              <a:rPr lang="en-US" dirty="0" smtClean="0">
+                <a:latin typeface="Courier New" panose="02070309020205020404" pitchFamily="49" charset="0"/>
+                <a:cs typeface="Courier New" panose="02070309020205020404" pitchFamily="49" charset="0"/>
+              </a:rPr>
+              <a:t>Filter()</a:t>
+            </a:r>
+            <a:endParaRPr lang="en-IN" dirty="0">
+              <a:latin typeface="Courier New" panose="02070309020205020404" pitchFamily="49" charset="0"/>
               <a:cs typeface="Courier New" panose="02070309020205020404" pitchFamily="49" charset="0"/>
             </a:endParaRPr>
           </a:p>
@@ -7721,7 +7036,7 @@
     </p:spTree>
     <p:extLst>
       <p:ext uri="{BB962C8B-B14F-4D97-AF65-F5344CB8AC3E}">
-        <p14:creationId xmlns:p14="http://schemas.microsoft.com/office/powerpoint/2010/main" val="1538813390"/>
+        <p14:creationId xmlns:p14="http://schemas.microsoft.com/office/powerpoint/2010/main" val="3098106477"/>
       </p:ext>
     </p:extLst>
   </p:cSld>
@@ -7757,7 +7072,317 @@
       </p:grpSpPr>
       <p:sp>
         <p:nvSpPr>
-          <p:cNvPr id="4" name="Rectangle 1"/>
+          <p:cNvPr id="3" name="Rectangle 2"/>
+          <p:cNvSpPr/>
+          <p:nvPr/>
+        </p:nvSpPr>
+        <p:spPr>
+          <a:xfrm>
+            <a:off x="344129" y="411796"/>
+            <a:ext cx="6096000" cy="369332"/>
+          </a:xfrm>
+          <a:prstGeom prst="rect">
+            <a:avLst/>
+          </a:prstGeom>
+        </p:spPr>
+        <p:txBody>
+          <a:bodyPr>
+            <a:spAutoFit/>
+          </a:bodyPr>
+          <a:lstStyle/>
+          <a:p>
+            <a:pPr lvl="0" eaLnBrk="0" fontAlgn="base" hangingPunct="0">
+              <a:spcBef>
+                <a:spcPct val="0"/>
+              </a:spcBef>
+              <a:spcAft>
+                <a:spcPct val="0"/>
+              </a:spcAft>
+            </a:pPr>
+            <a:r>
+              <a:rPr lang="en-US" altLang="en-US" b="1" dirty="0" smtClean="0">
+                <a:latin typeface="Candara" panose="020E0502030303020204" pitchFamily="34" charset="0"/>
+              </a:rPr>
+              <a:t>Calculate functions</a:t>
+            </a:r>
+            <a:endParaRPr lang="en-US" altLang="en-US" dirty="0">
+              <a:latin typeface="Candara" panose="020E0502030303020204" pitchFamily="34" charset="0"/>
+            </a:endParaRPr>
+          </a:p>
+        </p:txBody>
+      </p:sp>
+      <p:sp>
+        <p:nvSpPr>
+          <p:cNvPr id="4" name="Rectangle 3"/>
+          <p:cNvSpPr/>
+          <p:nvPr/>
+        </p:nvSpPr>
+        <p:spPr>
+          <a:xfrm>
+            <a:off x="435428" y="2700262"/>
+            <a:ext cx="9986866" cy="3414396"/>
+          </a:xfrm>
+          <a:prstGeom prst="rect">
+            <a:avLst/>
+          </a:prstGeom>
+        </p:spPr>
+        <p:txBody>
+          <a:bodyPr wrap="square">
+            <a:spAutoFit/>
+          </a:bodyPr>
+          <a:lstStyle/>
+          <a:p>
+            <a:pPr>
+              <a:lnSpc>
+                <a:spcPct val="107000"/>
+              </a:lnSpc>
+              <a:tabLst>
+                <a:tab pos="581660" algn="l"/>
+                <a:tab pos="1163320" algn="l"/>
+                <a:tab pos="1744980" algn="l"/>
+                <a:tab pos="2326640" algn="l"/>
+                <a:tab pos="2908300" algn="l"/>
+                <a:tab pos="3489960" algn="l"/>
+                <a:tab pos="4071620" algn="l"/>
+                <a:tab pos="4653280" algn="l"/>
+                <a:tab pos="5234940" algn="l"/>
+                <a:tab pos="5816600" algn="l"/>
+                <a:tab pos="6398260" algn="l"/>
+                <a:tab pos="6979920" algn="l"/>
+                <a:tab pos="7561580" algn="l"/>
+                <a:tab pos="8143240" algn="l"/>
+                <a:tab pos="8724900" algn="l"/>
+                <a:tab pos="9306560" algn="l"/>
+              </a:tabLst>
+            </a:pPr>
+            <a:r>
+              <a:rPr lang="en-IN" sz="1400" dirty="0">
+                <a:latin typeface="Courier New" panose="02070309020205020404" pitchFamily="49" charset="0"/>
+                <a:ea typeface="Times New Roman" panose="02020603050405020304" pitchFamily="18" charset="0"/>
+                <a:cs typeface="Courier New" panose="02070309020205020404" pitchFamily="49" charset="0"/>
+              </a:rPr>
+              <a:t>CALCULATE(&lt;expression&gt;, &lt;filter1&gt;, &lt;filter2&gt;, ...)</a:t>
+            </a:r>
+            <a:endParaRPr lang="en-IN" sz="1400" dirty="0">
+              <a:latin typeface="Courier New" panose="02070309020205020404" pitchFamily="49" charset="0"/>
+              <a:ea typeface="Calibri" panose="020F0502020204030204" pitchFamily="34" charset="0"/>
+              <a:cs typeface="Courier New" panose="02070309020205020404" pitchFamily="49" charset="0"/>
+            </a:endParaRPr>
+          </a:p>
+          <a:p>
+            <a:pPr>
+              <a:lnSpc>
+                <a:spcPct val="107000"/>
+              </a:lnSpc>
+            </a:pPr>
+            <a:endParaRPr lang="en-US" sz="1400" b="1" dirty="0" smtClean="0">
+              <a:latin typeface="Courier New" panose="02070309020205020404" pitchFamily="49" charset="0"/>
+              <a:ea typeface="Times New Roman" panose="02020603050405020304" pitchFamily="18" charset="0"/>
+              <a:cs typeface="Courier New" panose="02070309020205020404" pitchFamily="49" charset="0"/>
+            </a:endParaRPr>
+          </a:p>
+          <a:p>
+            <a:pPr>
+              <a:lnSpc>
+                <a:spcPct val="107000"/>
+              </a:lnSpc>
+            </a:pPr>
+            <a:r>
+              <a:rPr lang="en-US" sz="1400" b="1" dirty="0" smtClean="0">
+                <a:latin typeface="Courier New" panose="02070309020205020404" pitchFamily="49" charset="0"/>
+                <a:ea typeface="Times New Roman" panose="02020603050405020304" pitchFamily="18" charset="0"/>
+                <a:cs typeface="Courier New" panose="02070309020205020404" pitchFamily="49" charset="0"/>
+              </a:rPr>
+              <a:t>AS SUMIF</a:t>
+            </a:r>
+            <a:endParaRPr lang="en-IN" sz="1400" b="1" dirty="0" smtClean="0">
+              <a:latin typeface="Courier New" panose="02070309020205020404" pitchFamily="49" charset="0"/>
+              <a:ea typeface="Times New Roman" panose="02020603050405020304" pitchFamily="18" charset="0"/>
+              <a:cs typeface="Courier New" panose="02070309020205020404" pitchFamily="49" charset="0"/>
+            </a:endParaRPr>
+          </a:p>
+          <a:p>
+            <a:r>
+              <a:rPr lang="en-US" sz="1400" dirty="0" smtClean="0">
+                <a:latin typeface="Courier New" panose="02070309020205020404" pitchFamily="49" charset="0"/>
+                <a:cs typeface="Courier New" panose="02070309020205020404" pitchFamily="49" charset="0"/>
+              </a:rPr>
+              <a:t>CALCULATE(Sum_Expression,filter_1, filter_2,……… .. . . ) </a:t>
+            </a:r>
+            <a:endParaRPr lang="en-US" sz="1400" dirty="0">
+              <a:latin typeface="Courier New" panose="02070309020205020404" pitchFamily="49" charset="0"/>
+              <a:cs typeface="Courier New" panose="02070309020205020404" pitchFamily="49" charset="0"/>
+            </a:endParaRPr>
+          </a:p>
+          <a:p>
+            <a:r>
+              <a:rPr lang="en-US" sz="1400" dirty="0" smtClean="0">
+                <a:latin typeface="Courier New" panose="02070309020205020404" pitchFamily="49" charset="0"/>
+                <a:cs typeface="Courier New" panose="02070309020205020404" pitchFamily="49" charset="0"/>
+              </a:rPr>
+              <a:t>CALCULATE(SUM(Orders[Sales</a:t>
+            </a:r>
+            <a:r>
+              <a:rPr lang="en-US" sz="1400" dirty="0">
+                <a:latin typeface="Courier New" panose="02070309020205020404" pitchFamily="49" charset="0"/>
+                <a:cs typeface="Courier New" panose="02070309020205020404" pitchFamily="49" charset="0"/>
+              </a:rPr>
+              <a:t>]),Orders[Category]="Furniture</a:t>
+            </a:r>
+            <a:r>
+              <a:rPr lang="en-US" sz="1400" dirty="0" smtClean="0">
+                <a:latin typeface="Courier New" panose="02070309020205020404" pitchFamily="49" charset="0"/>
+                <a:cs typeface="Courier New" panose="02070309020205020404" pitchFamily="49" charset="0"/>
+              </a:rPr>
+              <a:t>", Orders[Region</a:t>
+            </a:r>
+            <a:r>
+              <a:rPr lang="en-US" sz="1400" dirty="0">
+                <a:latin typeface="Courier New" panose="02070309020205020404" pitchFamily="49" charset="0"/>
+                <a:cs typeface="Courier New" panose="02070309020205020404" pitchFamily="49" charset="0"/>
+              </a:rPr>
+              <a:t>]="South") </a:t>
+            </a:r>
+          </a:p>
+          <a:p>
+            <a:pPr>
+              <a:lnSpc>
+                <a:spcPct val="107000"/>
+              </a:lnSpc>
+            </a:pPr>
+            <a:endParaRPr lang="en-US" sz="1400" dirty="0" smtClean="0">
+              <a:latin typeface="Courier New" panose="02070309020205020404" pitchFamily="49" charset="0"/>
+              <a:ea typeface="Times New Roman" panose="02020603050405020304" pitchFamily="18" charset="0"/>
+              <a:cs typeface="Courier New" panose="02070309020205020404" pitchFamily="49" charset="0"/>
+            </a:endParaRPr>
+          </a:p>
+          <a:p>
+            <a:pPr>
+              <a:lnSpc>
+                <a:spcPct val="107000"/>
+              </a:lnSpc>
+            </a:pPr>
+            <a:endParaRPr lang="en-US" sz="1400" b="1" dirty="0" smtClean="0">
+              <a:latin typeface="Courier New" panose="02070309020205020404" pitchFamily="49" charset="0"/>
+              <a:ea typeface="Times New Roman" panose="02020603050405020304" pitchFamily="18" charset="0"/>
+              <a:cs typeface="Courier New" panose="02070309020205020404" pitchFamily="49" charset="0"/>
+            </a:endParaRPr>
+          </a:p>
+          <a:p>
+            <a:pPr>
+              <a:lnSpc>
+                <a:spcPct val="107000"/>
+              </a:lnSpc>
+            </a:pPr>
+            <a:r>
+              <a:rPr lang="en-US" sz="1400" b="1" dirty="0" smtClean="0">
+                <a:latin typeface="Courier New" panose="02070309020205020404" pitchFamily="49" charset="0"/>
+                <a:ea typeface="Times New Roman" panose="02020603050405020304" pitchFamily="18" charset="0"/>
+                <a:cs typeface="Courier New" panose="02070309020205020404" pitchFamily="49" charset="0"/>
+              </a:rPr>
+              <a:t>AS COUNTIF</a:t>
+            </a:r>
+            <a:endParaRPr lang="en-IN" sz="1400" b="1" dirty="0">
+              <a:latin typeface="Courier New" panose="02070309020205020404" pitchFamily="49" charset="0"/>
+              <a:ea typeface="Times New Roman" panose="02020603050405020304" pitchFamily="18" charset="0"/>
+              <a:cs typeface="Courier New" panose="02070309020205020404" pitchFamily="49" charset="0"/>
+            </a:endParaRPr>
+          </a:p>
+          <a:p>
+            <a:r>
+              <a:rPr lang="en-US" sz="1400" dirty="0" smtClean="0">
+                <a:latin typeface="Courier New" panose="02070309020205020404" pitchFamily="49" charset="0"/>
+                <a:cs typeface="Courier New" panose="02070309020205020404" pitchFamily="49" charset="0"/>
+              </a:rPr>
+              <a:t>CALCULATE(Count_Expression,filter_1</a:t>
+            </a:r>
+            <a:r>
+              <a:rPr lang="en-US" sz="1400" dirty="0">
+                <a:latin typeface="Courier New" panose="02070309020205020404" pitchFamily="49" charset="0"/>
+                <a:cs typeface="Courier New" panose="02070309020205020404" pitchFamily="49" charset="0"/>
+              </a:rPr>
+              <a:t>, filter_2) </a:t>
+            </a:r>
+          </a:p>
+          <a:p>
+            <a:endParaRPr lang="en-US" sz="1400" dirty="0" smtClean="0">
+              <a:latin typeface="Courier New" panose="02070309020205020404" pitchFamily="49" charset="0"/>
+              <a:cs typeface="Courier New" panose="02070309020205020404" pitchFamily="49" charset="0"/>
+            </a:endParaRPr>
+          </a:p>
+          <a:p>
+            <a:endParaRPr lang="en-US" sz="1400" dirty="0" smtClean="0">
+              <a:latin typeface="Courier New" panose="02070309020205020404" pitchFamily="49" charset="0"/>
+              <a:cs typeface="Courier New" panose="02070309020205020404" pitchFamily="49" charset="0"/>
+            </a:endParaRPr>
+          </a:p>
+          <a:p>
+            <a:r>
+              <a:rPr lang="en-US" sz="1400" dirty="0" err="1">
+                <a:latin typeface="Courier New" panose="02070309020205020404" pitchFamily="49" charset="0"/>
+                <a:cs typeface="Courier New" panose="02070309020205020404" pitchFamily="49" charset="0"/>
+              </a:rPr>
+              <a:t>M_Count_Furniture&amp;East</a:t>
+            </a:r>
+            <a:r>
+              <a:rPr lang="en-US" sz="1400" dirty="0">
+                <a:latin typeface="Courier New" panose="02070309020205020404" pitchFamily="49" charset="0"/>
+                <a:cs typeface="Courier New" panose="02070309020205020404" pitchFamily="49" charset="0"/>
+              </a:rPr>
+              <a:t> = </a:t>
+            </a:r>
+            <a:endParaRPr lang="en-US" sz="1400" dirty="0" smtClean="0">
+              <a:latin typeface="Courier New" panose="02070309020205020404" pitchFamily="49" charset="0"/>
+              <a:cs typeface="Courier New" panose="02070309020205020404" pitchFamily="49" charset="0"/>
+            </a:endParaRPr>
+          </a:p>
+          <a:p>
+            <a:r>
+              <a:rPr lang="en-US" sz="1400" dirty="0" smtClean="0">
+                <a:latin typeface="Courier New" panose="02070309020205020404" pitchFamily="49" charset="0"/>
+                <a:cs typeface="Courier New" panose="02070309020205020404" pitchFamily="49" charset="0"/>
+              </a:rPr>
+              <a:t>CALCULATE(COUNT(Orders[Customer ID</a:t>
+            </a:r>
+            <a:r>
+              <a:rPr lang="en-US" sz="1400" dirty="0">
+                <a:latin typeface="Courier New" panose="02070309020205020404" pitchFamily="49" charset="0"/>
+                <a:cs typeface="Courier New" panose="02070309020205020404" pitchFamily="49" charset="0"/>
+              </a:rPr>
+              <a:t>]),Orders[Category]="</a:t>
+            </a:r>
+            <a:r>
+              <a:rPr lang="en-US" sz="1400" dirty="0" err="1">
+                <a:latin typeface="Courier New" panose="02070309020205020404" pitchFamily="49" charset="0"/>
+                <a:cs typeface="Courier New" panose="02070309020205020404" pitchFamily="49" charset="0"/>
+              </a:rPr>
+              <a:t>Furniture",Orders</a:t>
+            </a:r>
+            <a:r>
+              <a:rPr lang="en-US" sz="1400" dirty="0">
+                <a:latin typeface="Courier New" panose="02070309020205020404" pitchFamily="49" charset="0"/>
+                <a:cs typeface="Courier New" panose="02070309020205020404" pitchFamily="49" charset="0"/>
+              </a:rPr>
+              <a:t>[Region]="East")</a:t>
+            </a:r>
+          </a:p>
+          <a:p>
+            <a:endParaRPr lang="en-US" sz="1400" dirty="0">
+              <a:latin typeface="Courier New" panose="02070309020205020404" pitchFamily="49" charset="0"/>
+              <a:cs typeface="Courier New" panose="02070309020205020404" pitchFamily="49" charset="0"/>
+            </a:endParaRPr>
+          </a:p>
+          <a:p>
+            <a:endParaRPr lang="en-US" sz="1400" dirty="0">
+              <a:latin typeface="Courier New" panose="02070309020205020404" pitchFamily="49" charset="0"/>
+              <a:cs typeface="Courier New" panose="02070309020205020404" pitchFamily="49" charset="0"/>
+            </a:endParaRPr>
+          </a:p>
+        </p:txBody>
+      </p:sp>
+      <p:sp>
+        <p:nvSpPr>
+          <p:cNvPr id="5" name="Rectangle 1"/>
           <p:cNvSpPr>
             <a:spLocks noChangeArrowheads="1"/>
           </p:cNvSpPr>
@@ -7765,8 +7390,8 @@
         </p:nvSpPr>
         <p:spPr bwMode="auto">
           <a:xfrm>
-            <a:off x="373224" y="2408054"/>
-            <a:ext cx="11728580" cy="1323439"/>
+            <a:off x="259701" y="1067443"/>
+            <a:ext cx="9871788" cy="830997"/>
           </a:xfrm>
           <a:prstGeom prst="rect">
             <a:avLst/>
@@ -7963,6 +7588,1899 @@
                   <a:noFill/>
                 </a:ln>
                 <a:solidFill>
+                  <a:schemeClr val="tx1"/>
+                </a:solidFill>
+                <a:effectLst/>
+                <a:latin typeface="Candara" panose="020E0502030303020204" pitchFamily="34" charset="0"/>
+                <a:ea typeface="Times New Roman" panose="02020603050405020304" pitchFamily="18" charset="0"/>
+                <a:cs typeface="Courier New" panose="02070309020205020404" pitchFamily="49" charset="0"/>
+              </a:rPr>
+              <a:t>CALCULATE function in Power BI (DAX)</a:t>
+            </a:r>
+            <a:endParaRPr kumimoji="0" lang="en-US" altLang="en-US" sz="1600" b="0" i="0" u="none" strike="noStrike" cap="none" normalizeH="0" baseline="0" dirty="0" smtClean="0">
+              <a:ln>
+                <a:noFill/>
+              </a:ln>
+              <a:solidFill>
+                <a:schemeClr val="tx1"/>
+              </a:solidFill>
+              <a:effectLst/>
+              <a:latin typeface="Candara" panose="020E0502030303020204" pitchFamily="34" charset="0"/>
+              <a:cs typeface="Courier New" panose="02070309020205020404" pitchFamily="49" charset="0"/>
+            </a:endParaRPr>
+          </a:p>
+          <a:p>
+            <a:pPr marL="0" marR="0" lvl="0" indent="457200" algn="l" defTabSz="914400" rtl="0" eaLnBrk="0" fontAlgn="base" latinLnBrk="0" hangingPunct="0">
+              <a:lnSpc>
+                <a:spcPct val="100000"/>
+              </a:lnSpc>
+              <a:spcBef>
+                <a:spcPct val="0"/>
+              </a:spcBef>
+              <a:spcAft>
+                <a:spcPct val="0"/>
+              </a:spcAft>
+              <a:buClrTx/>
+              <a:buSzTx/>
+              <a:buFontTx/>
+              <a:buNone/>
+              <a:tabLst/>
+            </a:pPr>
+            <a:r>
+              <a:rPr kumimoji="0" lang="en-US" altLang="en-US" sz="1600" b="0" i="0" u="none" strike="noStrike" cap="none" normalizeH="0" baseline="0" dirty="0" smtClean="0">
+                <a:ln>
+                  <a:noFill/>
+                </a:ln>
+                <a:solidFill>
+                  <a:schemeClr val="tx1"/>
+                </a:solidFill>
+                <a:effectLst/>
+                <a:latin typeface="Candara" panose="020E0502030303020204" pitchFamily="34" charset="0"/>
+                <a:ea typeface="Times New Roman" panose="02020603050405020304" pitchFamily="18" charset="0"/>
+                <a:cs typeface="Courier New" panose="02070309020205020404" pitchFamily="49" charset="0"/>
+              </a:rPr>
+              <a:t>CALCULATE() is one of the </a:t>
+            </a:r>
+            <a:r>
+              <a:rPr kumimoji="0" lang="en-US" altLang="en-US" sz="1600" b="1" i="0" u="none" strike="noStrike" cap="none" normalizeH="0" baseline="0" dirty="0" smtClean="0">
+                <a:ln>
+                  <a:noFill/>
+                </a:ln>
+                <a:solidFill>
+                  <a:schemeClr val="tx1"/>
+                </a:solidFill>
+                <a:effectLst/>
+                <a:latin typeface="Candara" panose="020E0502030303020204" pitchFamily="34" charset="0"/>
+                <a:ea typeface="Times New Roman" panose="02020603050405020304" pitchFamily="18" charset="0"/>
+                <a:cs typeface="Courier New" panose="02070309020205020404" pitchFamily="49" charset="0"/>
+              </a:rPr>
+              <a:t>most important DAX functions</a:t>
+            </a:r>
+            <a:r>
+              <a:rPr kumimoji="0" lang="en-US" altLang="en-US" sz="1600" b="0" i="0" u="none" strike="noStrike" cap="none" normalizeH="0" baseline="0" dirty="0" smtClean="0">
+                <a:ln>
+                  <a:noFill/>
+                </a:ln>
+                <a:solidFill>
+                  <a:schemeClr val="tx1"/>
+                </a:solidFill>
+                <a:effectLst/>
+                <a:latin typeface="Candara" panose="020E0502030303020204" pitchFamily="34" charset="0"/>
+                <a:ea typeface="Times New Roman" panose="02020603050405020304" pitchFamily="18" charset="0"/>
+                <a:cs typeface="Courier New" panose="02070309020205020404" pitchFamily="49" charset="0"/>
+              </a:rPr>
+              <a:t> in Power BI.</a:t>
+            </a:r>
+            <a:endParaRPr kumimoji="0" lang="en-US" altLang="en-US" sz="1600" b="0" i="0" u="none" strike="noStrike" cap="none" normalizeH="0" baseline="0" dirty="0" smtClean="0">
+              <a:ln>
+                <a:noFill/>
+              </a:ln>
+              <a:solidFill>
+                <a:schemeClr val="tx1"/>
+              </a:solidFill>
+              <a:effectLst/>
+              <a:latin typeface="Candara" panose="020E0502030303020204" pitchFamily="34" charset="0"/>
+              <a:cs typeface="Courier New" panose="02070309020205020404" pitchFamily="49" charset="0"/>
+            </a:endParaRPr>
+          </a:p>
+          <a:p>
+            <a:pPr marL="0" marR="0" lvl="0" indent="457200" algn="l" defTabSz="914400" rtl="0" eaLnBrk="0" fontAlgn="base" latinLnBrk="0" hangingPunct="0">
+              <a:lnSpc>
+                <a:spcPct val="100000"/>
+              </a:lnSpc>
+              <a:spcBef>
+                <a:spcPct val="0"/>
+              </a:spcBef>
+              <a:spcAft>
+                <a:spcPct val="0"/>
+              </a:spcAft>
+              <a:buClrTx/>
+              <a:buSzTx/>
+              <a:buFontTx/>
+              <a:buNone/>
+              <a:tabLst/>
+            </a:pPr>
+            <a:r>
+              <a:rPr kumimoji="0" lang="en-US" altLang="en-US" sz="1600" b="1" i="0" u="none" strike="noStrike" cap="none" normalizeH="0" baseline="0" dirty="0" smtClean="0">
+                <a:ln>
+                  <a:noFill/>
+                </a:ln>
+                <a:solidFill>
+                  <a:schemeClr val="tx1"/>
+                </a:solidFill>
+                <a:effectLst/>
+                <a:latin typeface="Candara" panose="020E0502030303020204" pitchFamily="34" charset="0"/>
+                <a:ea typeface="Calibri" panose="020F0502020204030204" pitchFamily="34" charset="0"/>
+                <a:cs typeface="Courier New" panose="02070309020205020404" pitchFamily="49" charset="0"/>
+              </a:rPr>
+              <a:t>CALCULATE() works similarly to Excel's SUMIF() and </a:t>
+            </a:r>
+            <a:r>
+              <a:rPr kumimoji="0" lang="en-US" altLang="en-US" sz="1600" b="1" i="0" u="none" strike="noStrike" cap="none" normalizeH="0" baseline="0" dirty="0" err="1" smtClean="0">
+                <a:ln>
+                  <a:noFill/>
+                </a:ln>
+                <a:solidFill>
+                  <a:schemeClr val="tx1"/>
+                </a:solidFill>
+                <a:effectLst/>
+                <a:latin typeface="Candara" panose="020E0502030303020204" pitchFamily="34" charset="0"/>
+                <a:ea typeface="Calibri" panose="020F0502020204030204" pitchFamily="34" charset="0"/>
+                <a:cs typeface="Courier New" panose="02070309020205020404" pitchFamily="49" charset="0"/>
+              </a:rPr>
+              <a:t>countIF</a:t>
+            </a:r>
+            <a:r>
+              <a:rPr kumimoji="0" lang="en-US" altLang="en-US" sz="1600" b="1" i="0" u="none" strike="noStrike" cap="none" normalizeH="0" baseline="0" dirty="0" smtClean="0">
+                <a:ln>
+                  <a:noFill/>
+                </a:ln>
+                <a:solidFill>
+                  <a:schemeClr val="tx1"/>
+                </a:solidFill>
+                <a:effectLst/>
+                <a:latin typeface="Candara" panose="020E0502030303020204" pitchFamily="34" charset="0"/>
+                <a:ea typeface="Calibri" panose="020F0502020204030204" pitchFamily="34" charset="0"/>
+                <a:cs typeface="Courier New" panose="02070309020205020404" pitchFamily="49" charset="0"/>
+              </a:rPr>
+              <a:t>()</a:t>
+            </a:r>
+            <a:r>
+              <a:rPr kumimoji="0" lang="en-US" altLang="en-US" sz="1600" b="0" i="0" u="none" strike="noStrike" cap="none" normalizeH="0" baseline="0" dirty="0" smtClean="0">
+                <a:ln>
+                  <a:noFill/>
+                </a:ln>
+                <a:solidFill>
+                  <a:schemeClr val="tx1"/>
+                </a:solidFill>
+                <a:effectLst/>
+                <a:latin typeface="Candara" panose="020E0502030303020204" pitchFamily="34" charset="0"/>
+                <a:ea typeface="Calibri" panose="020F0502020204030204" pitchFamily="34" charset="0"/>
+                <a:cs typeface="Courier New" panose="02070309020205020404" pitchFamily="49" charset="0"/>
+              </a:rPr>
+              <a:t>.</a:t>
+            </a:r>
+            <a:endParaRPr kumimoji="0" lang="en-US" altLang="en-US" sz="1600" b="0" i="0" u="none" strike="noStrike" cap="none" normalizeH="0" baseline="0" dirty="0" smtClean="0">
+              <a:ln>
+                <a:noFill/>
+              </a:ln>
+              <a:solidFill>
+                <a:schemeClr val="tx1"/>
+              </a:solidFill>
+              <a:effectLst/>
+              <a:latin typeface="Candara" panose="020E0502030303020204" pitchFamily="34" charset="0"/>
+              <a:cs typeface="Courier New" panose="02070309020205020404" pitchFamily="49" charset="0"/>
+            </a:endParaRPr>
+          </a:p>
+        </p:txBody>
+      </p:sp>
+    </p:spTree>
+    <p:extLst>
+      <p:ext uri="{BB962C8B-B14F-4D97-AF65-F5344CB8AC3E}">
+        <p14:creationId xmlns:p14="http://schemas.microsoft.com/office/powerpoint/2010/main" val="2206240905"/>
+      </p:ext>
+    </p:extLst>
+  </p:cSld>
+  <p:clrMapOvr>
+    <a:masterClrMapping/>
+  </p:clrMapOvr>
+  <p:transition spd="slow">
+    <p:randomBar dir="vert"/>
+  </p:transition>
+  <p:timing>
+    <p:tnLst>
+      <p:par>
+        <p:cTn id="1" dur="indefinite" restart="never" nodeType="tmRoot"/>
+      </p:par>
+    </p:tnLst>
+  </p:timing>
+</p:sld>
+</file>
+
+<file path=ppt/slides/slide12.xml><?xml version="1.0" encoding="utf-8"?>
+<p:sld xmlns:a="http://schemas.openxmlformats.org/drawingml/2006/main" xmlns:r="http://schemas.openxmlformats.org/officeDocument/2006/relationships" xmlns:p="http://schemas.openxmlformats.org/presentationml/2006/main">
+  <p:cSld>
+    <p:spTree>
+      <p:nvGrpSpPr>
+        <p:cNvPr id="1" name=""/>
+        <p:cNvGrpSpPr/>
+        <p:nvPr/>
+      </p:nvGrpSpPr>
+      <p:grpSpPr>
+        <a:xfrm>
+          <a:off x="0" y="0"/>
+          <a:ext cx="0" cy="0"/>
+          <a:chOff x="0" y="0"/>
+          <a:chExt cx="0" cy="0"/>
+        </a:xfrm>
+      </p:grpSpPr>
+      <p:sp>
+        <p:nvSpPr>
+          <p:cNvPr id="4" name="Rectangle 3"/>
+          <p:cNvSpPr/>
+          <p:nvPr/>
+        </p:nvSpPr>
+        <p:spPr>
+          <a:xfrm>
+            <a:off x="373429" y="842717"/>
+            <a:ext cx="10600236" cy="369332"/>
+          </a:xfrm>
+          <a:prstGeom prst="rect">
+            <a:avLst/>
+          </a:prstGeom>
+        </p:spPr>
+        <p:txBody>
+          <a:bodyPr wrap="square">
+            <a:spAutoFit/>
+          </a:bodyPr>
+          <a:lstStyle/>
+          <a:p>
+            <a:r>
+              <a:rPr lang="en-US" dirty="0" smtClean="0">
+                <a:latin typeface="Courier New" panose="02070309020205020404" pitchFamily="49" charset="0"/>
+                <a:cs typeface="Courier New" panose="02070309020205020404" pitchFamily="49" charset="0"/>
+              </a:rPr>
+              <a:t>All() : </a:t>
+            </a:r>
+          </a:p>
+        </p:txBody>
+      </p:sp>
+    </p:spTree>
+    <p:extLst>
+      <p:ext uri="{BB962C8B-B14F-4D97-AF65-F5344CB8AC3E}">
+        <p14:creationId xmlns:p14="http://schemas.microsoft.com/office/powerpoint/2010/main" val="635712050"/>
+      </p:ext>
+    </p:extLst>
+  </p:cSld>
+  <p:clrMapOvr>
+    <a:masterClrMapping/>
+  </p:clrMapOvr>
+  <p:timing>
+    <p:tnLst>
+      <p:par>
+        <p:cTn id="1" dur="indefinite" restart="never" nodeType="tmRoot"/>
+      </p:par>
+    </p:tnLst>
+  </p:timing>
+</p:sld>
+</file>
+
+<file path=ppt/slides/slide13.xml><?xml version="1.0" encoding="utf-8"?>
+<p:sld xmlns:a="http://schemas.openxmlformats.org/drawingml/2006/main" xmlns:r="http://schemas.openxmlformats.org/officeDocument/2006/relationships" xmlns:p="http://schemas.openxmlformats.org/presentationml/2006/main">
+  <p:cSld>
+    <p:bg>
+      <p:bgPr>
+        <a:solidFill>
+          <a:schemeClr val="bg2">
+            <a:lumMod val="60000"/>
+            <a:lumOff val="40000"/>
+          </a:schemeClr>
+        </a:solidFill>
+        <a:effectLst/>
+      </p:bgPr>
+    </p:bg>
+    <p:spTree>
+      <p:nvGrpSpPr>
+        <p:cNvPr id="1" name=""/>
+        <p:cNvGrpSpPr/>
+        <p:nvPr/>
+      </p:nvGrpSpPr>
+      <p:grpSpPr>
+        <a:xfrm>
+          <a:off x="0" y="0"/>
+          <a:ext cx="0" cy="0"/>
+          <a:chOff x="0" y="0"/>
+          <a:chExt cx="0" cy="0"/>
+        </a:xfrm>
+      </p:grpSpPr>
+      <p:sp>
+        <p:nvSpPr>
+          <p:cNvPr id="4" name="Rectangle 3"/>
+          <p:cNvSpPr/>
+          <p:nvPr/>
+        </p:nvSpPr>
+        <p:spPr>
+          <a:xfrm>
+            <a:off x="408494" y="4428491"/>
+            <a:ext cx="10017551" cy="646331"/>
+          </a:xfrm>
+          <a:prstGeom prst="rect">
+            <a:avLst/>
+          </a:prstGeom>
+        </p:spPr>
+        <p:txBody>
+          <a:bodyPr wrap="square">
+            <a:spAutoFit/>
+          </a:bodyPr>
+          <a:lstStyle/>
+          <a:p>
+            <a:r>
+              <a:rPr lang="en-IN" dirty="0" err="1" smtClean="0">
+                <a:solidFill>
+                  <a:srgbClr val="000000"/>
+                </a:solidFill>
+                <a:latin typeface="Consolas" panose="020B0609020204030204" pitchFamily="49" charset="0"/>
+              </a:rPr>
+              <a:t>Max_Region</a:t>
+            </a:r>
+            <a:r>
+              <a:rPr lang="en-IN" dirty="0" smtClean="0">
+                <a:solidFill>
+                  <a:srgbClr val="000000"/>
+                </a:solidFill>
+                <a:latin typeface="Consolas" panose="020B0609020204030204" pitchFamily="49" charset="0"/>
+              </a:rPr>
+              <a:t> </a:t>
+            </a:r>
+            <a:r>
+              <a:rPr lang="en-IN" dirty="0">
+                <a:solidFill>
+                  <a:srgbClr val="000000"/>
+                </a:solidFill>
+                <a:latin typeface="Consolas" panose="020B0609020204030204" pitchFamily="49" charset="0"/>
+              </a:rPr>
+              <a:t>= </a:t>
+            </a:r>
+            <a:r>
+              <a:rPr lang="en-IN" dirty="0">
+                <a:solidFill>
+                  <a:srgbClr val="3165BB"/>
+                </a:solidFill>
+                <a:latin typeface="Consolas" panose="020B0609020204030204" pitchFamily="49" charset="0"/>
+              </a:rPr>
+              <a:t>CALCULATE</a:t>
+            </a:r>
+            <a:r>
+              <a:rPr lang="en-IN" dirty="0">
+                <a:solidFill>
+                  <a:srgbClr val="000000"/>
+                </a:solidFill>
+                <a:latin typeface="Consolas" panose="020B0609020204030204" pitchFamily="49" charset="0"/>
+              </a:rPr>
+              <a:t>(</a:t>
+            </a:r>
+            <a:r>
+              <a:rPr lang="en-IN" dirty="0">
+                <a:solidFill>
+                  <a:srgbClr val="3165BB"/>
+                </a:solidFill>
+                <a:latin typeface="Consolas" panose="020B0609020204030204" pitchFamily="49" charset="0"/>
+              </a:rPr>
+              <a:t>MAX</a:t>
+            </a:r>
+            <a:r>
+              <a:rPr lang="en-IN" dirty="0">
+                <a:solidFill>
+                  <a:srgbClr val="000000"/>
+                </a:solidFill>
+                <a:latin typeface="Consolas" panose="020B0609020204030204" pitchFamily="49" charset="0"/>
+              </a:rPr>
+              <a:t>(</a:t>
+            </a:r>
+            <a:r>
+              <a:rPr lang="en-IN" dirty="0">
+                <a:solidFill>
+                  <a:srgbClr val="001080"/>
+                </a:solidFill>
+                <a:latin typeface="Consolas" panose="020B0609020204030204" pitchFamily="49" charset="0"/>
+              </a:rPr>
+              <a:t>Orders[Sales]</a:t>
+            </a:r>
+            <a:r>
+              <a:rPr lang="en-IN" dirty="0">
+                <a:solidFill>
+                  <a:srgbClr val="000000"/>
+                </a:solidFill>
+                <a:latin typeface="Consolas" panose="020B0609020204030204" pitchFamily="49" charset="0"/>
+              </a:rPr>
+              <a:t>),</a:t>
+            </a:r>
+            <a:r>
+              <a:rPr lang="en-IN" dirty="0">
+                <a:solidFill>
+                  <a:srgbClr val="3165BB"/>
+                </a:solidFill>
+                <a:latin typeface="Consolas" panose="020B0609020204030204" pitchFamily="49" charset="0"/>
+              </a:rPr>
+              <a:t>ALLEXCEPT</a:t>
+            </a:r>
+            <a:r>
+              <a:rPr lang="en-IN" dirty="0">
+                <a:solidFill>
+                  <a:srgbClr val="000000"/>
+                </a:solidFill>
+                <a:latin typeface="Consolas" panose="020B0609020204030204" pitchFamily="49" charset="0"/>
+              </a:rPr>
+              <a:t>(</a:t>
+            </a:r>
+            <a:r>
+              <a:rPr lang="en-IN" dirty="0" err="1">
+                <a:solidFill>
+                  <a:srgbClr val="001080"/>
+                </a:solidFill>
+                <a:latin typeface="Consolas" panose="020B0609020204030204" pitchFamily="49" charset="0"/>
+              </a:rPr>
+              <a:t>Orders</a:t>
+            </a:r>
+            <a:r>
+              <a:rPr lang="en-IN" dirty="0" err="1">
+                <a:solidFill>
+                  <a:srgbClr val="000000"/>
+                </a:solidFill>
+                <a:latin typeface="Consolas" panose="020B0609020204030204" pitchFamily="49" charset="0"/>
+              </a:rPr>
+              <a:t>,</a:t>
+            </a:r>
+            <a:r>
+              <a:rPr lang="en-IN" dirty="0" err="1">
+                <a:solidFill>
+                  <a:srgbClr val="001080"/>
+                </a:solidFill>
+                <a:latin typeface="Consolas" panose="020B0609020204030204" pitchFamily="49" charset="0"/>
+              </a:rPr>
+              <a:t>Orders</a:t>
+            </a:r>
+            <a:r>
+              <a:rPr lang="en-IN" dirty="0">
+                <a:solidFill>
+                  <a:srgbClr val="001080"/>
+                </a:solidFill>
+                <a:latin typeface="Consolas" panose="020B0609020204030204" pitchFamily="49" charset="0"/>
+              </a:rPr>
+              <a:t>[Region]</a:t>
+            </a:r>
+            <a:r>
+              <a:rPr lang="en-IN" dirty="0">
+                <a:solidFill>
+                  <a:srgbClr val="000000"/>
+                </a:solidFill>
+                <a:latin typeface="Consolas" panose="020B0609020204030204" pitchFamily="49" charset="0"/>
+              </a:rPr>
+              <a:t>))</a:t>
+            </a:r>
+          </a:p>
+          <a:p>
+            <a:endParaRPr lang="en-IN" b="0" dirty="0">
+              <a:solidFill>
+                <a:srgbClr val="000000"/>
+              </a:solidFill>
+              <a:effectLst/>
+              <a:latin typeface="Consolas" panose="020B0609020204030204" pitchFamily="49" charset="0"/>
+            </a:endParaRPr>
+          </a:p>
+        </p:txBody>
+      </p:sp>
+      <p:sp>
+        <p:nvSpPr>
+          <p:cNvPr id="6" name="Rectangle 5"/>
+          <p:cNvSpPr/>
+          <p:nvPr/>
+        </p:nvSpPr>
+        <p:spPr>
+          <a:xfrm>
+            <a:off x="408494" y="902864"/>
+            <a:ext cx="11356156" cy="2585323"/>
+          </a:xfrm>
+          <a:prstGeom prst="rect">
+            <a:avLst/>
+          </a:prstGeom>
+        </p:spPr>
+        <p:txBody>
+          <a:bodyPr wrap="square">
+            <a:spAutoFit/>
+          </a:bodyPr>
+          <a:lstStyle/>
+          <a:p>
+            <a:r>
+              <a:rPr lang="en-IN" dirty="0" err="1">
+                <a:solidFill>
+                  <a:srgbClr val="000000"/>
+                </a:solidFill>
+                <a:latin typeface="Consolas" panose="020B0609020204030204" pitchFamily="49" charset="0"/>
+              </a:rPr>
+              <a:t>Sum_Region</a:t>
+            </a:r>
+            <a:r>
+              <a:rPr lang="en-IN" dirty="0">
+                <a:solidFill>
+                  <a:srgbClr val="000000"/>
+                </a:solidFill>
+                <a:latin typeface="Consolas" panose="020B0609020204030204" pitchFamily="49" charset="0"/>
+              </a:rPr>
+              <a:t> = </a:t>
+            </a:r>
+            <a:endParaRPr lang="en-IN" dirty="0" smtClean="0">
+              <a:solidFill>
+                <a:srgbClr val="000000"/>
+              </a:solidFill>
+              <a:latin typeface="Consolas" panose="020B0609020204030204" pitchFamily="49" charset="0"/>
+            </a:endParaRPr>
+          </a:p>
+          <a:p>
+            <a:r>
+              <a:rPr lang="en-IN" dirty="0" smtClean="0">
+                <a:solidFill>
+                  <a:srgbClr val="3165BB"/>
+                </a:solidFill>
+                <a:latin typeface="Consolas" panose="020B0609020204030204" pitchFamily="49" charset="0"/>
+              </a:rPr>
+              <a:t>CALCULATE</a:t>
+            </a:r>
+            <a:r>
+              <a:rPr lang="en-IN" dirty="0" smtClean="0">
+                <a:solidFill>
+                  <a:srgbClr val="000000"/>
+                </a:solidFill>
+                <a:latin typeface="Consolas" panose="020B0609020204030204" pitchFamily="49" charset="0"/>
+              </a:rPr>
+              <a:t>(</a:t>
+            </a:r>
+            <a:r>
+              <a:rPr lang="en-IN" dirty="0" smtClean="0">
+                <a:solidFill>
+                  <a:srgbClr val="3165BB"/>
+                </a:solidFill>
+                <a:latin typeface="Consolas" panose="020B0609020204030204" pitchFamily="49" charset="0"/>
+              </a:rPr>
+              <a:t>SUM</a:t>
+            </a:r>
+            <a:r>
+              <a:rPr lang="en-IN" dirty="0" smtClean="0">
+                <a:solidFill>
+                  <a:srgbClr val="000000"/>
+                </a:solidFill>
+                <a:latin typeface="Consolas" panose="020B0609020204030204" pitchFamily="49" charset="0"/>
+              </a:rPr>
+              <a:t>(</a:t>
+            </a:r>
+            <a:r>
+              <a:rPr lang="en-IN" dirty="0" smtClean="0">
+                <a:solidFill>
+                  <a:srgbClr val="001080"/>
+                </a:solidFill>
+                <a:latin typeface="Consolas" panose="020B0609020204030204" pitchFamily="49" charset="0"/>
+              </a:rPr>
+              <a:t>Orders[Sales</a:t>
+            </a:r>
+            <a:r>
+              <a:rPr lang="en-IN" dirty="0">
+                <a:solidFill>
+                  <a:srgbClr val="001080"/>
+                </a:solidFill>
+                <a:latin typeface="Consolas" panose="020B0609020204030204" pitchFamily="49" charset="0"/>
+              </a:rPr>
+              <a:t>]</a:t>
+            </a:r>
+            <a:r>
+              <a:rPr lang="en-IN" dirty="0">
+                <a:solidFill>
+                  <a:srgbClr val="000000"/>
+                </a:solidFill>
+                <a:latin typeface="Consolas" panose="020B0609020204030204" pitchFamily="49" charset="0"/>
+              </a:rPr>
+              <a:t>),</a:t>
+            </a:r>
+            <a:r>
+              <a:rPr lang="en-IN" dirty="0">
+                <a:solidFill>
+                  <a:srgbClr val="3165BB"/>
+                </a:solidFill>
+                <a:latin typeface="Consolas" panose="020B0609020204030204" pitchFamily="49" charset="0"/>
+              </a:rPr>
+              <a:t>ALLEXCEPT</a:t>
+            </a:r>
+            <a:r>
+              <a:rPr lang="en-IN" dirty="0">
+                <a:solidFill>
+                  <a:srgbClr val="000000"/>
+                </a:solidFill>
+                <a:latin typeface="Consolas" panose="020B0609020204030204" pitchFamily="49" charset="0"/>
+              </a:rPr>
+              <a:t>(</a:t>
+            </a:r>
+            <a:r>
+              <a:rPr lang="en-IN" dirty="0" err="1">
+                <a:solidFill>
+                  <a:srgbClr val="001080"/>
+                </a:solidFill>
+                <a:latin typeface="Consolas" panose="020B0609020204030204" pitchFamily="49" charset="0"/>
+              </a:rPr>
+              <a:t>Orders</a:t>
+            </a:r>
+            <a:r>
+              <a:rPr lang="en-IN" dirty="0" err="1">
+                <a:solidFill>
+                  <a:srgbClr val="000000"/>
+                </a:solidFill>
+                <a:latin typeface="Consolas" panose="020B0609020204030204" pitchFamily="49" charset="0"/>
+              </a:rPr>
+              <a:t>,</a:t>
+            </a:r>
+            <a:r>
+              <a:rPr lang="en-IN" dirty="0" err="1">
+                <a:solidFill>
+                  <a:srgbClr val="001080"/>
+                </a:solidFill>
+                <a:latin typeface="Consolas" panose="020B0609020204030204" pitchFamily="49" charset="0"/>
+              </a:rPr>
+              <a:t>Orders</a:t>
+            </a:r>
+            <a:r>
+              <a:rPr lang="en-IN" dirty="0">
+                <a:solidFill>
+                  <a:srgbClr val="001080"/>
+                </a:solidFill>
+                <a:latin typeface="Consolas" panose="020B0609020204030204" pitchFamily="49" charset="0"/>
+              </a:rPr>
+              <a:t>[Region]</a:t>
+            </a:r>
+            <a:r>
+              <a:rPr lang="en-IN" dirty="0">
+                <a:solidFill>
+                  <a:srgbClr val="000000"/>
+                </a:solidFill>
+                <a:latin typeface="Consolas" panose="020B0609020204030204" pitchFamily="49" charset="0"/>
+              </a:rPr>
+              <a:t>))</a:t>
+            </a:r>
+          </a:p>
+          <a:p>
+            <a:endParaRPr lang="en-US" dirty="0" smtClean="0">
+              <a:solidFill>
+                <a:srgbClr val="000000"/>
+              </a:solidFill>
+              <a:latin typeface="Consolas" panose="020B0609020204030204" pitchFamily="49" charset="0"/>
+            </a:endParaRPr>
+          </a:p>
+          <a:p>
+            <a:r>
+              <a:rPr lang="en-IN" dirty="0" err="1">
+                <a:solidFill>
+                  <a:srgbClr val="000000"/>
+                </a:solidFill>
+                <a:latin typeface="Consolas" panose="020B0609020204030204" pitchFamily="49" charset="0"/>
+              </a:rPr>
+              <a:t>Sum_Category</a:t>
+            </a:r>
+            <a:r>
+              <a:rPr lang="en-IN" dirty="0">
+                <a:solidFill>
+                  <a:srgbClr val="000000"/>
+                </a:solidFill>
+                <a:latin typeface="Consolas" panose="020B0609020204030204" pitchFamily="49" charset="0"/>
+              </a:rPr>
+              <a:t> = </a:t>
+            </a:r>
+            <a:endParaRPr lang="en-IN" dirty="0" smtClean="0">
+              <a:solidFill>
+                <a:srgbClr val="000000"/>
+              </a:solidFill>
+              <a:latin typeface="Consolas" panose="020B0609020204030204" pitchFamily="49" charset="0"/>
+            </a:endParaRPr>
+          </a:p>
+          <a:p>
+            <a:r>
+              <a:rPr lang="en-IN" dirty="0" smtClean="0">
+                <a:solidFill>
+                  <a:srgbClr val="3165BB"/>
+                </a:solidFill>
+                <a:latin typeface="Consolas" panose="020B0609020204030204" pitchFamily="49" charset="0"/>
+              </a:rPr>
+              <a:t>CALCULATE</a:t>
+            </a:r>
+            <a:r>
+              <a:rPr lang="en-IN" dirty="0" smtClean="0">
+                <a:solidFill>
+                  <a:srgbClr val="000000"/>
+                </a:solidFill>
+                <a:latin typeface="Consolas" panose="020B0609020204030204" pitchFamily="49" charset="0"/>
+              </a:rPr>
+              <a:t>(</a:t>
+            </a:r>
+            <a:r>
+              <a:rPr lang="en-IN" dirty="0" smtClean="0">
+                <a:solidFill>
+                  <a:srgbClr val="3165BB"/>
+                </a:solidFill>
+                <a:latin typeface="Consolas" panose="020B0609020204030204" pitchFamily="49" charset="0"/>
+              </a:rPr>
+              <a:t>SUM</a:t>
+            </a:r>
+            <a:r>
+              <a:rPr lang="en-IN" dirty="0" smtClean="0">
+                <a:solidFill>
+                  <a:srgbClr val="000000"/>
+                </a:solidFill>
+                <a:latin typeface="Consolas" panose="020B0609020204030204" pitchFamily="49" charset="0"/>
+              </a:rPr>
+              <a:t>(</a:t>
+            </a:r>
+            <a:r>
+              <a:rPr lang="en-IN" dirty="0" smtClean="0">
+                <a:solidFill>
+                  <a:srgbClr val="001080"/>
+                </a:solidFill>
+                <a:latin typeface="Consolas" panose="020B0609020204030204" pitchFamily="49" charset="0"/>
+              </a:rPr>
+              <a:t>Orders[Sales</a:t>
+            </a:r>
+            <a:r>
+              <a:rPr lang="en-IN" dirty="0">
+                <a:solidFill>
+                  <a:srgbClr val="001080"/>
+                </a:solidFill>
+                <a:latin typeface="Consolas" panose="020B0609020204030204" pitchFamily="49" charset="0"/>
+              </a:rPr>
+              <a:t>]</a:t>
+            </a:r>
+            <a:r>
+              <a:rPr lang="en-IN" dirty="0">
+                <a:solidFill>
+                  <a:srgbClr val="000000"/>
+                </a:solidFill>
+                <a:latin typeface="Consolas" panose="020B0609020204030204" pitchFamily="49" charset="0"/>
+              </a:rPr>
+              <a:t>),</a:t>
+            </a:r>
+            <a:r>
+              <a:rPr lang="en-IN" dirty="0">
+                <a:solidFill>
+                  <a:srgbClr val="3165BB"/>
+                </a:solidFill>
+                <a:latin typeface="Consolas" panose="020B0609020204030204" pitchFamily="49" charset="0"/>
+              </a:rPr>
+              <a:t>ALLEXCEPT</a:t>
+            </a:r>
+            <a:r>
+              <a:rPr lang="en-IN" dirty="0">
+                <a:solidFill>
+                  <a:srgbClr val="000000"/>
+                </a:solidFill>
+                <a:latin typeface="Consolas" panose="020B0609020204030204" pitchFamily="49" charset="0"/>
+              </a:rPr>
+              <a:t>(</a:t>
+            </a:r>
+            <a:r>
+              <a:rPr lang="en-IN" dirty="0" err="1">
+                <a:solidFill>
+                  <a:srgbClr val="001080"/>
+                </a:solidFill>
+                <a:latin typeface="Consolas" panose="020B0609020204030204" pitchFamily="49" charset="0"/>
+              </a:rPr>
+              <a:t>Orders</a:t>
+            </a:r>
+            <a:r>
+              <a:rPr lang="en-IN" dirty="0" err="1">
+                <a:solidFill>
+                  <a:srgbClr val="000000"/>
+                </a:solidFill>
+                <a:latin typeface="Consolas" panose="020B0609020204030204" pitchFamily="49" charset="0"/>
+              </a:rPr>
+              <a:t>,</a:t>
+            </a:r>
+            <a:r>
+              <a:rPr lang="en-IN" dirty="0" err="1">
+                <a:solidFill>
+                  <a:srgbClr val="001080"/>
+                </a:solidFill>
+                <a:latin typeface="Consolas" panose="020B0609020204030204" pitchFamily="49" charset="0"/>
+              </a:rPr>
+              <a:t>Orders</a:t>
+            </a:r>
+            <a:r>
+              <a:rPr lang="en-IN" dirty="0">
+                <a:solidFill>
+                  <a:srgbClr val="001080"/>
+                </a:solidFill>
+                <a:latin typeface="Consolas" panose="020B0609020204030204" pitchFamily="49" charset="0"/>
+              </a:rPr>
+              <a:t>[Category]</a:t>
+            </a:r>
+            <a:r>
+              <a:rPr lang="en-IN" dirty="0">
+                <a:solidFill>
+                  <a:srgbClr val="000000"/>
+                </a:solidFill>
+                <a:latin typeface="Consolas" panose="020B0609020204030204" pitchFamily="49" charset="0"/>
+              </a:rPr>
+              <a:t>))</a:t>
+            </a:r>
+          </a:p>
+          <a:p>
+            <a:endParaRPr lang="en-IN" dirty="0" smtClean="0">
+              <a:solidFill>
+                <a:srgbClr val="000000"/>
+              </a:solidFill>
+              <a:latin typeface="Consolas" panose="020B0609020204030204" pitchFamily="49" charset="0"/>
+            </a:endParaRPr>
+          </a:p>
+          <a:p>
+            <a:endParaRPr lang="en-IN" dirty="0">
+              <a:solidFill>
+                <a:srgbClr val="000000"/>
+              </a:solidFill>
+              <a:latin typeface="Consolas" panose="020B0609020204030204" pitchFamily="49" charset="0"/>
+            </a:endParaRPr>
+          </a:p>
+          <a:p>
+            <a:r>
+              <a:rPr lang="en-IN" dirty="0" err="1" smtClean="0">
+                <a:solidFill>
+                  <a:srgbClr val="000000"/>
+                </a:solidFill>
+                <a:latin typeface="Consolas" panose="020B0609020204030204" pitchFamily="49" charset="0"/>
+              </a:rPr>
+              <a:t>Sum_Region_Category</a:t>
+            </a:r>
+            <a:r>
+              <a:rPr lang="en-IN" dirty="0" smtClean="0">
+                <a:solidFill>
+                  <a:srgbClr val="000000"/>
+                </a:solidFill>
+                <a:latin typeface="Consolas" panose="020B0609020204030204" pitchFamily="49" charset="0"/>
+              </a:rPr>
+              <a:t> </a:t>
+            </a:r>
+            <a:r>
+              <a:rPr lang="en-IN" dirty="0">
+                <a:solidFill>
+                  <a:srgbClr val="000000"/>
+                </a:solidFill>
+                <a:latin typeface="Consolas" panose="020B0609020204030204" pitchFamily="49" charset="0"/>
+              </a:rPr>
+              <a:t>= </a:t>
+            </a:r>
+            <a:r>
+              <a:rPr lang="en-IN" dirty="0">
+                <a:solidFill>
+                  <a:srgbClr val="3165BB"/>
+                </a:solidFill>
+                <a:latin typeface="Consolas" panose="020B0609020204030204" pitchFamily="49" charset="0"/>
+              </a:rPr>
+              <a:t>CALCULATE</a:t>
+            </a:r>
+            <a:r>
+              <a:rPr lang="en-IN" dirty="0">
+                <a:solidFill>
+                  <a:srgbClr val="000000"/>
+                </a:solidFill>
+                <a:latin typeface="Consolas" panose="020B0609020204030204" pitchFamily="49" charset="0"/>
+              </a:rPr>
+              <a:t>(</a:t>
+            </a:r>
+            <a:r>
+              <a:rPr lang="en-IN" dirty="0">
+                <a:solidFill>
+                  <a:srgbClr val="3165BB"/>
+                </a:solidFill>
+                <a:latin typeface="Consolas" panose="020B0609020204030204" pitchFamily="49" charset="0"/>
+              </a:rPr>
+              <a:t>SUM</a:t>
+            </a:r>
+            <a:r>
+              <a:rPr lang="en-IN" dirty="0">
+                <a:solidFill>
+                  <a:srgbClr val="000000"/>
+                </a:solidFill>
+                <a:latin typeface="Consolas" panose="020B0609020204030204" pitchFamily="49" charset="0"/>
+              </a:rPr>
+              <a:t>(</a:t>
+            </a:r>
+            <a:r>
+              <a:rPr lang="en-IN" dirty="0">
+                <a:solidFill>
+                  <a:srgbClr val="001080"/>
+                </a:solidFill>
+                <a:latin typeface="Consolas" panose="020B0609020204030204" pitchFamily="49" charset="0"/>
+              </a:rPr>
+              <a:t>Orders[Sales]</a:t>
+            </a:r>
+            <a:r>
+              <a:rPr lang="en-IN" dirty="0">
+                <a:solidFill>
+                  <a:srgbClr val="000000"/>
+                </a:solidFill>
+                <a:latin typeface="Consolas" panose="020B0609020204030204" pitchFamily="49" charset="0"/>
+              </a:rPr>
+              <a:t>),</a:t>
+            </a:r>
+            <a:r>
+              <a:rPr lang="en-IN" dirty="0">
+                <a:solidFill>
+                  <a:srgbClr val="3165BB"/>
+                </a:solidFill>
+                <a:latin typeface="Consolas" panose="020B0609020204030204" pitchFamily="49" charset="0"/>
+              </a:rPr>
+              <a:t>ALLEXCEPT</a:t>
+            </a:r>
+            <a:r>
+              <a:rPr lang="en-IN" dirty="0">
+                <a:solidFill>
+                  <a:srgbClr val="000000"/>
+                </a:solidFill>
+                <a:latin typeface="Consolas" panose="020B0609020204030204" pitchFamily="49" charset="0"/>
+              </a:rPr>
+              <a:t>(</a:t>
+            </a:r>
+            <a:r>
+              <a:rPr lang="en-IN" dirty="0" err="1">
+                <a:solidFill>
+                  <a:srgbClr val="001080"/>
+                </a:solidFill>
+                <a:latin typeface="Consolas" panose="020B0609020204030204" pitchFamily="49" charset="0"/>
+              </a:rPr>
+              <a:t>Orders</a:t>
+            </a:r>
+            <a:r>
+              <a:rPr lang="en-IN" dirty="0" err="1">
+                <a:solidFill>
+                  <a:srgbClr val="000000"/>
+                </a:solidFill>
+                <a:latin typeface="Consolas" panose="020B0609020204030204" pitchFamily="49" charset="0"/>
+              </a:rPr>
+              <a:t>,</a:t>
+            </a:r>
+            <a:r>
+              <a:rPr lang="en-IN" dirty="0" err="1">
+                <a:solidFill>
+                  <a:srgbClr val="001080"/>
+                </a:solidFill>
+                <a:latin typeface="Consolas" panose="020B0609020204030204" pitchFamily="49" charset="0"/>
+              </a:rPr>
+              <a:t>Orders</a:t>
+            </a:r>
+            <a:r>
+              <a:rPr lang="en-IN" dirty="0">
+                <a:solidFill>
+                  <a:srgbClr val="001080"/>
+                </a:solidFill>
+                <a:latin typeface="Consolas" panose="020B0609020204030204" pitchFamily="49" charset="0"/>
+              </a:rPr>
+              <a:t>[Region]</a:t>
+            </a:r>
+            <a:r>
+              <a:rPr lang="en-IN" dirty="0">
+                <a:solidFill>
+                  <a:srgbClr val="000000"/>
+                </a:solidFill>
+                <a:latin typeface="Consolas" panose="020B0609020204030204" pitchFamily="49" charset="0"/>
+              </a:rPr>
+              <a:t>,</a:t>
+            </a:r>
+            <a:r>
+              <a:rPr lang="en-IN" dirty="0">
+                <a:solidFill>
+                  <a:srgbClr val="001080"/>
+                </a:solidFill>
+                <a:latin typeface="Consolas" panose="020B0609020204030204" pitchFamily="49" charset="0"/>
+              </a:rPr>
+              <a:t>Orders[Category]</a:t>
+            </a:r>
+            <a:r>
+              <a:rPr lang="en-IN" dirty="0">
+                <a:solidFill>
+                  <a:srgbClr val="000000"/>
+                </a:solidFill>
+                <a:latin typeface="Consolas" panose="020B0609020204030204" pitchFamily="49" charset="0"/>
+              </a:rPr>
+              <a:t>))</a:t>
+            </a:r>
+            <a:endParaRPr lang="en-IN" b="0" dirty="0">
+              <a:solidFill>
+                <a:srgbClr val="000000"/>
+              </a:solidFill>
+              <a:effectLst/>
+              <a:latin typeface="Consolas" panose="020B0609020204030204" pitchFamily="49" charset="0"/>
+            </a:endParaRPr>
+          </a:p>
+        </p:txBody>
+      </p:sp>
+    </p:spTree>
+    <p:extLst>
+      <p:ext uri="{BB962C8B-B14F-4D97-AF65-F5344CB8AC3E}">
+        <p14:creationId xmlns:p14="http://schemas.microsoft.com/office/powerpoint/2010/main" val="3365410378"/>
+      </p:ext>
+    </p:extLst>
+  </p:cSld>
+  <p:clrMapOvr>
+    <a:masterClrMapping/>
+  </p:clrMapOvr>
+  <p:timing>
+    <p:tnLst>
+      <p:par>
+        <p:cTn id="1" dur="indefinite" restart="never" nodeType="tmRoot"/>
+      </p:par>
+    </p:tnLst>
+  </p:timing>
+</p:sld>
+</file>
+
+<file path=ppt/slides/slide14.xml><?xml version="1.0" encoding="utf-8"?>
+<p:sld xmlns:a="http://schemas.openxmlformats.org/drawingml/2006/main" xmlns:r="http://schemas.openxmlformats.org/officeDocument/2006/relationships" xmlns:p="http://schemas.openxmlformats.org/presentationml/2006/main">
+  <p:cSld>
+    <p:bg>
+      <p:bgPr>
+        <a:solidFill>
+          <a:schemeClr val="bg2">
+            <a:lumMod val="60000"/>
+            <a:lumOff val="40000"/>
+          </a:schemeClr>
+        </a:solidFill>
+        <a:effectLst/>
+      </p:bgPr>
+    </p:bg>
+    <p:spTree>
+      <p:nvGrpSpPr>
+        <p:cNvPr id="1" name=""/>
+        <p:cNvGrpSpPr/>
+        <p:nvPr/>
+      </p:nvGrpSpPr>
+      <p:grpSpPr>
+        <a:xfrm>
+          <a:off x="0" y="0"/>
+          <a:ext cx="0" cy="0"/>
+          <a:chOff x="0" y="0"/>
+          <a:chExt cx="0" cy="0"/>
+        </a:xfrm>
+      </p:grpSpPr>
+      <p:sp>
+        <p:nvSpPr>
+          <p:cNvPr id="4" name="Rectangle 3"/>
+          <p:cNvSpPr/>
+          <p:nvPr/>
+        </p:nvSpPr>
+        <p:spPr>
+          <a:xfrm>
+            <a:off x="484530" y="2091262"/>
+            <a:ext cx="4246089" cy="400110"/>
+          </a:xfrm>
+          <a:prstGeom prst="rect">
+            <a:avLst/>
+          </a:prstGeom>
+        </p:spPr>
+        <p:txBody>
+          <a:bodyPr wrap="square">
+            <a:spAutoFit/>
+          </a:bodyPr>
+          <a:lstStyle/>
+          <a:p>
+            <a:r>
+              <a:rPr lang="en-IN" sz="2000" dirty="0">
+                <a:solidFill>
+                  <a:schemeClr val="bg2"/>
+                </a:solidFill>
+                <a:latin typeface="Courier New" panose="02070309020205020404" pitchFamily="49" charset="0"/>
+                <a:cs typeface="Courier New" panose="02070309020205020404" pitchFamily="49" charset="0"/>
+              </a:rPr>
+              <a:t>ALL(Orders[Category])</a:t>
+            </a:r>
+            <a:endParaRPr lang="en-IN" sz="2000" b="0" dirty="0">
+              <a:solidFill>
+                <a:schemeClr val="bg2"/>
+              </a:solidFill>
+              <a:effectLst/>
+              <a:latin typeface="Courier New" panose="02070309020205020404" pitchFamily="49" charset="0"/>
+              <a:cs typeface="Courier New" panose="02070309020205020404" pitchFamily="49" charset="0"/>
+            </a:endParaRPr>
+          </a:p>
+        </p:txBody>
+      </p:sp>
+      <p:sp>
+        <p:nvSpPr>
+          <p:cNvPr id="5" name="Rectangle 4"/>
+          <p:cNvSpPr/>
+          <p:nvPr/>
+        </p:nvSpPr>
+        <p:spPr>
+          <a:xfrm>
+            <a:off x="373429" y="842717"/>
+            <a:ext cx="10600236" cy="923330"/>
+          </a:xfrm>
+          <a:prstGeom prst="rect">
+            <a:avLst/>
+          </a:prstGeom>
+        </p:spPr>
+        <p:txBody>
+          <a:bodyPr wrap="square">
+            <a:spAutoFit/>
+          </a:bodyPr>
+          <a:lstStyle/>
+          <a:p>
+            <a:r>
+              <a:rPr lang="en-US" dirty="0" smtClean="0">
+                <a:solidFill>
+                  <a:schemeClr val="bg2"/>
+                </a:solidFill>
+                <a:latin typeface="Courier New" panose="02070309020205020404" pitchFamily="49" charset="0"/>
+                <a:cs typeface="Courier New" panose="02070309020205020404" pitchFamily="49" charset="0"/>
+              </a:rPr>
+              <a:t>All()</a:t>
+            </a:r>
+          </a:p>
+          <a:p>
+            <a:r>
+              <a:rPr lang="en-US" dirty="0" smtClean="0">
+                <a:solidFill>
+                  <a:schemeClr val="bg2"/>
+                </a:solidFill>
+                <a:latin typeface="Candara" panose="020E0502030303020204" pitchFamily="34" charset="0"/>
+              </a:rPr>
+              <a:t>Its </a:t>
+            </a:r>
+            <a:r>
+              <a:rPr lang="en-US" dirty="0">
+                <a:solidFill>
+                  <a:schemeClr val="bg2"/>
+                </a:solidFill>
+                <a:latin typeface="Candara" panose="020E0502030303020204" pitchFamily="34" charset="0"/>
+              </a:rPr>
+              <a:t>primary job is to </a:t>
+            </a:r>
+            <a:r>
+              <a:rPr lang="en-US" b="1" dirty="0">
+                <a:solidFill>
+                  <a:schemeClr val="bg2"/>
+                </a:solidFill>
+                <a:latin typeface="Candara" panose="020E0502030303020204" pitchFamily="34" charset="0"/>
+              </a:rPr>
+              <a:t>clear/remove filters</a:t>
+            </a:r>
+            <a:r>
+              <a:rPr lang="en-US" dirty="0" smtClean="0">
+                <a:solidFill>
+                  <a:schemeClr val="bg2"/>
+                </a:solidFill>
+                <a:latin typeface="Candara" panose="020E0502030303020204" pitchFamily="34" charset="0"/>
+              </a:rPr>
+              <a:t>.</a:t>
+            </a:r>
+          </a:p>
+          <a:p>
+            <a:pPr lvl="0"/>
+            <a:r>
+              <a:rPr lang="en-US" altLang="en-US" dirty="0" smtClean="0">
+                <a:solidFill>
+                  <a:schemeClr val="bg2"/>
+                </a:solidFill>
+                <a:latin typeface="Candara" panose="020E0502030303020204" pitchFamily="34" charset="0"/>
+              </a:rPr>
+              <a:t>ALL </a:t>
+            </a:r>
+            <a:r>
+              <a:rPr lang="en-US" altLang="en-US" dirty="0">
+                <a:solidFill>
+                  <a:schemeClr val="bg2"/>
+                </a:solidFill>
+                <a:latin typeface="Candara" panose="020E0502030303020204" pitchFamily="34" charset="0"/>
+              </a:rPr>
+              <a:t>can clear filters from </a:t>
+            </a:r>
+            <a:r>
+              <a:rPr lang="en-US" altLang="en-US" dirty="0" smtClean="0">
+                <a:solidFill>
+                  <a:schemeClr val="bg2"/>
+                </a:solidFill>
+                <a:latin typeface="Candara" panose="020E0502030303020204" pitchFamily="34" charset="0"/>
+              </a:rPr>
+              <a:t>a specific </a:t>
+            </a:r>
+            <a:r>
+              <a:rPr lang="en-US" altLang="en-US" dirty="0">
+                <a:solidFill>
+                  <a:schemeClr val="bg2"/>
+                </a:solidFill>
+                <a:latin typeface="Candara" panose="020E0502030303020204" pitchFamily="34" charset="0"/>
+              </a:rPr>
+              <a:t>columns, or serve as a vital modifier inside CALCULATE </a:t>
+            </a:r>
+          </a:p>
+        </p:txBody>
+      </p:sp>
+      <p:sp>
+        <p:nvSpPr>
+          <p:cNvPr id="8" name="Rectangle 7"/>
+          <p:cNvSpPr/>
+          <p:nvPr/>
+        </p:nvSpPr>
+        <p:spPr>
+          <a:xfrm>
+            <a:off x="484530" y="2816587"/>
+            <a:ext cx="7308979" cy="369332"/>
+          </a:xfrm>
+          <a:prstGeom prst="rect">
+            <a:avLst/>
+          </a:prstGeom>
+        </p:spPr>
+        <p:txBody>
+          <a:bodyPr wrap="square">
+            <a:spAutoFit/>
+          </a:bodyPr>
+          <a:lstStyle/>
+          <a:p>
+            <a:r>
+              <a:rPr lang="en-IN" dirty="0">
+                <a:solidFill>
+                  <a:srgbClr val="3165BB"/>
+                </a:solidFill>
+                <a:latin typeface="Courier New" panose="02070309020205020404" pitchFamily="49" charset="0"/>
+                <a:cs typeface="Courier New" panose="02070309020205020404" pitchFamily="49" charset="0"/>
+              </a:rPr>
+              <a:t>CALCULATE</a:t>
+            </a:r>
+            <a:r>
+              <a:rPr lang="en-IN" dirty="0">
+                <a:solidFill>
+                  <a:srgbClr val="000000"/>
+                </a:solidFill>
+                <a:latin typeface="Courier New" panose="02070309020205020404" pitchFamily="49" charset="0"/>
+                <a:cs typeface="Courier New" panose="02070309020205020404" pitchFamily="49" charset="0"/>
+              </a:rPr>
+              <a:t>(</a:t>
+            </a:r>
+            <a:r>
+              <a:rPr lang="en-IN" dirty="0">
+                <a:solidFill>
+                  <a:srgbClr val="3165BB"/>
+                </a:solidFill>
+                <a:latin typeface="Courier New" panose="02070309020205020404" pitchFamily="49" charset="0"/>
+                <a:cs typeface="Courier New" panose="02070309020205020404" pitchFamily="49" charset="0"/>
+              </a:rPr>
+              <a:t>SUM</a:t>
+            </a:r>
+            <a:r>
+              <a:rPr lang="en-IN" dirty="0">
+                <a:solidFill>
+                  <a:srgbClr val="000000"/>
+                </a:solidFill>
+                <a:latin typeface="Courier New" panose="02070309020205020404" pitchFamily="49" charset="0"/>
+                <a:cs typeface="Courier New" panose="02070309020205020404" pitchFamily="49" charset="0"/>
+              </a:rPr>
+              <a:t>(</a:t>
+            </a:r>
+            <a:r>
+              <a:rPr lang="en-IN" dirty="0">
+                <a:solidFill>
+                  <a:srgbClr val="001080"/>
+                </a:solidFill>
+                <a:latin typeface="Courier New" panose="02070309020205020404" pitchFamily="49" charset="0"/>
+                <a:cs typeface="Courier New" panose="02070309020205020404" pitchFamily="49" charset="0"/>
+              </a:rPr>
+              <a:t>Orders[Sales]</a:t>
+            </a:r>
+            <a:r>
+              <a:rPr lang="en-IN" dirty="0">
+                <a:solidFill>
+                  <a:srgbClr val="000000"/>
+                </a:solidFill>
+                <a:latin typeface="Courier New" panose="02070309020205020404" pitchFamily="49" charset="0"/>
+                <a:cs typeface="Courier New" panose="02070309020205020404" pitchFamily="49" charset="0"/>
+              </a:rPr>
+              <a:t>),</a:t>
+            </a:r>
+            <a:r>
+              <a:rPr lang="en-IN" dirty="0">
+                <a:solidFill>
+                  <a:srgbClr val="3165BB"/>
+                </a:solidFill>
+                <a:latin typeface="Courier New" panose="02070309020205020404" pitchFamily="49" charset="0"/>
+                <a:cs typeface="Courier New" panose="02070309020205020404" pitchFamily="49" charset="0"/>
+              </a:rPr>
+              <a:t>ALL</a:t>
+            </a:r>
+            <a:r>
+              <a:rPr lang="en-IN" dirty="0">
+                <a:solidFill>
+                  <a:srgbClr val="000000"/>
+                </a:solidFill>
+                <a:latin typeface="Courier New" panose="02070309020205020404" pitchFamily="49" charset="0"/>
+                <a:cs typeface="Courier New" panose="02070309020205020404" pitchFamily="49" charset="0"/>
+              </a:rPr>
+              <a:t>(</a:t>
+            </a:r>
+            <a:r>
+              <a:rPr lang="en-IN" dirty="0">
+                <a:solidFill>
+                  <a:srgbClr val="001080"/>
+                </a:solidFill>
+                <a:latin typeface="Courier New" panose="02070309020205020404" pitchFamily="49" charset="0"/>
+                <a:cs typeface="Courier New" panose="02070309020205020404" pitchFamily="49" charset="0"/>
+              </a:rPr>
+              <a:t>Orders[Category]</a:t>
+            </a:r>
+            <a:r>
+              <a:rPr lang="en-IN" dirty="0">
+                <a:solidFill>
+                  <a:srgbClr val="000000"/>
+                </a:solidFill>
+                <a:latin typeface="Courier New" panose="02070309020205020404" pitchFamily="49" charset="0"/>
+                <a:cs typeface="Courier New" panose="02070309020205020404" pitchFamily="49" charset="0"/>
+              </a:rPr>
+              <a:t>))</a:t>
+            </a:r>
+            <a:endParaRPr lang="en-IN" b="0" dirty="0">
+              <a:solidFill>
+                <a:srgbClr val="000000"/>
+              </a:solidFill>
+              <a:effectLst/>
+              <a:latin typeface="Courier New" panose="02070309020205020404" pitchFamily="49" charset="0"/>
+              <a:cs typeface="Courier New" panose="02070309020205020404" pitchFamily="49" charset="0"/>
+            </a:endParaRPr>
+          </a:p>
+        </p:txBody>
+      </p:sp>
+      <p:sp>
+        <p:nvSpPr>
+          <p:cNvPr id="9" name="Rectangle 8"/>
+          <p:cNvSpPr/>
+          <p:nvPr/>
+        </p:nvSpPr>
+        <p:spPr>
+          <a:xfrm>
+            <a:off x="484530" y="3511134"/>
+            <a:ext cx="10824171" cy="584775"/>
+          </a:xfrm>
+          <a:prstGeom prst="rect">
+            <a:avLst/>
+          </a:prstGeom>
+        </p:spPr>
+        <p:txBody>
+          <a:bodyPr wrap="square">
+            <a:spAutoFit/>
+          </a:bodyPr>
+          <a:lstStyle/>
+          <a:p>
+            <a:r>
+              <a:rPr lang="en-US" sz="1600" dirty="0">
+                <a:solidFill>
+                  <a:srgbClr val="000000"/>
+                </a:solidFill>
+                <a:latin typeface="Courier New" panose="02070309020205020404" pitchFamily="49" charset="0"/>
+                <a:cs typeface="Courier New" panose="02070309020205020404" pitchFamily="49" charset="0"/>
+              </a:rPr>
+              <a:t>M_%</a:t>
+            </a:r>
+            <a:r>
+              <a:rPr lang="en-US" sz="1600" dirty="0" err="1">
+                <a:solidFill>
+                  <a:srgbClr val="000000"/>
+                </a:solidFill>
+                <a:latin typeface="Courier New" panose="02070309020205020404" pitchFamily="49" charset="0"/>
+                <a:cs typeface="Courier New" panose="02070309020205020404" pitchFamily="49" charset="0"/>
+              </a:rPr>
+              <a:t>Contri</a:t>
+            </a:r>
+            <a:r>
+              <a:rPr lang="en-US" sz="1600" dirty="0">
+                <a:solidFill>
+                  <a:srgbClr val="000000"/>
+                </a:solidFill>
+                <a:latin typeface="Courier New" panose="02070309020205020404" pitchFamily="49" charset="0"/>
+                <a:cs typeface="Courier New" panose="02070309020205020404" pitchFamily="49" charset="0"/>
+              </a:rPr>
+              <a:t> = </a:t>
+            </a:r>
+            <a:r>
+              <a:rPr lang="en-US" sz="1600" dirty="0">
+                <a:solidFill>
+                  <a:srgbClr val="3165BB"/>
+                </a:solidFill>
+                <a:latin typeface="Courier New" panose="02070309020205020404" pitchFamily="49" charset="0"/>
+                <a:cs typeface="Courier New" panose="02070309020205020404" pitchFamily="49" charset="0"/>
+              </a:rPr>
+              <a:t>DIVIDE</a:t>
+            </a:r>
+            <a:r>
+              <a:rPr lang="en-US" sz="1600" dirty="0">
+                <a:solidFill>
+                  <a:srgbClr val="000000"/>
+                </a:solidFill>
+                <a:latin typeface="Courier New" panose="02070309020205020404" pitchFamily="49" charset="0"/>
+                <a:cs typeface="Courier New" panose="02070309020205020404" pitchFamily="49" charset="0"/>
+              </a:rPr>
+              <a:t>(</a:t>
+            </a:r>
+            <a:r>
+              <a:rPr lang="en-US" sz="1600" dirty="0">
+                <a:solidFill>
+                  <a:srgbClr val="3165BB"/>
+                </a:solidFill>
+                <a:latin typeface="Courier New" panose="02070309020205020404" pitchFamily="49" charset="0"/>
+                <a:cs typeface="Courier New" panose="02070309020205020404" pitchFamily="49" charset="0"/>
+              </a:rPr>
+              <a:t>SUM</a:t>
+            </a:r>
+            <a:r>
+              <a:rPr lang="en-US" sz="1600" dirty="0">
+                <a:solidFill>
+                  <a:srgbClr val="000000"/>
+                </a:solidFill>
+                <a:latin typeface="Courier New" panose="02070309020205020404" pitchFamily="49" charset="0"/>
+                <a:cs typeface="Courier New" panose="02070309020205020404" pitchFamily="49" charset="0"/>
+              </a:rPr>
+              <a:t>(</a:t>
+            </a:r>
+            <a:r>
+              <a:rPr lang="en-US" sz="1600" dirty="0">
+                <a:solidFill>
+                  <a:srgbClr val="001080"/>
+                </a:solidFill>
+                <a:latin typeface="Courier New" panose="02070309020205020404" pitchFamily="49" charset="0"/>
+                <a:cs typeface="Courier New" panose="02070309020205020404" pitchFamily="49" charset="0"/>
+              </a:rPr>
+              <a:t>Orders[Sales]</a:t>
+            </a:r>
+            <a:r>
+              <a:rPr lang="en-US" sz="1600" dirty="0">
+                <a:solidFill>
+                  <a:srgbClr val="000000"/>
+                </a:solidFill>
+                <a:latin typeface="Courier New" panose="02070309020205020404" pitchFamily="49" charset="0"/>
+                <a:cs typeface="Courier New" panose="02070309020205020404" pitchFamily="49" charset="0"/>
+              </a:rPr>
+              <a:t>),</a:t>
+            </a:r>
+            <a:r>
+              <a:rPr lang="en-US" sz="1600" dirty="0">
+                <a:solidFill>
+                  <a:srgbClr val="3165BB"/>
+                </a:solidFill>
+                <a:latin typeface="Courier New" panose="02070309020205020404" pitchFamily="49" charset="0"/>
+                <a:cs typeface="Courier New" panose="02070309020205020404" pitchFamily="49" charset="0"/>
+              </a:rPr>
+              <a:t>CALCULATE</a:t>
+            </a:r>
+            <a:r>
+              <a:rPr lang="en-US" sz="1600" dirty="0">
+                <a:solidFill>
+                  <a:srgbClr val="000000"/>
+                </a:solidFill>
+                <a:latin typeface="Courier New" panose="02070309020205020404" pitchFamily="49" charset="0"/>
+                <a:cs typeface="Courier New" panose="02070309020205020404" pitchFamily="49" charset="0"/>
+              </a:rPr>
+              <a:t>(</a:t>
+            </a:r>
+            <a:r>
+              <a:rPr lang="en-US" sz="1600" dirty="0">
+                <a:solidFill>
+                  <a:srgbClr val="3165BB"/>
+                </a:solidFill>
+                <a:latin typeface="Courier New" panose="02070309020205020404" pitchFamily="49" charset="0"/>
+                <a:cs typeface="Courier New" panose="02070309020205020404" pitchFamily="49" charset="0"/>
+              </a:rPr>
+              <a:t>SUM</a:t>
+            </a:r>
+            <a:r>
+              <a:rPr lang="en-US" sz="1600" dirty="0">
+                <a:solidFill>
+                  <a:srgbClr val="000000"/>
+                </a:solidFill>
+                <a:latin typeface="Courier New" panose="02070309020205020404" pitchFamily="49" charset="0"/>
+                <a:cs typeface="Courier New" panose="02070309020205020404" pitchFamily="49" charset="0"/>
+              </a:rPr>
+              <a:t>(</a:t>
+            </a:r>
+            <a:r>
+              <a:rPr lang="en-US" sz="1600" dirty="0">
+                <a:solidFill>
+                  <a:srgbClr val="001080"/>
+                </a:solidFill>
+                <a:latin typeface="Courier New" panose="02070309020205020404" pitchFamily="49" charset="0"/>
+                <a:cs typeface="Courier New" panose="02070309020205020404" pitchFamily="49" charset="0"/>
+              </a:rPr>
+              <a:t>Orders[Sales]</a:t>
+            </a:r>
+            <a:r>
+              <a:rPr lang="en-US" sz="1600" dirty="0">
+                <a:solidFill>
+                  <a:srgbClr val="000000"/>
+                </a:solidFill>
+                <a:latin typeface="Courier New" panose="02070309020205020404" pitchFamily="49" charset="0"/>
+                <a:cs typeface="Courier New" panose="02070309020205020404" pitchFamily="49" charset="0"/>
+              </a:rPr>
+              <a:t>),</a:t>
+            </a:r>
+            <a:r>
+              <a:rPr lang="en-US" sz="1600" dirty="0">
+                <a:solidFill>
+                  <a:srgbClr val="3165BB"/>
+                </a:solidFill>
+                <a:latin typeface="Courier New" panose="02070309020205020404" pitchFamily="49" charset="0"/>
+                <a:cs typeface="Courier New" panose="02070309020205020404" pitchFamily="49" charset="0"/>
+              </a:rPr>
+              <a:t>ALL</a:t>
+            </a:r>
+            <a:r>
+              <a:rPr lang="en-US" sz="1600" dirty="0">
+                <a:solidFill>
+                  <a:srgbClr val="000000"/>
+                </a:solidFill>
+                <a:latin typeface="Courier New" panose="02070309020205020404" pitchFamily="49" charset="0"/>
+                <a:cs typeface="Courier New" panose="02070309020205020404" pitchFamily="49" charset="0"/>
+              </a:rPr>
+              <a:t>(</a:t>
+            </a:r>
+            <a:r>
+              <a:rPr lang="en-US" sz="1600" dirty="0">
+                <a:solidFill>
+                  <a:srgbClr val="001080"/>
+                </a:solidFill>
+                <a:latin typeface="Courier New" panose="02070309020205020404" pitchFamily="49" charset="0"/>
+                <a:cs typeface="Courier New" panose="02070309020205020404" pitchFamily="49" charset="0"/>
+              </a:rPr>
+              <a:t>Orders[Category]</a:t>
+            </a:r>
+            <a:r>
+              <a:rPr lang="en-US" sz="1600" dirty="0">
+                <a:solidFill>
+                  <a:srgbClr val="000000"/>
+                </a:solidFill>
+                <a:latin typeface="Courier New" panose="02070309020205020404" pitchFamily="49" charset="0"/>
+                <a:cs typeface="Courier New" panose="02070309020205020404" pitchFamily="49" charset="0"/>
+              </a:rPr>
+              <a:t>)))</a:t>
+            </a:r>
+            <a:endParaRPr lang="en-US" sz="1600" b="0" dirty="0">
+              <a:solidFill>
+                <a:srgbClr val="000000"/>
+              </a:solidFill>
+              <a:effectLst/>
+              <a:latin typeface="Courier New" panose="02070309020205020404" pitchFamily="49" charset="0"/>
+              <a:cs typeface="Courier New" panose="02070309020205020404" pitchFamily="49" charset="0"/>
+            </a:endParaRPr>
+          </a:p>
+        </p:txBody>
+      </p:sp>
+    </p:spTree>
+    <p:extLst>
+      <p:ext uri="{BB962C8B-B14F-4D97-AF65-F5344CB8AC3E}">
+        <p14:creationId xmlns:p14="http://schemas.microsoft.com/office/powerpoint/2010/main" val="1445128732"/>
+      </p:ext>
+    </p:extLst>
+  </p:cSld>
+  <p:clrMapOvr>
+    <a:masterClrMapping/>
+  </p:clrMapOvr>
+  <p:timing>
+    <p:tnLst>
+      <p:par>
+        <p:cTn id="1" dur="indefinite" restart="never" nodeType="tmRoot"/>
+      </p:par>
+    </p:tnLst>
+  </p:timing>
+</p:sld>
+</file>
+
+<file path=ppt/slides/slide15.xml><?xml version="1.0" encoding="utf-8"?>
+<p:sld xmlns:a="http://schemas.openxmlformats.org/drawingml/2006/main" xmlns:r="http://schemas.openxmlformats.org/officeDocument/2006/relationships" xmlns:p="http://schemas.openxmlformats.org/presentationml/2006/main">
+  <p:cSld>
+    <p:spTree>
+      <p:nvGrpSpPr>
+        <p:cNvPr id="1" name=""/>
+        <p:cNvGrpSpPr/>
+        <p:nvPr/>
+      </p:nvGrpSpPr>
+      <p:grpSpPr>
+        <a:xfrm>
+          <a:off x="0" y="0"/>
+          <a:ext cx="0" cy="0"/>
+          <a:chOff x="0" y="0"/>
+          <a:chExt cx="0" cy="0"/>
+        </a:xfrm>
+      </p:grpSpPr>
+      <p:sp>
+        <p:nvSpPr>
+          <p:cNvPr id="4" name="Rectangle 3"/>
+          <p:cNvSpPr/>
+          <p:nvPr/>
+        </p:nvSpPr>
+        <p:spPr>
+          <a:xfrm>
+            <a:off x="444760" y="597361"/>
+            <a:ext cx="6096000" cy="923330"/>
+          </a:xfrm>
+          <a:prstGeom prst="rect">
+            <a:avLst/>
+          </a:prstGeom>
+        </p:spPr>
+        <p:txBody>
+          <a:bodyPr>
+            <a:spAutoFit/>
+          </a:bodyPr>
+          <a:lstStyle/>
+          <a:p>
+            <a:r>
+              <a:rPr lang="en-IN" dirty="0">
+                <a:latin typeface="Courier New" panose="02070309020205020404" pitchFamily="49" charset="0"/>
+                <a:cs typeface="Courier New" panose="02070309020205020404" pitchFamily="49" charset="0"/>
+              </a:rPr>
+              <a:t>FILTER()</a:t>
+            </a:r>
+          </a:p>
+          <a:p>
+            <a:r>
+              <a:rPr lang="en-IN" dirty="0">
+                <a:latin typeface="Courier New" panose="02070309020205020404" pitchFamily="49" charset="0"/>
+                <a:cs typeface="Courier New" panose="02070309020205020404" pitchFamily="49" charset="0"/>
+              </a:rPr>
+              <a:t>KEEPFILTERS()</a:t>
+            </a:r>
+          </a:p>
+          <a:p>
+            <a:r>
+              <a:rPr lang="en-IN" dirty="0">
+                <a:latin typeface="Courier New" panose="02070309020205020404" pitchFamily="49" charset="0"/>
+                <a:cs typeface="Courier New" panose="02070309020205020404" pitchFamily="49" charset="0"/>
+              </a:rPr>
+              <a:t>REMOVEFILTERS()</a:t>
+            </a:r>
+          </a:p>
+        </p:txBody>
+      </p:sp>
+    </p:spTree>
+    <p:extLst>
+      <p:ext uri="{BB962C8B-B14F-4D97-AF65-F5344CB8AC3E}">
+        <p14:creationId xmlns:p14="http://schemas.microsoft.com/office/powerpoint/2010/main" val="2917987714"/>
+      </p:ext>
+    </p:extLst>
+  </p:cSld>
+  <p:clrMapOvr>
+    <a:masterClrMapping/>
+  </p:clrMapOvr>
+  <p:timing>
+    <p:tnLst>
+      <p:par>
+        <p:cTn id="1" dur="indefinite" restart="never" nodeType="tmRoot"/>
+      </p:par>
+    </p:tnLst>
+  </p:timing>
+</p:sld>
+</file>
+
+<file path=ppt/slides/slide16.xml><?xml version="1.0" encoding="utf-8"?>
+<p:sld xmlns:a="http://schemas.openxmlformats.org/drawingml/2006/main" xmlns:r="http://schemas.openxmlformats.org/officeDocument/2006/relationships" xmlns:p="http://schemas.openxmlformats.org/presentationml/2006/main">
+  <p:cSld>
+    <p:spTree>
+      <p:nvGrpSpPr>
+        <p:cNvPr id="1" name=""/>
+        <p:cNvGrpSpPr/>
+        <p:nvPr/>
+      </p:nvGrpSpPr>
+      <p:grpSpPr>
+        <a:xfrm>
+          <a:off x="0" y="0"/>
+          <a:ext cx="0" cy="0"/>
+          <a:chOff x="0" y="0"/>
+          <a:chExt cx="0" cy="0"/>
+        </a:xfrm>
+      </p:grpSpPr>
+      <p:sp>
+        <p:nvSpPr>
+          <p:cNvPr id="4" name="Rectangle 1"/>
+          <p:cNvSpPr>
+            <a:spLocks noChangeArrowheads="1"/>
+          </p:cNvSpPr>
+          <p:nvPr/>
+        </p:nvSpPr>
+        <p:spPr bwMode="auto">
+          <a:xfrm>
+            <a:off x="-214605" y="670748"/>
+            <a:ext cx="11728580" cy="1569660"/>
+          </a:xfrm>
+          <a:prstGeom prst="rect">
+            <a:avLst/>
+          </a:prstGeom>
+          <a:noFill/>
+          <a:ln>
+            <a:noFill/>
+          </a:ln>
+          <a:effectLst/>
+          <a:extLst>
+            <a:ext uri="{909E8E84-426E-40DD-AFC4-6F175D3DCCD1}">
+              <a14:hiddenFill xmlns:a14="http://schemas.microsoft.com/office/drawing/2010/main">
+                <a:solidFill>
+                  <a:schemeClr val="accent1"/>
+                </a:solidFill>
+              </a14:hiddenFill>
+            </a:ext>
+            <a:ext uri="{91240B29-F687-4F45-9708-019B960494DF}">
+              <a14:hiddenLine xmlns:a14="http://schemas.microsoft.com/office/drawing/2010/main" w="9525">
+                <a:solidFill>
+                  <a:schemeClr val="tx1"/>
+                </a:solidFill>
+                <a:miter lim="800000"/>
+                <a:headEnd/>
+                <a:tailEnd/>
+              </a14:hiddenLine>
+            </a:ext>
+            <a:ext uri="{AF507438-7753-43E0-B8FC-AC1667EBCBE1}">
+              <a14:hiddenEffects xmlns:a14="http://schemas.microsoft.com/office/drawing/2010/main">
+                <a:effectLst>
+                  <a:outerShdw dist="35921" dir="2700000" algn="ctr" rotWithShape="0">
+                    <a:schemeClr val="bg2"/>
+                  </a:outerShdw>
+                </a:effectLst>
+              </a14:hiddenEffects>
+            </a:ext>
+          </a:extLst>
+        </p:spPr>
+        <p:txBody>
+          <a:bodyPr vert="horz" wrap="square" lIns="91440" tIns="45720" rIns="91440" bIns="45720" numCol="1" anchor="ctr" anchorCtr="0" compatLnSpc="1">
+            <a:prstTxWarp prst="textNoShape">
+              <a:avLst/>
+            </a:prstTxWarp>
+            <a:spAutoFit/>
+          </a:bodyPr>
+          <a:lstStyle>
+            <a:lvl1pPr indent="457200" eaLnBrk="0" fontAlgn="base" hangingPunct="0">
+              <a:spcBef>
+                <a:spcPct val="0"/>
+              </a:spcBef>
+              <a:spcAft>
+                <a:spcPct val="0"/>
+              </a:spcAft>
+              <a:defRPr>
+                <a:solidFill>
+                  <a:schemeClr val="tx1"/>
+                </a:solidFill>
+                <a:latin typeface="Arial" panose="020B0604020202020204" pitchFamily="34" charset="0"/>
+              </a:defRPr>
+            </a:lvl1pPr>
+            <a:lvl2pPr eaLnBrk="0" fontAlgn="base" hangingPunct="0">
+              <a:spcBef>
+                <a:spcPct val="0"/>
+              </a:spcBef>
+              <a:spcAft>
+                <a:spcPct val="0"/>
+              </a:spcAft>
+              <a:defRPr>
+                <a:solidFill>
+                  <a:schemeClr val="tx1"/>
+                </a:solidFill>
+                <a:latin typeface="Arial" panose="020B0604020202020204" pitchFamily="34" charset="0"/>
+              </a:defRPr>
+            </a:lvl2pPr>
+            <a:lvl3pPr eaLnBrk="0" fontAlgn="base" hangingPunct="0">
+              <a:spcBef>
+                <a:spcPct val="0"/>
+              </a:spcBef>
+              <a:spcAft>
+                <a:spcPct val="0"/>
+              </a:spcAft>
+              <a:defRPr>
+                <a:solidFill>
+                  <a:schemeClr val="tx1"/>
+                </a:solidFill>
+                <a:latin typeface="Arial" panose="020B0604020202020204" pitchFamily="34" charset="0"/>
+              </a:defRPr>
+            </a:lvl3pPr>
+            <a:lvl4pPr eaLnBrk="0" fontAlgn="base" hangingPunct="0">
+              <a:spcBef>
+                <a:spcPct val="0"/>
+              </a:spcBef>
+              <a:spcAft>
+                <a:spcPct val="0"/>
+              </a:spcAft>
+              <a:defRPr>
+                <a:solidFill>
+                  <a:schemeClr val="tx1"/>
+                </a:solidFill>
+                <a:latin typeface="Arial" panose="020B0604020202020204" pitchFamily="34" charset="0"/>
+              </a:defRPr>
+            </a:lvl4pPr>
+            <a:lvl5pPr eaLnBrk="0" fontAlgn="base" hangingPunct="0">
+              <a:spcBef>
+                <a:spcPct val="0"/>
+              </a:spcBef>
+              <a:spcAft>
+                <a:spcPct val="0"/>
+              </a:spcAft>
+              <a:defRPr>
+                <a:solidFill>
+                  <a:schemeClr val="tx1"/>
+                </a:solidFill>
+                <a:latin typeface="Arial" panose="020B0604020202020204" pitchFamily="34" charset="0"/>
+              </a:defRPr>
+            </a:lvl5pPr>
+            <a:lvl6pPr eaLnBrk="0" fontAlgn="base" hangingPunct="0">
+              <a:spcBef>
+                <a:spcPct val="0"/>
+              </a:spcBef>
+              <a:spcAft>
+                <a:spcPct val="0"/>
+              </a:spcAft>
+              <a:defRPr>
+                <a:solidFill>
+                  <a:schemeClr val="tx1"/>
+                </a:solidFill>
+                <a:latin typeface="Arial" panose="020B0604020202020204" pitchFamily="34" charset="0"/>
+              </a:defRPr>
+            </a:lvl6pPr>
+            <a:lvl7pPr eaLnBrk="0" fontAlgn="base" hangingPunct="0">
+              <a:spcBef>
+                <a:spcPct val="0"/>
+              </a:spcBef>
+              <a:spcAft>
+                <a:spcPct val="0"/>
+              </a:spcAft>
+              <a:defRPr>
+                <a:solidFill>
+                  <a:schemeClr val="tx1"/>
+                </a:solidFill>
+                <a:latin typeface="Arial" panose="020B0604020202020204" pitchFamily="34" charset="0"/>
+              </a:defRPr>
+            </a:lvl7pPr>
+            <a:lvl8pPr eaLnBrk="0" fontAlgn="base" hangingPunct="0">
+              <a:spcBef>
+                <a:spcPct val="0"/>
+              </a:spcBef>
+              <a:spcAft>
+                <a:spcPct val="0"/>
+              </a:spcAft>
+              <a:defRPr>
+                <a:solidFill>
+                  <a:schemeClr val="tx1"/>
+                </a:solidFill>
+                <a:latin typeface="Arial" panose="020B0604020202020204" pitchFamily="34" charset="0"/>
+              </a:defRPr>
+            </a:lvl8pPr>
+            <a:lvl9pPr eaLnBrk="0" fontAlgn="base" hangingPunct="0">
+              <a:spcBef>
+                <a:spcPct val="0"/>
+              </a:spcBef>
+              <a:spcAft>
+                <a:spcPct val="0"/>
+              </a:spcAft>
+              <a:defRPr>
+                <a:solidFill>
+                  <a:schemeClr val="tx1"/>
+                </a:solidFill>
+                <a:latin typeface="Arial" panose="020B0604020202020204" pitchFamily="34" charset="0"/>
+              </a:defRPr>
+            </a:lvl9pPr>
+          </a:lstStyle>
+          <a:p>
+            <a:pPr marL="0" marR="0" lvl="0" indent="457200" algn="l" defTabSz="914400" rtl="0" eaLnBrk="0" fontAlgn="base" latinLnBrk="0" hangingPunct="0">
+              <a:lnSpc>
+                <a:spcPct val="100000"/>
+              </a:lnSpc>
+              <a:spcBef>
+                <a:spcPct val="0"/>
+              </a:spcBef>
+              <a:spcAft>
+                <a:spcPct val="0"/>
+              </a:spcAft>
+              <a:buClrTx/>
+              <a:buSzTx/>
+              <a:buFontTx/>
+              <a:buNone/>
+              <a:tabLst/>
+            </a:pPr>
+            <a:r>
+              <a:rPr kumimoji="0" lang="en-US" altLang="en-US" sz="1600" b="1" i="0" u="none" strike="noStrike" cap="none" normalizeH="0" baseline="0" dirty="0" smtClean="0">
+                <a:ln>
+                  <a:noFill/>
+                </a:ln>
+                <a:solidFill>
                   <a:schemeClr val="tx1">
                     <a:lumMod val="75000"/>
                   </a:schemeClr>
@@ -8020,41 +9538,7 @@
                 <a:ea typeface="Calibri" panose="020F0502020204030204" pitchFamily="34" charset="0"/>
                 <a:cs typeface="Courier New" panose="02070309020205020404" pitchFamily="49" charset="0"/>
               </a:rPr>
-              <a:t>	Applies the filter on </a:t>
-            </a:r>
-            <a:r>
-              <a:rPr kumimoji="0" lang="en-US" altLang="en-US" sz="1600" b="1" i="0" u="none" strike="noStrike" cap="none" normalizeH="0" baseline="0" dirty="0" err="1" smtClean="0">
-                <a:ln>
-                  <a:noFill/>
-                </a:ln>
-                <a:solidFill>
-                  <a:schemeClr val="tx1">
-                    <a:lumMod val="75000"/>
-                  </a:schemeClr>
-                </a:solidFill>
-                <a:effectLst/>
-                <a:latin typeface="Courier New" panose="02070309020205020404" pitchFamily="49" charset="0"/>
-                <a:ea typeface="Calibri" panose="020F0502020204030204" pitchFamily="34" charset="0"/>
-                <a:cs typeface="Courier New" panose="02070309020205020404" pitchFamily="49" charset="0"/>
-              </a:rPr>
-              <a:t>spefic</a:t>
-            </a:r>
-            <a:r>
-              <a:rPr kumimoji="0" lang="en-US" altLang="en-US" sz="1600" b="1" i="0" u="none" strike="noStrike" cap="none" normalizeH="0" baseline="0" dirty="0" smtClean="0">
-                <a:ln>
-                  <a:noFill/>
-                </a:ln>
-                <a:solidFill>
-                  <a:schemeClr val="tx1">
-                    <a:lumMod val="75000"/>
-                  </a:schemeClr>
-                </a:solidFill>
-                <a:effectLst/>
-                <a:latin typeface="Courier New" panose="02070309020205020404" pitchFamily="49" charset="0"/>
-                <a:ea typeface="Calibri" panose="020F0502020204030204" pitchFamily="34" charset="0"/>
-                <a:cs typeface="Courier New" panose="02070309020205020404" pitchFamily="49" charset="0"/>
-              </a:rPr>
-              <a:t> </a:t>
+              <a:t>	Applies the filter on specific </a:t>
             </a:r>
             <a:r>
               <a:rPr kumimoji="0" lang="en-US" altLang="en-US" sz="1600" b="1" i="0" u="none" strike="noStrike" cap="none" normalizeH="0" baseline="0" dirty="0" err="1" smtClean="0">
@@ -8101,6 +9585,38 @@
               </a:solidFill>
               <a:effectLst/>
               <a:latin typeface="Courier New" panose="02070309020205020404" pitchFamily="49" charset="0"/>
+              <a:cs typeface="Courier New" panose="02070309020205020404" pitchFamily="49" charset="0"/>
+            </a:endParaRPr>
+          </a:p>
+          <a:p>
+            <a:pPr marL="0" marR="0" lvl="0" indent="457200" algn="l" defTabSz="914400" rtl="0" eaLnBrk="0" fontAlgn="base" latinLnBrk="0" hangingPunct="0">
+              <a:lnSpc>
+                <a:spcPct val="100000"/>
+              </a:lnSpc>
+              <a:spcBef>
+                <a:spcPct val="0"/>
+              </a:spcBef>
+              <a:spcAft>
+                <a:spcPct val="0"/>
+              </a:spcAft>
+              <a:buClrTx/>
+              <a:buSzTx/>
+              <a:buFontTx/>
+              <a:buNone/>
+              <a:tabLst/>
+            </a:pPr>
+            <a:endParaRPr kumimoji="0" lang="en-US" altLang="en-US" sz="1600" b="0" i="0" u="none" strike="noStrike" cap="none" normalizeH="0" baseline="0" dirty="0" smtClean="0">
+              <a:ln>
+                <a:noFill/>
+              </a:ln>
+              <a:solidFill>
+                <a:schemeClr val="tx1">
+                  <a:lumMod val="75000"/>
+                </a:schemeClr>
+              </a:solidFill>
+              <a:effectLst/>
+              <a:latin typeface="Courier New" panose="02070309020205020404" pitchFamily="49" charset="0"/>
+              <a:ea typeface="Times New Roman" panose="02020603050405020304" pitchFamily="18" charset="0"/>
               <a:cs typeface="Courier New" panose="02070309020205020404" pitchFamily="49" charset="0"/>
             </a:endParaRPr>
           </a:p>
@@ -8437,7 +9953,7 @@
                                         <p:tgtEl>
                                           <p:spTgt spid="4">
                                             <p:txEl>
-                                              <p:pRg st="2" end="2"/>
+                                              <p:pRg st="3" end="3"/>
                                             </p:txEl>
                                           </p:spTgt>
                                         </p:tgtEl>
@@ -8455,7 +9971,7 @@
                                         <p:tgtEl>
                                           <p:spTgt spid="4">
                                             <p:txEl>
-                                              <p:pRg st="2" end="2"/>
+                                              <p:pRg st="3" end="3"/>
                                             </p:txEl>
                                           </p:spTgt>
                                         </p:tgtEl>
@@ -8495,7 +10011,7 @@
 </p:sld>
 </file>
 
-<file path=ppt/slides/slide12.xml><?xml version="1.0" encoding="utf-8"?>
+<file path=ppt/slides/slide17.xml><?xml version="1.0" encoding="utf-8"?>
 <p:sld xmlns:a="http://schemas.openxmlformats.org/drawingml/2006/main" xmlns:r="http://schemas.openxmlformats.org/officeDocument/2006/relationships" xmlns:p="http://schemas.openxmlformats.org/presentationml/2006/main">
   <p:cSld>
     <p:spTree>
@@ -8521,7 +10037,7 @@
         <p:spPr>
           <a:xfrm>
             <a:off x="397565" y="1612806"/>
-            <a:ext cx="11261035" cy="2585323"/>
+            <a:ext cx="11261035" cy="3539430"/>
           </a:xfrm>
           <a:prstGeom prst="rect">
             <a:avLst/>
@@ -8542,7 +10058,7 @@
               </a:spcAft>
             </a:pPr>
             <a:r>
-              <a:rPr lang="en-US" altLang="en-US" b="1" dirty="0">
+              <a:rPr lang="en-US" altLang="en-US" sz="1600" b="1" dirty="0">
                 <a:solidFill>
                   <a:schemeClr val="tx1">
                     <a:lumMod val="75000"/>
@@ -8554,7 +10070,7 @@
               </a:rPr>
               <a:t>Keep filters</a:t>
             </a:r>
-            <a:endParaRPr lang="en-US" altLang="en-US" sz="1400" dirty="0">
+            <a:endParaRPr lang="en-US" altLang="en-US" sz="1600" dirty="0">
               <a:solidFill>
                 <a:schemeClr val="tx1">
                   <a:lumMod val="75000"/>
@@ -8573,8 +10089,28 @@
                 <a:spcPct val="0"/>
               </a:spcAft>
             </a:pPr>
-            <a:r>
-              <a:rPr lang="en-US" altLang="en-US" b="1" dirty="0">
+            <a:endParaRPr lang="en-US" altLang="en-US" sz="1600" dirty="0" smtClean="0">
+              <a:solidFill>
+                <a:schemeClr val="tx1">
+                  <a:lumMod val="75000"/>
+                </a:schemeClr>
+              </a:solidFill>
+              <a:latin typeface="Courier New" panose="02070309020205020404" pitchFamily="49" charset="0"/>
+              <a:ea typeface="Times New Roman" panose="02020603050405020304" pitchFamily="18" charset="0"/>
+              <a:cs typeface="Courier New" panose="02070309020205020404" pitchFamily="49" charset="0"/>
+            </a:endParaRPr>
+          </a:p>
+          <a:p>
+            <a:pPr lvl="0" indent="457200" eaLnBrk="0" fontAlgn="base" hangingPunct="0">
+              <a:spcBef>
+                <a:spcPct val="0"/>
+              </a:spcBef>
+              <a:spcAft>
+                <a:spcPct val="0"/>
+              </a:spcAft>
+            </a:pPr>
+            <a:r>
+              <a:rPr lang="en-US" altLang="en-US" sz="1600" dirty="0" smtClean="0">
                 <a:solidFill>
                   <a:schemeClr val="tx1">
                     <a:lumMod val="75000"/>
@@ -8584,9 +10120,22 @@
                 <a:ea typeface="Times New Roman" panose="02020603050405020304" pitchFamily="18" charset="0"/>
                 <a:cs typeface="Courier New" panose="02070309020205020404" pitchFamily="49" charset="0"/>
               </a:rPr>
-              <a:t>KEEPFILTERS keeps the existing filter and applies the new filter on top of it</a:t>
-            </a:r>
-            <a:endParaRPr lang="en-US" altLang="en-US" sz="1400" dirty="0">
+              <a:t>CALCULATE(SUM(Orders[Sales</a:t>
+            </a:r>
+            <a:r>
+              <a:rPr lang="en-US" altLang="en-US" sz="1600" dirty="0">
+                <a:solidFill>
+                  <a:schemeClr val="tx1">
+                    <a:lumMod val="75000"/>
+                  </a:schemeClr>
+                </a:solidFill>
+                <a:latin typeface="Courier New" panose="02070309020205020404" pitchFamily="49" charset="0"/>
+                <a:ea typeface="Times New Roman" panose="02020603050405020304" pitchFamily="18" charset="0"/>
+                <a:cs typeface="Courier New" panose="02070309020205020404" pitchFamily="49" charset="0"/>
+              </a:rPr>
+              <a:t>]),KEEPFILTERS(Orders[Category]="Furniture"))</a:t>
+            </a:r>
+            <a:endParaRPr lang="en-US" altLang="en-US" sz="1600" dirty="0">
               <a:solidFill>
                 <a:schemeClr val="tx1">
                   <a:lumMod val="75000"/>
@@ -8605,39 +10154,7 @@
                 <a:spcPct val="0"/>
               </a:spcAft>
             </a:pPr>
-            <a:r>
-              <a:rPr lang="en-US" altLang="en-US" dirty="0">
-                <a:solidFill>
-                  <a:schemeClr val="tx1">
-                    <a:lumMod val="75000"/>
-                  </a:schemeClr>
-                </a:solidFill>
-                <a:latin typeface="Courier New" panose="02070309020205020404" pitchFamily="49" charset="0"/>
-                <a:ea typeface="Times New Roman" panose="02020603050405020304" pitchFamily="18" charset="0"/>
-                <a:cs typeface="Courier New" panose="02070309020205020404" pitchFamily="49" charset="0"/>
-              </a:rPr>
-              <a:t>MS_KF = CALCULATE(SUM(Orders[Sales]),KEEPFILTERS(Orders[Category]="Furniture"))</a:t>
-            </a:r>
-            <a:endParaRPr lang="en-US" altLang="en-US" sz="1400" dirty="0">
-              <a:solidFill>
-                <a:schemeClr val="tx1">
-                  <a:lumMod val="75000"/>
-                </a:schemeClr>
-              </a:solidFill>
-              <a:latin typeface="Courier New" panose="02070309020205020404" pitchFamily="49" charset="0"/>
-              <a:cs typeface="Courier New" panose="02070309020205020404" pitchFamily="49" charset="0"/>
-            </a:endParaRPr>
-          </a:p>
-          <a:p>
-            <a:pPr lvl="0" indent="457200" eaLnBrk="0" fontAlgn="base" hangingPunct="0">
-              <a:spcBef>
-                <a:spcPct val="0"/>
-              </a:spcBef>
-              <a:spcAft>
-                <a:spcPct val="0"/>
-              </a:spcAft>
-            </a:pPr>
-            <a:endParaRPr lang="en-US" altLang="en-US" b="1" dirty="0">
+            <a:endParaRPr lang="en-US" altLang="en-US" sz="1600" b="1" dirty="0" smtClean="0">
               <a:solidFill>
                 <a:schemeClr val="tx1">
                   <a:lumMod val="75000"/>
@@ -8649,6 +10166,38 @@
             </a:endParaRPr>
           </a:p>
           <a:p>
+            <a:pPr indent="457200" eaLnBrk="0" fontAlgn="base" hangingPunct="0">
+              <a:spcBef>
+                <a:spcPct val="0"/>
+              </a:spcBef>
+              <a:spcAft>
+                <a:spcPct val="0"/>
+              </a:spcAft>
+            </a:pPr>
+            <a:r>
+              <a:rPr lang="en-US" altLang="en-US" sz="1600" b="1" dirty="0">
+                <a:solidFill>
+                  <a:schemeClr val="tx1">
+                    <a:lumMod val="75000"/>
+                  </a:schemeClr>
+                </a:solidFill>
+                <a:latin typeface="Courier New" panose="02070309020205020404" pitchFamily="49" charset="0"/>
+                <a:ea typeface="Times New Roman" panose="02020603050405020304" pitchFamily="18" charset="0"/>
+                <a:cs typeface="Courier New" panose="02070309020205020404" pitchFamily="49" charset="0"/>
+              </a:rPr>
+              <a:t>KEEPFILTERS keeps the existing filter and applies the new filter on top of it</a:t>
+            </a:r>
+            <a:endParaRPr lang="en-US" altLang="en-US" sz="1600" dirty="0">
+              <a:solidFill>
+                <a:schemeClr val="tx1">
+                  <a:lumMod val="75000"/>
+                </a:schemeClr>
+              </a:solidFill>
+              <a:latin typeface="Courier New" panose="02070309020205020404" pitchFamily="49" charset="0"/>
+              <a:cs typeface="Courier New" panose="02070309020205020404" pitchFamily="49" charset="0"/>
+            </a:endParaRPr>
+          </a:p>
+          <a:p>
             <a:pPr lvl="0" indent="457200" eaLnBrk="0" fontAlgn="base" hangingPunct="0">
               <a:spcBef>
                 <a:spcPct val="0"/>
@@ -8657,7 +10206,7 @@
                 <a:spcPct val="0"/>
               </a:spcAft>
             </a:pPr>
-            <a:endParaRPr lang="en-US" altLang="en-US" b="1" dirty="0">
+            <a:endParaRPr lang="en-US" altLang="en-US" sz="1600" b="1" dirty="0">
               <a:solidFill>
                 <a:schemeClr val="tx1">
                   <a:lumMod val="75000"/>
@@ -8677,8 +10226,48 @@
                 <a:spcPct val="0"/>
               </a:spcAft>
             </a:pPr>
-            <a:r>
-              <a:rPr lang="en-US" altLang="en-US" b="1" dirty="0">
+            <a:endParaRPr lang="en-US" altLang="en-US" sz="1600" b="1" dirty="0">
+              <a:solidFill>
+                <a:schemeClr val="tx1">
+                  <a:lumMod val="75000"/>
+                </a:schemeClr>
+              </a:solidFill>
+              <a:latin typeface="Courier New" panose="02070309020205020404" pitchFamily="49" charset="0"/>
+              <a:ea typeface="Calibri" panose="020F0502020204030204" pitchFamily="34" charset="0"/>
+              <a:cs typeface="Courier New" panose="02070309020205020404" pitchFamily="49" charset="0"/>
+            </a:endParaRPr>
+          </a:p>
+          <a:p>
+            <a:pPr lvl="0" indent="457200" eaLnBrk="0" fontAlgn="base" hangingPunct="0">
+              <a:spcBef>
+                <a:spcPct val="0"/>
+              </a:spcBef>
+              <a:spcAft>
+                <a:spcPct val="0"/>
+              </a:spcAft>
+            </a:pPr>
+            <a:endParaRPr lang="en-US" altLang="en-US" sz="1600" b="1" dirty="0">
+              <a:solidFill>
+                <a:schemeClr val="tx1">
+                  <a:lumMod val="75000"/>
+                </a:schemeClr>
+              </a:solidFill>
+              <a:latin typeface="Courier New" panose="02070309020205020404" pitchFamily="49" charset="0"/>
+              <a:ea typeface="Calibri" panose="020F0502020204030204" pitchFamily="34" charset="0"/>
+              <a:cs typeface="Courier New" panose="02070309020205020404" pitchFamily="49" charset="0"/>
+            </a:endParaRPr>
+          </a:p>
+          <a:p>
+            <a:pPr lvl="0" indent="457200" eaLnBrk="0" fontAlgn="base" hangingPunct="0">
+              <a:spcBef>
+                <a:spcPct val="0"/>
+              </a:spcBef>
+              <a:spcAft>
+                <a:spcPct val="0"/>
+              </a:spcAft>
+            </a:pPr>
+            <a:r>
+              <a:rPr lang="en-US" altLang="en-US" sz="1600" b="1" dirty="0">
                 <a:solidFill>
                   <a:schemeClr val="tx1">
                     <a:lumMod val="75000"/>
@@ -8690,7 +10279,7 @@
               </a:rPr>
               <a:t>Remove filters</a:t>
             </a:r>
-            <a:endParaRPr lang="en-US" altLang="en-US" sz="1400" dirty="0">
+            <a:endParaRPr lang="en-US" altLang="en-US" sz="1600" dirty="0">
               <a:solidFill>
                 <a:schemeClr val="tx1">
                   <a:lumMod val="75000"/>
@@ -8710,19 +10299,55 @@
               </a:spcAft>
             </a:pPr>
             <a:r>
-              <a:rPr lang="en-US" altLang="en-US" dirty="0">
+              <a:rPr lang="en-US" altLang="en-US" sz="1600" dirty="0" smtClean="0">
                 <a:solidFill>
                   <a:schemeClr val="tx1">
                     <a:lumMod val="75000"/>
                   </a:schemeClr>
                 </a:solidFill>
                 <a:latin typeface="Courier New" panose="02070309020205020404" pitchFamily="49" charset="0"/>
-                <a:ea typeface="Calibri" panose="020F0502020204030204" pitchFamily="34" charset="0"/>
-                <a:cs typeface="Courier New" panose="02070309020205020404" pitchFamily="49" charset="0"/>
-              </a:rPr>
-              <a:t>REMOVEFILTERS() removes filters from a column or table.</a:t>
-            </a:r>
-            <a:endParaRPr lang="en-US" altLang="en-US" sz="1400" dirty="0">
+                <a:ea typeface="Times New Roman" panose="02020603050405020304" pitchFamily="18" charset="0"/>
+                <a:cs typeface="Courier New" panose="02070309020205020404" pitchFamily="49" charset="0"/>
+              </a:rPr>
+              <a:t>MS_RM</a:t>
+            </a:r>
+            <a:r>
+              <a:rPr lang="en-US" altLang="en-US" sz="1600" dirty="0">
+                <a:solidFill>
+                  <a:schemeClr val="tx1">
+                    <a:lumMod val="75000"/>
+                  </a:schemeClr>
+                </a:solidFill>
+                <a:latin typeface="Courier New" panose="02070309020205020404" pitchFamily="49" charset="0"/>
+                <a:ea typeface="Times New Roman" panose="02020603050405020304" pitchFamily="18" charset="0"/>
+                <a:cs typeface="Courier New" panose="02070309020205020404" pitchFamily="49" charset="0"/>
+              </a:rPr>
+              <a:t>_ = CALCULATE(SUM(Orders[Sales]),REMOVEFILTERS(Orders[Category</a:t>
+            </a:r>
+            <a:r>
+              <a:rPr lang="en-US" altLang="en-US" sz="1600" dirty="0" smtClean="0">
+                <a:solidFill>
+                  <a:schemeClr val="tx1">
+                    <a:lumMod val="75000"/>
+                  </a:schemeClr>
+                </a:solidFill>
+                <a:latin typeface="Courier New" panose="02070309020205020404" pitchFamily="49" charset="0"/>
+                <a:ea typeface="Times New Roman" panose="02020603050405020304" pitchFamily="18" charset="0"/>
+                <a:cs typeface="Courier New" panose="02070309020205020404" pitchFamily="49" charset="0"/>
+              </a:rPr>
+              <a:t>]))</a:t>
+            </a:r>
+          </a:p>
+          <a:p>
+            <a:pPr lvl="0" indent="457200" eaLnBrk="0" fontAlgn="base" hangingPunct="0">
+              <a:spcBef>
+                <a:spcPct val="0"/>
+              </a:spcBef>
+              <a:spcAft>
+                <a:spcPct val="0"/>
+              </a:spcAft>
+            </a:pPr>
+            <a:endParaRPr lang="en-US" altLang="en-US" sz="1600" dirty="0">
               <a:solidFill>
                 <a:schemeClr val="tx1">
                   <a:lumMod val="75000"/>
@@ -8733,6 +10358,71 @@
             </a:endParaRPr>
           </a:p>
           <a:p>
+            <a:pPr indent="457200" eaLnBrk="0" fontAlgn="base" hangingPunct="0">
+              <a:spcBef>
+                <a:spcPct val="0"/>
+              </a:spcBef>
+              <a:spcAft>
+                <a:spcPct val="0"/>
+              </a:spcAft>
+            </a:pPr>
+            <a:endParaRPr lang="en-US" altLang="en-US" sz="1600" dirty="0" smtClean="0">
+              <a:solidFill>
+                <a:schemeClr val="tx1">
+                  <a:lumMod val="75000"/>
+                </a:schemeClr>
+              </a:solidFill>
+              <a:latin typeface="Courier New" panose="02070309020205020404" pitchFamily="49" charset="0"/>
+              <a:ea typeface="Calibri" panose="020F0502020204030204" pitchFamily="34" charset="0"/>
+              <a:cs typeface="Courier New" panose="02070309020205020404" pitchFamily="49" charset="0"/>
+            </a:endParaRPr>
+          </a:p>
+          <a:p>
+            <a:pPr indent="457200" eaLnBrk="0" fontAlgn="base" hangingPunct="0">
+              <a:spcBef>
+                <a:spcPct val="0"/>
+              </a:spcBef>
+              <a:spcAft>
+                <a:spcPct val="0"/>
+              </a:spcAft>
+            </a:pPr>
+            <a:r>
+              <a:rPr lang="en-US" altLang="en-US" sz="1600" b="1" dirty="0" smtClean="0">
+                <a:solidFill>
+                  <a:schemeClr val="tx1">
+                    <a:lumMod val="75000"/>
+                  </a:schemeClr>
+                </a:solidFill>
+                <a:latin typeface="Courier New" panose="02070309020205020404" pitchFamily="49" charset="0"/>
+                <a:ea typeface="Calibri" panose="020F0502020204030204" pitchFamily="34" charset="0"/>
+                <a:cs typeface="Courier New" panose="02070309020205020404" pitchFamily="49" charset="0"/>
+              </a:rPr>
+              <a:t>REMOVEFILTERS</a:t>
+            </a:r>
+            <a:r>
+              <a:rPr lang="en-US" altLang="en-US" sz="1600" b="1" dirty="0">
+                <a:solidFill>
+                  <a:schemeClr val="tx1">
+                    <a:lumMod val="75000"/>
+                  </a:schemeClr>
+                </a:solidFill>
+                <a:latin typeface="Courier New" panose="02070309020205020404" pitchFamily="49" charset="0"/>
+                <a:ea typeface="Calibri" panose="020F0502020204030204" pitchFamily="34" charset="0"/>
+                <a:cs typeface="Courier New" panose="02070309020205020404" pitchFamily="49" charset="0"/>
+              </a:rPr>
+              <a:t>() removes filters from a column or table.</a:t>
+            </a:r>
+            <a:endParaRPr lang="en-US" altLang="en-US" sz="1600" b="1" dirty="0">
+              <a:solidFill>
+                <a:schemeClr val="tx1">
+                  <a:lumMod val="75000"/>
+                </a:schemeClr>
+              </a:solidFill>
+              <a:latin typeface="Courier New" panose="02070309020205020404" pitchFamily="49" charset="0"/>
+              <a:cs typeface="Courier New" panose="02070309020205020404" pitchFamily="49" charset="0"/>
+            </a:endParaRPr>
+          </a:p>
+          <a:p>
             <a:pPr lvl="0" indent="457200" eaLnBrk="0" fontAlgn="base" hangingPunct="0">
               <a:spcBef>
                 <a:spcPct val="0"/>
@@ -8741,20 +10431,7 @@
                 <a:spcPct val="0"/>
               </a:spcAft>
             </a:pPr>
-            <a:r>
-              <a:rPr lang="en-US" altLang="en-US" dirty="0">
-                <a:solidFill>
-                  <a:schemeClr val="tx1">
-                    <a:lumMod val="75000"/>
-                  </a:schemeClr>
-                </a:solidFill>
-                <a:latin typeface="Courier New" panose="02070309020205020404" pitchFamily="49" charset="0"/>
-                <a:ea typeface="Times New Roman" panose="02020603050405020304" pitchFamily="18" charset="0"/>
-                <a:cs typeface="Courier New" panose="02070309020205020404" pitchFamily="49" charset="0"/>
-              </a:rPr>
-              <a:t>MS_RM_ = CALCULATE(SUM(Orders[Sales]),REMOVEFILTERS(Orders[Category]))</a:t>
-            </a:r>
-            <a:endParaRPr lang="en-US" altLang="en-US" sz="4000" dirty="0">
+            <a:endParaRPr lang="en-US" altLang="en-US" sz="1600" dirty="0">
               <a:solidFill>
                 <a:schemeClr val="tx1">
                   <a:lumMod val="75000"/>
@@ -8774,7 +10451,7 @@
         </p:nvSpPr>
         <p:spPr>
           <a:xfrm>
-            <a:off x="397565" y="443302"/>
+            <a:off x="397565" y="415311"/>
             <a:ext cx="11261035" cy="369332"/>
           </a:xfrm>
           <a:prstGeom prst="rect">
@@ -14417,7 +16094,7 @@
         <p:spPr>
           <a:xfrm>
             <a:off x="132080" y="473516"/>
-            <a:ext cx="11503152" cy="1231106"/>
+            <a:ext cx="11503152" cy="1446550"/>
           </a:xfrm>
           <a:prstGeom prst="rect">
             <a:avLst/>
@@ -14561,15 +16238,18 @@
               </a:rPr>
               <a:t> </a:t>
             </a:r>
-            <a:r>
-              <a:rPr lang="en-IN" sz="1400" dirty="0">
+          </a:p>
+          <a:p>
+            <a:pPr lvl="1" fontAlgn="b"/>
+            <a:r>
+              <a:rPr lang="en-IN" sz="1400" dirty="0" smtClean="0">
                 <a:latin typeface="Courier New" panose="02070309020205020404" pitchFamily="49" charset="0"/>
                 <a:cs typeface="Courier New" panose="02070309020205020404" pitchFamily="49" charset="0"/>
               </a:rPr>
               <a:t>WEEKNUM</a:t>
             </a:r>
             <a:r>
-              <a:rPr lang="en-IN" sz="1400" b="1" dirty="0">
+              <a:rPr lang="en-IN" sz="1400" b="1" dirty="0" smtClean="0">
                 <a:solidFill>
                   <a:srgbClr val="000000"/>
                 </a:solidFill>
@@ -14632,7 +16312,7 @@
         <p:spPr>
           <a:xfrm>
             <a:off x="132080" y="1986062"/>
-            <a:ext cx="11360912" cy="2123658"/>
+            <a:ext cx="11360912" cy="2277547"/>
           </a:xfrm>
           <a:prstGeom prst="rect">
             <a:avLst/>
@@ -14734,10 +16414,23 @@
             </a:r>
             <a:r>
               <a:rPr lang="en-IN" sz="1400" dirty="0">
-                <a:latin typeface="Courier New" panose="02070309020205020404" pitchFamily="49" charset="0"/>
-                <a:cs typeface="Courier New" panose="02070309020205020404" pitchFamily="49" charset="0"/>
-              </a:rPr>
-              <a:t>DAY)</a:t>
+                <a:solidFill>
+                  <a:schemeClr val="accent3">
+                    <a:lumMod val="60000"/>
+                    <a:lumOff val="40000"/>
+                  </a:schemeClr>
+                </a:solidFill>
+                <a:latin typeface="Courier New" panose="02070309020205020404" pitchFamily="49" charset="0"/>
+                <a:cs typeface="Courier New" panose="02070309020205020404" pitchFamily="49" charset="0"/>
+              </a:rPr>
+              <a:t>DAY</a:t>
+            </a:r>
+            <a:r>
+              <a:rPr lang="en-IN" sz="1400" dirty="0">
+                <a:latin typeface="Courier New" panose="02070309020205020404" pitchFamily="49" charset="0"/>
+                <a:cs typeface="Courier New" panose="02070309020205020404" pitchFamily="49" charset="0"/>
+              </a:rPr>
+              <a:t>)</a:t>
             </a:r>
           </a:p>
           <a:p>
@@ -14806,7 +16499,27 @@
                 <a:latin typeface="Courier New" panose="02070309020205020404" pitchFamily="49" charset="0"/>
                 <a:cs typeface="Courier New" panose="02070309020205020404" pitchFamily="49" charset="0"/>
               </a:rPr>
-              <a:t>, DAY)</a:t>
+              <a:t>, </a:t>
+            </a:r>
+            <a:r>
+              <a:rPr lang="en-IN" sz="1400" dirty="0" smtClean="0">
+                <a:solidFill>
+                  <a:schemeClr val="accent3">
+                    <a:lumMod val="60000"/>
+                    <a:lumOff val="40000"/>
+                  </a:schemeClr>
+                </a:solidFill>
+                <a:latin typeface="Courier New" panose="02070309020205020404" pitchFamily="49" charset="0"/>
+                <a:cs typeface="Courier New" panose="02070309020205020404" pitchFamily="49" charset="0"/>
+              </a:rPr>
+              <a:t>Month</a:t>
+            </a:r>
+            <a:r>
+              <a:rPr lang="en-IN" sz="1400" dirty="0" smtClean="0">
+                <a:latin typeface="Courier New" panose="02070309020205020404" pitchFamily="49" charset="0"/>
+                <a:cs typeface="Courier New" panose="02070309020205020404" pitchFamily="49" charset="0"/>
+              </a:rPr>
+              <a:t>)</a:t>
             </a:r>
             <a:endParaRPr lang="en-IN" sz="1400" dirty="0">
               <a:solidFill>
@@ -14823,21 +16536,113 @@
                 <a:latin typeface="Courier New" panose="02070309020205020404" pitchFamily="49" charset="0"/>
                 <a:cs typeface="Courier New" panose="02070309020205020404" pitchFamily="49" charset="0"/>
               </a:rPr>
+              <a:t> </a:t>
+            </a:r>
+            <a:r>
+              <a:rPr lang="en-IN" sz="1400" dirty="0" smtClean="0">
+                <a:latin typeface="Courier New" panose="02070309020205020404" pitchFamily="49" charset="0"/>
+                <a:cs typeface="Courier New" panose="02070309020205020404" pitchFamily="49" charset="0"/>
+              </a:rPr>
+              <a:t> DATEDIFF</a:t>
+            </a:r>
+            <a:r>
+              <a:rPr lang="en-IN" sz="1400" b="1" dirty="0" smtClean="0">
+                <a:solidFill>
+                  <a:srgbClr val="000000"/>
+                </a:solidFill>
+                <a:latin typeface="Courier New" panose="02070309020205020404" pitchFamily="49" charset="0"/>
+                <a:cs typeface="Courier New" panose="02070309020205020404" pitchFamily="49" charset="0"/>
+              </a:rPr>
+              <a:t>    </a:t>
+            </a:r>
+            <a:r>
+              <a:rPr lang="en-IN" sz="1400" dirty="0" err="1">
+                <a:latin typeface="Courier New" panose="02070309020205020404" pitchFamily="49" charset="0"/>
+                <a:cs typeface="Courier New" panose="02070309020205020404" pitchFamily="49" charset="0"/>
+              </a:rPr>
+              <a:t>DaysPassed</a:t>
+            </a:r>
+            <a:r>
+              <a:rPr lang="en-IN" sz="1400" dirty="0">
+                <a:latin typeface="Courier New" panose="02070309020205020404" pitchFamily="49" charset="0"/>
+                <a:cs typeface="Courier New" panose="02070309020205020404" pitchFamily="49" charset="0"/>
+              </a:rPr>
+              <a:t> = DATEDIFF(</a:t>
+            </a:r>
+            <a:r>
+              <a:rPr lang="en-IN" sz="1400" dirty="0" err="1">
+                <a:latin typeface="Courier New" panose="02070309020205020404" pitchFamily="49" charset="0"/>
+                <a:cs typeface="Courier New" panose="02070309020205020404" pitchFamily="49" charset="0"/>
+              </a:rPr>
+              <a:t>OrderDate</a:t>
+            </a:r>
+            <a:r>
+              <a:rPr lang="en-IN" sz="1400" dirty="0">
+                <a:latin typeface="Courier New" panose="02070309020205020404" pitchFamily="49" charset="0"/>
+                <a:cs typeface="Courier New" panose="02070309020205020404" pitchFamily="49" charset="0"/>
+              </a:rPr>
+              <a:t>, </a:t>
+            </a:r>
+            <a:r>
+              <a:rPr lang="en-IN" sz="1400" dirty="0" err="1">
+                <a:latin typeface="Courier New" panose="02070309020205020404" pitchFamily="49" charset="0"/>
+                <a:cs typeface="Courier New" panose="02070309020205020404" pitchFamily="49" charset="0"/>
+              </a:rPr>
+              <a:t>ShipDate</a:t>
+            </a:r>
+            <a:r>
+              <a:rPr lang="en-IN" sz="1400" dirty="0">
+                <a:latin typeface="Courier New" panose="02070309020205020404" pitchFamily="49" charset="0"/>
+                <a:cs typeface="Courier New" panose="02070309020205020404" pitchFamily="49" charset="0"/>
+              </a:rPr>
+              <a:t>, </a:t>
+            </a:r>
+            <a:r>
+              <a:rPr lang="en-IN" sz="1400" dirty="0" smtClean="0">
+                <a:solidFill>
+                  <a:schemeClr val="accent3">
+                    <a:lumMod val="60000"/>
+                    <a:lumOff val="40000"/>
+                  </a:schemeClr>
+                </a:solidFill>
+                <a:latin typeface="Courier New" panose="02070309020205020404" pitchFamily="49" charset="0"/>
+                <a:cs typeface="Courier New" panose="02070309020205020404" pitchFamily="49" charset="0"/>
+              </a:rPr>
+              <a:t>Year</a:t>
+            </a:r>
+            <a:r>
+              <a:rPr lang="en-IN" sz="1400" dirty="0" smtClean="0">
+                <a:latin typeface="Courier New" panose="02070309020205020404" pitchFamily="49" charset="0"/>
+                <a:cs typeface="Courier New" panose="02070309020205020404" pitchFamily="49" charset="0"/>
+              </a:rPr>
+              <a:t>)  </a:t>
+            </a:r>
+          </a:p>
+          <a:p>
+            <a:pPr lvl="1" fontAlgn="b"/>
+            <a:r>
+              <a:rPr lang="en-IN" sz="1400" dirty="0" smtClean="0">
+                <a:latin typeface="Courier New" panose="02070309020205020404" pitchFamily="49" charset="0"/>
+                <a:cs typeface="Courier New" panose="02070309020205020404" pitchFamily="49" charset="0"/>
+              </a:rPr>
               <a:t>  </a:t>
             </a:r>
-            <a:endParaRPr lang="en-IN" sz="1400" dirty="0" smtClean="0">
-              <a:latin typeface="Courier New" panose="02070309020205020404" pitchFamily="49" charset="0"/>
-              <a:cs typeface="Courier New" panose="02070309020205020404" pitchFamily="49" charset="0"/>
-            </a:endParaRPr>
           </a:p>
           <a:p>
             <a:pPr lvl="1" fontAlgn="b"/>
             <a:r>
+              <a:rPr lang="en-IN" sz="1400" dirty="0">
+                <a:latin typeface="Courier New" panose="02070309020205020404" pitchFamily="49" charset="0"/>
+                <a:cs typeface="Courier New" panose="02070309020205020404" pitchFamily="49" charset="0"/>
+              </a:rPr>
+              <a:t> </a:t>
+            </a:r>
+            <a:r>
               <a:rPr lang="en-IN" sz="1400" dirty="0" smtClean="0">
                 <a:latin typeface="Courier New" panose="02070309020205020404" pitchFamily="49" charset="0"/>
                 <a:cs typeface="Courier New" panose="02070309020205020404" pitchFamily="49" charset="0"/>
               </a:rPr>
-              <a:t>  EDATE</a:t>
+              <a:t> EDATE</a:t>
             </a:r>
             <a:r>
               <a:rPr lang="en-IN" sz="1400" b="1" dirty="0" smtClean="0">
@@ -14875,7 +16680,14 @@
                 <a:latin typeface="Courier New" panose="02070309020205020404" pitchFamily="49" charset="0"/>
                 <a:cs typeface="Courier New" panose="02070309020205020404" pitchFamily="49" charset="0"/>
               </a:rPr>
-              <a:t>], 2)     Add Month</a:t>
+              <a:t>], </a:t>
+            </a:r>
+            <a:r>
+              <a:rPr lang="en-IN" sz="1400" dirty="0" smtClean="0">
+                <a:latin typeface="Courier New" panose="02070309020205020404" pitchFamily="49" charset="0"/>
+                <a:cs typeface="Courier New" panose="02070309020205020404" pitchFamily="49" charset="0"/>
+              </a:rPr>
+              <a:t>1)     It will Add a Month 25 may (+2) 25July</a:t>
             </a:r>
             <a:endParaRPr lang="en-IN" sz="1400" dirty="0">
               <a:solidFill>
@@ -14944,7 +16756,27 @@
                 <a:latin typeface="Courier New" panose="02070309020205020404" pitchFamily="49" charset="0"/>
                 <a:cs typeface="Courier New" panose="02070309020205020404" pitchFamily="49" charset="0"/>
               </a:rPr>
-              <a:t>], 0)	  </a:t>
+              <a:t>], </a:t>
+            </a:r>
+            <a:r>
+              <a:rPr lang="en-IN" sz="1400" dirty="0">
+                <a:solidFill>
+                  <a:schemeClr val="accent3">
+                    <a:lumMod val="60000"/>
+                    <a:lumOff val="40000"/>
+                  </a:schemeClr>
+                </a:solidFill>
+                <a:latin typeface="Courier New" panose="02070309020205020404" pitchFamily="49" charset="0"/>
+                <a:cs typeface="Courier New" panose="02070309020205020404" pitchFamily="49" charset="0"/>
+              </a:rPr>
+              <a:t>0</a:t>
+            </a:r>
+            <a:r>
+              <a:rPr lang="en-IN" sz="1400" dirty="0">
+                <a:latin typeface="Courier New" panose="02070309020205020404" pitchFamily="49" charset="0"/>
+                <a:cs typeface="Courier New" panose="02070309020205020404" pitchFamily="49" charset="0"/>
+              </a:rPr>
+              <a:t>)	  </a:t>
             </a:r>
             <a:r>
               <a:rPr lang="en-IN" sz="1400" dirty="0" smtClean="0">
@@ -14958,39 +16790,112 @@
                 <a:latin typeface="Courier New" panose="02070309020205020404" pitchFamily="49" charset="0"/>
                 <a:cs typeface="Courier New" panose="02070309020205020404" pitchFamily="49" charset="0"/>
               </a:rPr>
-              <a:t>end of the month</a:t>
-            </a:r>
-            <a:endParaRPr lang="en-IN" sz="1400" dirty="0">
-              <a:solidFill>
-                <a:srgbClr val="000000"/>
-              </a:solidFill>
+              <a:t>end of the </a:t>
+            </a:r>
+            <a:r>
+              <a:rPr lang="en-IN" sz="1400" dirty="0" smtClean="0">
+                <a:latin typeface="Courier New" panose="02070309020205020404" pitchFamily="49" charset="0"/>
+                <a:cs typeface="Courier New" panose="02070309020205020404" pitchFamily="49" charset="0"/>
+              </a:rPr>
+              <a:t>same month </a:t>
+            </a:r>
+          </a:p>
+          <a:p>
+            <a:pPr lvl="1" fontAlgn="b"/>
+            <a:r>
+              <a:rPr lang="en-IN" sz="1400" dirty="0">
+                <a:latin typeface="Courier New" panose="02070309020205020404" pitchFamily="49" charset="0"/>
+                <a:cs typeface="Courier New" panose="02070309020205020404" pitchFamily="49" charset="0"/>
+              </a:rPr>
+              <a:t> </a:t>
+            </a:r>
+            <a:r>
+              <a:rPr lang="en-IN" sz="1400" dirty="0" smtClean="0">
+                <a:latin typeface="Courier New" panose="02070309020205020404" pitchFamily="49" charset="0"/>
+                <a:cs typeface="Courier New" panose="02070309020205020404" pitchFamily="49" charset="0"/>
+              </a:rPr>
+              <a:t> EOMONTH</a:t>
+            </a:r>
+            <a:r>
+              <a:rPr lang="en-IN" sz="1400" b="1" dirty="0" smtClean="0">
+                <a:solidFill>
+                  <a:srgbClr val="000000"/>
+                </a:solidFill>
+                <a:latin typeface="Courier New" panose="02070309020205020404" pitchFamily="49" charset="0"/>
+                <a:cs typeface="Courier New" panose="02070309020205020404" pitchFamily="49" charset="0"/>
+              </a:rPr>
+              <a:t>     </a:t>
+            </a:r>
+            <a:r>
+              <a:rPr lang="en-IN" sz="1400" dirty="0" err="1">
+                <a:latin typeface="Courier New" panose="02070309020205020404" pitchFamily="49" charset="0"/>
+                <a:cs typeface="Courier New" panose="02070309020205020404" pitchFamily="49" charset="0"/>
+              </a:rPr>
+              <a:t>MonthEnd</a:t>
+            </a:r>
+            <a:r>
+              <a:rPr lang="en-IN" sz="1400" dirty="0">
+                <a:latin typeface="Courier New" panose="02070309020205020404" pitchFamily="49" charset="0"/>
+                <a:cs typeface="Courier New" panose="02070309020205020404" pitchFamily="49" charset="0"/>
+              </a:rPr>
+              <a:t> = EOMONTH(Sales[</a:t>
+            </a:r>
+            <a:r>
+              <a:rPr lang="en-IN" sz="1400" dirty="0" err="1">
+                <a:latin typeface="Courier New" panose="02070309020205020404" pitchFamily="49" charset="0"/>
+                <a:cs typeface="Courier New" panose="02070309020205020404" pitchFamily="49" charset="0"/>
+              </a:rPr>
+              <a:t>OrderDate</a:t>
+            </a:r>
+            <a:r>
+              <a:rPr lang="en-IN" sz="1400" dirty="0">
+                <a:latin typeface="Courier New" panose="02070309020205020404" pitchFamily="49" charset="0"/>
+                <a:cs typeface="Courier New" panose="02070309020205020404" pitchFamily="49" charset="0"/>
+              </a:rPr>
+              <a:t>], </a:t>
+            </a:r>
+            <a:r>
+              <a:rPr lang="en-IN" sz="1400" dirty="0" smtClean="0">
+                <a:solidFill>
+                  <a:schemeClr val="accent3">
+                    <a:lumMod val="60000"/>
+                    <a:lumOff val="40000"/>
+                  </a:schemeClr>
+                </a:solidFill>
+                <a:latin typeface="Courier New" panose="02070309020205020404" pitchFamily="49" charset="0"/>
+                <a:cs typeface="Courier New" panose="02070309020205020404" pitchFamily="49" charset="0"/>
+              </a:rPr>
+              <a:t>1</a:t>
+            </a:r>
+            <a:r>
+              <a:rPr lang="en-IN" sz="1400" dirty="0" smtClean="0">
+                <a:latin typeface="Courier New" panose="02070309020205020404" pitchFamily="49" charset="0"/>
+                <a:cs typeface="Courier New" panose="02070309020205020404" pitchFamily="49" charset="0"/>
+              </a:rPr>
+              <a:t>)</a:t>
+            </a:r>
+            <a:r>
+              <a:rPr lang="en-IN" sz="1400" dirty="0">
+                <a:latin typeface="Courier New" panose="02070309020205020404" pitchFamily="49" charset="0"/>
+                <a:cs typeface="Courier New" panose="02070309020205020404" pitchFamily="49" charset="0"/>
+              </a:rPr>
+              <a:t>	      Return end of the </a:t>
+            </a:r>
+            <a:r>
+              <a:rPr lang="en-IN" sz="1400" dirty="0" smtClean="0">
+                <a:latin typeface="Courier New" panose="02070309020205020404" pitchFamily="49" charset="0"/>
+                <a:cs typeface="Courier New" panose="02070309020205020404" pitchFamily="49" charset="0"/>
+              </a:rPr>
+              <a:t>NEXT month </a:t>
+            </a:r>
+            <a:endParaRPr lang="en-US" sz="1400" dirty="0" smtClean="0">
               <a:latin typeface="Courier New" panose="02070309020205020404" pitchFamily="49" charset="0"/>
               <a:cs typeface="Courier New" panose="02070309020205020404" pitchFamily="49" charset="0"/>
             </a:endParaRPr>
           </a:p>
           <a:p>
-            <a:pPr fontAlgn="b"/>
-            <a:r>
-              <a:rPr lang="en-IN" sz="1600" dirty="0">
-                <a:latin typeface="Courier New" panose="02070309020205020404" pitchFamily="49" charset="0"/>
-                <a:cs typeface="Courier New" panose="02070309020205020404" pitchFamily="49" charset="0"/>
-              </a:rPr>
-              <a:t> </a:t>
-            </a:r>
-            <a:endParaRPr lang="en-IN" sz="1600" dirty="0">
-              <a:solidFill>
-                <a:srgbClr val="000000"/>
-              </a:solidFill>
-              <a:latin typeface="Courier New" panose="02070309020205020404" pitchFamily="49" charset="0"/>
-              <a:cs typeface="Courier New" panose="02070309020205020404" pitchFamily="49" charset="0"/>
-            </a:endParaRPr>
-          </a:p>
-          <a:p>
-            <a:pPr fontAlgn="b"/>
-            <a:endParaRPr lang="en-IN" sz="1600" dirty="0">
-              <a:solidFill>
-                <a:srgbClr val="000000"/>
-              </a:solidFill>
+            <a:pPr lvl="1" fontAlgn="b"/>
+            <a:endParaRPr lang="en-US" sz="1400" dirty="0" smtClean="0">
               <a:latin typeface="Courier New" panose="02070309020205020404" pitchFamily="49" charset="0"/>
               <a:cs typeface="Courier New" panose="02070309020205020404" pitchFamily="49" charset="0"/>
             </a:endParaRPr>
@@ -15005,8 +16910,8 @@
         </p:nvSpPr>
         <p:spPr>
           <a:xfrm>
-            <a:off x="167640" y="3854827"/>
-            <a:ext cx="11432032" cy="830997"/>
+            <a:off x="203200" y="4517301"/>
+            <a:ext cx="11432032" cy="954107"/>
           </a:xfrm>
           <a:prstGeom prst="rect">
             <a:avLst/>
@@ -15024,7 +16929,27 @@
                 <a:latin typeface="Courier New" panose="02070309020205020404" pitchFamily="49" charset="0"/>
                 <a:cs typeface="Courier New" panose="02070309020205020404" pitchFamily="49" charset="0"/>
               </a:rPr>
-              <a:t>Convert text to date or time</a:t>
+              <a:t>Convert </a:t>
+            </a:r>
+            <a:r>
+              <a:rPr lang="en-US" sz="2400" b="1" dirty="0">
+                <a:solidFill>
+                  <a:schemeClr val="accent3">
+                    <a:lumMod val="60000"/>
+                    <a:lumOff val="40000"/>
+                  </a:schemeClr>
+                </a:solidFill>
+                <a:latin typeface="Courier New" panose="02070309020205020404" pitchFamily="49" charset="0"/>
+                <a:cs typeface="Courier New" panose="02070309020205020404" pitchFamily="49" charset="0"/>
+              </a:rPr>
+              <a:t>text</a:t>
+            </a:r>
+            <a:r>
+              <a:rPr lang="en-US" sz="1600" dirty="0">
+                <a:latin typeface="Courier New" panose="02070309020205020404" pitchFamily="49" charset="0"/>
+                <a:cs typeface="Courier New" panose="02070309020205020404" pitchFamily="49" charset="0"/>
+              </a:rPr>
+              <a:t> to date or time</a:t>
             </a:r>
             <a:endParaRPr lang="en-IN" sz="1600" dirty="0">
               <a:latin typeface="Courier New" panose="02070309020205020404" pitchFamily="49" charset="0"/>
@@ -15370,6 +17295,67 @@
                       </p:childTnLst>
                     </p:cTn>
                   </p:par>
+                  <p:par>
+                    <p:cTn id="23" fill="hold">
+                      <p:stCondLst>
+                        <p:cond delay="indefinite"/>
+                      </p:stCondLst>
+                      <p:childTnLst>
+                        <p:par>
+                          <p:cTn id="24" fill="hold">
+                            <p:stCondLst>
+                              <p:cond delay="0"/>
+                            </p:stCondLst>
+                            <p:childTnLst>
+                              <p:par>
+                                <p:cTn id="25" presetID="22" presetClass="entr" presetSubtype="8" fill="hold" nodeType="clickEffect">
+                                  <p:stCondLst>
+                                    <p:cond delay="0"/>
+                                  </p:stCondLst>
+                                  <p:childTnLst>
+                                    <p:set>
+                                      <p:cBhvr>
+                                        <p:cTn id="26" dur="1" fill="hold">
+                                          <p:stCondLst>
+                                            <p:cond delay="0"/>
+                                          </p:stCondLst>
+                                        </p:cTn>
+                                        <p:tgtEl>
+                                          <p:spTgt spid="4">
+                                            <p:txEl>
+                                              <p:pRg st="4" end="4"/>
+                                            </p:txEl>
+                                          </p:spTgt>
+                                        </p:tgtEl>
+                                        <p:attrNameLst>
+                                          <p:attrName>style.visibility</p:attrName>
+                                        </p:attrNameLst>
+                                      </p:cBhvr>
+                                      <p:to>
+                                        <p:strVal val="visible"/>
+                                      </p:to>
+                                    </p:set>
+                                    <p:animEffect transition="in" filter="wipe(left)">
+                                      <p:cBhvr>
+                                        <p:cTn id="27" dur="500"/>
+                                        <p:tgtEl>
+                                          <p:spTgt spid="4">
+                                            <p:txEl>
+                                              <p:pRg st="4" end="4"/>
+                                            </p:txEl>
+                                          </p:spTgt>
+                                        </p:tgtEl>
+                                      </p:cBhvr>
+                                    </p:animEffect>
+                                  </p:childTnLst>
+                                </p:cTn>
+                              </p:par>
+                            </p:childTnLst>
+                          </p:cTn>
+                        </p:par>
+                      </p:childTnLst>
+                    </p:cTn>
+                  </p:par>
                 </p:childTnLst>
               </p:cTn>
               <p:prevCondLst>
@@ -16209,7 +18195,7 @@
         <p:spPr>
           <a:xfrm>
             <a:off x="494522" y="1387592"/>
-            <a:ext cx="9275643" cy="5093959"/>
+            <a:ext cx="9275643" cy="4044377"/>
           </a:xfrm>
           <a:prstGeom prst="rect">
             <a:avLst/>
@@ -16227,26 +18213,18 @@
               </a:lnSpc>
             </a:pPr>
             <a:r>
+              <a:rPr lang="en-US" sz="1600" dirty="0" smtClean="0">
+                <a:latin typeface="Courier New" panose="02070309020205020404" pitchFamily="49" charset="0"/>
+                <a:cs typeface="Courier New" panose="02070309020205020404" pitchFamily="49" charset="0"/>
+              </a:rPr>
+              <a:t>IF(Data[Sales</a:t>
+            </a:r>
+            <a:r>
               <a:rPr lang="en-US" sz="1600" dirty="0">
                 <a:latin typeface="Courier New" panose="02070309020205020404" pitchFamily="49" charset="0"/>
-                <a:ea typeface="Calibri" panose="020F0502020204030204" pitchFamily="34" charset="0"/>
-                <a:cs typeface="Courier New" panose="02070309020205020404" pitchFamily="49" charset="0"/>
-              </a:rPr>
-              <a:t>Category </a:t>
-            </a:r>
-            <a:r>
-              <a:rPr lang="en-US" sz="1600" dirty="0" smtClean="0">
-                <a:latin typeface="Courier New" panose="02070309020205020404" pitchFamily="49" charset="0"/>
-                <a:cs typeface="Courier New" panose="02070309020205020404" pitchFamily="49" charset="0"/>
-              </a:rPr>
-              <a:t>= </a:t>
-            </a:r>
-            <a:r>
-              <a:rPr lang="en-US" sz="1600" dirty="0">
-                <a:latin typeface="Courier New" panose="02070309020205020404" pitchFamily="49" charset="0"/>
-                <a:cs typeface="Courier New" panose="02070309020205020404" pitchFamily="49" charset="0"/>
-              </a:rPr>
-              <a:t>IF(Data[Sales]&lt;25</a:t>
+                <a:cs typeface="Courier New" panose="02070309020205020404" pitchFamily="49" charset="0"/>
+              </a:rPr>
+              <a:t>]&lt;25</a:t>
             </a:r>
             <a:r>
               <a:rPr lang="en-US" sz="1600" dirty="0" smtClean="0">
@@ -16288,7 +18266,7 @@
                 <a:latin typeface="Courier New" panose="02070309020205020404" pitchFamily="49" charset="0"/>
                 <a:cs typeface="Courier New" panose="02070309020205020404" pitchFamily="49" charset="0"/>
               </a:rPr>
-              <a:t>	IF(Data[Sales</a:t>
+              <a:t>IF(Data[Sales</a:t>
             </a:r>
             <a:r>
               <a:rPr lang="en-US" sz="1600" dirty="0">
@@ -16321,38 +18299,11 @@
                 <a:spcPct val="107000"/>
               </a:lnSpc>
             </a:pPr>
-            <a:r>
-              <a:rPr lang="en-IN" sz="1600" dirty="0" smtClean="0">
-                <a:latin typeface="Courier New" panose="02070309020205020404" pitchFamily="49" charset="0"/>
-                <a:ea typeface="Calibri" panose="020F0502020204030204" pitchFamily="34" charset="0"/>
-                <a:cs typeface="Courier New" panose="02070309020205020404" pitchFamily="49" charset="0"/>
-              </a:rPr>
-              <a:t>IFERROR</a:t>
-            </a:r>
-            <a:r>
-              <a:rPr lang="en-IN" sz="1600" dirty="0">
-                <a:latin typeface="Courier New" panose="02070309020205020404" pitchFamily="49" charset="0"/>
-                <a:ea typeface="Calibri" panose="020F0502020204030204" pitchFamily="34" charset="0"/>
-                <a:cs typeface="Courier New" panose="02070309020205020404" pitchFamily="49" charset="0"/>
-              </a:rPr>
-              <a:t>	</a:t>
-            </a:r>
-            <a:r>
-              <a:rPr lang="en-IN" sz="1600" dirty="0" smtClean="0">
-                <a:latin typeface="Courier New" panose="02070309020205020404" pitchFamily="49" charset="0"/>
-                <a:ea typeface="Calibri" panose="020F0502020204030204" pitchFamily="34" charset="0"/>
-                <a:cs typeface="Courier New" panose="02070309020205020404" pitchFamily="49" charset="0"/>
-              </a:rPr>
-              <a:t>        IFERROR(Sales[Revenue</a:t>
-            </a:r>
-            <a:r>
-              <a:rPr lang="en-IN" sz="1600" dirty="0">
-                <a:latin typeface="Courier New" panose="02070309020205020404" pitchFamily="49" charset="0"/>
-                <a:ea typeface="Calibri" panose="020F0502020204030204" pitchFamily="34" charset="0"/>
-                <a:cs typeface="Courier New" panose="02070309020205020404" pitchFamily="49" charset="0"/>
-              </a:rPr>
-              <a:t>] / Sales[Units], 0)</a:t>
-            </a:r>
+            <a:endParaRPr lang="en-US" sz="1600" dirty="0" smtClean="0">
+              <a:latin typeface="Courier New" panose="02070309020205020404" pitchFamily="49" charset="0"/>
+              <a:ea typeface="Calibri" panose="020F0502020204030204" pitchFamily="34" charset="0"/>
+              <a:cs typeface="Courier New" panose="02070309020205020404" pitchFamily="49" charset="0"/>
+            </a:endParaRPr>
           </a:p>
           <a:p>
             <a:pPr>
@@ -16360,11 +18311,96 @@
                 <a:spcPct val="107000"/>
               </a:lnSpc>
             </a:pPr>
-            <a:endParaRPr lang="en-IN" sz="1600" dirty="0">
-              <a:latin typeface="Courier New" panose="02070309020205020404" pitchFamily="49" charset="0"/>
-              <a:ea typeface="Calibri" panose="020F0502020204030204" pitchFamily="34" charset="0"/>
-              <a:cs typeface="Courier New" panose="02070309020205020404" pitchFamily="49" charset="0"/>
-            </a:endParaRPr>
+            <a:r>
+              <a:rPr lang="en-US" sz="1600" dirty="0">
+                <a:latin typeface="Courier New" panose="02070309020205020404" pitchFamily="49" charset="0"/>
+                <a:ea typeface="Calibri" panose="020F0502020204030204" pitchFamily="34" charset="0"/>
+                <a:cs typeface="Courier New" panose="02070309020205020404" pitchFamily="49" charset="0"/>
+              </a:rPr>
+              <a:t>Category =SWITCH(    </a:t>
+            </a:r>
+          </a:p>
+          <a:p>
+            <a:pPr lvl="2">
+              <a:lnSpc>
+                <a:spcPct val="107000"/>
+              </a:lnSpc>
+            </a:pPr>
+            <a:r>
+              <a:rPr lang="en-US" sz="1600" dirty="0">
+                <a:latin typeface="Courier New" panose="02070309020205020404" pitchFamily="49" charset="0"/>
+                <a:ea typeface="Calibri" panose="020F0502020204030204" pitchFamily="34" charset="0"/>
+                <a:cs typeface="Courier New" panose="02070309020205020404" pitchFamily="49" charset="0"/>
+              </a:rPr>
+              <a:t>	</a:t>
+            </a:r>
+            <a:r>
+              <a:rPr lang="en-US" sz="1600" dirty="0">
+                <a:solidFill>
+                  <a:schemeClr val="accent3">
+                    <a:lumMod val="60000"/>
+                    <a:lumOff val="40000"/>
+                  </a:schemeClr>
+                </a:solidFill>
+                <a:latin typeface="Courier New" panose="02070309020205020404" pitchFamily="49" charset="0"/>
+                <a:ea typeface="Calibri" panose="020F0502020204030204" pitchFamily="34" charset="0"/>
+                <a:cs typeface="Courier New" panose="02070309020205020404" pitchFamily="49" charset="0"/>
+              </a:rPr>
+              <a:t>TRUE()</a:t>
+            </a:r>
+            <a:r>
+              <a:rPr lang="en-US" sz="1600" dirty="0">
+                <a:latin typeface="Courier New" panose="02070309020205020404" pitchFamily="49" charset="0"/>
+                <a:ea typeface="Calibri" panose="020F0502020204030204" pitchFamily="34" charset="0"/>
+                <a:cs typeface="Courier New" panose="02070309020205020404" pitchFamily="49" charset="0"/>
+              </a:rPr>
+              <a:t>,    </a:t>
+            </a:r>
+          </a:p>
+          <a:p>
+            <a:pPr lvl="2">
+              <a:lnSpc>
+                <a:spcPct val="107000"/>
+              </a:lnSpc>
+            </a:pPr>
+            <a:r>
+              <a:rPr lang="en-US" sz="1600" dirty="0">
+                <a:latin typeface="Courier New" panose="02070309020205020404" pitchFamily="49" charset="0"/>
+                <a:ea typeface="Calibri" panose="020F0502020204030204" pitchFamily="34" charset="0"/>
+                <a:cs typeface="Courier New" panose="02070309020205020404" pitchFamily="49" charset="0"/>
+              </a:rPr>
+              <a:t>	</a:t>
+            </a:r>
+            <a:r>
+              <a:rPr lang="en-US" sz="1600" dirty="0">
+                <a:solidFill>
+                  <a:schemeClr val="accent3">
+                    <a:lumMod val="60000"/>
+                    <a:lumOff val="40000"/>
+                  </a:schemeClr>
+                </a:solidFill>
+                <a:latin typeface="Courier New" panose="02070309020205020404" pitchFamily="49" charset="0"/>
+                <a:ea typeface="Calibri" panose="020F0502020204030204" pitchFamily="34" charset="0"/>
+                <a:cs typeface="Courier New" panose="02070309020205020404" pitchFamily="49" charset="0"/>
+              </a:rPr>
+              <a:t>Data[Sales] &lt; 25, "LESS", </a:t>
+            </a:r>
+            <a:r>
+              <a:rPr lang="en-US" sz="1600" dirty="0" smtClean="0">
+                <a:latin typeface="Courier New" panose="02070309020205020404" pitchFamily="49" charset="0"/>
+                <a:ea typeface="Calibri" panose="020F0502020204030204" pitchFamily="34" charset="0"/>
+                <a:cs typeface="Courier New" panose="02070309020205020404" pitchFamily="49" charset="0"/>
+              </a:rPr>
+              <a:t>"</a:t>
+            </a:r>
+            <a:r>
+              <a:rPr lang="en-US" sz="1600" dirty="0">
+                <a:latin typeface="Courier New" panose="02070309020205020404" pitchFamily="49" charset="0"/>
+                <a:ea typeface="Calibri" panose="020F0502020204030204" pitchFamily="34" charset="0"/>
+                <a:cs typeface="Courier New" panose="02070309020205020404" pitchFamily="49" charset="0"/>
+              </a:rPr>
+              <a:t>High")</a:t>
+            </a:r>
           </a:p>
           <a:p>
             <a:pPr>
@@ -16372,147 +18408,7 @@
                 <a:spcPct val="107000"/>
               </a:lnSpc>
             </a:pPr>
-            <a:r>
-              <a:rPr lang="en-IN" sz="1600" dirty="0">
-                <a:latin typeface="Courier New" panose="02070309020205020404" pitchFamily="49" charset="0"/>
-                <a:ea typeface="Calibri" panose="020F0502020204030204" pitchFamily="34" charset="0"/>
-                <a:cs typeface="Courier New" panose="02070309020205020404" pitchFamily="49" charset="0"/>
-              </a:rPr>
-              <a:t>AND	 	AND(Sales[Amount] &gt; 100, Sales[Region] = "West")</a:t>
-            </a:r>
-          </a:p>
-          <a:p>
-            <a:pPr>
-              <a:lnSpc>
-                <a:spcPct val="107000"/>
-              </a:lnSpc>
-            </a:pPr>
-            <a:r>
-              <a:rPr lang="en-IN" sz="1600" dirty="0">
-                <a:latin typeface="Courier New" panose="02070309020205020404" pitchFamily="49" charset="0"/>
-                <a:ea typeface="Calibri" panose="020F0502020204030204" pitchFamily="34" charset="0"/>
-                <a:cs typeface="Courier New" panose="02070309020205020404" pitchFamily="49" charset="0"/>
-              </a:rPr>
-              <a:t>OR	 	OR(Sales[Quantity] &gt; 10, Sales[Discount] &gt; 0.1)</a:t>
-            </a:r>
-          </a:p>
-          <a:p>
-            <a:pPr>
-              <a:lnSpc>
-                <a:spcPct val="107000"/>
-              </a:lnSpc>
-            </a:pPr>
-            <a:r>
-              <a:rPr lang="en-IN" sz="1600" dirty="0">
-                <a:latin typeface="Courier New" panose="02070309020205020404" pitchFamily="49" charset="0"/>
-                <a:ea typeface="Calibri" panose="020F0502020204030204" pitchFamily="34" charset="0"/>
-                <a:cs typeface="Courier New" panose="02070309020205020404" pitchFamily="49" charset="0"/>
-              </a:rPr>
-              <a:t>NOT	 	NOT(Sales[Status] = "Cancelled")</a:t>
-            </a:r>
-          </a:p>
-          <a:p>
-            <a:pPr>
-              <a:lnSpc>
-                <a:spcPct val="107000"/>
-              </a:lnSpc>
-            </a:pPr>
-            <a:endParaRPr lang="en-IN" sz="1600" dirty="0">
-              <a:latin typeface="Courier New" panose="02070309020205020404" pitchFamily="49" charset="0"/>
-              <a:ea typeface="Calibri" panose="020F0502020204030204" pitchFamily="34" charset="0"/>
-              <a:cs typeface="Courier New" panose="02070309020205020404" pitchFamily="49" charset="0"/>
-            </a:endParaRPr>
-          </a:p>
-          <a:p>
-            <a:pPr>
-              <a:lnSpc>
-                <a:spcPct val="107000"/>
-              </a:lnSpc>
-            </a:pPr>
-            <a:endParaRPr lang="en-IN" sz="1600" dirty="0">
-              <a:latin typeface="Courier New" panose="02070309020205020404" pitchFamily="49" charset="0"/>
-              <a:ea typeface="Calibri" panose="020F0502020204030204" pitchFamily="34" charset="0"/>
-              <a:cs typeface="Courier New" panose="02070309020205020404" pitchFamily="49" charset="0"/>
-            </a:endParaRPr>
-          </a:p>
-          <a:p>
-            <a:pPr>
-              <a:lnSpc>
-                <a:spcPct val="107000"/>
-              </a:lnSpc>
-            </a:pPr>
-            <a:r>
-              <a:rPr lang="en-IN" sz="1600" dirty="0">
-                <a:latin typeface="Courier New" panose="02070309020205020404" pitchFamily="49" charset="0"/>
-                <a:ea typeface="Calibri" panose="020F0502020204030204" pitchFamily="34" charset="0"/>
-                <a:cs typeface="Courier New" panose="02070309020205020404" pitchFamily="49" charset="0"/>
-              </a:rPr>
-              <a:t>FALSE	 	</a:t>
-            </a:r>
-            <a:r>
-              <a:rPr lang="en-IN" sz="1600" dirty="0" err="1">
-                <a:latin typeface="Courier New" panose="02070309020205020404" pitchFamily="49" charset="0"/>
-                <a:ea typeface="Calibri" panose="020F0502020204030204" pitchFamily="34" charset="0"/>
-                <a:cs typeface="Courier New" panose="02070309020205020404" pitchFamily="49" charset="0"/>
-              </a:rPr>
-              <a:t>SetFalse</a:t>
-            </a:r>
-            <a:r>
-              <a:rPr lang="en-IN" sz="1600" dirty="0">
-                <a:latin typeface="Courier New" panose="02070309020205020404" pitchFamily="49" charset="0"/>
-                <a:ea typeface="Calibri" panose="020F0502020204030204" pitchFamily="34" charset="0"/>
-                <a:cs typeface="Courier New" panose="02070309020205020404" pitchFamily="49" charset="0"/>
-              </a:rPr>
-              <a:t> = FALSE()</a:t>
-            </a:r>
-          </a:p>
-          <a:p>
-            <a:pPr>
-              <a:lnSpc>
-                <a:spcPct val="107000"/>
-              </a:lnSpc>
-            </a:pPr>
-            <a:r>
-              <a:rPr lang="en-IN" sz="1600" dirty="0">
-                <a:latin typeface="Courier New" panose="02070309020205020404" pitchFamily="49" charset="0"/>
-                <a:ea typeface="Calibri" panose="020F0502020204030204" pitchFamily="34" charset="0"/>
-                <a:cs typeface="Courier New" panose="02070309020205020404" pitchFamily="49" charset="0"/>
-              </a:rPr>
-              <a:t>TRUE		</a:t>
-            </a:r>
-            <a:r>
-              <a:rPr lang="en-IN" sz="1600" dirty="0" err="1">
-                <a:latin typeface="Courier New" panose="02070309020205020404" pitchFamily="49" charset="0"/>
-                <a:ea typeface="Calibri" panose="020F0502020204030204" pitchFamily="34" charset="0"/>
-                <a:cs typeface="Courier New" panose="02070309020205020404" pitchFamily="49" charset="0"/>
-              </a:rPr>
-              <a:t>SetTrue</a:t>
-            </a:r>
-            <a:r>
-              <a:rPr lang="en-IN" sz="1600" dirty="0">
-                <a:latin typeface="Courier New" panose="02070309020205020404" pitchFamily="49" charset="0"/>
-                <a:ea typeface="Calibri" panose="020F0502020204030204" pitchFamily="34" charset="0"/>
-                <a:cs typeface="Courier New" panose="02070309020205020404" pitchFamily="49" charset="0"/>
-              </a:rPr>
-              <a:t> </a:t>
-            </a:r>
-            <a:r>
-              <a:rPr lang="en-IN" sz="1600" dirty="0" smtClean="0">
-                <a:latin typeface="Courier New" panose="02070309020205020404" pitchFamily="49" charset="0"/>
-                <a:ea typeface="Calibri" panose="020F0502020204030204" pitchFamily="34" charset="0"/>
-                <a:cs typeface="Courier New" panose="02070309020205020404" pitchFamily="49" charset="0"/>
-              </a:rPr>
-              <a:t> = </a:t>
-            </a:r>
-            <a:r>
-              <a:rPr lang="en-IN" sz="1600" dirty="0">
-                <a:latin typeface="Courier New" panose="02070309020205020404" pitchFamily="49" charset="0"/>
-                <a:ea typeface="Calibri" panose="020F0502020204030204" pitchFamily="34" charset="0"/>
-                <a:cs typeface="Courier New" panose="02070309020205020404" pitchFamily="49" charset="0"/>
-              </a:rPr>
-              <a:t>TRUE() </a:t>
-            </a:r>
-            <a:endParaRPr lang="en-IN" sz="1600" dirty="0" smtClean="0">
+            <a:endParaRPr lang="en-US" sz="1600" dirty="0" smtClean="0">
               <a:latin typeface="Courier New" panose="02070309020205020404" pitchFamily="49" charset="0"/>
               <a:ea typeface="Calibri" panose="020F0502020204030204" pitchFamily="34" charset="0"/>
               <a:cs typeface="Courier New" panose="02070309020205020404" pitchFamily="49" charset="0"/>
@@ -16564,11 +18460,6 @@
               </a:rPr>
               <a:t>=SWITCH(    </a:t>
             </a:r>
-            <a:endParaRPr lang="en-US" sz="1600" dirty="0" smtClean="0">
-              <a:latin typeface="Courier New" panose="02070309020205020404" pitchFamily="49" charset="0"/>
-              <a:ea typeface="Calibri" panose="020F0502020204030204" pitchFamily="34" charset="0"/>
-              <a:cs typeface="Courier New" panose="02070309020205020404" pitchFamily="49" charset="0"/>
-            </a:endParaRPr>
           </a:p>
           <a:p>
             <a:pPr lvl="2">
@@ -16585,12 +18476,18 @@
               <a:t>	</a:t>
             </a:r>
             <a:r>
-              <a:rPr lang="en-US" sz="1600" dirty="0" smtClean="0">
+              <a:rPr lang="en-US" sz="1600" dirty="0">
+                <a:solidFill>
+                  <a:schemeClr val="accent3">
+                    <a:lumMod val="60000"/>
+                    <a:lumOff val="40000"/>
+                  </a:schemeClr>
+                </a:solidFill>
                 <a:latin typeface="Courier New" panose="02070309020205020404" pitchFamily="49" charset="0"/>
                 <a:ea typeface="Calibri" panose="020F0502020204030204" pitchFamily="34" charset="0"/>
                 <a:cs typeface="Courier New" panose="02070309020205020404" pitchFamily="49" charset="0"/>
               </a:rPr>
-              <a:t>TRUE</a:t>
+              <a:t>TRUE()</a:t>
             </a:r>
             <a:r>
               <a:rPr lang="en-US" sz="1600" dirty="0">
@@ -16598,13 +18495,8 @@
                 <a:ea typeface="Calibri" panose="020F0502020204030204" pitchFamily="34" charset="0"/>
                 <a:cs typeface="Courier New" panose="02070309020205020404" pitchFamily="49" charset="0"/>
               </a:rPr>
-              <a:t>(),    </a:t>
-            </a:r>
-            <a:endParaRPr lang="en-US" sz="1600" dirty="0" smtClean="0">
-              <a:latin typeface="Courier New" panose="02070309020205020404" pitchFamily="49" charset="0"/>
-              <a:ea typeface="Calibri" panose="020F0502020204030204" pitchFamily="34" charset="0"/>
-              <a:cs typeface="Courier New" panose="02070309020205020404" pitchFamily="49" charset="0"/>
-            </a:endParaRPr>
+              <a:t>,    </a:t>
+            </a:r>
           </a:p>
           <a:p>
             <a:pPr lvl="2">
@@ -16621,26 +18513,19 @@
               <a:t>	</a:t>
             </a:r>
             <a:r>
-              <a:rPr lang="en-US" sz="1600" dirty="0" smtClean="0">
+              <a:rPr lang="en-US" sz="1600" dirty="0">
+                <a:solidFill>
+                  <a:schemeClr val="accent3">
+                    <a:lumMod val="60000"/>
+                    <a:lumOff val="40000"/>
+                  </a:schemeClr>
+                </a:solidFill>
                 <a:latin typeface="Courier New" panose="02070309020205020404" pitchFamily="49" charset="0"/>
                 <a:ea typeface="Calibri" panose="020F0502020204030204" pitchFamily="34" charset="0"/>
                 <a:cs typeface="Courier New" panose="02070309020205020404" pitchFamily="49" charset="0"/>
               </a:rPr>
-              <a:t>Data[Sales</a:t>
-            </a:r>
-            <a:r>
-              <a:rPr lang="en-US" sz="1600" dirty="0">
-                <a:latin typeface="Courier New" panose="02070309020205020404" pitchFamily="49" charset="0"/>
-                <a:ea typeface="Calibri" panose="020F0502020204030204" pitchFamily="34" charset="0"/>
-                <a:cs typeface="Courier New" panose="02070309020205020404" pitchFamily="49" charset="0"/>
-              </a:rPr>
-              <a:t>] &lt; 25, "LESS",    </a:t>
-            </a:r>
-            <a:endParaRPr lang="en-US" sz="1600" dirty="0" smtClean="0">
-              <a:latin typeface="Courier New" panose="02070309020205020404" pitchFamily="49" charset="0"/>
-              <a:ea typeface="Calibri" panose="020F0502020204030204" pitchFamily="34" charset="0"/>
-              <a:cs typeface="Courier New" panose="02070309020205020404" pitchFamily="49" charset="0"/>
-            </a:endParaRPr>
+              <a:t>Data[Sales] &lt; 25, "LESS",    </a:t>
+            </a:r>
           </a:p>
           <a:p>
             <a:pPr lvl="2">
@@ -16654,39 +18539,7 @@
                 <a:ea typeface="Calibri" panose="020F0502020204030204" pitchFamily="34" charset="0"/>
                 <a:cs typeface="Courier New" panose="02070309020205020404" pitchFamily="49" charset="0"/>
               </a:rPr>
-              <a:t>	</a:t>
-            </a:r>
-            <a:r>
-              <a:rPr lang="en-US" sz="1600" dirty="0" smtClean="0">
-                <a:latin typeface="Courier New" panose="02070309020205020404" pitchFamily="49" charset="0"/>
-                <a:ea typeface="Calibri" panose="020F0502020204030204" pitchFamily="34" charset="0"/>
-                <a:cs typeface="Courier New" panose="02070309020205020404" pitchFamily="49" charset="0"/>
-              </a:rPr>
-              <a:t>Data[Sales</a:t>
-            </a:r>
-            <a:r>
-              <a:rPr lang="en-US" sz="1600" dirty="0">
-                <a:latin typeface="Courier New" panose="02070309020205020404" pitchFamily="49" charset="0"/>
-                <a:ea typeface="Calibri" panose="020F0502020204030204" pitchFamily="34" charset="0"/>
-                <a:cs typeface="Courier New" panose="02070309020205020404" pitchFamily="49" charset="0"/>
-              </a:rPr>
-              <a:t>] &lt; 75, "AVG",    </a:t>
-            </a:r>
-            <a:r>
-              <a:rPr lang="en-US" sz="1600" dirty="0" smtClean="0">
-                <a:latin typeface="Courier New" panose="02070309020205020404" pitchFamily="49" charset="0"/>
-                <a:ea typeface="Calibri" panose="020F0502020204030204" pitchFamily="34" charset="0"/>
-                <a:cs typeface="Courier New" panose="02070309020205020404" pitchFamily="49" charset="0"/>
-              </a:rPr>
-              <a:t>"</a:t>
-            </a:r>
-            <a:r>
-              <a:rPr lang="en-US" sz="1600" dirty="0">
-                <a:latin typeface="Courier New" panose="02070309020205020404" pitchFamily="49" charset="0"/>
-                <a:ea typeface="Calibri" panose="020F0502020204030204" pitchFamily="34" charset="0"/>
-                <a:cs typeface="Courier New" panose="02070309020205020404" pitchFamily="49" charset="0"/>
-              </a:rPr>
-              <a:t>High")</a:t>
+              <a:t>	Data[Sales] &lt; 75, "AVG",    "High")</a:t>
             </a:r>
           </a:p>
           <a:p>
@@ -16824,14 +18677,14 @@
       </p:grpSpPr>
       <p:sp>
         <p:nvSpPr>
-          <p:cNvPr id="6" name="Rectangle 5"/>
+          <p:cNvPr id="4" name="Rectangle 3"/>
           <p:cNvSpPr/>
           <p:nvPr/>
         </p:nvSpPr>
         <p:spPr>
           <a:xfrm>
-            <a:off x="443948" y="1420801"/>
-            <a:ext cx="10956234" cy="4834785"/>
+            <a:off x="615820" y="863747"/>
+            <a:ext cx="10664890" cy="3945054"/>
           </a:xfrm>
           <a:prstGeom prst="rect">
             <a:avLst/>
@@ -16848,34 +18701,10 @@
                 <a:spcPct val="107000"/>
               </a:lnSpc>
             </a:pPr>
-            <a:r>
-              <a:rPr lang="en-IN" sz="1600" dirty="0">
-                <a:latin typeface="Courier New" panose="02070309020205020404" pitchFamily="49" charset="0"/>
-                <a:ea typeface="Calibri" panose="020F0502020204030204" pitchFamily="34" charset="0"/>
-                <a:cs typeface="Times New Roman" panose="02020603050405020304" pitchFamily="18" charset="0"/>
-              </a:rPr>
-              <a:t>Function	</a:t>
-            </a:r>
-            <a:r>
-              <a:rPr lang="en-IN" sz="1600" dirty="0" smtClean="0">
-                <a:latin typeface="Courier New" panose="02070309020205020404" pitchFamily="49" charset="0"/>
-                <a:ea typeface="Calibri" panose="020F0502020204030204" pitchFamily="34" charset="0"/>
-                <a:cs typeface="Times New Roman" panose="02020603050405020304" pitchFamily="18" charset="0"/>
-              </a:rPr>
-              <a:t>	Example</a:t>
-            </a:r>
-            <a:r>
-              <a:rPr lang="en-IN" sz="1600" dirty="0">
-                <a:latin typeface="Courier New" panose="02070309020205020404" pitchFamily="49" charset="0"/>
-                <a:ea typeface="Calibri" panose="020F0502020204030204" pitchFamily="34" charset="0"/>
-                <a:cs typeface="Times New Roman" panose="02020603050405020304" pitchFamily="18" charset="0"/>
-              </a:rPr>
-              <a:t>	Result</a:t>
-            </a:r>
-            <a:endParaRPr lang="en-IN" sz="1600" dirty="0">
-              <a:latin typeface="Calibri" panose="020F0502020204030204" pitchFamily="34" charset="0"/>
+            <a:endParaRPr lang="en-IN" dirty="0">
+              <a:latin typeface="Courier New" panose="02070309020205020404" pitchFamily="49" charset="0"/>
               <a:ea typeface="Calibri" panose="020F0502020204030204" pitchFamily="34" charset="0"/>
-              <a:cs typeface="Times New Roman" panose="02020603050405020304" pitchFamily="18" charset="0"/>
+              <a:cs typeface="Courier New" panose="02070309020205020404" pitchFamily="49" charset="0"/>
             </a:endParaRPr>
           </a:p>
           <a:p>
@@ -16884,66 +18713,10 @@
                 <a:spcPct val="107000"/>
               </a:lnSpc>
             </a:pPr>
-            <a:r>
-              <a:rPr lang="en-IN" sz="1600" dirty="0" smtClean="0">
-                <a:latin typeface="Courier New" panose="02070309020205020404" pitchFamily="49" charset="0"/>
-                <a:ea typeface="Calibri" panose="020F0502020204030204" pitchFamily="34" charset="0"/>
-                <a:cs typeface="Times New Roman" panose="02020603050405020304" pitchFamily="18" charset="0"/>
-              </a:rPr>
-              <a:t>LEFT</a:t>
-            </a:r>
-            <a:r>
-              <a:rPr lang="en-IN" sz="1600" dirty="0">
-                <a:latin typeface="Courier New" panose="02070309020205020404" pitchFamily="49" charset="0"/>
-                <a:ea typeface="Calibri" panose="020F0502020204030204" pitchFamily="34" charset="0"/>
-                <a:cs typeface="Times New Roman" panose="02020603050405020304" pitchFamily="18" charset="0"/>
-              </a:rPr>
-              <a:t>()	</a:t>
-            </a:r>
-            <a:r>
-              <a:rPr lang="en-IN" sz="1600" dirty="0" smtClean="0">
-                <a:latin typeface="Courier New" panose="02070309020205020404" pitchFamily="49" charset="0"/>
-                <a:ea typeface="Calibri" panose="020F0502020204030204" pitchFamily="34" charset="0"/>
-                <a:cs typeface="Times New Roman" panose="02020603050405020304" pitchFamily="18" charset="0"/>
-              </a:rPr>
-              <a:t>		LEFT</a:t>
-            </a:r>
-            <a:r>
-              <a:rPr lang="en-IN" sz="1600" dirty="0">
-                <a:latin typeface="Courier New" panose="02070309020205020404" pitchFamily="49" charset="0"/>
-                <a:ea typeface="Calibri" panose="020F0502020204030204" pitchFamily="34" charset="0"/>
-                <a:cs typeface="Times New Roman" panose="02020603050405020304" pitchFamily="18" charset="0"/>
-              </a:rPr>
-              <a:t>("</a:t>
-            </a:r>
-            <a:r>
-              <a:rPr lang="en-IN" sz="1600" dirty="0" err="1">
-                <a:latin typeface="Courier New" panose="02070309020205020404" pitchFamily="49" charset="0"/>
-                <a:ea typeface="Calibri" panose="020F0502020204030204" pitchFamily="34" charset="0"/>
-                <a:cs typeface="Times New Roman" panose="02020603050405020304" pitchFamily="18" charset="0"/>
-              </a:rPr>
-              <a:t>PowerBI</a:t>
-            </a:r>
-            <a:r>
-              <a:rPr lang="en-IN" sz="1600" dirty="0">
-                <a:latin typeface="Courier New" panose="02070309020205020404" pitchFamily="49" charset="0"/>
-                <a:ea typeface="Calibri" panose="020F0502020204030204" pitchFamily="34" charset="0"/>
-                <a:cs typeface="Times New Roman" panose="02020603050405020304" pitchFamily="18" charset="0"/>
-              </a:rPr>
-              <a:t>", 5)	</a:t>
-            </a:r>
-            <a:r>
-              <a:rPr lang="en-IN" sz="1600" dirty="0" smtClean="0">
-                <a:latin typeface="Courier New" panose="02070309020205020404" pitchFamily="49" charset="0"/>
-                <a:ea typeface="Calibri" panose="020F0502020204030204" pitchFamily="34" charset="0"/>
-                <a:cs typeface="Times New Roman" panose="02020603050405020304" pitchFamily="18" charset="0"/>
-              </a:rPr>
-              <a:t>			Power</a:t>
-            </a:r>
-            <a:endParaRPr lang="en-IN" sz="1600" dirty="0">
-              <a:latin typeface="Calibri" panose="020F0502020204030204" pitchFamily="34" charset="0"/>
+            <a:endParaRPr lang="en-IN" dirty="0">
+              <a:latin typeface="Courier New" panose="02070309020205020404" pitchFamily="49" charset="0"/>
               <a:ea typeface="Calibri" panose="020F0502020204030204" pitchFamily="34" charset="0"/>
-              <a:cs typeface="Times New Roman" panose="02020603050405020304" pitchFamily="18" charset="0"/>
+              <a:cs typeface="Courier New" panose="02070309020205020404" pitchFamily="49" charset="0"/>
             </a:endParaRPr>
           </a:p>
           <a:p>
@@ -16953,58 +18726,29 @@
               </a:lnSpc>
             </a:pPr>
             <a:r>
-              <a:rPr lang="en-IN" sz="1600" dirty="0">
+              <a:rPr lang="en-IN" dirty="0">
                 <a:latin typeface="Courier New" panose="02070309020205020404" pitchFamily="49" charset="0"/>
                 <a:ea typeface="Calibri" panose="020F0502020204030204" pitchFamily="34" charset="0"/>
-                <a:cs typeface="Times New Roman" panose="02020603050405020304" pitchFamily="18" charset="0"/>
-              </a:rPr>
-              <a:t>RIGHT()	</a:t>
-            </a:r>
-            <a:r>
-              <a:rPr lang="en-IN" sz="1600" dirty="0" smtClean="0">
+                <a:cs typeface="Courier New" panose="02070309020205020404" pitchFamily="49" charset="0"/>
+              </a:rPr>
+              <a:t>IFERROR	</a:t>
+            </a:r>
+            <a:r>
+              <a:rPr lang="en-IN" dirty="0" smtClean="0">
                 <a:latin typeface="Courier New" panose="02070309020205020404" pitchFamily="49" charset="0"/>
                 <a:ea typeface="Calibri" panose="020F0502020204030204" pitchFamily="34" charset="0"/>
-                <a:cs typeface="Times New Roman" panose="02020603050405020304" pitchFamily="18" charset="0"/>
-              </a:rPr>
-              <a:t>		RIGHT</a:t>
-            </a:r>
-            <a:r>
-              <a:rPr lang="en-IN" sz="1600" dirty="0">
+                <a:cs typeface="Courier New" panose="02070309020205020404" pitchFamily="49" charset="0"/>
+              </a:rPr>
+              <a:t>IFERROR(Sales[Revenue</a:t>
+            </a:r>
+            <a:r>
+              <a:rPr lang="en-IN" dirty="0">
                 <a:latin typeface="Courier New" panose="02070309020205020404" pitchFamily="49" charset="0"/>
                 <a:ea typeface="Calibri" panose="020F0502020204030204" pitchFamily="34" charset="0"/>
-                <a:cs typeface="Times New Roman" panose="02020603050405020304" pitchFamily="18" charset="0"/>
-              </a:rPr>
-              <a:t>("</a:t>
-            </a:r>
-            <a:r>
-              <a:rPr lang="en-IN" sz="1600" dirty="0" err="1">
-                <a:latin typeface="Courier New" panose="02070309020205020404" pitchFamily="49" charset="0"/>
-                <a:ea typeface="Calibri" panose="020F0502020204030204" pitchFamily="34" charset="0"/>
-                <a:cs typeface="Times New Roman" panose="02020603050405020304" pitchFamily="18" charset="0"/>
-              </a:rPr>
-              <a:t>PowerBI</a:t>
-            </a:r>
-            <a:r>
-              <a:rPr lang="en-IN" sz="1600" dirty="0">
-                <a:latin typeface="Courier New" panose="02070309020205020404" pitchFamily="49" charset="0"/>
-                <a:ea typeface="Calibri" panose="020F0502020204030204" pitchFamily="34" charset="0"/>
-                <a:cs typeface="Times New Roman" panose="02020603050405020304" pitchFamily="18" charset="0"/>
-              </a:rPr>
-              <a:t>", 2)	</a:t>
-            </a:r>
-            <a:r>
-              <a:rPr lang="en-IN" sz="1600" dirty="0" smtClean="0">
-                <a:latin typeface="Courier New" panose="02070309020205020404" pitchFamily="49" charset="0"/>
-                <a:ea typeface="Calibri" panose="020F0502020204030204" pitchFamily="34" charset="0"/>
-                <a:cs typeface="Times New Roman" panose="02020603050405020304" pitchFamily="18" charset="0"/>
-              </a:rPr>
-              <a:t>			BI</a:t>
-            </a:r>
-            <a:endParaRPr lang="en-IN" sz="1600" dirty="0">
-              <a:latin typeface="Calibri" panose="020F0502020204030204" pitchFamily="34" charset="0"/>
-              <a:ea typeface="Calibri" panose="020F0502020204030204" pitchFamily="34" charset="0"/>
-              <a:cs typeface="Times New Roman" panose="02020603050405020304" pitchFamily="18" charset="0"/>
-            </a:endParaRPr>
+                <a:cs typeface="Courier New" panose="02070309020205020404" pitchFamily="49" charset="0"/>
+              </a:rPr>
+              <a:t>] / Sales[Units], 0)</a:t>
+            </a:r>
           </a:p>
           <a:p>
             <a:pPr>
@@ -17012,58 +18756,10 @@
                 <a:spcPct val="107000"/>
               </a:lnSpc>
             </a:pPr>
-            <a:r>
-              <a:rPr lang="en-IN" sz="1600" dirty="0">
-                <a:latin typeface="Courier New" panose="02070309020205020404" pitchFamily="49" charset="0"/>
-                <a:ea typeface="Calibri" panose="020F0502020204030204" pitchFamily="34" charset="0"/>
-                <a:cs typeface="Times New Roman" panose="02020603050405020304" pitchFamily="18" charset="0"/>
-              </a:rPr>
-              <a:t>MID()	</a:t>
-            </a:r>
-            <a:r>
-              <a:rPr lang="en-IN" sz="1600" dirty="0" smtClean="0">
-                <a:latin typeface="Courier New" panose="02070309020205020404" pitchFamily="49" charset="0"/>
-                <a:ea typeface="Calibri" panose="020F0502020204030204" pitchFamily="34" charset="0"/>
-                <a:cs typeface="Times New Roman" panose="02020603050405020304" pitchFamily="18" charset="0"/>
-              </a:rPr>
-              <a:t>		MID</a:t>
-            </a:r>
-            <a:r>
-              <a:rPr lang="en-IN" sz="1600" dirty="0">
-                <a:latin typeface="Courier New" panose="02070309020205020404" pitchFamily="49" charset="0"/>
-                <a:ea typeface="Calibri" panose="020F0502020204030204" pitchFamily="34" charset="0"/>
-                <a:cs typeface="Times New Roman" panose="02020603050405020304" pitchFamily="18" charset="0"/>
-              </a:rPr>
-              <a:t>("</a:t>
-            </a:r>
-            <a:r>
-              <a:rPr lang="en-IN" sz="1600" dirty="0" err="1">
-                <a:latin typeface="Courier New" panose="02070309020205020404" pitchFamily="49" charset="0"/>
-                <a:ea typeface="Calibri" panose="020F0502020204030204" pitchFamily="34" charset="0"/>
-                <a:cs typeface="Times New Roman" panose="02020603050405020304" pitchFamily="18" charset="0"/>
-              </a:rPr>
-              <a:t>PowerBI</a:t>
-            </a:r>
-            <a:r>
-              <a:rPr lang="en-IN" sz="1600" dirty="0">
-                <a:latin typeface="Courier New" panose="02070309020205020404" pitchFamily="49" charset="0"/>
-                <a:ea typeface="Calibri" panose="020F0502020204030204" pitchFamily="34" charset="0"/>
-                <a:cs typeface="Times New Roman" panose="02020603050405020304" pitchFamily="18" charset="0"/>
-              </a:rPr>
-              <a:t>", 2, 3)	</a:t>
-            </a:r>
-            <a:r>
-              <a:rPr lang="en-IN" sz="1600" dirty="0" smtClean="0">
-                <a:latin typeface="Courier New" panose="02070309020205020404" pitchFamily="49" charset="0"/>
-                <a:ea typeface="Calibri" panose="020F0502020204030204" pitchFamily="34" charset="0"/>
-                <a:cs typeface="Times New Roman" panose="02020603050405020304" pitchFamily="18" charset="0"/>
-              </a:rPr>
-              <a:t>			owe</a:t>
-            </a:r>
-            <a:endParaRPr lang="en-IN" sz="1600" dirty="0">
-              <a:latin typeface="Calibri" panose="020F0502020204030204" pitchFamily="34" charset="0"/>
+            <a:endParaRPr lang="en-IN" dirty="0">
+              <a:latin typeface="Courier New" panose="02070309020205020404" pitchFamily="49" charset="0"/>
               <a:ea typeface="Calibri" panose="020F0502020204030204" pitchFamily="34" charset="0"/>
-              <a:cs typeface="Times New Roman" panose="02020603050405020304" pitchFamily="18" charset="0"/>
+              <a:cs typeface="Courier New" panose="02070309020205020404" pitchFamily="49" charset="0"/>
             </a:endParaRPr>
           </a:p>
           <a:p>
@@ -17072,11 +18768,14 @@
                 <a:spcPct val="107000"/>
               </a:lnSpc>
             </a:pPr>
-            <a:endParaRPr lang="en-IN" sz="1600" dirty="0" smtClean="0">
-              <a:latin typeface="Courier New" panose="02070309020205020404" pitchFamily="49" charset="0"/>
-              <a:ea typeface="Calibri" panose="020F0502020204030204" pitchFamily="34" charset="0"/>
-              <a:cs typeface="Times New Roman" panose="02020603050405020304" pitchFamily="18" charset="0"/>
-            </a:endParaRPr>
+            <a:r>
+              <a:rPr lang="en-IN" dirty="0">
+                <a:latin typeface="Courier New" panose="02070309020205020404" pitchFamily="49" charset="0"/>
+                <a:ea typeface="Calibri" panose="020F0502020204030204" pitchFamily="34" charset="0"/>
+                <a:cs typeface="Courier New" panose="02070309020205020404" pitchFamily="49" charset="0"/>
+              </a:rPr>
+              <a:t>AND	 	AND(Sales[Amount] &gt; 100, Sales[Region] = "West")</a:t>
+            </a:r>
           </a:p>
           <a:p>
             <a:pPr>
@@ -17085,66 +18784,13 @@
               </a:lnSpc>
             </a:pPr>
             <a:r>
-              <a:rPr lang="en-IN" sz="1600" dirty="0" smtClean="0">
+              <a:rPr lang="en-IN" dirty="0">
                 <a:latin typeface="Courier New" panose="02070309020205020404" pitchFamily="49" charset="0"/>
                 <a:ea typeface="Calibri" panose="020F0502020204030204" pitchFamily="34" charset="0"/>
-                <a:cs typeface="Times New Roman" panose="02020603050405020304" pitchFamily="18" charset="0"/>
-              </a:rPr>
-              <a:t>LEN</a:t>
-            </a:r>
-            <a:r>
-              <a:rPr lang="en-IN" sz="1600" dirty="0">
-                <a:latin typeface="Courier New" panose="02070309020205020404" pitchFamily="49" charset="0"/>
-                <a:ea typeface="Calibri" panose="020F0502020204030204" pitchFamily="34" charset="0"/>
-                <a:cs typeface="Times New Roman" panose="02020603050405020304" pitchFamily="18" charset="0"/>
-              </a:rPr>
-              <a:t>()	</a:t>
-            </a:r>
-            <a:r>
-              <a:rPr lang="en-IN" sz="1600" dirty="0" smtClean="0">
-                <a:latin typeface="Courier New" panose="02070309020205020404" pitchFamily="49" charset="0"/>
-                <a:ea typeface="Calibri" panose="020F0502020204030204" pitchFamily="34" charset="0"/>
-                <a:cs typeface="Times New Roman" panose="02020603050405020304" pitchFamily="18" charset="0"/>
-              </a:rPr>
-              <a:t>		LEN</a:t>
-            </a:r>
-            <a:r>
-              <a:rPr lang="en-IN" sz="1600" dirty="0">
-                <a:latin typeface="Courier New" panose="02070309020205020404" pitchFamily="49" charset="0"/>
-                <a:ea typeface="Calibri" panose="020F0502020204030204" pitchFamily="34" charset="0"/>
-                <a:cs typeface="Times New Roman" panose="02020603050405020304" pitchFamily="18" charset="0"/>
-              </a:rPr>
-              <a:t>("</a:t>
-            </a:r>
-            <a:r>
-              <a:rPr lang="en-IN" sz="1600" dirty="0" err="1">
-                <a:latin typeface="Courier New" panose="02070309020205020404" pitchFamily="49" charset="0"/>
-                <a:ea typeface="Calibri" panose="020F0502020204030204" pitchFamily="34" charset="0"/>
-                <a:cs typeface="Times New Roman" panose="02020603050405020304" pitchFamily="18" charset="0"/>
-              </a:rPr>
-              <a:t>PowerBI</a:t>
-            </a:r>
-            <a:r>
-              <a:rPr lang="en-IN" sz="1600" dirty="0">
-                <a:latin typeface="Courier New" panose="02070309020205020404" pitchFamily="49" charset="0"/>
-                <a:ea typeface="Calibri" panose="020F0502020204030204" pitchFamily="34" charset="0"/>
-                <a:cs typeface="Times New Roman" panose="02020603050405020304" pitchFamily="18" charset="0"/>
-              </a:rPr>
-              <a:t>")	</a:t>
-            </a:r>
-            <a:r>
-              <a:rPr lang="en-IN" sz="1600" dirty="0" smtClean="0">
-                <a:latin typeface="Courier New" panose="02070309020205020404" pitchFamily="49" charset="0"/>
-                <a:ea typeface="Calibri" panose="020F0502020204030204" pitchFamily="34" charset="0"/>
-                <a:cs typeface="Times New Roman" panose="02020603050405020304" pitchFamily="18" charset="0"/>
-              </a:rPr>
-              <a:t>				7</a:t>
-            </a:r>
-            <a:endParaRPr lang="en-IN" sz="1600" dirty="0">
-              <a:latin typeface="Calibri" panose="020F0502020204030204" pitchFamily="34" charset="0"/>
-              <a:ea typeface="Calibri" panose="020F0502020204030204" pitchFamily="34" charset="0"/>
-              <a:cs typeface="Times New Roman" panose="02020603050405020304" pitchFamily="18" charset="0"/>
-            </a:endParaRPr>
+                <a:cs typeface="Courier New" panose="02070309020205020404" pitchFamily="49" charset="0"/>
+              </a:rPr>
+              <a:t>OR	 	OR(Sales[Quantity] &gt; 10, Sales[Discount] &gt; 0.1)</a:t>
+            </a:r>
           </a:p>
           <a:p>
             <a:pPr>
@@ -17152,11 +18798,14 @@
                 <a:spcPct val="107000"/>
               </a:lnSpc>
             </a:pPr>
-            <a:endParaRPr lang="en-IN" sz="1600" dirty="0" smtClean="0">
-              <a:latin typeface="Courier New" panose="02070309020205020404" pitchFamily="49" charset="0"/>
-              <a:ea typeface="Calibri" panose="020F0502020204030204" pitchFamily="34" charset="0"/>
-              <a:cs typeface="Times New Roman" panose="02020603050405020304" pitchFamily="18" charset="0"/>
-            </a:endParaRPr>
+            <a:r>
+              <a:rPr lang="en-IN" dirty="0">
+                <a:latin typeface="Courier New" panose="02070309020205020404" pitchFamily="49" charset="0"/>
+                <a:ea typeface="Calibri" panose="020F0502020204030204" pitchFamily="34" charset="0"/>
+                <a:cs typeface="Courier New" panose="02070309020205020404" pitchFamily="49" charset="0"/>
+              </a:rPr>
+              <a:t>NOT	 	NOT(Sales[Status] = "Cancelled")</a:t>
+            </a:r>
           </a:p>
           <a:p>
             <a:pPr>
@@ -17164,58 +18813,10 @@
                 <a:spcPct val="107000"/>
               </a:lnSpc>
             </a:pPr>
-            <a:r>
-              <a:rPr lang="en-IN" sz="1600" dirty="0" smtClean="0">
-                <a:latin typeface="Courier New" panose="02070309020205020404" pitchFamily="49" charset="0"/>
-                <a:ea typeface="Calibri" panose="020F0502020204030204" pitchFamily="34" charset="0"/>
-                <a:cs typeface="Times New Roman" panose="02020603050405020304" pitchFamily="18" charset="0"/>
-              </a:rPr>
-              <a:t>UPPER</a:t>
-            </a:r>
-            <a:r>
-              <a:rPr lang="en-IN" sz="1600" dirty="0">
-                <a:latin typeface="Courier New" panose="02070309020205020404" pitchFamily="49" charset="0"/>
-                <a:ea typeface="Calibri" panose="020F0502020204030204" pitchFamily="34" charset="0"/>
-                <a:cs typeface="Times New Roman" panose="02020603050405020304" pitchFamily="18" charset="0"/>
-              </a:rPr>
-              <a:t>()	</a:t>
-            </a:r>
-            <a:r>
-              <a:rPr lang="en-IN" sz="1600" dirty="0" smtClean="0">
-                <a:latin typeface="Courier New" panose="02070309020205020404" pitchFamily="49" charset="0"/>
-                <a:ea typeface="Calibri" panose="020F0502020204030204" pitchFamily="34" charset="0"/>
-                <a:cs typeface="Times New Roman" panose="02020603050405020304" pitchFamily="18" charset="0"/>
-              </a:rPr>
-              <a:t>		UPPER</a:t>
-            </a:r>
-            <a:r>
-              <a:rPr lang="en-IN" sz="1600" dirty="0">
-                <a:latin typeface="Courier New" panose="02070309020205020404" pitchFamily="49" charset="0"/>
-                <a:ea typeface="Calibri" panose="020F0502020204030204" pitchFamily="34" charset="0"/>
-                <a:cs typeface="Times New Roman" panose="02020603050405020304" pitchFamily="18" charset="0"/>
-              </a:rPr>
-              <a:t>("power bi")	</a:t>
-            </a:r>
-            <a:r>
-              <a:rPr lang="en-IN" sz="1600" dirty="0" smtClean="0">
-                <a:latin typeface="Courier New" panose="02070309020205020404" pitchFamily="49" charset="0"/>
-                <a:ea typeface="Calibri" panose="020F0502020204030204" pitchFamily="34" charset="0"/>
-                <a:cs typeface="Times New Roman" panose="02020603050405020304" pitchFamily="18" charset="0"/>
-              </a:rPr>
-              <a:t>			POWER </a:t>
-            </a:r>
-            <a:r>
-              <a:rPr lang="en-IN" sz="1600" dirty="0">
-                <a:latin typeface="Courier New" panose="02070309020205020404" pitchFamily="49" charset="0"/>
-                <a:ea typeface="Calibri" panose="020F0502020204030204" pitchFamily="34" charset="0"/>
-                <a:cs typeface="Times New Roman" panose="02020603050405020304" pitchFamily="18" charset="0"/>
-              </a:rPr>
-              <a:t>BI</a:t>
-            </a:r>
-            <a:endParaRPr lang="en-IN" sz="1600" dirty="0">
-              <a:latin typeface="Calibri" panose="020F0502020204030204" pitchFamily="34" charset="0"/>
+            <a:endParaRPr lang="en-IN" dirty="0">
+              <a:latin typeface="Courier New" panose="02070309020205020404" pitchFamily="49" charset="0"/>
               <a:ea typeface="Calibri" panose="020F0502020204030204" pitchFamily="34" charset="0"/>
-              <a:cs typeface="Times New Roman" panose="02020603050405020304" pitchFamily="18" charset="0"/>
+              <a:cs typeface="Courier New" panose="02070309020205020404" pitchFamily="49" charset="0"/>
             </a:endParaRPr>
           </a:p>
           <a:p>
@@ -17224,50 +18825,10 @@
                 <a:spcPct val="107000"/>
               </a:lnSpc>
             </a:pPr>
-            <a:r>
-              <a:rPr lang="en-IN" sz="1600" dirty="0">
-                <a:latin typeface="Courier New" panose="02070309020205020404" pitchFamily="49" charset="0"/>
-                <a:ea typeface="Calibri" panose="020F0502020204030204" pitchFamily="34" charset="0"/>
-                <a:cs typeface="Times New Roman" panose="02020603050405020304" pitchFamily="18" charset="0"/>
-              </a:rPr>
-              <a:t>LOWER()	</a:t>
-            </a:r>
-            <a:r>
-              <a:rPr lang="en-IN" sz="1600" dirty="0" smtClean="0">
-                <a:latin typeface="Courier New" panose="02070309020205020404" pitchFamily="49" charset="0"/>
-                <a:ea typeface="Calibri" panose="020F0502020204030204" pitchFamily="34" charset="0"/>
-                <a:cs typeface="Times New Roman" panose="02020603050405020304" pitchFamily="18" charset="0"/>
-              </a:rPr>
-              <a:t>		LOWER</a:t>
-            </a:r>
-            <a:r>
-              <a:rPr lang="en-IN" sz="1600" dirty="0">
-                <a:latin typeface="Courier New" panose="02070309020205020404" pitchFamily="49" charset="0"/>
-                <a:ea typeface="Calibri" panose="020F0502020204030204" pitchFamily="34" charset="0"/>
-                <a:cs typeface="Times New Roman" panose="02020603050405020304" pitchFamily="18" charset="0"/>
-              </a:rPr>
-              <a:t>("POWER BI")	</a:t>
-            </a:r>
-            <a:r>
-              <a:rPr lang="en-IN" sz="1600" dirty="0" smtClean="0">
-                <a:latin typeface="Courier New" panose="02070309020205020404" pitchFamily="49" charset="0"/>
-                <a:ea typeface="Calibri" panose="020F0502020204030204" pitchFamily="34" charset="0"/>
-                <a:cs typeface="Times New Roman" panose="02020603050405020304" pitchFamily="18" charset="0"/>
-              </a:rPr>
-              <a:t>			power </a:t>
-            </a:r>
-            <a:r>
-              <a:rPr lang="en-IN" sz="1600" dirty="0">
-                <a:latin typeface="Courier New" panose="02070309020205020404" pitchFamily="49" charset="0"/>
-                <a:ea typeface="Calibri" panose="020F0502020204030204" pitchFamily="34" charset="0"/>
-                <a:cs typeface="Times New Roman" panose="02020603050405020304" pitchFamily="18" charset="0"/>
-              </a:rPr>
-              <a:t>bi</a:t>
-            </a:r>
-            <a:endParaRPr lang="en-IN" sz="1600" dirty="0">
-              <a:latin typeface="Calibri" panose="020F0502020204030204" pitchFamily="34" charset="0"/>
+            <a:endParaRPr lang="en-IN" dirty="0">
+              <a:latin typeface="Courier New" panose="02070309020205020404" pitchFamily="49" charset="0"/>
               <a:ea typeface="Calibri" panose="020F0502020204030204" pitchFamily="34" charset="0"/>
-              <a:cs typeface="Times New Roman" panose="02020603050405020304" pitchFamily="18" charset="0"/>
+              <a:cs typeface="Courier New" panose="02070309020205020404" pitchFamily="49" charset="0"/>
             </a:endParaRPr>
           </a:p>
           <a:p>
@@ -17276,11 +18837,30 @@
                 <a:spcPct val="107000"/>
               </a:lnSpc>
             </a:pPr>
-            <a:endParaRPr lang="en-IN" sz="1600" dirty="0" smtClean="0">
-              <a:latin typeface="Courier New" panose="02070309020205020404" pitchFamily="49" charset="0"/>
-              <a:ea typeface="Calibri" panose="020F0502020204030204" pitchFamily="34" charset="0"/>
-              <a:cs typeface="Times New Roman" panose="02020603050405020304" pitchFamily="18" charset="0"/>
-            </a:endParaRPr>
+            <a:r>
+              <a:rPr lang="en-IN" dirty="0">
+                <a:latin typeface="Courier New" panose="02070309020205020404" pitchFamily="49" charset="0"/>
+                <a:ea typeface="Calibri" panose="020F0502020204030204" pitchFamily="34" charset="0"/>
+                <a:cs typeface="Courier New" panose="02070309020205020404" pitchFamily="49" charset="0"/>
+              </a:rPr>
+              <a:t>FALSE	 	</a:t>
+            </a:r>
+            <a:r>
+              <a:rPr lang="en-IN" dirty="0" err="1">
+                <a:latin typeface="Courier New" panose="02070309020205020404" pitchFamily="49" charset="0"/>
+                <a:ea typeface="Calibri" panose="020F0502020204030204" pitchFamily="34" charset="0"/>
+                <a:cs typeface="Courier New" panose="02070309020205020404" pitchFamily="49" charset="0"/>
+              </a:rPr>
+              <a:t>SetFalse</a:t>
+            </a:r>
+            <a:r>
+              <a:rPr lang="en-IN" dirty="0">
+                <a:latin typeface="Courier New" panose="02070309020205020404" pitchFamily="49" charset="0"/>
+                <a:ea typeface="Calibri" panose="020F0502020204030204" pitchFamily="34" charset="0"/>
+                <a:cs typeface="Courier New" panose="02070309020205020404" pitchFamily="49" charset="0"/>
+              </a:rPr>
+              <a:t> = FALSE()</a:t>
+            </a:r>
           </a:p>
           <a:p>
             <a:pPr>
@@ -17289,58 +18869,29 @@
               </a:lnSpc>
             </a:pPr>
             <a:r>
-              <a:rPr lang="en-IN" sz="1600" dirty="0" smtClean="0">
+              <a:rPr lang="en-IN" dirty="0">
                 <a:latin typeface="Courier New" panose="02070309020205020404" pitchFamily="49" charset="0"/>
                 <a:ea typeface="Calibri" panose="020F0502020204030204" pitchFamily="34" charset="0"/>
-                <a:cs typeface="Times New Roman" panose="02020603050405020304" pitchFamily="18" charset="0"/>
-              </a:rPr>
-              <a:t>TRIM</a:t>
-            </a:r>
-            <a:r>
-              <a:rPr lang="en-IN" sz="1600" dirty="0">
+                <a:cs typeface="Courier New" panose="02070309020205020404" pitchFamily="49" charset="0"/>
+              </a:rPr>
+              <a:t>TRUE		</a:t>
+            </a:r>
+            <a:r>
+              <a:rPr lang="en-IN" dirty="0" err="1">
                 <a:latin typeface="Courier New" panose="02070309020205020404" pitchFamily="49" charset="0"/>
                 <a:ea typeface="Calibri" panose="020F0502020204030204" pitchFamily="34" charset="0"/>
-                <a:cs typeface="Times New Roman" panose="02020603050405020304" pitchFamily="18" charset="0"/>
-              </a:rPr>
-              <a:t>()	</a:t>
-            </a:r>
-            <a:r>
-              <a:rPr lang="en-IN" sz="1600" dirty="0" smtClean="0">
+                <a:cs typeface="Courier New" panose="02070309020205020404" pitchFamily="49" charset="0"/>
+              </a:rPr>
+              <a:t>SetTrue</a:t>
+            </a:r>
+            <a:r>
+              <a:rPr lang="en-IN" dirty="0">
                 <a:latin typeface="Courier New" panose="02070309020205020404" pitchFamily="49" charset="0"/>
                 <a:ea typeface="Calibri" panose="020F0502020204030204" pitchFamily="34" charset="0"/>
-                <a:cs typeface="Times New Roman" panose="02020603050405020304" pitchFamily="18" charset="0"/>
-              </a:rPr>
-              <a:t>		TRIM</a:t>
-            </a:r>
-            <a:r>
-              <a:rPr lang="en-IN" sz="1600" dirty="0">
-                <a:latin typeface="Courier New" panose="02070309020205020404" pitchFamily="49" charset="0"/>
-                <a:ea typeface="Calibri" panose="020F0502020204030204" pitchFamily="34" charset="0"/>
-                <a:cs typeface="Times New Roman" panose="02020603050405020304" pitchFamily="18" charset="0"/>
-              </a:rPr>
-              <a:t>(" Power BI ")	</a:t>
-            </a:r>
-            <a:r>
-              <a:rPr lang="en-IN" sz="1600" dirty="0" smtClean="0">
-                <a:latin typeface="Courier New" panose="02070309020205020404" pitchFamily="49" charset="0"/>
-                <a:ea typeface="Calibri" panose="020F0502020204030204" pitchFamily="34" charset="0"/>
-                <a:cs typeface="Times New Roman" panose="02020603050405020304" pitchFamily="18" charset="0"/>
-              </a:rPr>
-              <a:t>			Power </a:t>
-            </a:r>
-            <a:r>
-              <a:rPr lang="en-IN" sz="1600" dirty="0">
-                <a:latin typeface="Courier New" panose="02070309020205020404" pitchFamily="49" charset="0"/>
-                <a:ea typeface="Calibri" panose="020F0502020204030204" pitchFamily="34" charset="0"/>
-                <a:cs typeface="Times New Roman" panose="02020603050405020304" pitchFamily="18" charset="0"/>
-              </a:rPr>
-              <a:t>BI</a:t>
-            </a:r>
-            <a:endParaRPr lang="en-IN" sz="1600" dirty="0">
-              <a:latin typeface="Calibri" panose="020F0502020204030204" pitchFamily="34" charset="0"/>
-              <a:ea typeface="Calibri" panose="020F0502020204030204" pitchFamily="34" charset="0"/>
-              <a:cs typeface="Times New Roman" panose="02020603050405020304" pitchFamily="18" charset="0"/>
-            </a:endParaRPr>
+                <a:cs typeface="Courier New" panose="02070309020205020404" pitchFamily="49" charset="0"/>
+              </a:rPr>
+              <a:t>  = TRUE() </a:t>
+            </a:r>
           </a:p>
           <a:p>
             <a:pPr>
@@ -17348,50 +18899,10 @@
                 <a:spcPct val="107000"/>
               </a:lnSpc>
             </a:pPr>
-            <a:r>
-              <a:rPr lang="en-IN" sz="1600" dirty="0">
-                <a:latin typeface="Courier New" panose="02070309020205020404" pitchFamily="49" charset="0"/>
-                <a:ea typeface="Calibri" panose="020F0502020204030204" pitchFamily="34" charset="0"/>
-                <a:cs typeface="Times New Roman" panose="02020603050405020304" pitchFamily="18" charset="0"/>
-              </a:rPr>
-              <a:t>SUBSTITUTE()	</a:t>
-            </a:r>
-            <a:r>
-              <a:rPr lang="en-IN" sz="1600" dirty="0" smtClean="0">
-                <a:latin typeface="Courier New" panose="02070309020205020404" pitchFamily="49" charset="0"/>
-                <a:ea typeface="Calibri" panose="020F0502020204030204" pitchFamily="34" charset="0"/>
-                <a:cs typeface="Times New Roman" panose="02020603050405020304" pitchFamily="18" charset="0"/>
-              </a:rPr>
-              <a:t>	SUBSTITUTE</a:t>
-            </a:r>
-            <a:r>
-              <a:rPr lang="en-IN" sz="1600" dirty="0">
-                <a:latin typeface="Courier New" panose="02070309020205020404" pitchFamily="49" charset="0"/>
-                <a:ea typeface="Calibri" panose="020F0502020204030204" pitchFamily="34" charset="0"/>
-                <a:cs typeface="Times New Roman" panose="02020603050405020304" pitchFamily="18" charset="0"/>
-              </a:rPr>
-              <a:t>("Power BI", "BI", "Query")	</a:t>
-            </a:r>
-            <a:r>
-              <a:rPr lang="en-IN" sz="1600" dirty="0" smtClean="0">
-                <a:latin typeface="Courier New" panose="02070309020205020404" pitchFamily="49" charset="0"/>
-                <a:ea typeface="Calibri" panose="020F0502020204030204" pitchFamily="34" charset="0"/>
-                <a:cs typeface="Times New Roman" panose="02020603050405020304" pitchFamily="18" charset="0"/>
-              </a:rPr>
-              <a:t>	Power </a:t>
-            </a:r>
-            <a:r>
-              <a:rPr lang="en-IN" sz="1600" dirty="0">
-                <a:latin typeface="Courier New" panose="02070309020205020404" pitchFamily="49" charset="0"/>
-                <a:ea typeface="Calibri" panose="020F0502020204030204" pitchFamily="34" charset="0"/>
-                <a:cs typeface="Times New Roman" panose="02020603050405020304" pitchFamily="18" charset="0"/>
-              </a:rPr>
-              <a:t>Query</a:t>
-            </a:r>
-            <a:endParaRPr lang="en-IN" sz="1600" dirty="0">
-              <a:latin typeface="Calibri" panose="020F0502020204030204" pitchFamily="34" charset="0"/>
+            <a:endParaRPr lang="en-US" dirty="0">
+              <a:latin typeface="Courier New" panose="02070309020205020404" pitchFamily="49" charset="0"/>
               <a:ea typeface="Calibri" panose="020F0502020204030204" pitchFamily="34" charset="0"/>
-              <a:cs typeface="Times New Roman" panose="02020603050405020304" pitchFamily="18" charset="0"/>
+              <a:cs typeface="Courier New" panose="02070309020205020404" pitchFamily="49" charset="0"/>
             </a:endParaRPr>
           </a:p>
           <a:p>
@@ -17400,153 +18911,10 @@
                 <a:spcPct val="107000"/>
               </a:lnSpc>
             </a:pPr>
-            <a:endParaRPr lang="en-US" sz="1600" dirty="0" smtClean="0">
+            <a:endParaRPr lang="en-US" dirty="0">
               <a:latin typeface="Courier New" panose="02070309020205020404" pitchFamily="49" charset="0"/>
               <a:ea typeface="Calibri" panose="020F0502020204030204" pitchFamily="34" charset="0"/>
-              <a:cs typeface="Times New Roman" panose="02020603050405020304" pitchFamily="18" charset="0"/>
-            </a:endParaRPr>
-          </a:p>
-          <a:p>
-            <a:pPr>
-              <a:lnSpc>
-                <a:spcPct val="107000"/>
-              </a:lnSpc>
-            </a:pPr>
-            <a:r>
-              <a:rPr lang="en-IN" sz="1600" dirty="0">
-                <a:latin typeface="Courier New" panose="02070309020205020404" pitchFamily="49" charset="0"/>
-                <a:ea typeface="Calibri" panose="020F0502020204030204" pitchFamily="34" charset="0"/>
-                <a:cs typeface="Times New Roman" panose="02020603050405020304" pitchFamily="18" charset="0"/>
-              </a:rPr>
-              <a:t>CONTAINSSTRING()	CONTAINSSTRING("Power BI", "BI")		TRUE</a:t>
-            </a:r>
-          </a:p>
-          <a:p>
-            <a:pPr>
-              <a:lnSpc>
-                <a:spcPct val="107000"/>
-              </a:lnSpc>
-            </a:pPr>
-            <a:r>
-              <a:rPr lang="en-IN" sz="1600" dirty="0" smtClean="0">
-                <a:latin typeface="Courier New" panose="02070309020205020404" pitchFamily="49" charset="0"/>
-                <a:ea typeface="Calibri" panose="020F0502020204030204" pitchFamily="34" charset="0"/>
-                <a:cs typeface="Times New Roman" panose="02020603050405020304" pitchFamily="18" charset="0"/>
-              </a:rPr>
-              <a:t>SEARCH</a:t>
-            </a:r>
-            <a:r>
-              <a:rPr lang="en-IN" sz="1600" dirty="0">
-                <a:latin typeface="Courier New" panose="02070309020205020404" pitchFamily="49" charset="0"/>
-                <a:ea typeface="Calibri" panose="020F0502020204030204" pitchFamily="34" charset="0"/>
-                <a:cs typeface="Times New Roman" panose="02020603050405020304" pitchFamily="18" charset="0"/>
-              </a:rPr>
-              <a:t>()	</a:t>
-            </a:r>
-            <a:r>
-              <a:rPr lang="en-IN" sz="1600" dirty="0" smtClean="0">
-                <a:latin typeface="Courier New" panose="02070309020205020404" pitchFamily="49" charset="0"/>
-                <a:ea typeface="Calibri" panose="020F0502020204030204" pitchFamily="34" charset="0"/>
-                <a:cs typeface="Times New Roman" panose="02020603050405020304" pitchFamily="18" charset="0"/>
-              </a:rPr>
-              <a:t>	SEARCH</a:t>
-            </a:r>
-            <a:r>
-              <a:rPr lang="en-IN" sz="1600" dirty="0">
-                <a:latin typeface="Courier New" panose="02070309020205020404" pitchFamily="49" charset="0"/>
-                <a:ea typeface="Calibri" panose="020F0502020204030204" pitchFamily="34" charset="0"/>
-                <a:cs typeface="Times New Roman" panose="02020603050405020304" pitchFamily="18" charset="0"/>
-              </a:rPr>
-              <a:t>("BI", "Power BI")	</a:t>
-            </a:r>
-            <a:r>
-              <a:rPr lang="en-IN" sz="1600" dirty="0" smtClean="0">
-                <a:latin typeface="Courier New" panose="02070309020205020404" pitchFamily="49" charset="0"/>
-                <a:ea typeface="Calibri" panose="020F0502020204030204" pitchFamily="34" charset="0"/>
-                <a:cs typeface="Times New Roman" panose="02020603050405020304" pitchFamily="18" charset="0"/>
-              </a:rPr>
-              <a:t>		7</a:t>
-            </a:r>
-            <a:endParaRPr lang="en-IN" sz="1600" dirty="0">
-              <a:latin typeface="Calibri" panose="020F0502020204030204" pitchFamily="34" charset="0"/>
-              <a:ea typeface="Calibri" panose="020F0502020204030204" pitchFamily="34" charset="0"/>
-              <a:cs typeface="Times New Roman" panose="02020603050405020304" pitchFamily="18" charset="0"/>
-            </a:endParaRPr>
-          </a:p>
-          <a:p>
-            <a:pPr>
-              <a:lnSpc>
-                <a:spcPct val="107000"/>
-              </a:lnSpc>
-            </a:pPr>
-            <a:endParaRPr lang="en-IN" sz="1600" dirty="0" smtClean="0">
-              <a:latin typeface="Courier New" panose="02070309020205020404" pitchFamily="49" charset="0"/>
-              <a:ea typeface="Calibri" panose="020F0502020204030204" pitchFamily="34" charset="0"/>
-              <a:cs typeface="Times New Roman" panose="02020603050405020304" pitchFamily="18" charset="0"/>
-            </a:endParaRPr>
-          </a:p>
-          <a:p>
-            <a:pPr>
-              <a:lnSpc>
-                <a:spcPct val="107000"/>
-              </a:lnSpc>
-            </a:pPr>
-            <a:endParaRPr lang="en-IN" sz="1600" dirty="0" smtClean="0">
-              <a:latin typeface="Courier New" panose="02070309020205020404" pitchFamily="49" charset="0"/>
-              <a:ea typeface="Calibri" panose="020F0502020204030204" pitchFamily="34" charset="0"/>
-              <a:cs typeface="Times New Roman" panose="02020603050405020304" pitchFamily="18" charset="0"/>
-            </a:endParaRPr>
-          </a:p>
-          <a:p>
-            <a:pPr>
-              <a:lnSpc>
-                <a:spcPct val="107000"/>
-              </a:lnSpc>
-            </a:pPr>
-            <a:r>
-              <a:rPr lang="en-IN" sz="1600" dirty="0" smtClean="0">
-                <a:latin typeface="Courier New" panose="02070309020205020404" pitchFamily="49" charset="0"/>
-                <a:ea typeface="Calibri" panose="020F0502020204030204" pitchFamily="34" charset="0"/>
-                <a:cs typeface="Times New Roman" panose="02020603050405020304" pitchFamily="18" charset="0"/>
-              </a:rPr>
-              <a:t>CONCATENATE</a:t>
-            </a:r>
-            <a:r>
-              <a:rPr lang="en-IN" sz="1600" dirty="0">
-                <a:latin typeface="Courier New" panose="02070309020205020404" pitchFamily="49" charset="0"/>
-                <a:ea typeface="Calibri" panose="020F0502020204030204" pitchFamily="34" charset="0"/>
-                <a:cs typeface="Times New Roman" panose="02020603050405020304" pitchFamily="18" charset="0"/>
-              </a:rPr>
-              <a:t>()	</a:t>
-            </a:r>
-            <a:r>
-              <a:rPr lang="en-IN" sz="1600" dirty="0" smtClean="0">
-                <a:latin typeface="Courier New" panose="02070309020205020404" pitchFamily="49" charset="0"/>
-                <a:ea typeface="Calibri" panose="020F0502020204030204" pitchFamily="34" charset="0"/>
-                <a:cs typeface="Times New Roman" panose="02020603050405020304" pitchFamily="18" charset="0"/>
-              </a:rPr>
-              <a:t>	CONCATENATE</a:t>
-            </a:r>
-            <a:r>
-              <a:rPr lang="en-IN" sz="1600" dirty="0">
-                <a:latin typeface="Courier New" panose="02070309020205020404" pitchFamily="49" charset="0"/>
-                <a:ea typeface="Calibri" panose="020F0502020204030204" pitchFamily="34" charset="0"/>
-                <a:cs typeface="Times New Roman" panose="02020603050405020304" pitchFamily="18" charset="0"/>
-              </a:rPr>
-              <a:t>("Hello", " ", "World")	</a:t>
-            </a:r>
-            <a:r>
-              <a:rPr lang="en-IN" sz="1600" dirty="0" smtClean="0">
-                <a:latin typeface="Courier New" panose="02070309020205020404" pitchFamily="49" charset="0"/>
-                <a:ea typeface="Calibri" panose="020F0502020204030204" pitchFamily="34" charset="0"/>
-                <a:cs typeface="Times New Roman" panose="02020603050405020304" pitchFamily="18" charset="0"/>
-              </a:rPr>
-              <a:t>	Hello World</a:t>
-            </a:r>
-            <a:endParaRPr lang="en-IN" sz="1600" dirty="0">
-              <a:latin typeface="Calibri" panose="020F0502020204030204" pitchFamily="34" charset="0"/>
-              <a:ea typeface="Calibri" panose="020F0502020204030204" pitchFamily="34" charset="0"/>
-              <a:cs typeface="Times New Roman" panose="02020603050405020304" pitchFamily="18" charset="0"/>
+              <a:cs typeface="Courier New" panose="02070309020205020404" pitchFamily="49" charset="0"/>
             </a:endParaRPr>
           </a:p>
         </p:txBody>
@@ -17554,7 +18922,7 @@
     </p:spTree>
     <p:extLst>
       <p:ext uri="{BB962C8B-B14F-4D97-AF65-F5344CB8AC3E}">
-        <p14:creationId xmlns:p14="http://schemas.microsoft.com/office/powerpoint/2010/main" val="1925480359"/>
+        <p14:creationId xmlns:p14="http://schemas.microsoft.com/office/powerpoint/2010/main" val="3559477975"/>
       </p:ext>
     </p:extLst>
   </p:cSld>
@@ -17590,162 +18958,894 @@
       </p:grpSpPr>
       <p:sp>
         <p:nvSpPr>
-          <p:cNvPr id="3" name="Rectangle 2"/>
+          <p:cNvPr id="6" name="Rectangle 5"/>
           <p:cNvSpPr/>
           <p:nvPr/>
         </p:nvSpPr>
         <p:spPr>
           <a:xfrm>
-            <a:off x="344129" y="411796"/>
-            <a:ext cx="6096000" cy="646331"/>
+            <a:off x="313319" y="441086"/>
+            <a:ext cx="10956234" cy="5901616"/>
           </a:xfrm>
           <a:prstGeom prst="rect">
             <a:avLst/>
           </a:prstGeom>
         </p:spPr>
         <p:txBody>
-          <a:bodyPr>
+          <a:bodyPr wrap="square">
             <a:spAutoFit/>
           </a:bodyPr>
           <a:lstStyle/>
           <a:p>
-            <a:pPr lvl="0" eaLnBrk="0" fontAlgn="base" hangingPunct="0">
-              <a:spcBef>
-                <a:spcPct val="0"/>
-              </a:spcBef>
-              <a:spcAft>
-                <a:spcPct val="0"/>
-              </a:spcAft>
+            <a:pPr>
+              <a:lnSpc>
+                <a:spcPct val="107000"/>
+              </a:lnSpc>
             </a:pPr>
             <a:r>
-              <a:rPr lang="en-US" altLang="en-US" b="1" dirty="0">
-                <a:solidFill>
-                  <a:schemeClr val="accent1">
-                    <a:lumMod val="60000"/>
-                    <a:lumOff val="40000"/>
-                  </a:schemeClr>
-                </a:solidFill>
-                <a:latin typeface="Candara" panose="020E0502030303020204" pitchFamily="34" charset="0"/>
-              </a:rPr>
-              <a:t>Filter </a:t>
-            </a:r>
-            <a:r>
-              <a:rPr lang="en-US" altLang="en-US" b="1" dirty="0" smtClean="0">
-                <a:solidFill>
-                  <a:schemeClr val="accent1">
-                    <a:lumMod val="60000"/>
-                    <a:lumOff val="40000"/>
-                  </a:schemeClr>
-                </a:solidFill>
-                <a:latin typeface="Candara" panose="020E0502030303020204" pitchFamily="34" charset="0"/>
-              </a:rPr>
-              <a:t>&amp; Calculate functions</a:t>
-            </a:r>
-            <a:endParaRPr lang="en-US" altLang="en-US" dirty="0">
-              <a:solidFill>
-                <a:schemeClr val="accent1">
-                  <a:lumMod val="60000"/>
-                  <a:lumOff val="40000"/>
-                </a:schemeClr>
-              </a:solidFill>
-              <a:latin typeface="Candara" panose="020E0502030303020204" pitchFamily="34" charset="0"/>
+              <a:rPr lang="en-IN" sz="1400" dirty="0">
+                <a:latin typeface="Courier New" panose="02070309020205020404" pitchFamily="49" charset="0"/>
+                <a:ea typeface="Calibri" panose="020F0502020204030204" pitchFamily="34" charset="0"/>
+                <a:cs typeface="Courier New" panose="02070309020205020404" pitchFamily="49" charset="0"/>
+              </a:rPr>
+              <a:t>Function	</a:t>
+            </a:r>
+            <a:r>
+              <a:rPr lang="en-IN" sz="1400" dirty="0" smtClean="0">
+                <a:latin typeface="Courier New" panose="02070309020205020404" pitchFamily="49" charset="0"/>
+                <a:ea typeface="Calibri" panose="020F0502020204030204" pitchFamily="34" charset="0"/>
+                <a:cs typeface="Courier New" panose="02070309020205020404" pitchFamily="49" charset="0"/>
+              </a:rPr>
+              <a:t>	Example</a:t>
+            </a:r>
+            <a:r>
+              <a:rPr lang="en-IN" sz="1400" dirty="0">
+                <a:latin typeface="Courier New" panose="02070309020205020404" pitchFamily="49" charset="0"/>
+                <a:ea typeface="Calibri" panose="020F0502020204030204" pitchFamily="34" charset="0"/>
+                <a:cs typeface="Courier New" panose="02070309020205020404" pitchFamily="49" charset="0"/>
+              </a:rPr>
+              <a:t>	</a:t>
+            </a:r>
+            <a:r>
+              <a:rPr lang="en-IN" sz="1400" dirty="0" smtClean="0">
+                <a:latin typeface="Courier New" panose="02070309020205020404" pitchFamily="49" charset="0"/>
+                <a:ea typeface="Calibri" panose="020F0502020204030204" pitchFamily="34" charset="0"/>
+                <a:cs typeface="Courier New" panose="02070309020205020404" pitchFamily="49" charset="0"/>
+              </a:rPr>
+              <a:t>Result</a:t>
+            </a:r>
+          </a:p>
+          <a:p>
+            <a:pPr>
+              <a:lnSpc>
+                <a:spcPct val="107000"/>
+              </a:lnSpc>
+            </a:pPr>
+            <a:r>
+              <a:rPr lang="en-US" sz="1400" dirty="0" smtClean="0">
+                <a:latin typeface="Courier New" panose="02070309020205020404" pitchFamily="49" charset="0"/>
+                <a:ea typeface="Calibri" panose="020F0502020204030204" pitchFamily="34" charset="0"/>
+                <a:cs typeface="Courier New" panose="02070309020205020404" pitchFamily="49" charset="0"/>
+              </a:rPr>
+              <a:t>TO Extract Some Value</a:t>
+            </a:r>
+            <a:endParaRPr lang="en-IN" sz="1400" dirty="0">
+              <a:latin typeface="Courier New" panose="02070309020205020404" pitchFamily="49" charset="0"/>
+              <a:ea typeface="Calibri" panose="020F0502020204030204" pitchFamily="34" charset="0"/>
+              <a:cs typeface="Courier New" panose="02070309020205020404" pitchFamily="49" charset="0"/>
             </a:endParaRPr>
           </a:p>
           <a:p>
-            <a:pPr lvl="1" eaLnBrk="0" fontAlgn="base" hangingPunct="0">
-              <a:spcBef>
-                <a:spcPct val="0"/>
-              </a:spcBef>
-              <a:spcAft>
-                <a:spcPct val="0"/>
-              </a:spcAft>
+            <a:pPr lvl="1">
+              <a:lnSpc>
+                <a:spcPct val="107000"/>
+              </a:lnSpc>
             </a:pPr>
             <a:r>
-              <a:rPr lang="en-US" altLang="en-US" dirty="0">
-                <a:solidFill>
-                  <a:schemeClr val="accent1">
-                    <a:lumMod val="60000"/>
-                    <a:lumOff val="40000"/>
-                  </a:schemeClr>
-                </a:solidFill>
-                <a:latin typeface="Candara" panose="020E0502030303020204" pitchFamily="34" charset="0"/>
-              </a:rPr>
-              <a:t>Filter functions manipulate table and filter contexts.</a:t>
-            </a:r>
-          </a:p>
-        </p:txBody>
-      </p:sp>
-      <p:sp>
-        <p:nvSpPr>
-          <p:cNvPr id="7" name="Rectangle 6"/>
-          <p:cNvSpPr/>
-          <p:nvPr/>
-        </p:nvSpPr>
-        <p:spPr>
-          <a:xfrm>
-            <a:off x="1041918" y="1531881"/>
-            <a:ext cx="6096000" cy="1200329"/>
-          </a:xfrm>
-          <a:prstGeom prst="rect">
-            <a:avLst/>
-          </a:prstGeom>
-        </p:spPr>
-        <p:txBody>
-          <a:bodyPr>
-            <a:spAutoFit/>
-          </a:bodyPr>
-          <a:lstStyle/>
-          <a:p>
-            <a:r>
-              <a:rPr lang="en-IN" dirty="0">
-                <a:latin typeface="Courier New" panose="02070309020205020404" pitchFamily="49" charset="0"/>
-                <a:cs typeface="Courier New" panose="02070309020205020404" pitchFamily="49" charset="0"/>
-              </a:rPr>
-              <a:t>CALCULATE()</a:t>
-            </a:r>
-          </a:p>
-          <a:p>
-            <a:r>
-              <a:rPr lang="en-IN" dirty="0">
-                <a:latin typeface="Courier New" panose="02070309020205020404" pitchFamily="49" charset="0"/>
-                <a:cs typeface="Courier New" panose="02070309020205020404" pitchFamily="49" charset="0"/>
-              </a:rPr>
-              <a:t>FILTER()</a:t>
-            </a:r>
-          </a:p>
-          <a:p>
-            <a:r>
-              <a:rPr lang="en-IN" dirty="0">
-                <a:latin typeface="Courier New" panose="02070309020205020404" pitchFamily="49" charset="0"/>
-                <a:cs typeface="Courier New" panose="02070309020205020404" pitchFamily="49" charset="0"/>
-              </a:rPr>
-              <a:t>KEEPFILTERS()</a:t>
-            </a:r>
-          </a:p>
-          <a:p>
-            <a:r>
-              <a:rPr lang="en-IN" dirty="0">
-                <a:latin typeface="Courier New" panose="02070309020205020404" pitchFamily="49" charset="0"/>
-                <a:cs typeface="Courier New" panose="02070309020205020404" pitchFamily="49" charset="0"/>
-              </a:rPr>
-              <a:t>REMOVEFILTERS()</a:t>
-            </a:r>
+              <a:rPr lang="en-IN" sz="1400" dirty="0" smtClean="0">
+                <a:latin typeface="Courier New" panose="02070309020205020404" pitchFamily="49" charset="0"/>
+                <a:ea typeface="Calibri" panose="020F0502020204030204" pitchFamily="34" charset="0"/>
+                <a:cs typeface="Courier New" panose="02070309020205020404" pitchFamily="49" charset="0"/>
+              </a:rPr>
+              <a:t>LEFT</a:t>
+            </a:r>
+            <a:r>
+              <a:rPr lang="en-IN" sz="1400" dirty="0">
+                <a:latin typeface="Courier New" panose="02070309020205020404" pitchFamily="49" charset="0"/>
+                <a:ea typeface="Calibri" panose="020F0502020204030204" pitchFamily="34" charset="0"/>
+                <a:cs typeface="Courier New" panose="02070309020205020404" pitchFamily="49" charset="0"/>
+              </a:rPr>
+              <a:t>()	</a:t>
+            </a:r>
+            <a:r>
+              <a:rPr lang="en-IN" sz="1400" dirty="0" smtClean="0">
+                <a:latin typeface="Courier New" panose="02070309020205020404" pitchFamily="49" charset="0"/>
+                <a:ea typeface="Calibri" panose="020F0502020204030204" pitchFamily="34" charset="0"/>
+                <a:cs typeface="Courier New" panose="02070309020205020404" pitchFamily="49" charset="0"/>
+              </a:rPr>
+              <a:t>		LEFT</a:t>
+            </a:r>
+            <a:r>
+              <a:rPr lang="en-IN" sz="1400" dirty="0">
+                <a:latin typeface="Courier New" panose="02070309020205020404" pitchFamily="49" charset="0"/>
+                <a:ea typeface="Calibri" panose="020F0502020204030204" pitchFamily="34" charset="0"/>
+                <a:cs typeface="Courier New" panose="02070309020205020404" pitchFamily="49" charset="0"/>
+              </a:rPr>
+              <a:t>("</a:t>
+            </a:r>
+            <a:r>
+              <a:rPr lang="en-IN" sz="1400" dirty="0" err="1">
+                <a:latin typeface="Courier New" panose="02070309020205020404" pitchFamily="49" charset="0"/>
+                <a:ea typeface="Calibri" panose="020F0502020204030204" pitchFamily="34" charset="0"/>
+                <a:cs typeface="Courier New" panose="02070309020205020404" pitchFamily="49" charset="0"/>
+              </a:rPr>
+              <a:t>PowerBI</a:t>
+            </a:r>
+            <a:r>
+              <a:rPr lang="en-IN" sz="1400" dirty="0">
+                <a:latin typeface="Courier New" panose="02070309020205020404" pitchFamily="49" charset="0"/>
+                <a:ea typeface="Calibri" panose="020F0502020204030204" pitchFamily="34" charset="0"/>
+                <a:cs typeface="Courier New" panose="02070309020205020404" pitchFamily="49" charset="0"/>
+              </a:rPr>
+              <a:t>", 5)	</a:t>
+            </a:r>
+            <a:r>
+              <a:rPr lang="en-IN" sz="1400" dirty="0" smtClean="0">
+                <a:latin typeface="Courier New" panose="02070309020205020404" pitchFamily="49" charset="0"/>
+                <a:ea typeface="Calibri" panose="020F0502020204030204" pitchFamily="34" charset="0"/>
+                <a:cs typeface="Courier New" panose="02070309020205020404" pitchFamily="49" charset="0"/>
+              </a:rPr>
+              <a:t>			Power</a:t>
+            </a:r>
+            <a:endParaRPr lang="en-IN" sz="1400" dirty="0">
+              <a:latin typeface="Courier New" panose="02070309020205020404" pitchFamily="49" charset="0"/>
+              <a:ea typeface="Calibri" panose="020F0502020204030204" pitchFamily="34" charset="0"/>
+              <a:cs typeface="Courier New" panose="02070309020205020404" pitchFamily="49" charset="0"/>
+            </a:endParaRPr>
+          </a:p>
+          <a:p>
+            <a:pPr lvl="1">
+              <a:lnSpc>
+                <a:spcPct val="107000"/>
+              </a:lnSpc>
+            </a:pPr>
+            <a:r>
+              <a:rPr lang="en-IN" sz="1400" dirty="0">
+                <a:latin typeface="Courier New" panose="02070309020205020404" pitchFamily="49" charset="0"/>
+                <a:ea typeface="Calibri" panose="020F0502020204030204" pitchFamily="34" charset="0"/>
+                <a:cs typeface="Courier New" panose="02070309020205020404" pitchFamily="49" charset="0"/>
+              </a:rPr>
+              <a:t>RIGHT()	</a:t>
+            </a:r>
+            <a:r>
+              <a:rPr lang="en-IN" sz="1400" dirty="0" smtClean="0">
+                <a:latin typeface="Courier New" panose="02070309020205020404" pitchFamily="49" charset="0"/>
+                <a:ea typeface="Calibri" panose="020F0502020204030204" pitchFamily="34" charset="0"/>
+                <a:cs typeface="Courier New" panose="02070309020205020404" pitchFamily="49" charset="0"/>
+              </a:rPr>
+              <a:t>		RIGHT</a:t>
+            </a:r>
+            <a:r>
+              <a:rPr lang="en-IN" sz="1400" dirty="0">
+                <a:latin typeface="Courier New" panose="02070309020205020404" pitchFamily="49" charset="0"/>
+                <a:ea typeface="Calibri" panose="020F0502020204030204" pitchFamily="34" charset="0"/>
+                <a:cs typeface="Courier New" panose="02070309020205020404" pitchFamily="49" charset="0"/>
+              </a:rPr>
+              <a:t>("</a:t>
+            </a:r>
+            <a:r>
+              <a:rPr lang="en-IN" sz="1400" dirty="0" err="1">
+                <a:latin typeface="Courier New" panose="02070309020205020404" pitchFamily="49" charset="0"/>
+                <a:ea typeface="Calibri" panose="020F0502020204030204" pitchFamily="34" charset="0"/>
+                <a:cs typeface="Courier New" panose="02070309020205020404" pitchFamily="49" charset="0"/>
+              </a:rPr>
+              <a:t>PowerBI</a:t>
+            </a:r>
+            <a:r>
+              <a:rPr lang="en-IN" sz="1400" dirty="0">
+                <a:latin typeface="Courier New" panose="02070309020205020404" pitchFamily="49" charset="0"/>
+                <a:ea typeface="Calibri" panose="020F0502020204030204" pitchFamily="34" charset="0"/>
+                <a:cs typeface="Courier New" panose="02070309020205020404" pitchFamily="49" charset="0"/>
+              </a:rPr>
+              <a:t>", 2)	</a:t>
+            </a:r>
+            <a:r>
+              <a:rPr lang="en-IN" sz="1400" dirty="0" smtClean="0">
+                <a:latin typeface="Courier New" panose="02070309020205020404" pitchFamily="49" charset="0"/>
+                <a:ea typeface="Calibri" panose="020F0502020204030204" pitchFamily="34" charset="0"/>
+                <a:cs typeface="Courier New" panose="02070309020205020404" pitchFamily="49" charset="0"/>
+              </a:rPr>
+              <a:t>			BI</a:t>
+            </a:r>
+            <a:endParaRPr lang="en-IN" sz="1400" dirty="0">
+              <a:latin typeface="Courier New" panose="02070309020205020404" pitchFamily="49" charset="0"/>
+              <a:ea typeface="Calibri" panose="020F0502020204030204" pitchFamily="34" charset="0"/>
+              <a:cs typeface="Courier New" panose="02070309020205020404" pitchFamily="49" charset="0"/>
+            </a:endParaRPr>
+          </a:p>
+          <a:p>
+            <a:pPr lvl="1">
+              <a:lnSpc>
+                <a:spcPct val="107000"/>
+              </a:lnSpc>
+            </a:pPr>
+            <a:r>
+              <a:rPr lang="en-IN" sz="1400" dirty="0">
+                <a:latin typeface="Courier New" panose="02070309020205020404" pitchFamily="49" charset="0"/>
+                <a:ea typeface="Calibri" panose="020F0502020204030204" pitchFamily="34" charset="0"/>
+                <a:cs typeface="Courier New" panose="02070309020205020404" pitchFamily="49" charset="0"/>
+              </a:rPr>
+              <a:t>MID()	</a:t>
+            </a:r>
+            <a:r>
+              <a:rPr lang="en-IN" sz="1400" dirty="0" smtClean="0">
+                <a:latin typeface="Courier New" panose="02070309020205020404" pitchFamily="49" charset="0"/>
+                <a:ea typeface="Calibri" panose="020F0502020204030204" pitchFamily="34" charset="0"/>
+                <a:cs typeface="Courier New" panose="02070309020205020404" pitchFamily="49" charset="0"/>
+              </a:rPr>
+              <a:t>		MID</a:t>
+            </a:r>
+            <a:r>
+              <a:rPr lang="en-IN" sz="1400" dirty="0">
+                <a:latin typeface="Courier New" panose="02070309020205020404" pitchFamily="49" charset="0"/>
+                <a:ea typeface="Calibri" panose="020F0502020204030204" pitchFamily="34" charset="0"/>
+                <a:cs typeface="Courier New" panose="02070309020205020404" pitchFamily="49" charset="0"/>
+              </a:rPr>
+              <a:t>("</a:t>
+            </a:r>
+            <a:r>
+              <a:rPr lang="en-IN" sz="1400" dirty="0" err="1">
+                <a:latin typeface="Courier New" panose="02070309020205020404" pitchFamily="49" charset="0"/>
+                <a:ea typeface="Calibri" panose="020F0502020204030204" pitchFamily="34" charset="0"/>
+                <a:cs typeface="Courier New" panose="02070309020205020404" pitchFamily="49" charset="0"/>
+              </a:rPr>
+              <a:t>PowerBI</a:t>
+            </a:r>
+            <a:r>
+              <a:rPr lang="en-IN" sz="1400" dirty="0">
+                <a:latin typeface="Courier New" panose="02070309020205020404" pitchFamily="49" charset="0"/>
+                <a:ea typeface="Calibri" panose="020F0502020204030204" pitchFamily="34" charset="0"/>
+                <a:cs typeface="Courier New" panose="02070309020205020404" pitchFamily="49" charset="0"/>
+              </a:rPr>
+              <a:t>", 2, 3)	</a:t>
+            </a:r>
+            <a:r>
+              <a:rPr lang="en-IN" sz="1400" dirty="0" smtClean="0">
+                <a:latin typeface="Courier New" panose="02070309020205020404" pitchFamily="49" charset="0"/>
+                <a:ea typeface="Calibri" panose="020F0502020204030204" pitchFamily="34" charset="0"/>
+                <a:cs typeface="Courier New" panose="02070309020205020404" pitchFamily="49" charset="0"/>
+              </a:rPr>
+              <a:t>			owe</a:t>
+            </a:r>
+            <a:endParaRPr lang="en-IN" sz="1400" dirty="0">
+              <a:latin typeface="Courier New" panose="02070309020205020404" pitchFamily="49" charset="0"/>
+              <a:ea typeface="Calibri" panose="020F0502020204030204" pitchFamily="34" charset="0"/>
+              <a:cs typeface="Courier New" panose="02070309020205020404" pitchFamily="49" charset="0"/>
+            </a:endParaRPr>
+          </a:p>
+          <a:p>
+            <a:pPr>
+              <a:lnSpc>
+                <a:spcPct val="107000"/>
+              </a:lnSpc>
+            </a:pPr>
+            <a:endParaRPr lang="en-IN" sz="1400" dirty="0" smtClean="0">
+              <a:latin typeface="Courier New" panose="02070309020205020404" pitchFamily="49" charset="0"/>
+              <a:ea typeface="Calibri" panose="020F0502020204030204" pitchFamily="34" charset="0"/>
+              <a:cs typeface="Courier New" panose="02070309020205020404" pitchFamily="49" charset="0"/>
+            </a:endParaRPr>
+          </a:p>
+          <a:p>
+            <a:pPr>
+              <a:lnSpc>
+                <a:spcPct val="107000"/>
+              </a:lnSpc>
+            </a:pPr>
+            <a:r>
+              <a:rPr lang="en-US" sz="1400" dirty="0" smtClean="0">
+                <a:latin typeface="Courier New" panose="02070309020205020404" pitchFamily="49" charset="0"/>
+                <a:ea typeface="Calibri" panose="020F0502020204030204" pitchFamily="34" charset="0"/>
+                <a:cs typeface="Courier New" panose="02070309020205020404" pitchFamily="49" charset="0"/>
+              </a:rPr>
+              <a:t>To Know length</a:t>
+            </a:r>
+            <a:endParaRPr lang="en-IN" sz="1400" dirty="0" smtClean="0">
+              <a:latin typeface="Courier New" panose="02070309020205020404" pitchFamily="49" charset="0"/>
+              <a:ea typeface="Calibri" panose="020F0502020204030204" pitchFamily="34" charset="0"/>
+              <a:cs typeface="Courier New" panose="02070309020205020404" pitchFamily="49" charset="0"/>
+            </a:endParaRPr>
+          </a:p>
+          <a:p>
+            <a:pPr lvl="1">
+              <a:lnSpc>
+                <a:spcPct val="107000"/>
+              </a:lnSpc>
+            </a:pPr>
+            <a:r>
+              <a:rPr lang="en-IN" sz="1400" dirty="0" smtClean="0">
+                <a:latin typeface="Courier New" panose="02070309020205020404" pitchFamily="49" charset="0"/>
+                <a:ea typeface="Calibri" panose="020F0502020204030204" pitchFamily="34" charset="0"/>
+                <a:cs typeface="Courier New" panose="02070309020205020404" pitchFamily="49" charset="0"/>
+              </a:rPr>
+              <a:t>LEN</a:t>
+            </a:r>
+            <a:r>
+              <a:rPr lang="en-IN" sz="1400" dirty="0">
+                <a:latin typeface="Courier New" panose="02070309020205020404" pitchFamily="49" charset="0"/>
+                <a:ea typeface="Calibri" panose="020F0502020204030204" pitchFamily="34" charset="0"/>
+                <a:cs typeface="Courier New" panose="02070309020205020404" pitchFamily="49" charset="0"/>
+              </a:rPr>
+              <a:t>()	</a:t>
+            </a:r>
+            <a:r>
+              <a:rPr lang="en-IN" sz="1400" dirty="0" smtClean="0">
+                <a:latin typeface="Courier New" panose="02070309020205020404" pitchFamily="49" charset="0"/>
+                <a:ea typeface="Calibri" panose="020F0502020204030204" pitchFamily="34" charset="0"/>
+                <a:cs typeface="Courier New" panose="02070309020205020404" pitchFamily="49" charset="0"/>
+              </a:rPr>
+              <a:t>		LEN</a:t>
+            </a:r>
+            <a:r>
+              <a:rPr lang="en-IN" sz="1400" dirty="0">
+                <a:latin typeface="Courier New" panose="02070309020205020404" pitchFamily="49" charset="0"/>
+                <a:ea typeface="Calibri" panose="020F0502020204030204" pitchFamily="34" charset="0"/>
+                <a:cs typeface="Courier New" panose="02070309020205020404" pitchFamily="49" charset="0"/>
+              </a:rPr>
+              <a:t>("</a:t>
+            </a:r>
+            <a:r>
+              <a:rPr lang="en-IN" sz="1400" dirty="0" err="1">
+                <a:latin typeface="Courier New" panose="02070309020205020404" pitchFamily="49" charset="0"/>
+                <a:ea typeface="Calibri" panose="020F0502020204030204" pitchFamily="34" charset="0"/>
+                <a:cs typeface="Courier New" panose="02070309020205020404" pitchFamily="49" charset="0"/>
+              </a:rPr>
+              <a:t>PowerBI</a:t>
+            </a:r>
+            <a:r>
+              <a:rPr lang="en-IN" sz="1400" dirty="0">
+                <a:latin typeface="Courier New" panose="02070309020205020404" pitchFamily="49" charset="0"/>
+                <a:ea typeface="Calibri" panose="020F0502020204030204" pitchFamily="34" charset="0"/>
+                <a:cs typeface="Courier New" panose="02070309020205020404" pitchFamily="49" charset="0"/>
+              </a:rPr>
+              <a:t>")	</a:t>
+            </a:r>
+            <a:r>
+              <a:rPr lang="en-IN" sz="1400" dirty="0" smtClean="0">
+                <a:latin typeface="Courier New" panose="02070309020205020404" pitchFamily="49" charset="0"/>
+                <a:ea typeface="Calibri" panose="020F0502020204030204" pitchFamily="34" charset="0"/>
+                <a:cs typeface="Courier New" panose="02070309020205020404" pitchFamily="49" charset="0"/>
+              </a:rPr>
+              <a:t>				7</a:t>
+            </a:r>
+            <a:endParaRPr lang="en-IN" sz="1400" dirty="0">
+              <a:latin typeface="Courier New" panose="02070309020205020404" pitchFamily="49" charset="0"/>
+              <a:ea typeface="Calibri" panose="020F0502020204030204" pitchFamily="34" charset="0"/>
+              <a:cs typeface="Courier New" panose="02070309020205020404" pitchFamily="49" charset="0"/>
+            </a:endParaRPr>
+          </a:p>
+          <a:p>
+            <a:pPr>
+              <a:lnSpc>
+                <a:spcPct val="107000"/>
+              </a:lnSpc>
+            </a:pPr>
+            <a:endParaRPr lang="en-US" sz="1400" dirty="0" smtClean="0">
+              <a:latin typeface="Courier New" panose="02070309020205020404" pitchFamily="49" charset="0"/>
+              <a:ea typeface="Calibri" panose="020F0502020204030204" pitchFamily="34" charset="0"/>
+              <a:cs typeface="Courier New" panose="02070309020205020404" pitchFamily="49" charset="0"/>
+            </a:endParaRPr>
+          </a:p>
+          <a:p>
+            <a:pPr>
+              <a:lnSpc>
+                <a:spcPct val="107000"/>
+              </a:lnSpc>
+            </a:pPr>
+            <a:r>
+              <a:rPr lang="en-US" sz="1400" dirty="0" smtClean="0">
+                <a:latin typeface="Courier New" panose="02070309020205020404" pitchFamily="49" charset="0"/>
+                <a:ea typeface="Calibri" panose="020F0502020204030204" pitchFamily="34" charset="0"/>
+                <a:cs typeface="Courier New" panose="02070309020205020404" pitchFamily="49" charset="0"/>
+              </a:rPr>
+              <a:t>Change the Case</a:t>
+            </a:r>
+            <a:endParaRPr lang="en-IN" sz="1400" dirty="0" smtClean="0">
+              <a:latin typeface="Courier New" panose="02070309020205020404" pitchFamily="49" charset="0"/>
+              <a:ea typeface="Calibri" panose="020F0502020204030204" pitchFamily="34" charset="0"/>
+              <a:cs typeface="Courier New" panose="02070309020205020404" pitchFamily="49" charset="0"/>
+            </a:endParaRPr>
+          </a:p>
+          <a:p>
+            <a:pPr lvl="1">
+              <a:lnSpc>
+                <a:spcPct val="107000"/>
+              </a:lnSpc>
+            </a:pPr>
+            <a:r>
+              <a:rPr lang="en-IN" sz="1400" dirty="0" smtClean="0">
+                <a:latin typeface="Courier New" panose="02070309020205020404" pitchFamily="49" charset="0"/>
+                <a:ea typeface="Calibri" panose="020F0502020204030204" pitchFamily="34" charset="0"/>
+                <a:cs typeface="Courier New" panose="02070309020205020404" pitchFamily="49" charset="0"/>
+              </a:rPr>
+              <a:t>UPPER</a:t>
+            </a:r>
+            <a:r>
+              <a:rPr lang="en-IN" sz="1400" dirty="0">
+                <a:latin typeface="Courier New" panose="02070309020205020404" pitchFamily="49" charset="0"/>
+                <a:ea typeface="Calibri" panose="020F0502020204030204" pitchFamily="34" charset="0"/>
+                <a:cs typeface="Courier New" panose="02070309020205020404" pitchFamily="49" charset="0"/>
+              </a:rPr>
+              <a:t>()	</a:t>
+            </a:r>
+            <a:r>
+              <a:rPr lang="en-IN" sz="1400" dirty="0" smtClean="0">
+                <a:latin typeface="Courier New" panose="02070309020205020404" pitchFamily="49" charset="0"/>
+                <a:ea typeface="Calibri" panose="020F0502020204030204" pitchFamily="34" charset="0"/>
+                <a:cs typeface="Courier New" panose="02070309020205020404" pitchFamily="49" charset="0"/>
+              </a:rPr>
+              <a:t>		UPPER</a:t>
+            </a:r>
+            <a:r>
+              <a:rPr lang="en-IN" sz="1400" dirty="0">
+                <a:latin typeface="Courier New" panose="02070309020205020404" pitchFamily="49" charset="0"/>
+                <a:ea typeface="Calibri" panose="020F0502020204030204" pitchFamily="34" charset="0"/>
+                <a:cs typeface="Courier New" panose="02070309020205020404" pitchFamily="49" charset="0"/>
+              </a:rPr>
+              <a:t>("power bi")	</a:t>
+            </a:r>
+            <a:r>
+              <a:rPr lang="en-IN" sz="1400" dirty="0" smtClean="0">
+                <a:latin typeface="Courier New" panose="02070309020205020404" pitchFamily="49" charset="0"/>
+                <a:ea typeface="Calibri" panose="020F0502020204030204" pitchFamily="34" charset="0"/>
+                <a:cs typeface="Courier New" panose="02070309020205020404" pitchFamily="49" charset="0"/>
+              </a:rPr>
+              <a:t>			POWER </a:t>
+            </a:r>
+            <a:r>
+              <a:rPr lang="en-IN" sz="1400" dirty="0">
+                <a:latin typeface="Courier New" panose="02070309020205020404" pitchFamily="49" charset="0"/>
+                <a:ea typeface="Calibri" panose="020F0502020204030204" pitchFamily="34" charset="0"/>
+                <a:cs typeface="Courier New" panose="02070309020205020404" pitchFamily="49" charset="0"/>
+              </a:rPr>
+              <a:t>BI</a:t>
+            </a:r>
+          </a:p>
+          <a:p>
+            <a:pPr lvl="1">
+              <a:lnSpc>
+                <a:spcPct val="107000"/>
+              </a:lnSpc>
+            </a:pPr>
+            <a:r>
+              <a:rPr lang="en-IN" sz="1400" dirty="0">
+                <a:latin typeface="Courier New" panose="02070309020205020404" pitchFamily="49" charset="0"/>
+                <a:ea typeface="Calibri" panose="020F0502020204030204" pitchFamily="34" charset="0"/>
+                <a:cs typeface="Courier New" panose="02070309020205020404" pitchFamily="49" charset="0"/>
+              </a:rPr>
+              <a:t>LOWER()	</a:t>
+            </a:r>
+            <a:r>
+              <a:rPr lang="en-IN" sz="1400" dirty="0" smtClean="0">
+                <a:latin typeface="Courier New" panose="02070309020205020404" pitchFamily="49" charset="0"/>
+                <a:ea typeface="Calibri" panose="020F0502020204030204" pitchFamily="34" charset="0"/>
+                <a:cs typeface="Courier New" panose="02070309020205020404" pitchFamily="49" charset="0"/>
+              </a:rPr>
+              <a:t>		LOWER</a:t>
+            </a:r>
+            <a:r>
+              <a:rPr lang="en-IN" sz="1400" dirty="0">
+                <a:latin typeface="Courier New" panose="02070309020205020404" pitchFamily="49" charset="0"/>
+                <a:ea typeface="Calibri" panose="020F0502020204030204" pitchFamily="34" charset="0"/>
+                <a:cs typeface="Courier New" panose="02070309020205020404" pitchFamily="49" charset="0"/>
+              </a:rPr>
+              <a:t>("POWER BI")	</a:t>
+            </a:r>
+            <a:r>
+              <a:rPr lang="en-IN" sz="1400" dirty="0" smtClean="0">
+                <a:latin typeface="Courier New" panose="02070309020205020404" pitchFamily="49" charset="0"/>
+                <a:ea typeface="Calibri" panose="020F0502020204030204" pitchFamily="34" charset="0"/>
+                <a:cs typeface="Courier New" panose="02070309020205020404" pitchFamily="49" charset="0"/>
+              </a:rPr>
+              <a:t>			power </a:t>
+            </a:r>
+            <a:r>
+              <a:rPr lang="en-IN" sz="1400" dirty="0">
+                <a:latin typeface="Courier New" panose="02070309020205020404" pitchFamily="49" charset="0"/>
+                <a:ea typeface="Calibri" panose="020F0502020204030204" pitchFamily="34" charset="0"/>
+                <a:cs typeface="Courier New" panose="02070309020205020404" pitchFamily="49" charset="0"/>
+              </a:rPr>
+              <a:t>bi</a:t>
+            </a:r>
+          </a:p>
+          <a:p>
+            <a:pPr>
+              <a:lnSpc>
+                <a:spcPct val="107000"/>
+              </a:lnSpc>
+            </a:pPr>
+            <a:endParaRPr lang="en-US" sz="1400" dirty="0" smtClean="0">
+              <a:latin typeface="Courier New" panose="02070309020205020404" pitchFamily="49" charset="0"/>
+              <a:ea typeface="Calibri" panose="020F0502020204030204" pitchFamily="34" charset="0"/>
+              <a:cs typeface="Courier New" panose="02070309020205020404" pitchFamily="49" charset="0"/>
+            </a:endParaRPr>
+          </a:p>
+          <a:p>
+            <a:pPr>
+              <a:lnSpc>
+                <a:spcPct val="107000"/>
+              </a:lnSpc>
+            </a:pPr>
+            <a:r>
+              <a:rPr lang="en-US" sz="1400" dirty="0" smtClean="0">
+                <a:latin typeface="Courier New" panose="02070309020205020404" pitchFamily="49" charset="0"/>
+                <a:ea typeface="Calibri" panose="020F0502020204030204" pitchFamily="34" charset="0"/>
+                <a:cs typeface="Courier New" panose="02070309020205020404" pitchFamily="49" charset="0"/>
+              </a:rPr>
+              <a:t>To Clean the Data</a:t>
+            </a:r>
+            <a:endParaRPr lang="en-IN" sz="1400" dirty="0" smtClean="0">
+              <a:latin typeface="Courier New" panose="02070309020205020404" pitchFamily="49" charset="0"/>
+              <a:ea typeface="Calibri" panose="020F0502020204030204" pitchFamily="34" charset="0"/>
+              <a:cs typeface="Courier New" panose="02070309020205020404" pitchFamily="49" charset="0"/>
+            </a:endParaRPr>
+          </a:p>
+          <a:p>
+            <a:pPr lvl="1">
+              <a:lnSpc>
+                <a:spcPct val="107000"/>
+              </a:lnSpc>
+            </a:pPr>
+            <a:r>
+              <a:rPr lang="en-IN" sz="1400" dirty="0" smtClean="0">
+                <a:latin typeface="Courier New" panose="02070309020205020404" pitchFamily="49" charset="0"/>
+                <a:ea typeface="Calibri" panose="020F0502020204030204" pitchFamily="34" charset="0"/>
+                <a:cs typeface="Courier New" panose="02070309020205020404" pitchFamily="49" charset="0"/>
+              </a:rPr>
+              <a:t>TRIM</a:t>
+            </a:r>
+            <a:r>
+              <a:rPr lang="en-IN" sz="1400" dirty="0">
+                <a:latin typeface="Courier New" panose="02070309020205020404" pitchFamily="49" charset="0"/>
+                <a:ea typeface="Calibri" panose="020F0502020204030204" pitchFamily="34" charset="0"/>
+                <a:cs typeface="Courier New" panose="02070309020205020404" pitchFamily="49" charset="0"/>
+              </a:rPr>
+              <a:t>()	</a:t>
+            </a:r>
+            <a:r>
+              <a:rPr lang="en-IN" sz="1400" dirty="0" smtClean="0">
+                <a:latin typeface="Courier New" panose="02070309020205020404" pitchFamily="49" charset="0"/>
+                <a:ea typeface="Calibri" panose="020F0502020204030204" pitchFamily="34" charset="0"/>
+                <a:cs typeface="Courier New" panose="02070309020205020404" pitchFamily="49" charset="0"/>
+              </a:rPr>
+              <a:t>		TRIM</a:t>
+            </a:r>
+            <a:r>
+              <a:rPr lang="en-IN" sz="1400" dirty="0">
+                <a:latin typeface="Courier New" panose="02070309020205020404" pitchFamily="49" charset="0"/>
+                <a:ea typeface="Calibri" panose="020F0502020204030204" pitchFamily="34" charset="0"/>
+                <a:cs typeface="Courier New" panose="02070309020205020404" pitchFamily="49" charset="0"/>
+              </a:rPr>
+              <a:t>(" Power BI ")	</a:t>
+            </a:r>
+            <a:r>
+              <a:rPr lang="en-IN" sz="1400" dirty="0" smtClean="0">
+                <a:latin typeface="Courier New" panose="02070309020205020404" pitchFamily="49" charset="0"/>
+                <a:ea typeface="Calibri" panose="020F0502020204030204" pitchFamily="34" charset="0"/>
+                <a:cs typeface="Courier New" panose="02070309020205020404" pitchFamily="49" charset="0"/>
+              </a:rPr>
+              <a:t>			Power </a:t>
+            </a:r>
+            <a:r>
+              <a:rPr lang="en-IN" sz="1400" dirty="0">
+                <a:latin typeface="Courier New" panose="02070309020205020404" pitchFamily="49" charset="0"/>
+                <a:ea typeface="Calibri" panose="020F0502020204030204" pitchFamily="34" charset="0"/>
+                <a:cs typeface="Courier New" panose="02070309020205020404" pitchFamily="49" charset="0"/>
+              </a:rPr>
+              <a:t>BI</a:t>
+            </a:r>
+          </a:p>
+          <a:p>
+            <a:pPr lvl="1">
+              <a:lnSpc>
+                <a:spcPct val="107000"/>
+              </a:lnSpc>
+            </a:pPr>
+            <a:r>
+              <a:rPr lang="en-IN" sz="1400" dirty="0">
+                <a:latin typeface="Courier New" panose="02070309020205020404" pitchFamily="49" charset="0"/>
+                <a:ea typeface="Calibri" panose="020F0502020204030204" pitchFamily="34" charset="0"/>
+                <a:cs typeface="Courier New" panose="02070309020205020404" pitchFamily="49" charset="0"/>
+              </a:rPr>
+              <a:t>SUBSTITUTE()	</a:t>
+            </a:r>
+            <a:r>
+              <a:rPr lang="en-IN" sz="1400" dirty="0" smtClean="0">
+                <a:latin typeface="Courier New" panose="02070309020205020404" pitchFamily="49" charset="0"/>
+                <a:ea typeface="Calibri" panose="020F0502020204030204" pitchFamily="34" charset="0"/>
+                <a:cs typeface="Courier New" panose="02070309020205020404" pitchFamily="49" charset="0"/>
+              </a:rPr>
+              <a:t>	</a:t>
+            </a:r>
+            <a:r>
+              <a:rPr lang="en-IN" sz="1400" dirty="0" smtClean="0">
+                <a:latin typeface="Courier New" panose="02070309020205020404" pitchFamily="49" charset="0"/>
+                <a:ea typeface="Calibri" panose="020F0502020204030204" pitchFamily="34" charset="0"/>
+                <a:cs typeface="Courier New" panose="02070309020205020404" pitchFamily="49" charset="0"/>
+              </a:rPr>
+              <a:t>	SUBSTITUTE</a:t>
+            </a:r>
+            <a:r>
+              <a:rPr lang="en-IN" sz="1400" dirty="0">
+                <a:latin typeface="Courier New" panose="02070309020205020404" pitchFamily="49" charset="0"/>
+                <a:ea typeface="Calibri" panose="020F0502020204030204" pitchFamily="34" charset="0"/>
+                <a:cs typeface="Courier New" panose="02070309020205020404" pitchFamily="49" charset="0"/>
+              </a:rPr>
+              <a:t>("Power BI", "BI", "Query")	</a:t>
+            </a:r>
+            <a:r>
+              <a:rPr lang="en-IN" sz="1400" dirty="0" smtClean="0">
+                <a:latin typeface="Courier New" panose="02070309020205020404" pitchFamily="49" charset="0"/>
+                <a:ea typeface="Calibri" panose="020F0502020204030204" pitchFamily="34" charset="0"/>
+                <a:cs typeface="Courier New" panose="02070309020205020404" pitchFamily="49" charset="0"/>
+              </a:rPr>
+              <a:t>	Power </a:t>
+            </a:r>
+            <a:r>
+              <a:rPr lang="en-IN" sz="1400" dirty="0">
+                <a:latin typeface="Courier New" panose="02070309020205020404" pitchFamily="49" charset="0"/>
+                <a:ea typeface="Calibri" panose="020F0502020204030204" pitchFamily="34" charset="0"/>
+                <a:cs typeface="Courier New" panose="02070309020205020404" pitchFamily="49" charset="0"/>
+              </a:rPr>
+              <a:t>Query</a:t>
+            </a:r>
+          </a:p>
+          <a:p>
+            <a:pPr>
+              <a:lnSpc>
+                <a:spcPct val="107000"/>
+              </a:lnSpc>
+            </a:pPr>
+            <a:endParaRPr lang="en-US" sz="1400" dirty="0" smtClean="0">
+              <a:latin typeface="Courier New" panose="02070309020205020404" pitchFamily="49" charset="0"/>
+              <a:ea typeface="Calibri" panose="020F0502020204030204" pitchFamily="34" charset="0"/>
+              <a:cs typeface="Courier New" panose="02070309020205020404" pitchFamily="49" charset="0"/>
+            </a:endParaRPr>
+          </a:p>
+          <a:p>
+            <a:pPr>
+              <a:lnSpc>
+                <a:spcPct val="107000"/>
+              </a:lnSpc>
+            </a:pPr>
+            <a:r>
+              <a:rPr lang="en-US" sz="1400" dirty="0" smtClean="0">
+                <a:latin typeface="Courier New" panose="02070309020205020404" pitchFamily="49" charset="0"/>
+                <a:ea typeface="Calibri" panose="020F0502020204030204" pitchFamily="34" charset="0"/>
+                <a:cs typeface="Courier New" panose="02070309020205020404" pitchFamily="49" charset="0"/>
+              </a:rPr>
+              <a:t>Some information about String</a:t>
+            </a:r>
+            <a:endParaRPr lang="en-US" sz="1400" dirty="0" smtClean="0">
+              <a:latin typeface="Courier New" panose="02070309020205020404" pitchFamily="49" charset="0"/>
+              <a:ea typeface="Calibri" panose="020F0502020204030204" pitchFamily="34" charset="0"/>
+              <a:cs typeface="Courier New" panose="02070309020205020404" pitchFamily="49" charset="0"/>
+            </a:endParaRPr>
+          </a:p>
+          <a:p>
+            <a:pPr lvl="1">
+              <a:lnSpc>
+                <a:spcPct val="107000"/>
+              </a:lnSpc>
+            </a:pPr>
+            <a:r>
+              <a:rPr lang="en-IN" sz="1400" dirty="0">
+                <a:latin typeface="Courier New" panose="02070309020205020404" pitchFamily="49" charset="0"/>
+                <a:ea typeface="Calibri" panose="020F0502020204030204" pitchFamily="34" charset="0"/>
+                <a:cs typeface="Courier New" panose="02070309020205020404" pitchFamily="49" charset="0"/>
+              </a:rPr>
+              <a:t>CONTAINSSTRING()	CONTAINSSTRING("Power BI", "BI")		TRUE</a:t>
+            </a:r>
+          </a:p>
+          <a:p>
+            <a:pPr lvl="1">
+              <a:lnSpc>
+                <a:spcPct val="107000"/>
+              </a:lnSpc>
+            </a:pPr>
+            <a:r>
+              <a:rPr lang="en-IN" sz="1400" dirty="0" smtClean="0">
+                <a:latin typeface="Courier New" panose="02070309020205020404" pitchFamily="49" charset="0"/>
+                <a:ea typeface="Calibri" panose="020F0502020204030204" pitchFamily="34" charset="0"/>
+                <a:cs typeface="Courier New" panose="02070309020205020404" pitchFamily="49" charset="0"/>
+              </a:rPr>
+              <a:t>SEARCH</a:t>
+            </a:r>
+            <a:r>
+              <a:rPr lang="en-IN" sz="1400" dirty="0">
+                <a:latin typeface="Courier New" panose="02070309020205020404" pitchFamily="49" charset="0"/>
+                <a:ea typeface="Calibri" panose="020F0502020204030204" pitchFamily="34" charset="0"/>
+                <a:cs typeface="Courier New" panose="02070309020205020404" pitchFamily="49" charset="0"/>
+              </a:rPr>
+              <a:t>()	</a:t>
+            </a:r>
+            <a:r>
+              <a:rPr lang="en-IN" sz="1400" dirty="0" smtClean="0">
+                <a:latin typeface="Courier New" panose="02070309020205020404" pitchFamily="49" charset="0"/>
+                <a:ea typeface="Calibri" panose="020F0502020204030204" pitchFamily="34" charset="0"/>
+                <a:cs typeface="Courier New" panose="02070309020205020404" pitchFamily="49" charset="0"/>
+              </a:rPr>
+              <a:t>	SEARCH</a:t>
+            </a:r>
+            <a:r>
+              <a:rPr lang="en-IN" sz="1400" dirty="0">
+                <a:latin typeface="Courier New" panose="02070309020205020404" pitchFamily="49" charset="0"/>
+                <a:ea typeface="Calibri" panose="020F0502020204030204" pitchFamily="34" charset="0"/>
+                <a:cs typeface="Courier New" panose="02070309020205020404" pitchFamily="49" charset="0"/>
+              </a:rPr>
+              <a:t>("BI", "Power BI")	</a:t>
+            </a:r>
+            <a:r>
+              <a:rPr lang="en-IN" sz="1400" dirty="0" smtClean="0">
+                <a:latin typeface="Courier New" panose="02070309020205020404" pitchFamily="49" charset="0"/>
+                <a:ea typeface="Calibri" panose="020F0502020204030204" pitchFamily="34" charset="0"/>
+                <a:cs typeface="Courier New" panose="02070309020205020404" pitchFamily="49" charset="0"/>
+              </a:rPr>
+              <a:t>		7</a:t>
+            </a:r>
+            <a:endParaRPr lang="en-IN" sz="1400" dirty="0">
+              <a:latin typeface="Courier New" panose="02070309020205020404" pitchFamily="49" charset="0"/>
+              <a:ea typeface="Calibri" panose="020F0502020204030204" pitchFamily="34" charset="0"/>
+              <a:cs typeface="Courier New" panose="02070309020205020404" pitchFamily="49" charset="0"/>
+            </a:endParaRPr>
+          </a:p>
+          <a:p>
+            <a:pPr>
+              <a:lnSpc>
+                <a:spcPct val="107000"/>
+              </a:lnSpc>
+            </a:pPr>
+            <a:endParaRPr lang="en-IN" sz="1400" dirty="0" smtClean="0">
+              <a:latin typeface="Courier New" panose="02070309020205020404" pitchFamily="49" charset="0"/>
+              <a:ea typeface="Calibri" panose="020F0502020204030204" pitchFamily="34" charset="0"/>
+              <a:cs typeface="Courier New" panose="02070309020205020404" pitchFamily="49" charset="0"/>
+            </a:endParaRPr>
+          </a:p>
+          <a:p>
+            <a:pPr>
+              <a:lnSpc>
+                <a:spcPct val="107000"/>
+              </a:lnSpc>
+            </a:pPr>
+            <a:r>
+              <a:rPr lang="en-US" sz="1400" dirty="0" smtClean="0">
+                <a:latin typeface="Courier New" panose="02070309020205020404" pitchFamily="49" charset="0"/>
+                <a:ea typeface="Calibri" panose="020F0502020204030204" pitchFamily="34" charset="0"/>
+                <a:cs typeface="Courier New" panose="02070309020205020404" pitchFamily="49" charset="0"/>
+              </a:rPr>
+              <a:t>Combine String</a:t>
+            </a:r>
+            <a:endParaRPr lang="en-IN" sz="1400" dirty="0" smtClean="0">
+              <a:latin typeface="Courier New" panose="02070309020205020404" pitchFamily="49" charset="0"/>
+              <a:ea typeface="Calibri" panose="020F0502020204030204" pitchFamily="34" charset="0"/>
+              <a:cs typeface="Courier New" panose="02070309020205020404" pitchFamily="49" charset="0"/>
+            </a:endParaRPr>
+          </a:p>
+          <a:p>
+            <a:pPr>
+              <a:lnSpc>
+                <a:spcPct val="107000"/>
+              </a:lnSpc>
+            </a:pPr>
+            <a:r>
+              <a:rPr lang="en-IN" sz="1400" dirty="0">
+                <a:latin typeface="Courier New" panose="02070309020205020404" pitchFamily="49" charset="0"/>
+                <a:ea typeface="Calibri" panose="020F0502020204030204" pitchFamily="34" charset="0"/>
+                <a:cs typeface="Courier New" panose="02070309020205020404" pitchFamily="49" charset="0"/>
+              </a:rPr>
+              <a:t> </a:t>
+            </a:r>
+            <a:r>
+              <a:rPr lang="en-IN" sz="1400" dirty="0" smtClean="0">
+                <a:latin typeface="Courier New" panose="02070309020205020404" pitchFamily="49" charset="0"/>
+                <a:ea typeface="Calibri" panose="020F0502020204030204" pitchFamily="34" charset="0"/>
+                <a:cs typeface="Courier New" panose="02070309020205020404" pitchFamily="49" charset="0"/>
+              </a:rPr>
+              <a:t>  </a:t>
+            </a:r>
+            <a:r>
+              <a:rPr lang="en-IN" sz="1400" dirty="0" smtClean="0">
+                <a:latin typeface="Courier New" panose="02070309020205020404" pitchFamily="49" charset="0"/>
+                <a:ea typeface="Calibri" panose="020F0502020204030204" pitchFamily="34" charset="0"/>
+                <a:cs typeface="Courier New" panose="02070309020205020404" pitchFamily="49" charset="0"/>
+              </a:rPr>
+              <a:t>CONCATENATE</a:t>
+            </a:r>
+            <a:r>
+              <a:rPr lang="en-IN" sz="1400" dirty="0">
+                <a:latin typeface="Courier New" panose="02070309020205020404" pitchFamily="49" charset="0"/>
+                <a:ea typeface="Calibri" panose="020F0502020204030204" pitchFamily="34" charset="0"/>
+                <a:cs typeface="Courier New" panose="02070309020205020404" pitchFamily="49" charset="0"/>
+              </a:rPr>
+              <a:t>()	</a:t>
+            </a:r>
+            <a:r>
+              <a:rPr lang="en-IN" sz="1400" dirty="0" smtClean="0">
+                <a:latin typeface="Courier New" panose="02070309020205020404" pitchFamily="49" charset="0"/>
+                <a:ea typeface="Calibri" panose="020F0502020204030204" pitchFamily="34" charset="0"/>
+                <a:cs typeface="Courier New" panose="02070309020205020404" pitchFamily="49" charset="0"/>
+              </a:rPr>
+              <a:t>	CONCATENATE</a:t>
+            </a:r>
+            <a:r>
+              <a:rPr lang="en-IN" sz="1400" dirty="0">
+                <a:latin typeface="Courier New" panose="02070309020205020404" pitchFamily="49" charset="0"/>
+                <a:ea typeface="Calibri" panose="020F0502020204030204" pitchFamily="34" charset="0"/>
+                <a:cs typeface="Courier New" panose="02070309020205020404" pitchFamily="49" charset="0"/>
+              </a:rPr>
+              <a:t>("Hello", " ", "World")	</a:t>
+            </a:r>
+            <a:r>
+              <a:rPr lang="en-IN" sz="1400" dirty="0" smtClean="0">
+                <a:latin typeface="Courier New" panose="02070309020205020404" pitchFamily="49" charset="0"/>
+                <a:ea typeface="Calibri" panose="020F0502020204030204" pitchFamily="34" charset="0"/>
+                <a:cs typeface="Courier New" panose="02070309020205020404" pitchFamily="49" charset="0"/>
+              </a:rPr>
+              <a:t>	Hello </a:t>
+            </a:r>
+            <a:r>
+              <a:rPr lang="en-IN" sz="1400" dirty="0" smtClean="0">
+                <a:latin typeface="Courier New" panose="02070309020205020404" pitchFamily="49" charset="0"/>
+                <a:ea typeface="Calibri" panose="020F0502020204030204" pitchFamily="34" charset="0"/>
+                <a:cs typeface="Courier New" panose="02070309020205020404" pitchFamily="49" charset="0"/>
+              </a:rPr>
+              <a:t>World</a:t>
+            </a:r>
+          </a:p>
+          <a:p>
+            <a:pPr>
+              <a:lnSpc>
+                <a:spcPct val="107000"/>
+              </a:lnSpc>
+            </a:pPr>
+            <a:r>
+              <a:rPr lang="en-US" dirty="0" err="1">
+                <a:latin typeface="Courier New" panose="02070309020205020404" pitchFamily="49" charset="0"/>
+                <a:cs typeface="Courier New" panose="02070309020205020404" pitchFamily="49" charset="0"/>
+              </a:rPr>
+              <a:t>String_Man</a:t>
+            </a:r>
+            <a:r>
+              <a:rPr lang="en-US" dirty="0">
+                <a:latin typeface="Courier New" panose="02070309020205020404" pitchFamily="49" charset="0"/>
+                <a:cs typeface="Courier New" panose="02070309020205020404" pitchFamily="49" charset="0"/>
+              </a:rPr>
+              <a:t> = Sheet1[First Name]&amp;"    "&amp;Sheet1[Last Name]</a:t>
+            </a:r>
+          </a:p>
+          <a:p>
+            <a:pPr>
+              <a:lnSpc>
+                <a:spcPct val="107000"/>
+              </a:lnSpc>
+            </a:pPr>
+            <a:endParaRPr lang="en-IN" sz="1400" dirty="0">
+              <a:latin typeface="Courier New" panose="02070309020205020404" pitchFamily="49" charset="0"/>
+              <a:ea typeface="Calibri" panose="020F0502020204030204" pitchFamily="34" charset="0"/>
+              <a:cs typeface="Courier New" panose="02070309020205020404" pitchFamily="49" charset="0"/>
+            </a:endParaRPr>
           </a:p>
         </p:txBody>
       </p:sp>
     </p:spTree>
     <p:extLst>
       <p:ext uri="{BB962C8B-B14F-4D97-AF65-F5344CB8AC3E}">
-        <p14:creationId xmlns:p14="http://schemas.microsoft.com/office/powerpoint/2010/main" val="2206240905"/>
+        <p14:creationId xmlns:p14="http://schemas.microsoft.com/office/powerpoint/2010/main" val="1925480359"/>
       </p:ext>
     </p:extLst>
   </p:cSld>
   <p:clrMapOvr>
     <a:masterClrMapping/>
   </p:clrMapOvr>
-  <p:transition spd="slow">
-    <p:randomBar dir="vert"/>
-  </p:transition>
   <p:timing>
     <p:tnLst>
       <p:par>
